--- a/Cloudera_AI_Landscape.pptx
+++ b/Cloudera_AI_Landscape.pptx
@@ -25,9 +25,11 @@
     <p:sldId id="273" r:id="rId19"/>
     <p:sldId id="274" r:id="rId20"/>
     <p:sldId id="275" r:id="rId21"/>
+    <p:sldId id="276" r:id="rId22"/>
+    <p:sldId id="277" r:id="rId23"/>
   </p:sldIdLst>
   <p:notesMasterIdLst>
-    <p:notesMasterId r:id="rId22"/>
+    <p:notesMasterId r:id="rId24"/>
   </p:notesMasterIdLst>
   <p:sldSz cx="9144000" cy="5143500"/>
   <p:notesSz cx="5143500" cy="9144000"/>
@@ -1601,6 +1603,182 @@
             <a:fld id="{F7021451-1387-4CA6-816F-3879F97B5CBC}" type="slidenum">
               <a:rPr lang="en-US"/>
               <a:t>20</a:t>
+            </a:fld>
+            <a:endParaRPr lang="en-US"/>
+          </a:p>
+        </p:txBody>
+      </p:sp>
+    </p:spTree>
+    <p:extLst>
+      <p:ext uri="{BB962C8B-B14F-4D97-AF65-F5344CB8AC3E}">
+        <p14:creationId xmlns:p14="http://schemas.microsoft.com/office/powerpoint/2010/main" val="1024086991"/>
+      </p:ext>
+    </p:extLst>
+  </p:cSld>
+  <p:clrMapOvr>
+    <a:masterClrMapping/>
+  </p:clrMapOvr>
+</p:notes>
+</file>
+
+<file path=ppt/notesSlides/notesSlide21.xml><?xml version="1.0" encoding="utf-8"?>
+<p:notes xmlns:a="http://schemas.openxmlformats.org/drawingml/2006/main" xmlns:r="http://schemas.openxmlformats.org/officeDocument/2006/relationships" xmlns:p="http://schemas.openxmlformats.org/presentationml/2006/main">
+  <p:cSld>
+    <p:spTree>
+      <p:nvGrpSpPr>
+        <p:cNvPr id="1" name=""/>
+        <p:cNvGrpSpPr/>
+        <p:nvPr/>
+      </p:nvGrpSpPr>
+      <p:grpSpPr>
+        <a:xfrm>
+          <a:off x="0" y="0"/>
+          <a:ext cx="0" cy="0"/>
+          <a:chOff x="0" y="0"/>
+          <a:chExt cx="0" cy="0"/>
+        </a:xfrm>
+      </p:grpSpPr>
+      <p:sp>
+        <p:nvSpPr>
+          <p:cNvPr id="2" name="Slide Image Placeholder 1"/>
+          <p:cNvSpPr>
+            <a:spLocks noGrp="1" noRot="1" noChangeAspect="1"/>
+          </p:cNvSpPr>
+          <p:nvPr>
+            <p:ph type="sldImg"/>
+          </p:nvPr>
+        </p:nvSpPr>
+        <p:spPr/>
+      </p:sp>
+      <p:sp>
+        <p:nvSpPr>
+          <p:cNvPr id="3" name="Notes Placeholder 2"/>
+          <p:cNvSpPr>
+            <a:spLocks noGrp="1"/>
+          </p:cNvSpPr>
+          <p:nvPr>
+            <p:ph type="body" idx="1"/>
+          </p:nvPr>
+        </p:nvSpPr>
+        <p:spPr/>
+        <p:txBody>
+          <a:bodyPr/>
+          <a:lstStyle/>
+          <a:p>
+            <a:r>
+              <a:rPr lang="en-US" dirty="0"/>
+              <a:t/>
+            </a:r>
+            <a:endParaRPr lang="en-US" dirty="0"/>
+          </a:p>
+        </p:txBody>
+      </p:sp>
+      <p:sp>
+        <p:nvSpPr>
+          <p:cNvPr id="4" name="Slide Number Placeholder 3"/>
+          <p:cNvSpPr>
+            <a:spLocks noGrp="1"/>
+          </p:cNvSpPr>
+          <p:nvPr>
+            <p:ph type="sldNum" sz="quarter" idx="10"/>
+          </p:nvPr>
+        </p:nvSpPr>
+        <p:spPr/>
+        <p:txBody>
+          <a:bodyPr/>
+          <a:lstStyle/>
+          <a:p>
+            <a:fld id="{F7021451-1387-4CA6-816F-3879F97B5CBC}" type="slidenum">
+              <a:rPr lang="en-US"/>
+              <a:t>21</a:t>
+            </a:fld>
+            <a:endParaRPr lang="en-US"/>
+          </a:p>
+        </p:txBody>
+      </p:sp>
+    </p:spTree>
+    <p:extLst>
+      <p:ext uri="{BB962C8B-B14F-4D97-AF65-F5344CB8AC3E}">
+        <p14:creationId xmlns:p14="http://schemas.microsoft.com/office/powerpoint/2010/main" val="1024086991"/>
+      </p:ext>
+    </p:extLst>
+  </p:cSld>
+  <p:clrMapOvr>
+    <a:masterClrMapping/>
+  </p:clrMapOvr>
+</p:notes>
+</file>
+
+<file path=ppt/notesSlides/notesSlide22.xml><?xml version="1.0" encoding="utf-8"?>
+<p:notes xmlns:a="http://schemas.openxmlformats.org/drawingml/2006/main" xmlns:r="http://schemas.openxmlformats.org/officeDocument/2006/relationships" xmlns:p="http://schemas.openxmlformats.org/presentationml/2006/main">
+  <p:cSld>
+    <p:spTree>
+      <p:nvGrpSpPr>
+        <p:cNvPr id="1" name=""/>
+        <p:cNvGrpSpPr/>
+        <p:nvPr/>
+      </p:nvGrpSpPr>
+      <p:grpSpPr>
+        <a:xfrm>
+          <a:off x="0" y="0"/>
+          <a:ext cx="0" cy="0"/>
+          <a:chOff x="0" y="0"/>
+          <a:chExt cx="0" cy="0"/>
+        </a:xfrm>
+      </p:grpSpPr>
+      <p:sp>
+        <p:nvSpPr>
+          <p:cNvPr id="2" name="Slide Image Placeholder 1"/>
+          <p:cNvSpPr>
+            <a:spLocks noGrp="1" noRot="1" noChangeAspect="1"/>
+          </p:cNvSpPr>
+          <p:nvPr>
+            <p:ph type="sldImg"/>
+          </p:nvPr>
+        </p:nvSpPr>
+        <p:spPr/>
+      </p:sp>
+      <p:sp>
+        <p:nvSpPr>
+          <p:cNvPr id="3" name="Notes Placeholder 2"/>
+          <p:cNvSpPr>
+            <a:spLocks noGrp="1"/>
+          </p:cNvSpPr>
+          <p:nvPr>
+            <p:ph type="body" idx="1"/>
+          </p:nvPr>
+        </p:nvSpPr>
+        <p:spPr/>
+        <p:txBody>
+          <a:bodyPr/>
+          <a:lstStyle/>
+          <a:p>
+            <a:r>
+              <a:rPr lang="en-US" dirty="0"/>
+              <a:t/>
+            </a:r>
+            <a:endParaRPr lang="en-US" dirty="0"/>
+          </a:p>
+        </p:txBody>
+      </p:sp>
+      <p:sp>
+        <p:nvSpPr>
+          <p:cNvPr id="4" name="Slide Number Placeholder 3"/>
+          <p:cNvSpPr>
+            <a:spLocks noGrp="1"/>
+          </p:cNvSpPr>
+          <p:nvPr>
+            <p:ph type="sldNum" sz="quarter" idx="10"/>
+          </p:nvPr>
+        </p:nvSpPr>
+        <p:spPr/>
+        <p:txBody>
+          <a:bodyPr/>
+          <a:lstStyle/>
+          <a:p>
+            <a:fld id="{F7021451-1387-4CA6-816F-3879F97B5CBC}" type="slidenum">
+              <a:rPr lang="en-US"/>
+              <a:t>22</a:t>
             </a:fld>
             <a:endParaRPr lang="en-US"/>
           </a:p>
@@ -4221,7 +4399,7 @@
                 <a:ea typeface="Calibri" pitchFamily="34" charset="-122"/>
                 <a:cs typeface="Calibri" pitchFamily="34" charset="-120"/>
               </a:rPr>
-              <a:t>10 / 20</a:t>
+              <a:t>10 / 22</a:t>
             </a:r>
             <a:endParaRPr lang="en-US" sz="800" dirty="0"/>
           </a:p>
@@ -5283,7 +5461,7 @@
                 <a:ea typeface="Calibri" pitchFamily="34" charset="-122"/>
                 <a:cs typeface="Calibri" pitchFamily="34" charset="-120"/>
               </a:rPr>
-              <a:t>11 / 20</a:t>
+              <a:t>11 / 22</a:t>
             </a:r>
             <a:endParaRPr lang="en-US" sz="800" dirty="0"/>
           </a:p>
@@ -6825,7 +7003,7 @@
                 <a:ea typeface="Calibri" pitchFamily="34" charset="-122"/>
                 <a:cs typeface="Calibri" pitchFamily="34" charset="-120"/>
               </a:rPr>
-              <a:t>12 / 20</a:t>
+              <a:t>12 / 22</a:t>
             </a:r>
             <a:endParaRPr lang="en-US" sz="800" dirty="0"/>
           </a:p>
@@ -8346,7 +8524,7 @@
                 <a:ea typeface="Calibri" pitchFamily="34" charset="-122"/>
                 <a:cs typeface="Calibri" pitchFamily="34" charset="-120"/>
               </a:rPr>
-              <a:t>13 / 20</a:t>
+              <a:t>13 / 22</a:t>
             </a:r>
             <a:endParaRPr lang="en-US" sz="800" dirty="0"/>
           </a:p>
@@ -9453,7 +9631,7 @@
                 <a:ea typeface="Calibri" pitchFamily="34" charset="-122"/>
                 <a:cs typeface="Calibri" pitchFamily="34" charset="-120"/>
               </a:rPr>
-              <a:t>14 / 20</a:t>
+              <a:t>14 / 22</a:t>
             </a:r>
             <a:endParaRPr lang="en-US" sz="800" dirty="0"/>
           </a:p>
@@ -10207,7 +10385,7 @@
                 <a:ea typeface="Calibri" pitchFamily="34" charset="-122"/>
                 <a:cs typeface="Calibri" pitchFamily="34" charset="-120"/>
               </a:rPr>
-              <a:t>15 / 20</a:t>
+              <a:t>15 / 22</a:t>
             </a:r>
             <a:endParaRPr lang="en-US" sz="800" dirty="0"/>
           </a:p>
@@ -10937,7 +11115,7 @@
                 <a:ea typeface="Calibri" pitchFamily="34" charset="-122"/>
                 <a:cs typeface="Calibri" pitchFamily="34" charset="-120"/>
               </a:rPr>
-              <a:t>16 / 20</a:t>
+              <a:t>16 / 22</a:t>
             </a:r>
             <a:endParaRPr lang="en-US" sz="800" dirty="0"/>
           </a:p>
@@ -12427,7 +12605,7 @@
                 <a:ea typeface="Calibri" pitchFamily="34" charset="-122"/>
                 <a:cs typeface="Calibri" pitchFamily="34" charset="-120"/>
               </a:rPr>
-              <a:t>17 / 20</a:t>
+              <a:t>17 / 22</a:t>
             </a:r>
             <a:endParaRPr lang="en-US" sz="800" dirty="0"/>
           </a:p>
@@ -13846,7 +14024,7 @@
                 <a:ea typeface="Calibri" pitchFamily="34" charset="-122"/>
                 <a:cs typeface="Calibri" pitchFamily="34" charset="-120"/>
               </a:rPr>
-              <a:t>18 / 20</a:t>
+              <a:t>18 / 22</a:t>
             </a:r>
             <a:endParaRPr lang="en-US" sz="800" dirty="0"/>
           </a:p>
@@ -15288,7 +15466,7 @@
                 <a:ea typeface="Calibri" pitchFamily="34" charset="-122"/>
                 <a:cs typeface="Calibri" pitchFamily="34" charset="-120"/>
               </a:rPr>
-              <a:t>19 / 20</a:t>
+              <a:t>19 / 22</a:t>
             </a:r>
             <a:endParaRPr lang="en-US" sz="800" dirty="0"/>
           </a:p>
@@ -15970,7 +16148,7 @@
                 <a:ea typeface="Calibri" pitchFamily="34" charset="-122"/>
                 <a:cs typeface="Calibri" pitchFamily="34" charset="-120"/>
               </a:rPr>
-              <a:t>2 / 20</a:t>
+              <a:t>2 / 22</a:t>
             </a:r>
             <a:endParaRPr lang="en-US" sz="800" dirty="0"/>
           </a:p>
@@ -18314,7 +18492,3497 @@
                 <a:ea typeface="Calibri" pitchFamily="34" charset="-122"/>
                 <a:cs typeface="Calibri" pitchFamily="34" charset="-120"/>
               </a:rPr>
-              <a:t>20 / 20</a:t>
+              <a:t>20 / 22</a:t>
+            </a:r>
+            <a:endParaRPr lang="en-US" sz="800" dirty="0"/>
+          </a:p>
+        </p:txBody>
+      </p:sp>
+    </p:spTree>
+  </p:cSld>
+  <p:clrMapOvr>
+    <a:masterClrMapping/>
+  </p:clrMapOvr>
+</p:sld>
+</file>
+
+<file path=ppt/slides/slide21.xml><?xml version="1.0" encoding="utf-8"?>
+<p:sld xmlns:a="http://schemas.openxmlformats.org/drawingml/2006/main" xmlns:r="http://schemas.openxmlformats.org/officeDocument/2006/relationships" xmlns:p="http://schemas.openxmlformats.org/presentationml/2006/main">
+  <p:cSld name="Slide 21">
+    <p:bg>
+      <p:bgPr>
+        <a:solidFill>
+          <a:srgbClr val="FFFFFF"/>
+        </a:solidFill>
+      </p:bgPr>
+    </p:bg>
+    <p:spTree>
+      <p:nvGrpSpPr>
+        <p:cNvPr id="1" name=""/>
+        <p:cNvGrpSpPr/>
+        <p:nvPr/>
+      </p:nvGrpSpPr>
+      <p:grpSpPr>
+        <a:xfrm>
+          <a:off x="0" y="0"/>
+          <a:ext cx="0" cy="0"/>
+          <a:chOff x="0" y="0"/>
+          <a:chExt cx="0" cy="0"/>
+        </a:xfrm>
+      </p:grpSpPr>
+      <p:sp>
+        <p:nvSpPr>
+          <p:cNvPr id="2" name="Text 0"/>
+          <p:cNvSpPr/>
+          <p:nvPr/>
+        </p:nvSpPr>
+        <p:spPr>
+          <a:xfrm>
+            <a:off x="6858000" y="292608"/>
+            <a:ext cx="1737360" cy="292608"/>
+          </a:xfrm>
+          <a:prstGeom prst="rect">
+            <a:avLst/>
+          </a:prstGeom>
+          <a:noFill/>
+          <a:ln/>
+        </p:spPr>
+        <p:txBody>
+          <a:bodyPr wrap="square" lIns="0" tIns="0" rIns="0" bIns="0" rtlCol="0" anchor="ctr"/>
+          <a:lstStyle/>
+          <a:p>
+            <a:pPr algn="r" indent="0" marL="0">
+              <a:buNone/>
+            </a:pPr>
+            <a:r>
+              <a:rPr lang="en-US" sz="1300" b="1" spc="300" kern="0" dirty="0">
+                <a:solidFill>
+                  <a:srgbClr val="EE5A29"/>
+                </a:solidFill>
+                <a:latin typeface="Arial" pitchFamily="34" charset="0"/>
+                <a:ea typeface="Arial" pitchFamily="34" charset="-122"/>
+                <a:cs typeface="Arial" pitchFamily="34" charset="-120"/>
+              </a:rPr>
+              <a:t>CLOUD</a:t>
+            </a:r>
+            <a:pPr algn="r" indent="0" marL="0">
+              <a:buNone/>
+            </a:pPr>
+            <a:r>
+              <a:rPr lang="en-US" sz="1300" b="1" spc="300" kern="0" dirty="0">
+                <a:solidFill>
+                  <a:srgbClr val="EE5A29"/>
+                </a:solidFill>
+                <a:latin typeface="Arial" pitchFamily="34" charset="0"/>
+                <a:ea typeface="Arial" pitchFamily="34" charset="-122"/>
+                <a:cs typeface="Arial" pitchFamily="34" charset="-120"/>
+              </a:rPr>
+              <a:t>E</a:t>
+            </a:r>
+            <a:pPr algn="r" indent="0" marL="0">
+              <a:buNone/>
+            </a:pPr>
+            <a:r>
+              <a:rPr lang="en-US" sz="1300" b="1" spc="300" kern="0" dirty="0">
+                <a:solidFill>
+                  <a:srgbClr val="EE5A29"/>
+                </a:solidFill>
+                <a:latin typeface="Arial" pitchFamily="34" charset="0"/>
+                <a:ea typeface="Arial" pitchFamily="34" charset="-122"/>
+                <a:cs typeface="Arial" pitchFamily="34" charset="-120"/>
+              </a:rPr>
+              <a:t>RA</a:t>
+            </a:r>
+            <a:endParaRPr lang="en-US" sz="1300" dirty="0"/>
+          </a:p>
+        </p:txBody>
+      </p:sp>
+      <p:sp>
+        <p:nvSpPr>
+          <p:cNvPr id="3" name="Shape 1"/>
+          <p:cNvSpPr/>
+          <p:nvPr/>
+        </p:nvSpPr>
+        <p:spPr>
+          <a:xfrm>
+            <a:off x="566928" y="420624"/>
+            <a:ext cx="274320" cy="41148"/>
+          </a:xfrm>
+          <a:prstGeom prst="rect">
+            <a:avLst/>
+          </a:prstGeom>
+          <a:solidFill>
+            <a:srgbClr val="EE5A29"/>
+          </a:solidFill>
+          <a:ln/>
+        </p:spPr>
+      </p:sp>
+      <p:sp>
+        <p:nvSpPr>
+          <p:cNvPr id="4" name="Text 2"/>
+          <p:cNvSpPr/>
+          <p:nvPr/>
+        </p:nvSpPr>
+        <p:spPr>
+          <a:xfrm>
+            <a:off x="932688" y="274320"/>
+            <a:ext cx="6400800" cy="274320"/>
+          </a:xfrm>
+          <a:prstGeom prst="rect">
+            <a:avLst/>
+          </a:prstGeom>
+          <a:noFill/>
+          <a:ln/>
+        </p:spPr>
+        <p:txBody>
+          <a:bodyPr wrap="square" lIns="0" tIns="0" rIns="0" bIns="0" rtlCol="0" anchor="ctr"/>
+          <a:lstStyle/>
+          <a:p>
+            <a:pPr indent="0" marL="0">
+              <a:buNone/>
+            </a:pPr>
+            <a:r>
+              <a:rPr lang="en-US" sz="1050" b="1" spc="200" kern="0" dirty="0">
+                <a:solidFill>
+                  <a:srgbClr val="EE5A29"/>
+                </a:solidFill>
+                <a:latin typeface="Calibri" pitchFamily="34" charset="0"/>
+                <a:ea typeface="Calibri" pitchFamily="34" charset="-122"/>
+                <a:cs typeface="Calibri" pitchFamily="34" charset="-120"/>
+              </a:rPr>
+              <a:t>CLOUDERA AI</a:t>
+            </a:r>
+            <a:endParaRPr lang="en-US" sz="1050" dirty="0"/>
+          </a:p>
+        </p:txBody>
+      </p:sp>
+      <p:sp>
+        <p:nvSpPr>
+          <p:cNvPr id="5" name="Text 3"/>
+          <p:cNvSpPr/>
+          <p:nvPr/>
+        </p:nvSpPr>
+        <p:spPr>
+          <a:xfrm>
+            <a:off x="566928" y="566928"/>
+            <a:ext cx="8046720" cy="658368"/>
+          </a:xfrm>
+          <a:prstGeom prst="rect">
+            <a:avLst/>
+          </a:prstGeom>
+          <a:noFill/>
+          <a:ln/>
+        </p:spPr>
+        <p:txBody>
+          <a:bodyPr wrap="square" lIns="0" tIns="0" rIns="0" bIns="0" rtlCol="0" anchor="ctr"/>
+          <a:lstStyle/>
+          <a:p>
+            <a:pPr indent="0" marL="0">
+              <a:buNone/>
+            </a:pPr>
+            <a:r>
+              <a:rPr lang="en-US" sz="2700" b="1" dirty="0">
+                <a:solidFill>
+                  <a:srgbClr val="15154A"/>
+                </a:solidFill>
+                <a:latin typeface="Arial" pitchFamily="34" charset="0"/>
+                <a:ea typeface="Arial" pitchFamily="34" charset="-122"/>
+                <a:cs typeface="Arial" pitchFamily="34" charset="-120"/>
+              </a:rPr>
+              <a:t>Cloudera Agent Studio 3.0</a:t>
+            </a:r>
+            <a:endParaRPr lang="en-US" sz="2700" dirty="0"/>
+          </a:p>
+        </p:txBody>
+      </p:sp>
+      <p:sp>
+        <p:nvSpPr>
+          <p:cNvPr id="6" name="Text 4"/>
+          <p:cNvSpPr/>
+          <p:nvPr/>
+        </p:nvSpPr>
+        <p:spPr>
+          <a:xfrm>
+            <a:off x="566928" y="1444752"/>
+            <a:ext cx="4206240" cy="658368"/>
+          </a:xfrm>
+          <a:prstGeom prst="rect">
+            <a:avLst/>
+          </a:prstGeom>
+          <a:noFill/>
+          <a:ln/>
+        </p:spPr>
+        <p:txBody>
+          <a:bodyPr wrap="square" lIns="0" tIns="0" rIns="0" bIns="0" rtlCol="0" anchor="ctr"/>
+          <a:lstStyle/>
+          <a:p>
+            <a:pPr indent="0" marL="0">
+              <a:lnSpc>
+                <a:spcPct val="105000"/>
+              </a:lnSpc>
+              <a:buNone/>
+            </a:pPr>
+            <a:r>
+              <a:rPr lang="en-US" sz="1300" b="1" dirty="0">
+                <a:solidFill>
+                  <a:srgbClr val="4F4FF5"/>
+                </a:solidFill>
+                <a:latin typeface="Arial" pitchFamily="34" charset="0"/>
+                <a:ea typeface="Arial" pitchFamily="34" charset="-122"/>
+                <a:cs typeface="Arial" pitchFamily="34" charset="-120"/>
+              </a:rPr>
+              <a:t>A flexible low-code to high-code platform to create AI agents, tools, and multi-agent workflows — all through an intuitive UI.</a:t>
+            </a:r>
+            <a:endParaRPr lang="en-US" sz="1300" dirty="0"/>
+          </a:p>
+        </p:txBody>
+      </p:sp>
+      <p:sp>
+        <p:nvSpPr>
+          <p:cNvPr id="7" name="Shape 5"/>
+          <p:cNvSpPr/>
+          <p:nvPr/>
+        </p:nvSpPr>
+        <p:spPr>
+          <a:xfrm>
+            <a:off x="566928" y="2304288"/>
+            <a:ext cx="54864" cy="256032"/>
+          </a:xfrm>
+          <a:prstGeom prst="rect">
+            <a:avLst/>
+          </a:prstGeom>
+          <a:solidFill>
+            <a:srgbClr val="EE5A29"/>
+          </a:solidFill>
+          <a:ln/>
+        </p:spPr>
+      </p:sp>
+      <p:sp>
+        <p:nvSpPr>
+          <p:cNvPr id="8" name="Text 6"/>
+          <p:cNvSpPr/>
+          <p:nvPr/>
+        </p:nvSpPr>
+        <p:spPr>
+          <a:xfrm>
+            <a:off x="731520" y="2276856"/>
+            <a:ext cx="4023360" cy="182880"/>
+          </a:xfrm>
+          <a:prstGeom prst="rect">
+            <a:avLst/>
+          </a:prstGeom>
+          <a:noFill/>
+          <a:ln/>
+        </p:spPr>
+        <p:txBody>
+          <a:bodyPr wrap="square" lIns="0" tIns="0" rIns="0" bIns="0" rtlCol="0" anchor="ctr"/>
+          <a:lstStyle/>
+          <a:p>
+            <a:pPr indent="0" marL="0">
+              <a:buNone/>
+            </a:pPr>
+            <a:r>
+              <a:rPr lang="en-US" sz="1000" b="1" dirty="0">
+                <a:solidFill>
+                  <a:srgbClr val="15154A"/>
+                </a:solidFill>
+                <a:latin typeface="Arial" pitchFamily="34" charset="0"/>
+                <a:ea typeface="Arial" pitchFamily="34" charset="-122"/>
+                <a:cs typeface="Arial" pitchFamily="34" charset="-120"/>
+              </a:rPr>
+              <a:t>Agentic workflow builder</a:t>
+            </a:r>
+            <a:endParaRPr lang="en-US" sz="1000" dirty="0"/>
+          </a:p>
+        </p:txBody>
+      </p:sp>
+      <p:sp>
+        <p:nvSpPr>
+          <p:cNvPr id="9" name="Text 7"/>
+          <p:cNvSpPr/>
+          <p:nvPr/>
+        </p:nvSpPr>
+        <p:spPr>
+          <a:xfrm>
+            <a:off x="731520" y="2441448"/>
+            <a:ext cx="4023360" cy="164592"/>
+          </a:xfrm>
+          <a:prstGeom prst="rect">
+            <a:avLst/>
+          </a:prstGeom>
+          <a:noFill/>
+          <a:ln/>
+        </p:spPr>
+        <p:txBody>
+          <a:bodyPr wrap="square" lIns="0" tIns="0" rIns="0" bIns="0" rtlCol="0" anchor="ctr"/>
+          <a:lstStyle/>
+          <a:p>
+            <a:pPr indent="0" marL="0">
+              <a:buNone/>
+            </a:pPr>
+            <a:r>
+              <a:rPr lang="en-US" sz="850" dirty="0">
+                <a:solidFill>
+                  <a:srgbClr val="5A5A72"/>
+                </a:solidFill>
+                <a:latin typeface="Calibri" pitchFamily="34" charset="0"/>
+                <a:ea typeface="Calibri" pitchFamily="34" charset="-122"/>
+                <a:cs typeface="Calibri" pitchFamily="34" charset="-120"/>
+              </a:rPr>
+              <a:t>Create agents with tasks, tools &amp; roles; AI-assisted authoring</a:t>
+            </a:r>
+            <a:endParaRPr lang="en-US" sz="850" dirty="0"/>
+          </a:p>
+        </p:txBody>
+      </p:sp>
+      <p:sp>
+        <p:nvSpPr>
+          <p:cNvPr id="10" name="Shape 8"/>
+          <p:cNvSpPr/>
+          <p:nvPr/>
+        </p:nvSpPr>
+        <p:spPr>
+          <a:xfrm>
+            <a:off x="566928" y="2647188"/>
+            <a:ext cx="54864" cy="256032"/>
+          </a:xfrm>
+          <a:prstGeom prst="rect">
+            <a:avLst/>
+          </a:prstGeom>
+          <a:solidFill>
+            <a:srgbClr val="EE5A29"/>
+          </a:solidFill>
+          <a:ln/>
+        </p:spPr>
+      </p:sp>
+      <p:sp>
+        <p:nvSpPr>
+          <p:cNvPr id="11" name="Text 9"/>
+          <p:cNvSpPr/>
+          <p:nvPr/>
+        </p:nvSpPr>
+        <p:spPr>
+          <a:xfrm>
+            <a:off x="731520" y="2619756"/>
+            <a:ext cx="4023360" cy="182880"/>
+          </a:xfrm>
+          <a:prstGeom prst="rect">
+            <a:avLst/>
+          </a:prstGeom>
+          <a:noFill/>
+          <a:ln/>
+        </p:spPr>
+        <p:txBody>
+          <a:bodyPr wrap="square" lIns="0" tIns="0" rIns="0" bIns="0" rtlCol="0" anchor="ctr"/>
+          <a:lstStyle/>
+          <a:p>
+            <a:pPr indent="0" marL="0">
+              <a:buNone/>
+            </a:pPr>
+            <a:r>
+              <a:rPr lang="en-US" sz="1000" b="1" dirty="0">
+                <a:solidFill>
+                  <a:srgbClr val="15154A"/>
+                </a:solidFill>
+                <a:latin typeface="Arial" pitchFamily="34" charset="0"/>
+                <a:ea typeface="Arial" pitchFamily="34" charset="-122"/>
+                <a:cs typeface="Arial" pitchFamily="34" charset="-120"/>
+              </a:rPr>
+              <a:t>Tools Catalog</a:t>
+            </a:r>
+            <a:endParaRPr lang="en-US" sz="1000" dirty="0"/>
+          </a:p>
+        </p:txBody>
+      </p:sp>
+      <p:sp>
+        <p:nvSpPr>
+          <p:cNvPr id="12" name="Text 10"/>
+          <p:cNvSpPr/>
+          <p:nvPr/>
+        </p:nvSpPr>
+        <p:spPr>
+          <a:xfrm>
+            <a:off x="731520" y="2784348"/>
+            <a:ext cx="4023360" cy="164592"/>
+          </a:xfrm>
+          <a:prstGeom prst="rect">
+            <a:avLst/>
+          </a:prstGeom>
+          <a:noFill/>
+          <a:ln/>
+        </p:spPr>
+        <p:txBody>
+          <a:bodyPr wrap="square" lIns="0" tIns="0" rIns="0" bIns="0" rtlCol="0" anchor="ctr"/>
+          <a:lstStyle/>
+          <a:p>
+            <a:pPr indent="0" marL="0">
+              <a:buNone/>
+            </a:pPr>
+            <a:r>
+              <a:rPr lang="en-US" sz="850" dirty="0">
+                <a:solidFill>
+                  <a:srgbClr val="5A5A72"/>
+                </a:solidFill>
+                <a:latin typeface="Calibri" pitchFamily="34" charset="0"/>
+                <a:ea typeface="Calibri" pitchFamily="34" charset="-122"/>
+                <a:cs typeface="Calibri" pitchFamily="34" charset="-120"/>
+              </a:rPr>
+              <a:t>Built-in, custom Python, and MCP server tools — all reusable across workflows</a:t>
+            </a:r>
+            <a:endParaRPr lang="en-US" sz="850" dirty="0"/>
+          </a:p>
+        </p:txBody>
+      </p:sp>
+      <p:sp>
+        <p:nvSpPr>
+          <p:cNvPr id="13" name="Shape 11"/>
+          <p:cNvSpPr/>
+          <p:nvPr/>
+        </p:nvSpPr>
+        <p:spPr>
+          <a:xfrm>
+            <a:off x="566928" y="2990088"/>
+            <a:ext cx="54864" cy="256032"/>
+          </a:xfrm>
+          <a:prstGeom prst="rect">
+            <a:avLst/>
+          </a:prstGeom>
+          <a:solidFill>
+            <a:srgbClr val="EE5A29"/>
+          </a:solidFill>
+          <a:ln/>
+        </p:spPr>
+      </p:sp>
+      <p:sp>
+        <p:nvSpPr>
+          <p:cNvPr id="14" name="Text 12"/>
+          <p:cNvSpPr/>
+          <p:nvPr/>
+        </p:nvSpPr>
+        <p:spPr>
+          <a:xfrm>
+            <a:off x="731520" y="2962656"/>
+            <a:ext cx="4023360" cy="182880"/>
+          </a:xfrm>
+          <a:prstGeom prst="rect">
+            <a:avLst/>
+          </a:prstGeom>
+          <a:noFill/>
+          <a:ln/>
+        </p:spPr>
+        <p:txBody>
+          <a:bodyPr wrap="square" lIns="0" tIns="0" rIns="0" bIns="0" rtlCol="0" anchor="ctr"/>
+          <a:lstStyle/>
+          <a:p>
+            <a:pPr indent="0" marL="0">
+              <a:buNone/>
+            </a:pPr>
+            <a:r>
+              <a:rPr lang="en-US" sz="1000" b="1" dirty="0">
+                <a:solidFill>
+                  <a:srgbClr val="15154A"/>
+                </a:solidFill>
+                <a:latin typeface="Arial" pitchFamily="34" charset="0"/>
+                <a:ea typeface="Arial" pitchFamily="34" charset="-122"/>
+                <a:cs typeface="Arial" pitchFamily="34" charset="-120"/>
+              </a:rPr>
+              <a:t>Multi-LLM support</a:t>
+            </a:r>
+            <a:endParaRPr lang="en-US" sz="1000" dirty="0"/>
+          </a:p>
+        </p:txBody>
+      </p:sp>
+      <p:sp>
+        <p:nvSpPr>
+          <p:cNvPr id="15" name="Text 13"/>
+          <p:cNvSpPr/>
+          <p:nvPr/>
+        </p:nvSpPr>
+        <p:spPr>
+          <a:xfrm>
+            <a:off x="731520" y="3127248"/>
+            <a:ext cx="4023360" cy="164592"/>
+          </a:xfrm>
+          <a:prstGeom prst="rect">
+            <a:avLst/>
+          </a:prstGeom>
+          <a:noFill/>
+          <a:ln/>
+        </p:spPr>
+        <p:txBody>
+          <a:bodyPr wrap="square" lIns="0" tIns="0" rIns="0" bIns="0" rtlCol="0" anchor="ctr"/>
+          <a:lstStyle/>
+          <a:p>
+            <a:pPr indent="0" marL="0">
+              <a:buNone/>
+            </a:pPr>
+            <a:r>
+              <a:rPr lang="en-US" sz="850" dirty="0">
+                <a:solidFill>
+                  <a:srgbClr val="5A5A72"/>
+                </a:solidFill>
+                <a:latin typeface="Calibri" pitchFamily="34" charset="0"/>
+                <a:ea typeface="Calibri" pitchFamily="34" charset="-122"/>
+                <a:cs typeface="Calibri" pitchFamily="34" charset="-120"/>
+              </a:rPr>
+              <a:t>CAI Inferencing, Azure OpenAI, Gemini, Anthropic, any OpenAI-compatible endpoint</a:t>
+            </a:r>
+            <a:endParaRPr lang="en-US" sz="850" dirty="0"/>
+          </a:p>
+        </p:txBody>
+      </p:sp>
+      <p:sp>
+        <p:nvSpPr>
+          <p:cNvPr id="16" name="Shape 14"/>
+          <p:cNvSpPr/>
+          <p:nvPr/>
+        </p:nvSpPr>
+        <p:spPr>
+          <a:xfrm>
+            <a:off x="566928" y="3332988"/>
+            <a:ext cx="54864" cy="256032"/>
+          </a:xfrm>
+          <a:prstGeom prst="rect">
+            <a:avLst/>
+          </a:prstGeom>
+          <a:solidFill>
+            <a:srgbClr val="EE5A29"/>
+          </a:solidFill>
+          <a:ln/>
+        </p:spPr>
+      </p:sp>
+      <p:sp>
+        <p:nvSpPr>
+          <p:cNvPr id="17" name="Text 15"/>
+          <p:cNvSpPr/>
+          <p:nvPr/>
+        </p:nvSpPr>
+        <p:spPr>
+          <a:xfrm>
+            <a:off x="731520" y="3305556"/>
+            <a:ext cx="4023360" cy="182880"/>
+          </a:xfrm>
+          <a:prstGeom prst="rect">
+            <a:avLst/>
+          </a:prstGeom>
+          <a:noFill/>
+          <a:ln/>
+        </p:spPr>
+        <p:txBody>
+          <a:bodyPr wrap="square" lIns="0" tIns="0" rIns="0" bIns="0" rtlCol="0" anchor="ctr"/>
+          <a:lstStyle/>
+          <a:p>
+            <a:pPr indent="0" marL="0">
+              <a:buNone/>
+            </a:pPr>
+            <a:r>
+              <a:rPr lang="en-US" sz="1000" b="1" dirty="0">
+                <a:solidFill>
+                  <a:srgbClr val="15154A"/>
+                </a:solidFill>
+                <a:latin typeface="Arial" pitchFamily="34" charset="0"/>
+                <a:ea typeface="Arial" pitchFamily="34" charset="-122"/>
+                <a:cs typeface="Arial" pitchFamily="34" charset="-120"/>
+              </a:rPr>
+              <a:t>Test &amp; debug</a:t>
+            </a:r>
+            <a:endParaRPr lang="en-US" sz="1000" dirty="0"/>
+          </a:p>
+        </p:txBody>
+      </p:sp>
+      <p:sp>
+        <p:nvSpPr>
+          <p:cNvPr id="18" name="Text 16"/>
+          <p:cNvSpPr/>
+          <p:nvPr/>
+        </p:nvSpPr>
+        <p:spPr>
+          <a:xfrm>
+            <a:off x="731520" y="3470148"/>
+            <a:ext cx="4023360" cy="164592"/>
+          </a:xfrm>
+          <a:prstGeom prst="rect">
+            <a:avLst/>
+          </a:prstGeom>
+          <a:noFill/>
+          <a:ln/>
+        </p:spPr>
+        <p:txBody>
+          <a:bodyPr wrap="square" lIns="0" tIns="0" rIns="0" bIns="0" rtlCol="0" anchor="ctr"/>
+          <a:lstStyle/>
+          <a:p>
+            <a:pPr indent="0" marL="0">
+              <a:buNone/>
+            </a:pPr>
+            <a:r>
+              <a:rPr lang="en-US" sz="850" dirty="0">
+                <a:solidFill>
+                  <a:srgbClr val="5A5A72"/>
+                </a:solidFill>
+                <a:latin typeface="Calibri" pitchFamily="34" charset="0"/>
+                <a:ea typeface="Calibri" pitchFamily="34" charset="-122"/>
+                <a:cs typeface="Calibri" pitchFamily="34" charset="-120"/>
+              </a:rPr>
+              <a:t>Logs, playback, and visual debugger in the Test panel</a:t>
+            </a:r>
+            <a:endParaRPr lang="en-US" sz="850" dirty="0"/>
+          </a:p>
+        </p:txBody>
+      </p:sp>
+      <p:sp>
+        <p:nvSpPr>
+          <p:cNvPr id="19" name="Shape 17"/>
+          <p:cNvSpPr/>
+          <p:nvPr/>
+        </p:nvSpPr>
+        <p:spPr>
+          <a:xfrm>
+            <a:off x="566928" y="3675888"/>
+            <a:ext cx="54864" cy="256032"/>
+          </a:xfrm>
+          <a:prstGeom prst="rect">
+            <a:avLst/>
+          </a:prstGeom>
+          <a:solidFill>
+            <a:srgbClr val="EE5A29"/>
+          </a:solidFill>
+          <a:ln/>
+        </p:spPr>
+      </p:sp>
+      <p:sp>
+        <p:nvSpPr>
+          <p:cNvPr id="20" name="Text 18"/>
+          <p:cNvSpPr/>
+          <p:nvPr/>
+        </p:nvSpPr>
+        <p:spPr>
+          <a:xfrm>
+            <a:off x="731520" y="3648456"/>
+            <a:ext cx="4023360" cy="182880"/>
+          </a:xfrm>
+          <a:prstGeom prst="rect">
+            <a:avLst/>
+          </a:prstGeom>
+          <a:noFill/>
+          <a:ln/>
+        </p:spPr>
+        <p:txBody>
+          <a:bodyPr wrap="square" lIns="0" tIns="0" rIns="0" bIns="0" rtlCol="0" anchor="ctr"/>
+          <a:lstStyle/>
+          <a:p>
+            <a:pPr indent="0" marL="0">
+              <a:buNone/>
+            </a:pPr>
+            <a:r>
+              <a:rPr lang="en-US" sz="1000" b="1" dirty="0">
+                <a:solidFill>
+                  <a:srgbClr val="15154A"/>
+                </a:solidFill>
+                <a:latin typeface="Arial" pitchFamily="34" charset="0"/>
+                <a:ea typeface="Arial" pitchFamily="34" charset="-122"/>
+                <a:cs typeface="Arial" pitchFamily="34" charset="-120"/>
+              </a:rPr>
+              <a:t>Deploy as endpoint</a:t>
+            </a:r>
+            <a:endParaRPr lang="en-US" sz="1000" dirty="0"/>
+          </a:p>
+        </p:txBody>
+      </p:sp>
+      <p:sp>
+        <p:nvSpPr>
+          <p:cNvPr id="21" name="Text 19"/>
+          <p:cNvSpPr/>
+          <p:nvPr/>
+        </p:nvSpPr>
+        <p:spPr>
+          <a:xfrm>
+            <a:off x="731520" y="3813048"/>
+            <a:ext cx="4023360" cy="164592"/>
+          </a:xfrm>
+          <a:prstGeom prst="rect">
+            <a:avLst/>
+          </a:prstGeom>
+          <a:noFill/>
+          <a:ln/>
+        </p:spPr>
+        <p:txBody>
+          <a:bodyPr wrap="square" lIns="0" tIns="0" rIns="0" bIns="0" rtlCol="0" anchor="ctr"/>
+          <a:lstStyle/>
+          <a:p>
+            <a:pPr indent="0" marL="0">
+              <a:buNone/>
+            </a:pPr>
+            <a:r>
+              <a:rPr lang="en-US" sz="850" dirty="0">
+                <a:solidFill>
+                  <a:srgbClr val="5A5A72"/>
+                </a:solidFill>
+                <a:latin typeface="Calibri" pitchFamily="34" charset="0"/>
+                <a:ea typeface="Calibri" pitchFamily="34" charset="-122"/>
+                <a:cs typeface="Calibri" pitchFamily="34" charset="-120"/>
+              </a:rPr>
+              <a:t>Auto-generated UI; deploy workflows as APIs with one click</a:t>
+            </a:r>
+            <a:endParaRPr lang="en-US" sz="850" dirty="0"/>
+          </a:p>
+        </p:txBody>
+      </p:sp>
+      <p:sp>
+        <p:nvSpPr>
+          <p:cNvPr id="22" name="Shape 20"/>
+          <p:cNvSpPr/>
+          <p:nvPr/>
+        </p:nvSpPr>
+        <p:spPr>
+          <a:xfrm>
+            <a:off x="566928" y="4018788"/>
+            <a:ext cx="54864" cy="256032"/>
+          </a:xfrm>
+          <a:prstGeom prst="rect">
+            <a:avLst/>
+          </a:prstGeom>
+          <a:solidFill>
+            <a:srgbClr val="EE5A29"/>
+          </a:solidFill>
+          <a:ln/>
+        </p:spPr>
+      </p:sp>
+      <p:sp>
+        <p:nvSpPr>
+          <p:cNvPr id="23" name="Text 21"/>
+          <p:cNvSpPr/>
+          <p:nvPr/>
+        </p:nvSpPr>
+        <p:spPr>
+          <a:xfrm>
+            <a:off x="731520" y="3991356"/>
+            <a:ext cx="4023360" cy="182880"/>
+          </a:xfrm>
+          <a:prstGeom prst="rect">
+            <a:avLst/>
+          </a:prstGeom>
+          <a:noFill/>
+          <a:ln/>
+        </p:spPr>
+        <p:txBody>
+          <a:bodyPr wrap="square" lIns="0" tIns="0" rIns="0" bIns="0" rtlCol="0" anchor="ctr"/>
+          <a:lstStyle/>
+          <a:p>
+            <a:pPr indent="0" marL="0">
+              <a:buNone/>
+            </a:pPr>
+            <a:r>
+              <a:rPr lang="en-US" sz="1000" b="1" dirty="0">
+                <a:solidFill>
+                  <a:srgbClr val="15154A"/>
+                </a:solidFill>
+                <a:latin typeface="Arial" pitchFamily="34" charset="0"/>
+                <a:ea typeface="Arial" pitchFamily="34" charset="-122"/>
+                <a:cs typeface="Arial" pitchFamily="34" charset="-120"/>
+              </a:rPr>
+              <a:t>Built-in observability</a:t>
+            </a:r>
+            <a:endParaRPr lang="en-US" sz="1000" dirty="0"/>
+          </a:p>
+        </p:txBody>
+      </p:sp>
+      <p:sp>
+        <p:nvSpPr>
+          <p:cNvPr id="24" name="Text 22"/>
+          <p:cNvSpPr/>
+          <p:nvPr/>
+        </p:nvSpPr>
+        <p:spPr>
+          <a:xfrm>
+            <a:off x="731520" y="4155948"/>
+            <a:ext cx="4023360" cy="164592"/>
+          </a:xfrm>
+          <a:prstGeom prst="rect">
+            <a:avLst/>
+          </a:prstGeom>
+          <a:noFill/>
+          <a:ln/>
+        </p:spPr>
+        <p:txBody>
+          <a:bodyPr wrap="square" lIns="0" tIns="0" rIns="0" bIns="0" rtlCol="0" anchor="ctr"/>
+          <a:lstStyle/>
+          <a:p>
+            <a:pPr indent="0" marL="0">
+              <a:buNone/>
+            </a:pPr>
+            <a:r>
+              <a:rPr lang="en-US" sz="850" dirty="0">
+                <a:solidFill>
+                  <a:srgbClr val="5A5A72"/>
+                </a:solidFill>
+                <a:latin typeface="Calibri" pitchFamily="34" charset="0"/>
+                <a:ea typeface="Calibri" pitchFamily="34" charset="-122"/>
+                <a:cs typeface="Calibri" pitchFamily="34" charset="-120"/>
+              </a:rPr>
+              <a:t>Phoenix (Arize) tracing integrated; monitor every agent run</a:t>
+            </a:r>
+            <a:endParaRPr lang="en-US" sz="850" dirty="0"/>
+          </a:p>
+        </p:txBody>
+      </p:sp>
+      <p:sp>
+        <p:nvSpPr>
+          <p:cNvPr id="25" name="Shape 23"/>
+          <p:cNvSpPr/>
+          <p:nvPr/>
+        </p:nvSpPr>
+        <p:spPr>
+          <a:xfrm>
+            <a:off x="566928" y="4361688"/>
+            <a:ext cx="54864" cy="256032"/>
+          </a:xfrm>
+          <a:prstGeom prst="rect">
+            <a:avLst/>
+          </a:prstGeom>
+          <a:solidFill>
+            <a:srgbClr val="EE5A29"/>
+          </a:solidFill>
+          <a:ln/>
+        </p:spPr>
+      </p:sp>
+      <p:sp>
+        <p:nvSpPr>
+          <p:cNvPr id="26" name="Text 24"/>
+          <p:cNvSpPr/>
+          <p:nvPr/>
+        </p:nvSpPr>
+        <p:spPr>
+          <a:xfrm>
+            <a:off x="731520" y="4334256"/>
+            <a:ext cx="4023360" cy="182880"/>
+          </a:xfrm>
+          <a:prstGeom prst="rect">
+            <a:avLst/>
+          </a:prstGeom>
+          <a:noFill/>
+          <a:ln/>
+        </p:spPr>
+        <p:txBody>
+          <a:bodyPr wrap="square" lIns="0" tIns="0" rIns="0" bIns="0" rtlCol="0" anchor="ctr"/>
+          <a:lstStyle/>
+          <a:p>
+            <a:pPr indent="0" marL="0">
+              <a:buNone/>
+            </a:pPr>
+            <a:r>
+              <a:rPr lang="en-US" sz="1000" b="1" dirty="0">
+                <a:solidFill>
+                  <a:srgbClr val="15154A"/>
+                </a:solidFill>
+                <a:latin typeface="Arial" pitchFamily="34" charset="0"/>
+                <a:ea typeface="Arial" pitchFamily="34" charset="-122"/>
+                <a:cs typeface="Arial" pitchFamily="34" charset="-120"/>
+              </a:rPr>
+              <a:t>Guardrails</a:t>
+            </a:r>
+            <a:endParaRPr lang="en-US" sz="1000" dirty="0"/>
+          </a:p>
+        </p:txBody>
+      </p:sp>
+      <p:sp>
+        <p:nvSpPr>
+          <p:cNvPr id="27" name="Text 25"/>
+          <p:cNvSpPr/>
+          <p:nvPr/>
+        </p:nvSpPr>
+        <p:spPr>
+          <a:xfrm>
+            <a:off x="731520" y="4498848"/>
+            <a:ext cx="4023360" cy="164592"/>
+          </a:xfrm>
+          <a:prstGeom prst="rect">
+            <a:avLst/>
+          </a:prstGeom>
+          <a:noFill/>
+          <a:ln/>
+        </p:spPr>
+        <p:txBody>
+          <a:bodyPr wrap="square" lIns="0" tIns="0" rIns="0" bIns="0" rtlCol="0" anchor="ctr"/>
+          <a:lstStyle/>
+          <a:p>
+            <a:pPr indent="0" marL="0">
+              <a:buNone/>
+            </a:pPr>
+            <a:r>
+              <a:rPr lang="en-US" sz="850" dirty="0">
+                <a:solidFill>
+                  <a:srgbClr val="5A5A72"/>
+                </a:solidFill>
+                <a:latin typeface="Calibri" pitchFamily="34" charset="0"/>
+                <a:ea typeface="Calibri" pitchFamily="34" charset="-122"/>
+                <a:cs typeface="Calibri" pitchFamily="34" charset="-120"/>
+              </a:rPr>
+              <a:t>Secure workflows with configurable safety constraints</a:t>
+            </a:r>
+            <a:endParaRPr lang="en-US" sz="850" dirty="0"/>
+          </a:p>
+        </p:txBody>
+      </p:sp>
+      <p:sp>
+        <p:nvSpPr>
+          <p:cNvPr id="28" name="Shape 26"/>
+          <p:cNvSpPr/>
+          <p:nvPr/>
+        </p:nvSpPr>
+        <p:spPr>
+          <a:xfrm>
+            <a:off x="5047488" y="1389888"/>
+            <a:ext cx="3529584" cy="3291840"/>
+          </a:xfrm>
+          <a:prstGeom prst="roundRect">
+            <a:avLst>
+              <a:gd name="adj" fmla="val 2778"/>
+            </a:avLst>
+          </a:prstGeom>
+          <a:solidFill>
+            <a:srgbClr val="F6F6FB"/>
+          </a:solidFill>
+          <a:ln w="19050">
+            <a:solidFill>
+              <a:srgbClr val="E2E2EC"/>
+            </a:solidFill>
+            <a:prstDash val="solid"/>
+          </a:ln>
+        </p:spPr>
+      </p:sp>
+      <p:sp>
+        <p:nvSpPr>
+          <p:cNvPr id="29" name="Text 27"/>
+          <p:cNvSpPr/>
+          <p:nvPr/>
+        </p:nvSpPr>
+        <p:spPr>
+          <a:xfrm>
+            <a:off x="5230368" y="1517904"/>
+            <a:ext cx="3163824" cy="256032"/>
+          </a:xfrm>
+          <a:prstGeom prst="rect">
+            <a:avLst/>
+          </a:prstGeom>
+          <a:noFill/>
+          <a:ln/>
+        </p:spPr>
+        <p:txBody>
+          <a:bodyPr wrap="square" lIns="0" tIns="0" rIns="0" bIns="0" rtlCol="0" anchor="ctr"/>
+          <a:lstStyle/>
+          <a:p>
+            <a:pPr algn="ctr" indent="0" marL="0">
+              <a:buNone/>
+            </a:pPr>
+            <a:r>
+              <a:rPr lang="en-US" sz="1100" b="1" spc="150" kern="0" dirty="0">
+                <a:solidFill>
+                  <a:srgbClr val="15154A"/>
+                </a:solidFill>
+                <a:latin typeface="Arial" pitchFamily="34" charset="0"/>
+                <a:ea typeface="Arial" pitchFamily="34" charset="-122"/>
+                <a:cs typeface="Arial" pitchFamily="34" charset="-120"/>
+              </a:rPr>
+              <a:t>AGENT STUDIO</a:t>
+            </a:r>
+            <a:endParaRPr lang="en-US" sz="1100" dirty="0"/>
+          </a:p>
+        </p:txBody>
+      </p:sp>
+      <p:sp>
+        <p:nvSpPr>
+          <p:cNvPr id="30" name="Shape 28"/>
+          <p:cNvSpPr/>
+          <p:nvPr/>
+        </p:nvSpPr>
+        <p:spPr>
+          <a:xfrm>
+            <a:off x="5212080" y="1920240"/>
+            <a:ext cx="987552" cy="402336"/>
+          </a:xfrm>
+          <a:prstGeom prst="roundRect">
+            <a:avLst>
+              <a:gd name="adj" fmla="val 15909"/>
+            </a:avLst>
+          </a:prstGeom>
+          <a:solidFill>
+            <a:srgbClr val="FFFFFF"/>
+          </a:solidFill>
+          <a:ln w="12700">
+            <a:solidFill>
+              <a:srgbClr val="4F4FF5"/>
+            </a:solidFill>
+            <a:prstDash val="solid"/>
+          </a:ln>
+        </p:spPr>
+      </p:sp>
+      <p:sp>
+        <p:nvSpPr>
+          <p:cNvPr id="31" name="Text 29"/>
+          <p:cNvSpPr/>
+          <p:nvPr/>
+        </p:nvSpPr>
+        <p:spPr>
+          <a:xfrm>
+            <a:off x="5212080" y="1920240"/>
+            <a:ext cx="987552" cy="402336"/>
+          </a:xfrm>
+          <a:prstGeom prst="rect">
+            <a:avLst/>
+          </a:prstGeom>
+          <a:noFill/>
+          <a:ln/>
+        </p:spPr>
+        <p:txBody>
+          <a:bodyPr wrap="square" lIns="0" tIns="0" rIns="0" bIns="0" rtlCol="0" anchor="ctr"/>
+          <a:lstStyle/>
+          <a:p>
+            <a:pPr algn="ctr" indent="0" marL="0">
+              <a:buNone/>
+            </a:pPr>
+            <a:r>
+              <a:rPr lang="en-US" sz="900" b="1" dirty="0">
+                <a:solidFill>
+                  <a:srgbClr val="4F4FF5"/>
+                </a:solidFill>
+                <a:latin typeface="Calibri" pitchFamily="34" charset="0"/>
+                <a:ea typeface="Calibri" pitchFamily="34" charset="-122"/>
+                <a:cs typeface="Calibri" pitchFamily="34" charset="-120"/>
+              </a:rPr>
+              <a:t>Agent 1</a:t>
+            </a:r>
+            <a:endParaRPr lang="en-US" sz="900" dirty="0"/>
+          </a:p>
+        </p:txBody>
+      </p:sp>
+      <p:sp>
+        <p:nvSpPr>
+          <p:cNvPr id="32" name="Shape 30"/>
+          <p:cNvSpPr/>
+          <p:nvPr/>
+        </p:nvSpPr>
+        <p:spPr>
+          <a:xfrm>
+            <a:off x="5248656" y="2395728"/>
+            <a:ext cx="420624" cy="237744"/>
+          </a:xfrm>
+          <a:prstGeom prst="roundRect">
+            <a:avLst>
+              <a:gd name="adj" fmla="val 15385"/>
+            </a:avLst>
+          </a:prstGeom>
+          <a:solidFill>
+            <a:srgbClr val="FFF3EE"/>
+          </a:solidFill>
+          <a:ln/>
+        </p:spPr>
+      </p:sp>
+      <p:sp>
+        <p:nvSpPr>
+          <p:cNvPr id="33" name="Text 31"/>
+          <p:cNvSpPr/>
+          <p:nvPr/>
+        </p:nvSpPr>
+        <p:spPr>
+          <a:xfrm>
+            <a:off x="5248656" y="2395728"/>
+            <a:ext cx="420624" cy="237744"/>
+          </a:xfrm>
+          <a:prstGeom prst="rect">
+            <a:avLst/>
+          </a:prstGeom>
+          <a:noFill/>
+          <a:ln/>
+        </p:spPr>
+        <p:txBody>
+          <a:bodyPr wrap="square" lIns="0" tIns="0" rIns="0" bIns="0" rtlCol="0" anchor="ctr"/>
+          <a:lstStyle/>
+          <a:p>
+            <a:pPr algn="ctr" indent="0" marL="0">
+              <a:buNone/>
+            </a:pPr>
+            <a:r>
+              <a:rPr lang="en-US" sz="750" dirty="0">
+                <a:solidFill>
+                  <a:srgbClr val="EE5A29"/>
+                </a:solidFill>
+                <a:latin typeface="Calibri" pitchFamily="34" charset="0"/>
+                <a:ea typeface="Calibri" pitchFamily="34" charset="-122"/>
+                <a:cs typeface="Calibri" pitchFamily="34" charset="-120"/>
+              </a:rPr>
+              <a:t>Tool 1</a:t>
+            </a:r>
+            <a:endParaRPr lang="en-US" sz="750" dirty="0"/>
+          </a:p>
+        </p:txBody>
+      </p:sp>
+      <p:sp>
+        <p:nvSpPr>
+          <p:cNvPr id="34" name="Shape 32"/>
+          <p:cNvSpPr/>
+          <p:nvPr/>
+        </p:nvSpPr>
+        <p:spPr>
+          <a:xfrm>
+            <a:off x="5742432" y="2395728"/>
+            <a:ext cx="420624" cy="237744"/>
+          </a:xfrm>
+          <a:prstGeom prst="roundRect">
+            <a:avLst>
+              <a:gd name="adj" fmla="val 15385"/>
+            </a:avLst>
+          </a:prstGeom>
+          <a:solidFill>
+            <a:srgbClr val="FFF3EE"/>
+          </a:solidFill>
+          <a:ln/>
+        </p:spPr>
+      </p:sp>
+      <p:sp>
+        <p:nvSpPr>
+          <p:cNvPr id="35" name="Text 33"/>
+          <p:cNvSpPr/>
+          <p:nvPr/>
+        </p:nvSpPr>
+        <p:spPr>
+          <a:xfrm>
+            <a:off x="5742432" y="2395728"/>
+            <a:ext cx="420624" cy="237744"/>
+          </a:xfrm>
+          <a:prstGeom prst="rect">
+            <a:avLst/>
+          </a:prstGeom>
+          <a:noFill/>
+          <a:ln/>
+        </p:spPr>
+        <p:txBody>
+          <a:bodyPr wrap="square" lIns="0" tIns="0" rIns="0" bIns="0" rtlCol="0" anchor="ctr"/>
+          <a:lstStyle/>
+          <a:p>
+            <a:pPr algn="ctr" indent="0" marL="0">
+              <a:buNone/>
+            </a:pPr>
+            <a:r>
+              <a:rPr lang="en-US" sz="750" dirty="0">
+                <a:solidFill>
+                  <a:srgbClr val="EE5A29"/>
+                </a:solidFill>
+                <a:latin typeface="Calibri" pitchFamily="34" charset="0"/>
+                <a:ea typeface="Calibri" pitchFamily="34" charset="-122"/>
+                <a:cs typeface="Calibri" pitchFamily="34" charset="-120"/>
+              </a:rPr>
+              <a:t>Tool 2</a:t>
+            </a:r>
+            <a:endParaRPr lang="en-US" sz="750" dirty="0"/>
+          </a:p>
+        </p:txBody>
+      </p:sp>
+      <p:sp>
+        <p:nvSpPr>
+          <p:cNvPr id="36" name="Shape 34"/>
+          <p:cNvSpPr/>
+          <p:nvPr/>
+        </p:nvSpPr>
+        <p:spPr>
+          <a:xfrm>
+            <a:off x="6309360" y="1920240"/>
+            <a:ext cx="987552" cy="402336"/>
+          </a:xfrm>
+          <a:prstGeom prst="roundRect">
+            <a:avLst>
+              <a:gd name="adj" fmla="val 15909"/>
+            </a:avLst>
+          </a:prstGeom>
+          <a:solidFill>
+            <a:srgbClr val="E9E9FE"/>
+          </a:solidFill>
+          <a:ln w="12700">
+            <a:solidFill>
+              <a:srgbClr val="4F4FF5"/>
+            </a:solidFill>
+            <a:prstDash val="solid"/>
+          </a:ln>
+        </p:spPr>
+      </p:sp>
+      <p:sp>
+        <p:nvSpPr>
+          <p:cNvPr id="37" name="Text 35"/>
+          <p:cNvSpPr/>
+          <p:nvPr/>
+        </p:nvSpPr>
+        <p:spPr>
+          <a:xfrm>
+            <a:off x="6309360" y="1920240"/>
+            <a:ext cx="987552" cy="402336"/>
+          </a:xfrm>
+          <a:prstGeom prst="rect">
+            <a:avLst/>
+          </a:prstGeom>
+          <a:noFill/>
+          <a:ln/>
+        </p:spPr>
+        <p:txBody>
+          <a:bodyPr wrap="square" lIns="0" tIns="0" rIns="0" bIns="0" rtlCol="0" anchor="ctr"/>
+          <a:lstStyle/>
+          <a:p>
+            <a:pPr algn="ctr" indent="0" marL="0">
+              <a:buNone/>
+            </a:pPr>
+            <a:r>
+              <a:rPr lang="en-US" sz="900" b="1" dirty="0">
+                <a:solidFill>
+                  <a:srgbClr val="4F4FF5"/>
+                </a:solidFill>
+                <a:latin typeface="Calibri" pitchFamily="34" charset="0"/>
+                <a:ea typeface="Calibri" pitchFamily="34" charset="-122"/>
+                <a:cs typeface="Calibri" pitchFamily="34" charset="-120"/>
+              </a:rPr>
+              <a:t>Agent 2</a:t>
+            </a:r>
+            <a:endParaRPr lang="en-US" sz="900" dirty="0"/>
+          </a:p>
+        </p:txBody>
+      </p:sp>
+      <p:sp>
+        <p:nvSpPr>
+          <p:cNvPr id="38" name="Shape 36"/>
+          <p:cNvSpPr/>
+          <p:nvPr/>
+        </p:nvSpPr>
+        <p:spPr>
+          <a:xfrm>
+            <a:off x="6345936" y="2395728"/>
+            <a:ext cx="420624" cy="237744"/>
+          </a:xfrm>
+          <a:prstGeom prst="roundRect">
+            <a:avLst>
+              <a:gd name="adj" fmla="val 15385"/>
+            </a:avLst>
+          </a:prstGeom>
+          <a:solidFill>
+            <a:srgbClr val="FFF3EE"/>
+          </a:solidFill>
+          <a:ln/>
+        </p:spPr>
+      </p:sp>
+      <p:sp>
+        <p:nvSpPr>
+          <p:cNvPr id="39" name="Text 37"/>
+          <p:cNvSpPr/>
+          <p:nvPr/>
+        </p:nvSpPr>
+        <p:spPr>
+          <a:xfrm>
+            <a:off x="6345936" y="2395728"/>
+            <a:ext cx="420624" cy="237744"/>
+          </a:xfrm>
+          <a:prstGeom prst="rect">
+            <a:avLst/>
+          </a:prstGeom>
+          <a:noFill/>
+          <a:ln/>
+        </p:spPr>
+        <p:txBody>
+          <a:bodyPr wrap="square" lIns="0" tIns="0" rIns="0" bIns="0" rtlCol="0" anchor="ctr"/>
+          <a:lstStyle/>
+          <a:p>
+            <a:pPr algn="ctr" indent="0" marL="0">
+              <a:buNone/>
+            </a:pPr>
+            <a:r>
+              <a:rPr lang="en-US" sz="750" dirty="0">
+                <a:solidFill>
+                  <a:srgbClr val="EE5A29"/>
+                </a:solidFill>
+                <a:latin typeface="Calibri" pitchFamily="34" charset="0"/>
+                <a:ea typeface="Calibri" pitchFamily="34" charset="-122"/>
+                <a:cs typeface="Calibri" pitchFamily="34" charset="-120"/>
+              </a:rPr>
+              <a:t>Tool 1</a:t>
+            </a:r>
+            <a:endParaRPr lang="en-US" sz="750" dirty="0"/>
+          </a:p>
+        </p:txBody>
+      </p:sp>
+      <p:sp>
+        <p:nvSpPr>
+          <p:cNvPr id="40" name="Shape 38"/>
+          <p:cNvSpPr/>
+          <p:nvPr/>
+        </p:nvSpPr>
+        <p:spPr>
+          <a:xfrm>
+            <a:off x="6839712" y="2395728"/>
+            <a:ext cx="420624" cy="237744"/>
+          </a:xfrm>
+          <a:prstGeom prst="roundRect">
+            <a:avLst>
+              <a:gd name="adj" fmla="val 15385"/>
+            </a:avLst>
+          </a:prstGeom>
+          <a:solidFill>
+            <a:srgbClr val="FFF3EE"/>
+          </a:solidFill>
+          <a:ln/>
+        </p:spPr>
+      </p:sp>
+      <p:sp>
+        <p:nvSpPr>
+          <p:cNvPr id="41" name="Text 39"/>
+          <p:cNvSpPr/>
+          <p:nvPr/>
+        </p:nvSpPr>
+        <p:spPr>
+          <a:xfrm>
+            <a:off x="6839712" y="2395728"/>
+            <a:ext cx="420624" cy="237744"/>
+          </a:xfrm>
+          <a:prstGeom prst="rect">
+            <a:avLst/>
+          </a:prstGeom>
+          <a:noFill/>
+          <a:ln/>
+        </p:spPr>
+        <p:txBody>
+          <a:bodyPr wrap="square" lIns="0" tIns="0" rIns="0" bIns="0" rtlCol="0" anchor="ctr"/>
+          <a:lstStyle/>
+          <a:p>
+            <a:pPr algn="ctr" indent="0" marL="0">
+              <a:buNone/>
+            </a:pPr>
+            <a:r>
+              <a:rPr lang="en-US" sz="750" dirty="0">
+                <a:solidFill>
+                  <a:srgbClr val="EE5A29"/>
+                </a:solidFill>
+                <a:latin typeface="Calibri" pitchFamily="34" charset="0"/>
+                <a:ea typeface="Calibri" pitchFamily="34" charset="-122"/>
+                <a:cs typeface="Calibri" pitchFamily="34" charset="-120"/>
+              </a:rPr>
+              <a:t>Tool 2</a:t>
+            </a:r>
+            <a:endParaRPr lang="en-US" sz="750" dirty="0"/>
+          </a:p>
+        </p:txBody>
+      </p:sp>
+      <p:sp>
+        <p:nvSpPr>
+          <p:cNvPr id="42" name="Shape 40"/>
+          <p:cNvSpPr/>
+          <p:nvPr/>
+        </p:nvSpPr>
+        <p:spPr>
+          <a:xfrm>
+            <a:off x="7406640" y="1920240"/>
+            <a:ext cx="987552" cy="402336"/>
+          </a:xfrm>
+          <a:prstGeom prst="roundRect">
+            <a:avLst>
+              <a:gd name="adj" fmla="val 15909"/>
+            </a:avLst>
+          </a:prstGeom>
+          <a:solidFill>
+            <a:srgbClr val="FFFFFF"/>
+          </a:solidFill>
+          <a:ln w="12700">
+            <a:solidFill>
+              <a:srgbClr val="4F4FF5"/>
+            </a:solidFill>
+            <a:prstDash val="solid"/>
+          </a:ln>
+        </p:spPr>
+      </p:sp>
+      <p:sp>
+        <p:nvSpPr>
+          <p:cNvPr id="43" name="Text 41"/>
+          <p:cNvSpPr/>
+          <p:nvPr/>
+        </p:nvSpPr>
+        <p:spPr>
+          <a:xfrm>
+            <a:off x="7406640" y="1920240"/>
+            <a:ext cx="987552" cy="402336"/>
+          </a:xfrm>
+          <a:prstGeom prst="rect">
+            <a:avLst/>
+          </a:prstGeom>
+          <a:noFill/>
+          <a:ln/>
+        </p:spPr>
+        <p:txBody>
+          <a:bodyPr wrap="square" lIns="0" tIns="0" rIns="0" bIns="0" rtlCol="0" anchor="ctr"/>
+          <a:lstStyle/>
+          <a:p>
+            <a:pPr algn="ctr" indent="0" marL="0">
+              <a:buNone/>
+            </a:pPr>
+            <a:r>
+              <a:rPr lang="en-US" sz="900" b="1" dirty="0">
+                <a:solidFill>
+                  <a:srgbClr val="4F4FF5"/>
+                </a:solidFill>
+                <a:latin typeface="Calibri" pitchFamily="34" charset="0"/>
+                <a:ea typeface="Calibri" pitchFamily="34" charset="-122"/>
+                <a:cs typeface="Calibri" pitchFamily="34" charset="-120"/>
+              </a:rPr>
+              <a:t>Agent 3</a:t>
+            </a:r>
+            <a:endParaRPr lang="en-US" sz="900" dirty="0"/>
+          </a:p>
+        </p:txBody>
+      </p:sp>
+      <p:sp>
+        <p:nvSpPr>
+          <p:cNvPr id="44" name="Shape 42"/>
+          <p:cNvSpPr/>
+          <p:nvPr/>
+        </p:nvSpPr>
+        <p:spPr>
+          <a:xfrm>
+            <a:off x="7443216" y="2395728"/>
+            <a:ext cx="420624" cy="237744"/>
+          </a:xfrm>
+          <a:prstGeom prst="roundRect">
+            <a:avLst>
+              <a:gd name="adj" fmla="val 15385"/>
+            </a:avLst>
+          </a:prstGeom>
+          <a:solidFill>
+            <a:srgbClr val="FFF3EE"/>
+          </a:solidFill>
+          <a:ln/>
+        </p:spPr>
+      </p:sp>
+      <p:sp>
+        <p:nvSpPr>
+          <p:cNvPr id="45" name="Text 43"/>
+          <p:cNvSpPr/>
+          <p:nvPr/>
+        </p:nvSpPr>
+        <p:spPr>
+          <a:xfrm>
+            <a:off x="7443216" y="2395728"/>
+            <a:ext cx="420624" cy="237744"/>
+          </a:xfrm>
+          <a:prstGeom prst="rect">
+            <a:avLst/>
+          </a:prstGeom>
+          <a:noFill/>
+          <a:ln/>
+        </p:spPr>
+        <p:txBody>
+          <a:bodyPr wrap="square" lIns="0" tIns="0" rIns="0" bIns="0" rtlCol="0" anchor="ctr"/>
+          <a:lstStyle/>
+          <a:p>
+            <a:pPr algn="ctr" indent="0" marL="0">
+              <a:buNone/>
+            </a:pPr>
+            <a:r>
+              <a:rPr lang="en-US" sz="750" dirty="0">
+                <a:solidFill>
+                  <a:srgbClr val="EE5A29"/>
+                </a:solidFill>
+                <a:latin typeface="Calibri" pitchFamily="34" charset="0"/>
+                <a:ea typeface="Calibri" pitchFamily="34" charset="-122"/>
+                <a:cs typeface="Calibri" pitchFamily="34" charset="-120"/>
+              </a:rPr>
+              <a:t>Tool 1</a:t>
+            </a:r>
+            <a:endParaRPr lang="en-US" sz="750" dirty="0"/>
+          </a:p>
+        </p:txBody>
+      </p:sp>
+      <p:sp>
+        <p:nvSpPr>
+          <p:cNvPr id="46" name="Shape 44"/>
+          <p:cNvSpPr/>
+          <p:nvPr/>
+        </p:nvSpPr>
+        <p:spPr>
+          <a:xfrm>
+            <a:off x="7936992" y="2395728"/>
+            <a:ext cx="420624" cy="237744"/>
+          </a:xfrm>
+          <a:prstGeom prst="roundRect">
+            <a:avLst>
+              <a:gd name="adj" fmla="val 15385"/>
+            </a:avLst>
+          </a:prstGeom>
+          <a:solidFill>
+            <a:srgbClr val="FFF3EE"/>
+          </a:solidFill>
+          <a:ln/>
+        </p:spPr>
+      </p:sp>
+      <p:sp>
+        <p:nvSpPr>
+          <p:cNvPr id="47" name="Text 45"/>
+          <p:cNvSpPr/>
+          <p:nvPr/>
+        </p:nvSpPr>
+        <p:spPr>
+          <a:xfrm>
+            <a:off x="7936992" y="2395728"/>
+            <a:ext cx="420624" cy="237744"/>
+          </a:xfrm>
+          <a:prstGeom prst="rect">
+            <a:avLst/>
+          </a:prstGeom>
+          <a:noFill/>
+          <a:ln/>
+        </p:spPr>
+        <p:txBody>
+          <a:bodyPr wrap="square" lIns="0" tIns="0" rIns="0" bIns="0" rtlCol="0" anchor="ctr"/>
+          <a:lstStyle/>
+          <a:p>
+            <a:pPr algn="ctr" indent="0" marL="0">
+              <a:buNone/>
+            </a:pPr>
+            <a:r>
+              <a:rPr lang="en-US" sz="750" dirty="0">
+                <a:solidFill>
+                  <a:srgbClr val="EE5A29"/>
+                </a:solidFill>
+                <a:latin typeface="Calibri" pitchFamily="34" charset="0"/>
+                <a:ea typeface="Calibri" pitchFamily="34" charset="-122"/>
+                <a:cs typeface="Calibri" pitchFamily="34" charset="-120"/>
+              </a:rPr>
+              <a:t>Tool 2</a:t>
+            </a:r>
+            <a:endParaRPr lang="en-US" sz="750" dirty="0"/>
+          </a:p>
+        </p:txBody>
+      </p:sp>
+      <p:sp>
+        <p:nvSpPr>
+          <p:cNvPr id="48" name="Shape 46"/>
+          <p:cNvSpPr/>
+          <p:nvPr/>
+        </p:nvSpPr>
+        <p:spPr>
+          <a:xfrm>
+            <a:off x="5303520" y="2807208"/>
+            <a:ext cx="786384" cy="310896"/>
+          </a:xfrm>
+          <a:prstGeom prst="roundRect">
+            <a:avLst>
+              <a:gd name="adj" fmla="val 17647"/>
+            </a:avLst>
+          </a:prstGeom>
+          <a:solidFill>
+            <a:srgbClr val="15154A"/>
+          </a:solidFill>
+          <a:ln/>
+        </p:spPr>
+      </p:sp>
+      <p:sp>
+        <p:nvSpPr>
+          <p:cNvPr id="49" name="Text 47"/>
+          <p:cNvSpPr/>
+          <p:nvPr/>
+        </p:nvSpPr>
+        <p:spPr>
+          <a:xfrm>
+            <a:off x="5303520" y="2807208"/>
+            <a:ext cx="786384" cy="310896"/>
+          </a:xfrm>
+          <a:prstGeom prst="rect">
+            <a:avLst/>
+          </a:prstGeom>
+          <a:noFill/>
+          <a:ln/>
+        </p:spPr>
+        <p:txBody>
+          <a:bodyPr wrap="square" lIns="0" tIns="0" rIns="0" bIns="0" rtlCol="0" anchor="ctr"/>
+          <a:lstStyle/>
+          <a:p>
+            <a:pPr algn="ctr" indent="0" marL="0">
+              <a:buNone/>
+            </a:pPr>
+            <a:r>
+              <a:rPr lang="en-US" sz="900" b="1" dirty="0">
+                <a:solidFill>
+                  <a:srgbClr val="FFFFFF"/>
+                </a:solidFill>
+                <a:latin typeface="Calibri" pitchFamily="34" charset="0"/>
+                <a:ea typeface="Calibri" pitchFamily="34" charset="-122"/>
+                <a:cs typeface="Calibri" pitchFamily="34" charset="-120"/>
+              </a:rPr>
+              <a:t>Task 1</a:t>
+            </a:r>
+            <a:endParaRPr lang="en-US" sz="900" dirty="0"/>
+          </a:p>
+        </p:txBody>
+      </p:sp>
+      <p:sp>
+        <p:nvSpPr>
+          <p:cNvPr id="50" name="Text 48"/>
+          <p:cNvSpPr/>
+          <p:nvPr/>
+        </p:nvSpPr>
+        <p:spPr>
+          <a:xfrm>
+            <a:off x="6089904" y="2807208"/>
+            <a:ext cx="256032" cy="310896"/>
+          </a:xfrm>
+          <a:prstGeom prst="rect">
+            <a:avLst/>
+          </a:prstGeom>
+          <a:noFill/>
+          <a:ln/>
+        </p:spPr>
+        <p:txBody>
+          <a:bodyPr wrap="square" lIns="0" tIns="0" rIns="0" bIns="0" rtlCol="0" anchor="ctr"/>
+          <a:lstStyle/>
+          <a:p>
+            <a:pPr algn="ctr" indent="0" marL="0">
+              <a:buNone/>
+            </a:pPr>
+            <a:r>
+              <a:rPr lang="en-US" sz="1000" b="1" dirty="0">
+                <a:solidFill>
+                  <a:srgbClr val="EE5A29"/>
+                </a:solidFill>
+                <a:latin typeface="Arial" pitchFamily="34" charset="0"/>
+                <a:ea typeface="Arial" pitchFamily="34" charset="-122"/>
+                <a:cs typeface="Arial" pitchFamily="34" charset="-120"/>
+              </a:rPr>
+              <a:t>→</a:t>
+            </a:r>
+            <a:endParaRPr lang="en-US" sz="1000" dirty="0"/>
+          </a:p>
+        </p:txBody>
+      </p:sp>
+      <p:sp>
+        <p:nvSpPr>
+          <p:cNvPr id="51" name="Shape 49"/>
+          <p:cNvSpPr/>
+          <p:nvPr/>
+        </p:nvSpPr>
+        <p:spPr>
+          <a:xfrm>
+            <a:off x="6345936" y="2807208"/>
+            <a:ext cx="786384" cy="310896"/>
+          </a:xfrm>
+          <a:prstGeom prst="roundRect">
+            <a:avLst>
+              <a:gd name="adj" fmla="val 17647"/>
+            </a:avLst>
+          </a:prstGeom>
+          <a:solidFill>
+            <a:srgbClr val="15154A"/>
+          </a:solidFill>
+          <a:ln/>
+        </p:spPr>
+      </p:sp>
+      <p:sp>
+        <p:nvSpPr>
+          <p:cNvPr id="52" name="Text 50"/>
+          <p:cNvSpPr/>
+          <p:nvPr/>
+        </p:nvSpPr>
+        <p:spPr>
+          <a:xfrm>
+            <a:off x="6345936" y="2807208"/>
+            <a:ext cx="786384" cy="310896"/>
+          </a:xfrm>
+          <a:prstGeom prst="rect">
+            <a:avLst/>
+          </a:prstGeom>
+          <a:noFill/>
+          <a:ln/>
+        </p:spPr>
+        <p:txBody>
+          <a:bodyPr wrap="square" lIns="0" tIns="0" rIns="0" bIns="0" rtlCol="0" anchor="ctr"/>
+          <a:lstStyle/>
+          <a:p>
+            <a:pPr algn="ctr" indent="0" marL="0">
+              <a:buNone/>
+            </a:pPr>
+            <a:r>
+              <a:rPr lang="en-US" sz="900" b="1" dirty="0">
+                <a:solidFill>
+                  <a:srgbClr val="FFFFFF"/>
+                </a:solidFill>
+                <a:latin typeface="Calibri" pitchFamily="34" charset="0"/>
+                <a:ea typeface="Calibri" pitchFamily="34" charset="-122"/>
+                <a:cs typeface="Calibri" pitchFamily="34" charset="-120"/>
+              </a:rPr>
+              <a:t>Task 2</a:t>
+            </a:r>
+            <a:endParaRPr lang="en-US" sz="900" dirty="0"/>
+          </a:p>
+        </p:txBody>
+      </p:sp>
+      <p:sp>
+        <p:nvSpPr>
+          <p:cNvPr id="53" name="Text 51"/>
+          <p:cNvSpPr/>
+          <p:nvPr/>
+        </p:nvSpPr>
+        <p:spPr>
+          <a:xfrm>
+            <a:off x="7132320" y="2807208"/>
+            <a:ext cx="256032" cy="310896"/>
+          </a:xfrm>
+          <a:prstGeom prst="rect">
+            <a:avLst/>
+          </a:prstGeom>
+          <a:noFill/>
+          <a:ln/>
+        </p:spPr>
+        <p:txBody>
+          <a:bodyPr wrap="square" lIns="0" tIns="0" rIns="0" bIns="0" rtlCol="0" anchor="ctr"/>
+          <a:lstStyle/>
+          <a:p>
+            <a:pPr algn="ctr" indent="0" marL="0">
+              <a:buNone/>
+            </a:pPr>
+            <a:r>
+              <a:rPr lang="en-US" sz="1000" b="1" dirty="0">
+                <a:solidFill>
+                  <a:srgbClr val="EE5A29"/>
+                </a:solidFill>
+                <a:latin typeface="Arial" pitchFamily="34" charset="0"/>
+                <a:ea typeface="Arial" pitchFamily="34" charset="-122"/>
+                <a:cs typeface="Arial" pitchFamily="34" charset="-120"/>
+              </a:rPr>
+              <a:t>→</a:t>
+            </a:r>
+            <a:endParaRPr lang="en-US" sz="1000" dirty="0"/>
+          </a:p>
+        </p:txBody>
+      </p:sp>
+      <p:sp>
+        <p:nvSpPr>
+          <p:cNvPr id="54" name="Shape 52"/>
+          <p:cNvSpPr/>
+          <p:nvPr/>
+        </p:nvSpPr>
+        <p:spPr>
+          <a:xfrm>
+            <a:off x="7388352" y="2807208"/>
+            <a:ext cx="786384" cy="310896"/>
+          </a:xfrm>
+          <a:prstGeom prst="roundRect">
+            <a:avLst>
+              <a:gd name="adj" fmla="val 17647"/>
+            </a:avLst>
+          </a:prstGeom>
+          <a:solidFill>
+            <a:srgbClr val="15154A"/>
+          </a:solidFill>
+          <a:ln/>
+        </p:spPr>
+      </p:sp>
+      <p:sp>
+        <p:nvSpPr>
+          <p:cNvPr id="55" name="Text 53"/>
+          <p:cNvSpPr/>
+          <p:nvPr/>
+        </p:nvSpPr>
+        <p:spPr>
+          <a:xfrm>
+            <a:off x="7388352" y="2807208"/>
+            <a:ext cx="786384" cy="310896"/>
+          </a:xfrm>
+          <a:prstGeom prst="rect">
+            <a:avLst/>
+          </a:prstGeom>
+          <a:noFill/>
+          <a:ln/>
+        </p:spPr>
+        <p:txBody>
+          <a:bodyPr wrap="square" lIns="0" tIns="0" rIns="0" bIns="0" rtlCol="0" anchor="ctr"/>
+          <a:lstStyle/>
+          <a:p>
+            <a:pPr algn="ctr" indent="0" marL="0">
+              <a:buNone/>
+            </a:pPr>
+            <a:r>
+              <a:rPr lang="en-US" sz="900" b="1" dirty="0">
+                <a:solidFill>
+                  <a:srgbClr val="FFFFFF"/>
+                </a:solidFill>
+                <a:latin typeface="Calibri" pitchFamily="34" charset="0"/>
+                <a:ea typeface="Calibri" pitchFamily="34" charset="-122"/>
+                <a:cs typeface="Calibri" pitchFamily="34" charset="-120"/>
+              </a:rPr>
+              <a:t>Task 3</a:t>
+            </a:r>
+            <a:endParaRPr lang="en-US" sz="900" dirty="0"/>
+          </a:p>
+        </p:txBody>
+      </p:sp>
+      <p:sp>
+        <p:nvSpPr>
+          <p:cNvPr id="56" name="Shape 54"/>
+          <p:cNvSpPr/>
+          <p:nvPr/>
+        </p:nvSpPr>
+        <p:spPr>
+          <a:xfrm>
+            <a:off x="5230368" y="3310128"/>
+            <a:ext cx="3163824" cy="329184"/>
+          </a:xfrm>
+          <a:prstGeom prst="roundRect">
+            <a:avLst>
+              <a:gd name="adj" fmla="val 19444"/>
+            </a:avLst>
+          </a:prstGeom>
+          <a:solidFill>
+            <a:srgbClr val="23236B">
+              <a:alpha val="70000"/>
+            </a:srgbClr>
+          </a:solidFill>
+          <a:ln/>
+        </p:spPr>
+      </p:sp>
+      <p:sp>
+        <p:nvSpPr>
+          <p:cNvPr id="57" name="Text 55"/>
+          <p:cNvSpPr/>
+          <p:nvPr/>
+        </p:nvSpPr>
+        <p:spPr>
+          <a:xfrm>
+            <a:off x="5230368" y="3310128"/>
+            <a:ext cx="3163824" cy="329184"/>
+          </a:xfrm>
+          <a:prstGeom prst="rect">
+            <a:avLst/>
+          </a:prstGeom>
+          <a:noFill/>
+          <a:ln/>
+        </p:spPr>
+        <p:txBody>
+          <a:bodyPr wrap="square" lIns="0" tIns="0" rIns="0" bIns="0" rtlCol="0" anchor="ctr"/>
+          <a:lstStyle/>
+          <a:p>
+            <a:pPr algn="ctr" indent="0" marL="0">
+              <a:buNone/>
+            </a:pPr>
+            <a:r>
+              <a:rPr lang="en-US" sz="1000" b="1" dirty="0">
+                <a:solidFill>
+                  <a:srgbClr val="FFFFFF"/>
+                </a:solidFill>
+                <a:latin typeface="Calibri" pitchFamily="34" charset="0"/>
+                <a:ea typeface="Calibri" pitchFamily="34" charset="-122"/>
+                <a:cs typeface="Calibri" pitchFamily="34" charset="-120"/>
+              </a:rPr>
+              <a:t>Test  |  Deploy  |  Observe</a:t>
+            </a:r>
+            <a:endParaRPr lang="en-US" sz="1000" dirty="0"/>
+          </a:p>
+        </p:txBody>
+      </p:sp>
+      <p:sp>
+        <p:nvSpPr>
+          <p:cNvPr id="58" name="Shape 56"/>
+          <p:cNvSpPr/>
+          <p:nvPr/>
+        </p:nvSpPr>
+        <p:spPr>
+          <a:xfrm>
+            <a:off x="5230368" y="3785616"/>
+            <a:ext cx="1490472" cy="347472"/>
+          </a:xfrm>
+          <a:prstGeom prst="roundRect">
+            <a:avLst>
+              <a:gd name="adj" fmla="val 18421"/>
+            </a:avLst>
+          </a:prstGeom>
+          <a:solidFill>
+            <a:srgbClr val="E9E9FE"/>
+          </a:solidFill>
+          <a:ln/>
+        </p:spPr>
+      </p:sp>
+      <p:sp>
+        <p:nvSpPr>
+          <p:cNvPr id="59" name="Text 57"/>
+          <p:cNvSpPr/>
+          <p:nvPr/>
+        </p:nvSpPr>
+        <p:spPr>
+          <a:xfrm>
+            <a:off x="5230368" y="3785616"/>
+            <a:ext cx="1490472" cy="347472"/>
+          </a:xfrm>
+          <a:prstGeom prst="rect">
+            <a:avLst/>
+          </a:prstGeom>
+          <a:noFill/>
+          <a:ln/>
+        </p:spPr>
+        <p:txBody>
+          <a:bodyPr wrap="square" lIns="0" tIns="0" rIns="0" bIns="0" rtlCol="0" anchor="ctr"/>
+          <a:lstStyle/>
+          <a:p>
+            <a:pPr algn="ctr" indent="0" marL="0">
+              <a:buNone/>
+            </a:pPr>
+            <a:r>
+              <a:rPr lang="en-US" sz="800" b="1" dirty="0">
+                <a:solidFill>
+                  <a:srgbClr val="4F4FF5"/>
+                </a:solidFill>
+                <a:latin typeface="Calibri" pitchFamily="34" charset="0"/>
+                <a:ea typeface="Calibri" pitchFamily="34" charset="-122"/>
+                <a:cs typeface="Calibri" pitchFamily="34" charset="-120"/>
+              </a:rPr>
+              <a:t>Private Cloud GA (PVC 1.5.5-SP3)</a:t>
+            </a:r>
+            <a:endParaRPr lang="en-US" sz="800" dirty="0"/>
+          </a:p>
+        </p:txBody>
+      </p:sp>
+      <p:sp>
+        <p:nvSpPr>
+          <p:cNvPr id="60" name="Shape 58"/>
+          <p:cNvSpPr/>
+          <p:nvPr/>
+        </p:nvSpPr>
+        <p:spPr>
+          <a:xfrm>
+            <a:off x="6885432" y="3785616"/>
+            <a:ext cx="1490472" cy="347472"/>
+          </a:xfrm>
+          <a:prstGeom prst="roundRect">
+            <a:avLst>
+              <a:gd name="adj" fmla="val 18421"/>
+            </a:avLst>
+          </a:prstGeom>
+          <a:solidFill>
+            <a:srgbClr val="FFF3EE"/>
+          </a:solidFill>
+          <a:ln/>
+        </p:spPr>
+      </p:sp>
+      <p:sp>
+        <p:nvSpPr>
+          <p:cNvPr id="61" name="Text 59"/>
+          <p:cNvSpPr/>
+          <p:nvPr/>
+        </p:nvSpPr>
+        <p:spPr>
+          <a:xfrm>
+            <a:off x="6885432" y="3785616"/>
+            <a:ext cx="1490472" cy="347472"/>
+          </a:xfrm>
+          <a:prstGeom prst="rect">
+            <a:avLst/>
+          </a:prstGeom>
+          <a:noFill/>
+          <a:ln/>
+        </p:spPr>
+        <p:txBody>
+          <a:bodyPr wrap="square" lIns="0" tIns="0" rIns="0" bIns="0" rtlCol="0" anchor="ctr"/>
+          <a:lstStyle/>
+          <a:p>
+            <a:pPr algn="ctr" indent="0" marL="0">
+              <a:buNone/>
+            </a:pPr>
+            <a:r>
+              <a:rPr lang="en-US" sz="800" b="1" dirty="0">
+                <a:solidFill>
+                  <a:srgbClr val="EE5A29"/>
+                </a:solidFill>
+                <a:latin typeface="Calibri" pitchFamily="34" charset="0"/>
+                <a:ea typeface="Calibri" pitchFamily="34" charset="-122"/>
+                <a:cs typeface="Calibri" pitchFamily="34" charset="-120"/>
+              </a:rPr>
+              <a:t>Public Cloud (AWS, Azure — TP)</a:t>
+            </a:r>
+            <a:endParaRPr lang="en-US" sz="800" dirty="0"/>
+          </a:p>
+        </p:txBody>
+      </p:sp>
+      <p:sp>
+        <p:nvSpPr>
+          <p:cNvPr id="62" name="Text 60"/>
+          <p:cNvSpPr/>
+          <p:nvPr/>
+        </p:nvSpPr>
+        <p:spPr>
+          <a:xfrm>
+            <a:off x="566928" y="4759452"/>
+            <a:ext cx="6858000" cy="256032"/>
+          </a:xfrm>
+          <a:prstGeom prst="rect">
+            <a:avLst/>
+          </a:prstGeom>
+          <a:noFill/>
+          <a:ln/>
+        </p:spPr>
+        <p:txBody>
+          <a:bodyPr wrap="square" lIns="0" tIns="0" rIns="0" bIns="0" rtlCol="0" anchor="ctr"/>
+          <a:lstStyle/>
+          <a:p>
+            <a:pPr indent="0" marL="0">
+              <a:buNone/>
+            </a:pPr>
+            <a:r>
+              <a:rPr lang="en-US" sz="800" dirty="0">
+                <a:solidFill>
+                  <a:srgbClr val="9A9AB4"/>
+                </a:solidFill>
+                <a:latin typeface="Calibri" pitchFamily="34" charset="0"/>
+                <a:ea typeface="Calibri" pitchFamily="34" charset="-122"/>
+                <a:cs typeface="Calibri" pitchFamily="34" charset="-120"/>
+              </a:rPr>
+              <a:t>©2026 Cloudera, Inc. All Rights Reserved. · Agent Studio v3.0.0-b28 (PVC) / v2.3.0-b40 (Public Cloud).</a:t>
+            </a:r>
+            <a:endParaRPr lang="en-US" sz="800" dirty="0"/>
+          </a:p>
+        </p:txBody>
+      </p:sp>
+      <p:sp>
+        <p:nvSpPr>
+          <p:cNvPr id="63" name="Text 61"/>
+          <p:cNvSpPr/>
+          <p:nvPr/>
+        </p:nvSpPr>
+        <p:spPr>
+          <a:xfrm>
+            <a:off x="7955280" y="4759452"/>
+            <a:ext cx="640080" cy="256032"/>
+          </a:xfrm>
+          <a:prstGeom prst="rect">
+            <a:avLst/>
+          </a:prstGeom>
+          <a:noFill/>
+          <a:ln/>
+        </p:spPr>
+        <p:txBody>
+          <a:bodyPr wrap="square" lIns="0" tIns="0" rIns="0" bIns="0" rtlCol="0" anchor="ctr"/>
+          <a:lstStyle/>
+          <a:p>
+            <a:pPr algn="r" indent="0" marL="0">
+              <a:buNone/>
+            </a:pPr>
+            <a:r>
+              <a:rPr lang="en-US" sz="800" dirty="0">
+                <a:solidFill>
+                  <a:srgbClr val="9A9AB4"/>
+                </a:solidFill>
+                <a:latin typeface="Calibri" pitchFamily="34" charset="0"/>
+                <a:ea typeface="Calibri" pitchFamily="34" charset="-122"/>
+                <a:cs typeface="Calibri" pitchFamily="34" charset="-120"/>
+              </a:rPr>
+              <a:t>21 / 22</a:t>
+            </a:r>
+            <a:endParaRPr lang="en-US" sz="800" dirty="0"/>
+          </a:p>
+        </p:txBody>
+      </p:sp>
+    </p:spTree>
+  </p:cSld>
+  <p:clrMapOvr>
+    <a:masterClrMapping/>
+  </p:clrMapOvr>
+</p:sld>
+</file>
+
+<file path=ppt/slides/slide22.xml><?xml version="1.0" encoding="utf-8"?>
+<p:sld xmlns:a="http://schemas.openxmlformats.org/drawingml/2006/main" xmlns:r="http://schemas.openxmlformats.org/officeDocument/2006/relationships" xmlns:p="http://schemas.openxmlformats.org/presentationml/2006/main">
+  <p:cSld name="Slide 22">
+    <p:bg>
+      <p:bgPr>
+        <a:solidFill>
+          <a:srgbClr val="F6F6FB"/>
+        </a:solidFill>
+      </p:bgPr>
+    </p:bg>
+    <p:spTree>
+      <p:nvGrpSpPr>
+        <p:cNvPr id="1" name=""/>
+        <p:cNvGrpSpPr/>
+        <p:nvPr/>
+      </p:nvGrpSpPr>
+      <p:grpSpPr>
+        <a:xfrm>
+          <a:off x="0" y="0"/>
+          <a:ext cx="0" cy="0"/>
+          <a:chOff x="0" y="0"/>
+          <a:chExt cx="0" cy="0"/>
+        </a:xfrm>
+      </p:grpSpPr>
+      <p:sp>
+        <p:nvSpPr>
+          <p:cNvPr id="2" name="Text 0"/>
+          <p:cNvSpPr/>
+          <p:nvPr/>
+        </p:nvSpPr>
+        <p:spPr>
+          <a:xfrm>
+            <a:off x="6858000" y="292608"/>
+            <a:ext cx="1737360" cy="292608"/>
+          </a:xfrm>
+          <a:prstGeom prst="rect">
+            <a:avLst/>
+          </a:prstGeom>
+          <a:noFill/>
+          <a:ln/>
+        </p:spPr>
+        <p:txBody>
+          <a:bodyPr wrap="square" lIns="0" tIns="0" rIns="0" bIns="0" rtlCol="0" anchor="ctr"/>
+          <a:lstStyle/>
+          <a:p>
+            <a:pPr algn="r" indent="0" marL="0">
+              <a:buNone/>
+            </a:pPr>
+            <a:r>
+              <a:rPr lang="en-US" sz="1300" b="1" spc="300" kern="0" dirty="0">
+                <a:solidFill>
+                  <a:srgbClr val="EE5A29"/>
+                </a:solidFill>
+                <a:latin typeface="Arial" pitchFamily="34" charset="0"/>
+                <a:ea typeface="Arial" pitchFamily="34" charset="-122"/>
+                <a:cs typeface="Arial" pitchFamily="34" charset="-120"/>
+              </a:rPr>
+              <a:t>CLOUD</a:t>
+            </a:r>
+            <a:pPr algn="r" indent="0" marL="0">
+              <a:buNone/>
+            </a:pPr>
+            <a:r>
+              <a:rPr lang="en-US" sz="1300" b="1" spc="300" kern="0" dirty="0">
+                <a:solidFill>
+                  <a:srgbClr val="EE5A29"/>
+                </a:solidFill>
+                <a:latin typeface="Arial" pitchFamily="34" charset="0"/>
+                <a:ea typeface="Arial" pitchFamily="34" charset="-122"/>
+                <a:cs typeface="Arial" pitchFamily="34" charset="-120"/>
+              </a:rPr>
+              <a:t>E</a:t>
+            </a:r>
+            <a:pPr algn="r" indent="0" marL="0">
+              <a:buNone/>
+            </a:pPr>
+            <a:r>
+              <a:rPr lang="en-US" sz="1300" b="1" spc="300" kern="0" dirty="0">
+                <a:solidFill>
+                  <a:srgbClr val="EE5A29"/>
+                </a:solidFill>
+                <a:latin typeface="Arial" pitchFamily="34" charset="0"/>
+                <a:ea typeface="Arial" pitchFamily="34" charset="-122"/>
+                <a:cs typeface="Arial" pitchFamily="34" charset="-120"/>
+              </a:rPr>
+              <a:t>RA</a:t>
+            </a:r>
+            <a:endParaRPr lang="en-US" sz="1300" dirty="0"/>
+          </a:p>
+        </p:txBody>
+      </p:sp>
+      <p:sp>
+        <p:nvSpPr>
+          <p:cNvPr id="3" name="Shape 1"/>
+          <p:cNvSpPr/>
+          <p:nvPr/>
+        </p:nvSpPr>
+        <p:spPr>
+          <a:xfrm>
+            <a:off x="566928" y="420624"/>
+            <a:ext cx="274320" cy="41148"/>
+          </a:xfrm>
+          <a:prstGeom prst="rect">
+            <a:avLst/>
+          </a:prstGeom>
+          <a:solidFill>
+            <a:srgbClr val="EE5A29"/>
+          </a:solidFill>
+          <a:ln/>
+        </p:spPr>
+      </p:sp>
+      <p:sp>
+        <p:nvSpPr>
+          <p:cNvPr id="4" name="Text 2"/>
+          <p:cNvSpPr/>
+          <p:nvPr/>
+        </p:nvSpPr>
+        <p:spPr>
+          <a:xfrm>
+            <a:off x="932688" y="274320"/>
+            <a:ext cx="6400800" cy="274320"/>
+          </a:xfrm>
+          <a:prstGeom prst="rect">
+            <a:avLst/>
+          </a:prstGeom>
+          <a:noFill/>
+          <a:ln/>
+        </p:spPr>
+        <p:txBody>
+          <a:bodyPr wrap="square" lIns="0" tIns="0" rIns="0" bIns="0" rtlCol="0" anchor="ctr"/>
+          <a:lstStyle/>
+          <a:p>
+            <a:pPr indent="0" marL="0">
+              <a:buNone/>
+            </a:pPr>
+            <a:r>
+              <a:rPr lang="en-US" sz="1050" b="1" spc="200" kern="0" dirty="0">
+                <a:solidFill>
+                  <a:srgbClr val="EE5A29"/>
+                </a:solidFill>
+                <a:latin typeface="Calibri" pitchFamily="34" charset="0"/>
+                <a:ea typeface="Calibri" pitchFamily="34" charset="-122"/>
+                <a:cs typeface="Calibri" pitchFamily="34" charset="-120"/>
+              </a:rPr>
+              <a:t>FROM THEORY TO PRODUCT</a:t>
+            </a:r>
+            <a:endParaRPr lang="en-US" sz="1050" dirty="0"/>
+          </a:p>
+        </p:txBody>
+      </p:sp>
+      <p:sp>
+        <p:nvSpPr>
+          <p:cNvPr id="5" name="Text 3"/>
+          <p:cNvSpPr/>
+          <p:nvPr/>
+        </p:nvSpPr>
+        <p:spPr>
+          <a:xfrm>
+            <a:off x="566928" y="566928"/>
+            <a:ext cx="8046720" cy="658368"/>
+          </a:xfrm>
+          <a:prstGeom prst="rect">
+            <a:avLst/>
+          </a:prstGeom>
+          <a:noFill/>
+          <a:ln/>
+        </p:spPr>
+        <p:txBody>
+          <a:bodyPr wrap="square" lIns="0" tIns="0" rIns="0" bIns="0" rtlCol="0" anchor="ctr"/>
+          <a:lstStyle/>
+          <a:p>
+            <a:pPr indent="0" marL="0">
+              <a:buNone/>
+            </a:pPr>
+            <a:r>
+              <a:rPr lang="en-US" sz="2700" b="1" dirty="0">
+                <a:solidFill>
+                  <a:srgbClr val="15154A"/>
+                </a:solidFill>
+                <a:latin typeface="Arial" pitchFamily="34" charset="0"/>
+                <a:ea typeface="Arial" pitchFamily="34" charset="-122"/>
+                <a:cs typeface="Arial" pitchFamily="34" charset="-120"/>
+              </a:rPr>
+              <a:t>Agent Studio — The Harness Pillars in Practice</a:t>
+            </a:r>
+            <a:endParaRPr lang="en-US" sz="2700" dirty="0"/>
+          </a:p>
+        </p:txBody>
+      </p:sp>
+      <p:graphicFrame>
+        <p:nvGraphicFramePr>
+          <p:cNvPr id="23" name="Table 0"/>
+          <p:cNvGraphicFramePr>
+            <a:graphicFrameLocks noGrp="1"/>
+          </p:cNvGraphicFramePr>
+          <p:nvPr>
+            <p:extLst>
+              <p:ext uri="{D42A27DB-BD31-4B8C-83A1-F6EECF244321}">
+                <p14:modId xmlns:p14="http://schemas.microsoft.com/office/powerpoint/2010/main" val="1579011935"/>
+              </p:ext>
+            </p:extLst>
+          </p:nvPr>
+        </p:nvGraphicFramePr>
+        <p:xfrm>
+          <a:off x="566928" y="1389888"/>
+          <a:ext cx="8010144" cy="914400"/>
+        </p:xfrm>
+        <a:graphic>
+          <a:graphicData uri="http://schemas.openxmlformats.org/drawingml/2006/table">
+            <a:tbl>
+              <a:tblPr/>
+              <a:tblGrid>
+                <a:gridCol w="2194560"/>
+                <a:gridCol w="2377440"/>
+                <a:gridCol w="3438144"/>
+              </a:tblGrid>
+              <a:tr h="292608">
+                <a:tc>
+                  <a:txBody>
+                    <a:bodyPr/>
+                    <a:lstStyle/>
+                    <a:p>
+                      <a:pPr indent="0" marL="0">
+                        <a:buNone/>
+                      </a:pPr>
+                      <a:r>
+                        <a:rPr lang="en-US" sz="1000" b="1" dirty="0">
+                          <a:solidFill>
+                            <a:srgbClr val="FFFFFF"/>
+                          </a:solidFill>
+                          <a:latin typeface="Arial" pitchFamily="34" charset="0"/>
+                          <a:ea typeface="Arial" pitchFamily="34" charset="-122"/>
+                          <a:cs typeface="Arial" pitchFamily="34" charset="-120"/>
+                        </a:rPr>
+                        <a:t>Harness Pillar</a:t>
+                      </a:r>
+                      <a:endParaRPr lang="en-US" sz="1000" dirty="0">
+                        <a:latin typeface="Arial" charset="0"/>
+                        <a:ea typeface="Arial" charset="0"/>
+                        <a:cs typeface="Arial" charset="0"/>
+                      </a:endParaRPr>
+                    </a:p>
+                  </a:txBody>
+                  <a:tcPr marL="50800" marR="50800" marT="50800" marB="50800" anchor="ctr">
+                    <a:lnL w="6350" cap="flat" cmpd="sng" algn="ctr">
+                      <a:solidFill>
+                        <a:srgbClr val="E2E2EC"/>
+                      </a:solidFill>
+                      <a:prstDash val="solid"/>
+                      <a:round/>
+                      <a:headEnd type="none" w="med" len="med"/>
+                      <a:tailEnd type="none" w="med" len="med"/>
+                    </a:lnL>
+                    <a:lnR w="6350" cap="flat" cmpd="sng" algn="ctr">
+                      <a:solidFill>
+                        <a:srgbClr val="E2E2EC"/>
+                      </a:solidFill>
+                      <a:prstDash val="solid"/>
+                      <a:round/>
+                      <a:headEnd type="none" w="med" len="med"/>
+                      <a:tailEnd type="none" w="med" len="med"/>
+                    </a:lnR>
+                    <a:lnT w="6350" cap="flat" cmpd="sng" algn="ctr">
+                      <a:solidFill>
+                        <a:srgbClr val="E2E2EC"/>
+                      </a:solidFill>
+                      <a:prstDash val="solid"/>
+                      <a:round/>
+                      <a:headEnd type="none" w="med" len="med"/>
+                      <a:tailEnd type="none" w="med" len="med"/>
+                    </a:lnT>
+                    <a:lnB w="6350" cap="flat" cmpd="sng" algn="ctr">
+                      <a:solidFill>
+                        <a:srgbClr val="E2E2EC"/>
+                      </a:solidFill>
+                      <a:prstDash val="solid"/>
+                      <a:round/>
+                      <a:headEnd type="none" w="med" len="med"/>
+                      <a:tailEnd type="none" w="med" len="med"/>
+                    </a:lnB>
+                    <a:solidFill>
+                      <a:srgbClr val="15154A"/>
+                    </a:solidFill>
+                  </a:tcPr>
+                </a:tc>
+                <a:tc>
+                  <a:txBody>
+                    <a:bodyPr/>
+                    <a:lstStyle/>
+                    <a:p>
+                      <a:pPr indent="0" marL="0">
+                        <a:buNone/>
+                      </a:pPr>
+                      <a:r>
+                        <a:rPr lang="en-US" sz="1000" b="1" dirty="0">
+                          <a:solidFill>
+                            <a:srgbClr val="FFFFFF"/>
+                          </a:solidFill>
+                          <a:latin typeface="Arial" pitchFamily="34" charset="0"/>
+                          <a:ea typeface="Arial" pitchFamily="34" charset="-122"/>
+                          <a:cs typeface="Arial" pitchFamily="34" charset="-120"/>
+                        </a:rPr>
+                        <a:t>What it means</a:t>
+                      </a:r>
+                      <a:endParaRPr lang="en-US" sz="1000" dirty="0">
+                        <a:latin typeface="Arial" charset="0"/>
+                        <a:ea typeface="Arial" charset="0"/>
+                        <a:cs typeface="Arial" charset="0"/>
+                      </a:endParaRPr>
+                    </a:p>
+                  </a:txBody>
+                  <a:tcPr marL="50800" marR="50800" marT="50800" marB="50800" anchor="ctr">
+                    <a:lnL w="6350" cap="flat" cmpd="sng" algn="ctr">
+                      <a:solidFill>
+                        <a:srgbClr val="E2E2EC"/>
+                      </a:solidFill>
+                      <a:prstDash val="solid"/>
+                      <a:round/>
+                      <a:headEnd type="none" w="med" len="med"/>
+                      <a:tailEnd type="none" w="med" len="med"/>
+                    </a:lnL>
+                    <a:lnR w="6350" cap="flat" cmpd="sng" algn="ctr">
+                      <a:solidFill>
+                        <a:srgbClr val="E2E2EC"/>
+                      </a:solidFill>
+                      <a:prstDash val="solid"/>
+                      <a:round/>
+                      <a:headEnd type="none" w="med" len="med"/>
+                      <a:tailEnd type="none" w="med" len="med"/>
+                    </a:lnR>
+                    <a:lnT w="6350" cap="flat" cmpd="sng" algn="ctr">
+                      <a:solidFill>
+                        <a:srgbClr val="E2E2EC"/>
+                      </a:solidFill>
+                      <a:prstDash val="solid"/>
+                      <a:round/>
+                      <a:headEnd type="none" w="med" len="med"/>
+                      <a:tailEnd type="none" w="med" len="med"/>
+                    </a:lnT>
+                    <a:lnB w="6350" cap="flat" cmpd="sng" algn="ctr">
+                      <a:solidFill>
+                        <a:srgbClr val="E2E2EC"/>
+                      </a:solidFill>
+                      <a:prstDash val="solid"/>
+                      <a:round/>
+                      <a:headEnd type="none" w="med" len="med"/>
+                      <a:tailEnd type="none" w="med" len="med"/>
+                    </a:lnB>
+                    <a:solidFill>
+                      <a:srgbClr val="15154A"/>
+                    </a:solidFill>
+                  </a:tcPr>
+                </a:tc>
+                <a:tc>
+                  <a:txBody>
+                    <a:bodyPr/>
+                    <a:lstStyle/>
+                    <a:p>
+                      <a:pPr indent="0" marL="0">
+                        <a:buNone/>
+                      </a:pPr>
+                      <a:r>
+                        <a:rPr lang="en-US" sz="1000" b="1" dirty="0">
+                          <a:solidFill>
+                            <a:srgbClr val="FFFFFF"/>
+                          </a:solidFill>
+                          <a:latin typeface="Arial" pitchFamily="34" charset="0"/>
+                          <a:ea typeface="Arial" pitchFamily="34" charset="-122"/>
+                          <a:cs typeface="Arial" pitchFamily="34" charset="-120"/>
+                        </a:rPr>
+                        <a:t>Agent Studio implementation</a:t>
+                      </a:r>
+                      <a:endParaRPr lang="en-US" sz="1000" dirty="0">
+                        <a:latin typeface="Arial" charset="0"/>
+                        <a:ea typeface="Arial" charset="0"/>
+                        <a:cs typeface="Arial" charset="0"/>
+                      </a:endParaRPr>
+                    </a:p>
+                  </a:txBody>
+                  <a:tcPr marL="50800" marR="50800" marT="50800" marB="50800" anchor="ctr">
+                    <a:lnL w="6350" cap="flat" cmpd="sng" algn="ctr">
+                      <a:solidFill>
+                        <a:srgbClr val="E2E2EC"/>
+                      </a:solidFill>
+                      <a:prstDash val="solid"/>
+                      <a:round/>
+                      <a:headEnd type="none" w="med" len="med"/>
+                      <a:tailEnd type="none" w="med" len="med"/>
+                    </a:lnL>
+                    <a:lnR w="6350" cap="flat" cmpd="sng" algn="ctr">
+                      <a:solidFill>
+                        <a:srgbClr val="E2E2EC"/>
+                      </a:solidFill>
+                      <a:prstDash val="solid"/>
+                      <a:round/>
+                      <a:headEnd type="none" w="med" len="med"/>
+                      <a:tailEnd type="none" w="med" len="med"/>
+                    </a:lnR>
+                    <a:lnT w="6350" cap="flat" cmpd="sng" algn="ctr">
+                      <a:solidFill>
+                        <a:srgbClr val="E2E2EC"/>
+                      </a:solidFill>
+                      <a:prstDash val="solid"/>
+                      <a:round/>
+                      <a:headEnd type="none" w="med" len="med"/>
+                      <a:tailEnd type="none" w="med" len="med"/>
+                    </a:lnT>
+                    <a:lnB w="6350" cap="flat" cmpd="sng" algn="ctr">
+                      <a:solidFill>
+                        <a:srgbClr val="E2E2EC"/>
+                      </a:solidFill>
+                      <a:prstDash val="solid"/>
+                      <a:round/>
+                      <a:headEnd type="none" w="med" len="med"/>
+                      <a:tailEnd type="none" w="med" len="med"/>
+                    </a:lnB>
+                    <a:solidFill>
+                      <a:srgbClr val="15154A"/>
+                    </a:solidFill>
+                  </a:tcPr>
+                </a:tc>
+              </a:tr>
+              <a:tr h="731520">
+                <a:tc>
+                  <a:txBody>
+                    <a:bodyPr/>
+                    <a:lstStyle/>
+                    <a:p>
+                      <a:pPr indent="0" marL="0">
+                        <a:buNone/>
+                      </a:pPr>
+                      <a:r>
+                        <a:rPr lang="en-US" sz="900" b="1" dirty="0">
+                          <a:solidFill>
+                            <a:srgbClr val="4F4FF5"/>
+                          </a:solidFill>
+                          <a:latin typeface="Calibri" pitchFamily="34" charset="0"/>
+                          <a:ea typeface="Calibri" pitchFamily="34" charset="-122"/>
+                          <a:cs typeface="Calibri" pitchFamily="34" charset="-120"/>
+                        </a:rPr>
+                        <a:t>Progressive Context Architecture</a:t>
+                      </a:r>
+                      <a:endParaRPr lang="en-US" sz="900" dirty="0">
+                        <a:latin typeface="Calibri" charset="0"/>
+                        <a:ea typeface="Calibri" charset="0"/>
+                        <a:cs typeface="Calibri" charset="0"/>
+                      </a:endParaRPr>
+                    </a:p>
+                  </a:txBody>
+                  <a:tcPr marL="50800" marR="50800" marT="50800" marB="50800" anchor="ctr">
+                    <a:lnL w="6350" cap="flat" cmpd="sng" algn="ctr">
+                      <a:solidFill>
+                        <a:srgbClr val="E2E2EC"/>
+                      </a:solidFill>
+                      <a:prstDash val="solid"/>
+                      <a:round/>
+                      <a:headEnd type="none" w="med" len="med"/>
+                      <a:tailEnd type="none" w="med" len="med"/>
+                    </a:lnL>
+                    <a:lnR w="6350" cap="flat" cmpd="sng" algn="ctr">
+                      <a:solidFill>
+                        <a:srgbClr val="E2E2EC"/>
+                      </a:solidFill>
+                      <a:prstDash val="solid"/>
+                      <a:round/>
+                      <a:headEnd type="none" w="med" len="med"/>
+                      <a:tailEnd type="none" w="med" len="med"/>
+                    </a:lnR>
+                    <a:lnT w="6350" cap="flat" cmpd="sng" algn="ctr">
+                      <a:solidFill>
+                        <a:srgbClr val="E2E2EC"/>
+                      </a:solidFill>
+                      <a:prstDash val="solid"/>
+                      <a:round/>
+                      <a:headEnd type="none" w="med" len="med"/>
+                      <a:tailEnd type="none" w="med" len="med"/>
+                    </a:lnT>
+                    <a:lnB w="6350" cap="flat" cmpd="sng" algn="ctr">
+                      <a:solidFill>
+                        <a:srgbClr val="E2E2EC"/>
+                      </a:solidFill>
+                      <a:prstDash val="solid"/>
+                      <a:round/>
+                      <a:headEnd type="none" w="med" len="med"/>
+                      <a:tailEnd type="none" w="med" len="med"/>
+                    </a:lnB>
+                    <a:solidFill>
+                      <a:srgbClr val="E9E9FE"/>
+                    </a:solidFill>
+                  </a:tcPr>
+                </a:tc>
+                <a:tc>
+                  <a:txBody>
+                    <a:bodyPr/>
+                    <a:lstStyle/>
+                    <a:p>
+                      <a:pPr indent="0" marL="0">
+                        <a:buNone/>
+                      </a:pPr>
+                      <a:r>
+                        <a:rPr lang="en-US" sz="900" dirty="0">
+                          <a:solidFill>
+                            <a:srgbClr val="5A5A72"/>
+                          </a:solidFill>
+                          <a:latin typeface="Calibri" pitchFamily="34" charset="0"/>
+                          <a:ea typeface="Calibri" pitchFamily="34" charset="-122"/>
+                          <a:cs typeface="Calibri" pitchFamily="34" charset="-120"/>
+                        </a:rPr>
+                        <a:t>Agent only sees the context for its immediate task</a:t>
+                      </a:r>
+                      <a:endParaRPr lang="en-US" sz="900" dirty="0">
+                        <a:latin typeface="Calibri" charset="0"/>
+                        <a:ea typeface="Calibri" charset="0"/>
+                        <a:cs typeface="Calibri" charset="0"/>
+                      </a:endParaRPr>
+                    </a:p>
+                  </a:txBody>
+                  <a:tcPr marL="50800" marR="50800" marT="50800" marB="50800" anchor="ctr">
+                    <a:lnL w="6350" cap="flat" cmpd="sng" algn="ctr">
+                      <a:solidFill>
+                        <a:srgbClr val="E2E2EC"/>
+                      </a:solidFill>
+                      <a:prstDash val="solid"/>
+                      <a:round/>
+                      <a:headEnd type="none" w="med" len="med"/>
+                      <a:tailEnd type="none" w="med" len="med"/>
+                    </a:lnL>
+                    <a:lnR w="6350" cap="flat" cmpd="sng" algn="ctr">
+                      <a:solidFill>
+                        <a:srgbClr val="E2E2EC"/>
+                      </a:solidFill>
+                      <a:prstDash val="solid"/>
+                      <a:round/>
+                      <a:headEnd type="none" w="med" len="med"/>
+                      <a:tailEnd type="none" w="med" len="med"/>
+                    </a:lnR>
+                    <a:lnT w="6350" cap="flat" cmpd="sng" algn="ctr">
+                      <a:solidFill>
+                        <a:srgbClr val="E2E2EC"/>
+                      </a:solidFill>
+                      <a:prstDash val="solid"/>
+                      <a:round/>
+                      <a:headEnd type="none" w="med" len="med"/>
+                      <a:tailEnd type="none" w="med" len="med"/>
+                    </a:lnT>
+                    <a:lnB w="6350" cap="flat" cmpd="sng" algn="ctr">
+                      <a:solidFill>
+                        <a:srgbClr val="E2E2EC"/>
+                      </a:solidFill>
+                      <a:prstDash val="solid"/>
+                      <a:round/>
+                      <a:headEnd type="none" w="med" len="med"/>
+                      <a:tailEnd type="none" w="med" len="med"/>
+                    </a:lnB>
+                    <a:solidFill>
+                      <a:srgbClr val="FFFFFF"/>
+                    </a:solidFill>
+                  </a:tcPr>
+                </a:tc>
+                <a:tc>
+                  <a:txBody>
+                    <a:bodyPr/>
+                    <a:lstStyle/>
+                    <a:p>
+                      <a:pPr indent="0" marL="0">
+                        <a:buNone/>
+                      </a:pPr>
+                      <a:r>
+                        <a:rPr lang="en-US" sz="900" dirty="0">
+                          <a:solidFill>
+                            <a:srgbClr val="5A5A72"/>
+                          </a:solidFill>
+                          <a:latin typeface="Calibri" pitchFamily="34" charset="0"/>
+                          <a:ea typeface="Calibri" pitchFamily="34" charset="-122"/>
+                          <a:cs typeface="Calibri" pitchFamily="34" charset="-120"/>
+                        </a:rPr>
+                        <a:t>Sequential workflow routing — each task receives only its declared prior-task context; input variables injected at run time</a:t>
+                      </a:r>
+                      <a:endParaRPr lang="en-US" sz="900" dirty="0">
+                        <a:latin typeface="Calibri" charset="0"/>
+                        <a:ea typeface="Calibri" charset="0"/>
+                        <a:cs typeface="Calibri" charset="0"/>
+                      </a:endParaRPr>
+                    </a:p>
+                  </a:txBody>
+                  <a:tcPr marL="50800" marR="50800" marT="50800" marB="50800" anchor="ctr">
+                    <a:lnL w="6350" cap="flat" cmpd="sng" algn="ctr">
+                      <a:solidFill>
+                        <a:srgbClr val="E2E2EC"/>
+                      </a:solidFill>
+                      <a:prstDash val="solid"/>
+                      <a:round/>
+                      <a:headEnd type="none" w="med" len="med"/>
+                      <a:tailEnd type="none" w="med" len="med"/>
+                    </a:lnL>
+                    <a:lnR w="6350" cap="flat" cmpd="sng" algn="ctr">
+                      <a:solidFill>
+                        <a:srgbClr val="E2E2EC"/>
+                      </a:solidFill>
+                      <a:prstDash val="solid"/>
+                      <a:round/>
+                      <a:headEnd type="none" w="med" len="med"/>
+                      <a:tailEnd type="none" w="med" len="med"/>
+                    </a:lnR>
+                    <a:lnT w="6350" cap="flat" cmpd="sng" algn="ctr">
+                      <a:solidFill>
+                        <a:srgbClr val="E2E2EC"/>
+                      </a:solidFill>
+                      <a:prstDash val="solid"/>
+                      <a:round/>
+                      <a:headEnd type="none" w="med" len="med"/>
+                      <a:tailEnd type="none" w="med" len="med"/>
+                    </a:lnT>
+                    <a:lnB w="6350" cap="flat" cmpd="sng" algn="ctr">
+                      <a:solidFill>
+                        <a:srgbClr val="E2E2EC"/>
+                      </a:solidFill>
+                      <a:prstDash val="solid"/>
+                      <a:round/>
+                      <a:headEnd type="none" w="med" len="med"/>
+                      <a:tailEnd type="none" w="med" len="med"/>
+                    </a:lnB>
+                    <a:solidFill>
+                      <a:srgbClr val="FFFFFF"/>
+                    </a:solidFill>
+                  </a:tcPr>
+                </a:tc>
+              </a:tr>
+              <a:tr h="731520">
+                <a:tc>
+                  <a:txBody>
+                    <a:bodyPr/>
+                    <a:lstStyle/>
+                    <a:p>
+                      <a:pPr indent="0" marL="0">
+                        <a:buNone/>
+                      </a:pPr>
+                      <a:r>
+                        <a:rPr lang="en-US" sz="900" b="1" dirty="0">
+                          <a:solidFill>
+                            <a:srgbClr val="4F4FF5"/>
+                          </a:solidFill>
+                          <a:latin typeface="Calibri" pitchFamily="34" charset="0"/>
+                          <a:ea typeface="Calibri" pitchFamily="34" charset="-122"/>
+                          <a:cs typeface="Calibri" pitchFamily="34" charset="-120"/>
+                        </a:rPr>
+                        <a:t>Agent Specialization &amp; Parallelism</a:t>
+                      </a:r>
+                      <a:endParaRPr lang="en-US" sz="900" dirty="0">
+                        <a:latin typeface="Calibri" charset="0"/>
+                        <a:ea typeface="Calibri" charset="0"/>
+                        <a:cs typeface="Calibri" charset="0"/>
+                      </a:endParaRPr>
+                    </a:p>
+                  </a:txBody>
+                  <a:tcPr marL="50800" marR="50800" marT="50800" marB="50800" anchor="ctr">
+                    <a:lnL w="6350" cap="flat" cmpd="sng" algn="ctr">
+                      <a:solidFill>
+                        <a:srgbClr val="E2E2EC"/>
+                      </a:solidFill>
+                      <a:prstDash val="solid"/>
+                      <a:round/>
+                      <a:headEnd type="none" w="med" len="med"/>
+                      <a:tailEnd type="none" w="med" len="med"/>
+                    </a:lnL>
+                    <a:lnR w="6350" cap="flat" cmpd="sng" algn="ctr">
+                      <a:solidFill>
+                        <a:srgbClr val="E2E2EC"/>
+                      </a:solidFill>
+                      <a:prstDash val="solid"/>
+                      <a:round/>
+                      <a:headEnd type="none" w="med" len="med"/>
+                      <a:tailEnd type="none" w="med" len="med"/>
+                    </a:lnR>
+                    <a:lnT w="6350" cap="flat" cmpd="sng" algn="ctr">
+                      <a:solidFill>
+                        <a:srgbClr val="E2E2EC"/>
+                      </a:solidFill>
+                      <a:prstDash val="solid"/>
+                      <a:round/>
+                      <a:headEnd type="none" w="med" len="med"/>
+                      <a:tailEnd type="none" w="med" len="med"/>
+                    </a:lnT>
+                    <a:lnB w="6350" cap="flat" cmpd="sng" algn="ctr">
+                      <a:solidFill>
+                        <a:srgbClr val="E2E2EC"/>
+                      </a:solidFill>
+                      <a:prstDash val="solid"/>
+                      <a:round/>
+                      <a:headEnd type="none" w="med" len="med"/>
+                      <a:tailEnd type="none" w="med" len="med"/>
+                    </a:lnB>
+                    <a:solidFill>
+                      <a:srgbClr val="E9E9FE"/>
+                    </a:solidFill>
+                  </a:tcPr>
+                </a:tc>
+                <a:tc>
+                  <a:txBody>
+                    <a:bodyPr/>
+                    <a:lstStyle/>
+                    <a:p>
+                      <a:pPr indent="0" marL="0">
+                        <a:buNone/>
+                      </a:pPr>
+                      <a:r>
+                        <a:rPr lang="en-US" sz="900" dirty="0">
+                          <a:solidFill>
+                            <a:srgbClr val="5A5A72"/>
+                          </a:solidFill>
+                          <a:latin typeface="Calibri" pitchFamily="34" charset="0"/>
+                          <a:ea typeface="Calibri" pitchFamily="34" charset="-122"/>
+                          <a:cs typeface="Calibri" pitchFamily="34" charset="-120"/>
+                        </a:rPr>
+                        <a:t>Focused agents with restricted toolsets outperform generalists</a:t>
+                      </a:r>
+                      <a:endParaRPr lang="en-US" sz="900" dirty="0">
+                        <a:latin typeface="Calibri" charset="0"/>
+                        <a:ea typeface="Calibri" charset="0"/>
+                        <a:cs typeface="Calibri" charset="0"/>
+                      </a:endParaRPr>
+                    </a:p>
+                  </a:txBody>
+                  <a:tcPr marL="50800" marR="50800" marT="50800" marB="50800" anchor="ctr">
+                    <a:lnL w="6350" cap="flat" cmpd="sng" algn="ctr">
+                      <a:solidFill>
+                        <a:srgbClr val="E2E2EC"/>
+                      </a:solidFill>
+                      <a:prstDash val="solid"/>
+                      <a:round/>
+                      <a:headEnd type="none" w="med" len="med"/>
+                      <a:tailEnd type="none" w="med" len="med"/>
+                    </a:lnL>
+                    <a:lnR w="6350" cap="flat" cmpd="sng" algn="ctr">
+                      <a:solidFill>
+                        <a:srgbClr val="E2E2EC"/>
+                      </a:solidFill>
+                      <a:prstDash val="solid"/>
+                      <a:round/>
+                      <a:headEnd type="none" w="med" len="med"/>
+                      <a:tailEnd type="none" w="med" len="med"/>
+                    </a:lnR>
+                    <a:lnT w="6350" cap="flat" cmpd="sng" algn="ctr">
+                      <a:solidFill>
+                        <a:srgbClr val="E2E2EC"/>
+                      </a:solidFill>
+                      <a:prstDash val="solid"/>
+                      <a:round/>
+                      <a:headEnd type="none" w="med" len="med"/>
+                      <a:tailEnd type="none" w="med" len="med"/>
+                    </a:lnT>
+                    <a:lnB w="6350" cap="flat" cmpd="sng" algn="ctr">
+                      <a:solidFill>
+                        <a:srgbClr val="E2E2EC"/>
+                      </a:solidFill>
+                      <a:prstDash val="solid"/>
+                      <a:round/>
+                      <a:headEnd type="none" w="med" len="med"/>
+                      <a:tailEnd type="none" w="med" len="med"/>
+                    </a:lnB>
+                    <a:solidFill>
+                      <a:srgbClr val="FFFFFF"/>
+                    </a:solidFill>
+                  </a:tcPr>
+                </a:tc>
+                <a:tc>
+                  <a:txBody>
+                    <a:bodyPr/>
+                    <a:lstStyle/>
+                    <a:p>
+                      <a:pPr indent="0" marL="0">
+                        <a:buNone/>
+                      </a:pPr>
+                      <a:r>
+                        <a:rPr lang="en-US" sz="900" dirty="0">
+                          <a:solidFill>
+                            <a:srgbClr val="5A5A72"/>
+                          </a:solidFill>
+                          <a:latin typeface="Calibri" pitchFamily="34" charset="0"/>
+                          <a:ea typeface="Calibri" pitchFamily="34" charset="-122"/>
+                          <a:cs typeface="Calibri" pitchFamily="34" charset="-120"/>
+                        </a:rPr>
+                        <a:t>Each agent gets its own Role, Goal, Backstory and an explicit scoped tool list — no god-mode access; Manager Agent pattern for hierarchical coordination</a:t>
+                      </a:r>
+                      <a:endParaRPr lang="en-US" sz="900" dirty="0">
+                        <a:latin typeface="Calibri" charset="0"/>
+                        <a:ea typeface="Calibri" charset="0"/>
+                        <a:cs typeface="Calibri" charset="0"/>
+                      </a:endParaRPr>
+                    </a:p>
+                  </a:txBody>
+                  <a:tcPr marL="50800" marR="50800" marT="50800" marB="50800" anchor="ctr">
+                    <a:lnL w="6350" cap="flat" cmpd="sng" algn="ctr">
+                      <a:solidFill>
+                        <a:srgbClr val="E2E2EC"/>
+                      </a:solidFill>
+                      <a:prstDash val="solid"/>
+                      <a:round/>
+                      <a:headEnd type="none" w="med" len="med"/>
+                      <a:tailEnd type="none" w="med" len="med"/>
+                    </a:lnL>
+                    <a:lnR w="6350" cap="flat" cmpd="sng" algn="ctr">
+                      <a:solidFill>
+                        <a:srgbClr val="E2E2EC"/>
+                      </a:solidFill>
+                      <a:prstDash val="solid"/>
+                      <a:round/>
+                      <a:headEnd type="none" w="med" len="med"/>
+                      <a:tailEnd type="none" w="med" len="med"/>
+                    </a:lnR>
+                    <a:lnT w="6350" cap="flat" cmpd="sng" algn="ctr">
+                      <a:solidFill>
+                        <a:srgbClr val="E2E2EC"/>
+                      </a:solidFill>
+                      <a:prstDash val="solid"/>
+                      <a:round/>
+                      <a:headEnd type="none" w="med" len="med"/>
+                      <a:tailEnd type="none" w="med" len="med"/>
+                    </a:lnT>
+                    <a:lnB w="6350" cap="flat" cmpd="sng" algn="ctr">
+                      <a:solidFill>
+                        <a:srgbClr val="E2E2EC"/>
+                      </a:solidFill>
+                      <a:prstDash val="solid"/>
+                      <a:round/>
+                      <a:headEnd type="none" w="med" len="med"/>
+                      <a:tailEnd type="none" w="med" len="med"/>
+                    </a:lnB>
+                    <a:solidFill>
+                      <a:srgbClr val="FFFFFF"/>
+                    </a:solidFill>
+                  </a:tcPr>
+                </a:tc>
+              </a:tr>
+              <a:tr h="731520">
+                <a:tc>
+                  <a:txBody>
+                    <a:bodyPr/>
+                    <a:lstStyle/>
+                    <a:p>
+                      <a:pPr indent="0" marL="0">
+                        <a:buNone/>
+                      </a:pPr>
+                      <a:r>
+                        <a:rPr lang="en-US" sz="900" b="1" dirty="0">
+                          <a:solidFill>
+                            <a:srgbClr val="4F4FF5"/>
+                          </a:solidFill>
+                          <a:latin typeface="Calibri" pitchFamily="34" charset="0"/>
+                          <a:ea typeface="Calibri" pitchFamily="34" charset="-122"/>
+                          <a:cs typeface="Calibri" pitchFamily="34" charset="-120"/>
+                        </a:rPr>
+                        <a:t>Persistent Memory &amp; State</a:t>
+                      </a:r>
+                      <a:endParaRPr lang="en-US" sz="900" dirty="0">
+                        <a:latin typeface="Calibri" charset="0"/>
+                        <a:ea typeface="Calibri" charset="0"/>
+                        <a:cs typeface="Calibri" charset="0"/>
+                      </a:endParaRPr>
+                    </a:p>
+                  </a:txBody>
+                  <a:tcPr marL="50800" marR="50800" marT="50800" marB="50800" anchor="ctr">
+                    <a:lnL w="6350" cap="flat" cmpd="sng" algn="ctr">
+                      <a:solidFill>
+                        <a:srgbClr val="E2E2EC"/>
+                      </a:solidFill>
+                      <a:prstDash val="solid"/>
+                      <a:round/>
+                      <a:headEnd type="none" w="med" len="med"/>
+                      <a:tailEnd type="none" w="med" len="med"/>
+                    </a:lnL>
+                    <a:lnR w="6350" cap="flat" cmpd="sng" algn="ctr">
+                      <a:solidFill>
+                        <a:srgbClr val="E2E2EC"/>
+                      </a:solidFill>
+                      <a:prstDash val="solid"/>
+                      <a:round/>
+                      <a:headEnd type="none" w="med" len="med"/>
+                      <a:tailEnd type="none" w="med" len="med"/>
+                    </a:lnR>
+                    <a:lnT w="6350" cap="flat" cmpd="sng" algn="ctr">
+                      <a:solidFill>
+                        <a:srgbClr val="E2E2EC"/>
+                      </a:solidFill>
+                      <a:prstDash val="solid"/>
+                      <a:round/>
+                      <a:headEnd type="none" w="med" len="med"/>
+                      <a:tailEnd type="none" w="med" len="med"/>
+                    </a:lnT>
+                    <a:lnB w="6350" cap="flat" cmpd="sng" algn="ctr">
+                      <a:solidFill>
+                        <a:srgbClr val="E2E2EC"/>
+                      </a:solidFill>
+                      <a:prstDash val="solid"/>
+                      <a:round/>
+                      <a:headEnd type="none" w="med" len="med"/>
+                      <a:tailEnd type="none" w="med" len="med"/>
+                    </a:lnB>
+                    <a:solidFill>
+                      <a:srgbClr val="E9E9FE"/>
+                    </a:solidFill>
+                  </a:tcPr>
+                </a:tc>
+                <a:tc>
+                  <a:txBody>
+                    <a:bodyPr/>
+                    <a:lstStyle/>
+                    <a:p>
+                      <a:pPr indent="0" marL="0">
+                        <a:buNone/>
+                      </a:pPr>
+                      <a:r>
+                        <a:rPr lang="en-US" sz="900" dirty="0">
+                          <a:solidFill>
+                            <a:srgbClr val="5A5A72"/>
+                          </a:solidFill>
+                          <a:latin typeface="Calibri" pitchFamily="34" charset="0"/>
+                          <a:ea typeface="Calibri" pitchFamily="34" charset="-122"/>
+                          <a:cs typeface="Calibri" pitchFamily="34" charset="-120"/>
+                        </a:rPr>
+                        <a:t>Memory lives outside the prompt window</a:t>
+                      </a:r>
+                      <a:endParaRPr lang="en-US" sz="900" dirty="0">
+                        <a:latin typeface="Calibri" charset="0"/>
+                        <a:ea typeface="Calibri" charset="0"/>
+                        <a:cs typeface="Calibri" charset="0"/>
+                      </a:endParaRPr>
+                    </a:p>
+                  </a:txBody>
+                  <a:tcPr marL="50800" marR="50800" marT="50800" marB="50800" anchor="ctr">
+                    <a:lnL w="6350" cap="flat" cmpd="sng" algn="ctr">
+                      <a:solidFill>
+                        <a:srgbClr val="E2E2EC"/>
+                      </a:solidFill>
+                      <a:prstDash val="solid"/>
+                      <a:round/>
+                      <a:headEnd type="none" w="med" len="med"/>
+                      <a:tailEnd type="none" w="med" len="med"/>
+                    </a:lnL>
+                    <a:lnR w="6350" cap="flat" cmpd="sng" algn="ctr">
+                      <a:solidFill>
+                        <a:srgbClr val="E2E2EC"/>
+                      </a:solidFill>
+                      <a:prstDash val="solid"/>
+                      <a:round/>
+                      <a:headEnd type="none" w="med" len="med"/>
+                      <a:tailEnd type="none" w="med" len="med"/>
+                    </a:lnR>
+                    <a:lnT w="6350" cap="flat" cmpd="sng" algn="ctr">
+                      <a:solidFill>
+                        <a:srgbClr val="E2E2EC"/>
+                      </a:solidFill>
+                      <a:prstDash val="solid"/>
+                      <a:round/>
+                      <a:headEnd type="none" w="med" len="med"/>
+                      <a:tailEnd type="none" w="med" len="med"/>
+                    </a:lnT>
+                    <a:lnB w="6350" cap="flat" cmpd="sng" algn="ctr">
+                      <a:solidFill>
+                        <a:srgbClr val="E2E2EC"/>
+                      </a:solidFill>
+                      <a:prstDash val="solid"/>
+                      <a:round/>
+                      <a:headEnd type="none" w="med" len="med"/>
+                      <a:tailEnd type="none" w="med" len="med"/>
+                    </a:lnB>
+                    <a:solidFill>
+                      <a:srgbClr val="FFFFFF"/>
+                    </a:solidFill>
+                  </a:tcPr>
+                </a:tc>
+                <a:tc>
+                  <a:txBody>
+                    <a:bodyPr/>
+                    <a:lstStyle/>
+                    <a:p>
+                      <a:pPr indent="0" marL="0">
+                        <a:buNone/>
+                      </a:pPr>
+                      <a:r>
+                        <a:rPr lang="en-US" sz="900" dirty="0">
+                          <a:solidFill>
+                            <a:srgbClr val="5A5A72"/>
+                          </a:solidFill>
+                          <a:latin typeface="Calibri" pitchFamily="34" charset="0"/>
+                          <a:ea typeface="Calibri" pitchFamily="34" charset="-122"/>
+                          <a:cs typeface="Calibri" pitchFamily="34" charset="-120"/>
+                        </a:rPr>
+                        <a:t>Artifact Files (shared virtual filesystem), workflow input variables, and progress.json-style state persist across tasks and sessions</a:t>
+                      </a:r>
+                      <a:endParaRPr lang="en-US" sz="900" dirty="0">
+                        <a:latin typeface="Calibri" charset="0"/>
+                        <a:ea typeface="Calibri" charset="0"/>
+                        <a:cs typeface="Calibri" charset="0"/>
+                      </a:endParaRPr>
+                    </a:p>
+                  </a:txBody>
+                  <a:tcPr marL="50800" marR="50800" marT="50800" marB="50800" anchor="ctr">
+                    <a:lnL w="6350" cap="flat" cmpd="sng" algn="ctr">
+                      <a:solidFill>
+                        <a:srgbClr val="E2E2EC"/>
+                      </a:solidFill>
+                      <a:prstDash val="solid"/>
+                      <a:round/>
+                      <a:headEnd type="none" w="med" len="med"/>
+                      <a:tailEnd type="none" w="med" len="med"/>
+                    </a:lnL>
+                    <a:lnR w="6350" cap="flat" cmpd="sng" algn="ctr">
+                      <a:solidFill>
+                        <a:srgbClr val="E2E2EC"/>
+                      </a:solidFill>
+                      <a:prstDash val="solid"/>
+                      <a:round/>
+                      <a:headEnd type="none" w="med" len="med"/>
+                      <a:tailEnd type="none" w="med" len="med"/>
+                    </a:lnR>
+                    <a:lnT w="6350" cap="flat" cmpd="sng" algn="ctr">
+                      <a:solidFill>
+                        <a:srgbClr val="E2E2EC"/>
+                      </a:solidFill>
+                      <a:prstDash val="solid"/>
+                      <a:round/>
+                      <a:headEnd type="none" w="med" len="med"/>
+                      <a:tailEnd type="none" w="med" len="med"/>
+                    </a:lnT>
+                    <a:lnB w="6350" cap="flat" cmpd="sng" algn="ctr">
+                      <a:solidFill>
+                        <a:srgbClr val="E2E2EC"/>
+                      </a:solidFill>
+                      <a:prstDash val="solid"/>
+                      <a:round/>
+                      <a:headEnd type="none" w="med" len="med"/>
+                      <a:tailEnd type="none" w="med" len="med"/>
+                    </a:lnB>
+                    <a:solidFill>
+                      <a:srgbClr val="FFFFFF"/>
+                    </a:solidFill>
+                  </a:tcPr>
+                </a:tc>
+              </a:tr>
+              <a:tr h="731520">
+                <a:tc>
+                  <a:txBody>
+                    <a:bodyPr/>
+                    <a:lstStyle/>
+                    <a:p>
+                      <a:pPr indent="0" marL="0">
+                        <a:buNone/>
+                      </a:pPr>
+                      <a:r>
+                        <a:rPr lang="en-US" sz="900" b="1" dirty="0">
+                          <a:solidFill>
+                            <a:srgbClr val="4F4FF5"/>
+                          </a:solidFill>
+                          <a:latin typeface="Calibri" pitchFamily="34" charset="0"/>
+                          <a:ea typeface="Calibri" pitchFamily="34" charset="-122"/>
+                          <a:cs typeface="Calibri" pitchFamily="34" charset="-120"/>
+                        </a:rPr>
+                        <a:t>Structured Execution &amp; Backpressure</a:t>
+                      </a:r>
+                      <a:endParaRPr lang="en-US" sz="900" dirty="0">
+                        <a:latin typeface="Calibri" charset="0"/>
+                        <a:ea typeface="Calibri" charset="0"/>
+                        <a:cs typeface="Calibri" charset="0"/>
+                      </a:endParaRPr>
+                    </a:p>
+                  </a:txBody>
+                  <a:tcPr marL="50800" marR="50800" marT="50800" marB="50800" anchor="ctr">
+                    <a:lnL w="6350" cap="flat" cmpd="sng" algn="ctr">
+                      <a:solidFill>
+                        <a:srgbClr val="E2E2EC"/>
+                      </a:solidFill>
+                      <a:prstDash val="solid"/>
+                      <a:round/>
+                      <a:headEnd type="none" w="med" len="med"/>
+                      <a:tailEnd type="none" w="med" len="med"/>
+                    </a:lnL>
+                    <a:lnR w="6350" cap="flat" cmpd="sng" algn="ctr">
+                      <a:solidFill>
+                        <a:srgbClr val="E2E2EC"/>
+                      </a:solidFill>
+                      <a:prstDash val="solid"/>
+                      <a:round/>
+                      <a:headEnd type="none" w="med" len="med"/>
+                      <a:tailEnd type="none" w="med" len="med"/>
+                    </a:lnR>
+                    <a:lnT w="6350" cap="flat" cmpd="sng" algn="ctr">
+                      <a:solidFill>
+                        <a:srgbClr val="E2E2EC"/>
+                      </a:solidFill>
+                      <a:prstDash val="solid"/>
+                      <a:round/>
+                      <a:headEnd type="none" w="med" len="med"/>
+                      <a:tailEnd type="none" w="med" len="med"/>
+                    </a:lnT>
+                    <a:lnB w="6350" cap="flat" cmpd="sng" algn="ctr">
+                      <a:solidFill>
+                        <a:srgbClr val="E2E2EC"/>
+                      </a:solidFill>
+                      <a:prstDash val="solid"/>
+                      <a:round/>
+                      <a:headEnd type="none" w="med" len="med"/>
+                      <a:tailEnd type="none" w="med" len="med"/>
+                    </a:lnB>
+                    <a:solidFill>
+                      <a:srgbClr val="E9E9FE"/>
+                    </a:solidFill>
+                  </a:tcPr>
+                </a:tc>
+                <a:tc>
+                  <a:txBody>
+                    <a:bodyPr/>
+                    <a:lstStyle/>
+                    <a:p>
+                      <a:pPr indent="0" marL="0">
+                        <a:buNone/>
+                      </a:pPr>
+                      <a:r>
+                        <a:rPr lang="en-US" sz="900" dirty="0">
+                          <a:solidFill>
+                            <a:srgbClr val="5A5A72"/>
+                          </a:solidFill>
+                          <a:latin typeface="Calibri" pitchFamily="34" charset="0"/>
+                          <a:ea typeface="Calibri" pitchFamily="34" charset="-122"/>
+                          <a:cs typeface="Calibri" pitchFamily="34" charset="-120"/>
+                        </a:rPr>
+                        <a:t>Mechanical constraints force correct behavior</a:t>
+                      </a:r>
+                      <a:endParaRPr lang="en-US" sz="900" dirty="0">
+                        <a:latin typeface="Calibri" charset="0"/>
+                        <a:ea typeface="Calibri" charset="0"/>
+                        <a:cs typeface="Calibri" charset="0"/>
+                      </a:endParaRPr>
+                    </a:p>
+                  </a:txBody>
+                  <a:tcPr marL="50800" marR="50800" marT="50800" marB="50800" anchor="ctr">
+                    <a:lnL w="6350" cap="flat" cmpd="sng" algn="ctr">
+                      <a:solidFill>
+                        <a:srgbClr val="E2E2EC"/>
+                      </a:solidFill>
+                      <a:prstDash val="solid"/>
+                      <a:round/>
+                      <a:headEnd type="none" w="med" len="med"/>
+                      <a:tailEnd type="none" w="med" len="med"/>
+                    </a:lnL>
+                    <a:lnR w="6350" cap="flat" cmpd="sng" algn="ctr">
+                      <a:solidFill>
+                        <a:srgbClr val="E2E2EC"/>
+                      </a:solidFill>
+                      <a:prstDash val="solid"/>
+                      <a:round/>
+                      <a:headEnd type="none" w="med" len="med"/>
+                      <a:tailEnd type="none" w="med" len="med"/>
+                    </a:lnR>
+                    <a:lnT w="6350" cap="flat" cmpd="sng" algn="ctr">
+                      <a:solidFill>
+                        <a:srgbClr val="E2E2EC"/>
+                      </a:solidFill>
+                      <a:prstDash val="solid"/>
+                      <a:round/>
+                      <a:headEnd type="none" w="med" len="med"/>
+                      <a:tailEnd type="none" w="med" len="med"/>
+                    </a:lnT>
+                    <a:lnB w="6350" cap="flat" cmpd="sng" algn="ctr">
+                      <a:solidFill>
+                        <a:srgbClr val="E2E2EC"/>
+                      </a:solidFill>
+                      <a:prstDash val="solid"/>
+                      <a:round/>
+                      <a:headEnd type="none" w="med" len="med"/>
+                      <a:tailEnd type="none" w="med" len="med"/>
+                    </a:lnB>
+                    <a:solidFill>
+                      <a:srgbClr val="FFFFFF"/>
+                    </a:solidFill>
+                  </a:tcPr>
+                </a:tc>
+                <a:tc>
+                  <a:txBody>
+                    <a:bodyPr/>
+                    <a:lstStyle/>
+                    <a:p>
+                      <a:pPr indent="0" marL="0">
+                        <a:buNone/>
+                      </a:pPr>
+                      <a:r>
+                        <a:rPr lang="en-US" sz="900" dirty="0">
+                          <a:solidFill>
+                            <a:srgbClr val="5A5A72"/>
+                          </a:solidFill>
+                          <a:latin typeface="Calibri" pitchFamily="34" charset="0"/>
+                          <a:ea typeface="Calibri" pitchFamily="34" charset="-122"/>
+                          <a:cs typeface="Calibri" pitchFamily="34" charset="-120"/>
+                        </a:rPr>
+                        <a:t>MCP guardrails, jailbreak tool, custom Python tools with typed parameters, CI/CD-ready deployment endpoints, and Phoenix observability for every run</a:t>
+                      </a:r>
+                      <a:endParaRPr lang="en-US" sz="900" dirty="0">
+                        <a:latin typeface="Calibri" charset="0"/>
+                        <a:ea typeface="Calibri" charset="0"/>
+                        <a:cs typeface="Calibri" charset="0"/>
+                      </a:endParaRPr>
+                    </a:p>
+                  </a:txBody>
+                  <a:tcPr marL="50800" marR="50800" marT="50800" marB="50800" anchor="ctr">
+                    <a:lnL w="6350" cap="flat" cmpd="sng" algn="ctr">
+                      <a:solidFill>
+                        <a:srgbClr val="E2E2EC"/>
+                      </a:solidFill>
+                      <a:prstDash val="solid"/>
+                      <a:round/>
+                      <a:headEnd type="none" w="med" len="med"/>
+                      <a:tailEnd type="none" w="med" len="med"/>
+                    </a:lnL>
+                    <a:lnR w="6350" cap="flat" cmpd="sng" algn="ctr">
+                      <a:solidFill>
+                        <a:srgbClr val="E2E2EC"/>
+                      </a:solidFill>
+                      <a:prstDash val="solid"/>
+                      <a:round/>
+                      <a:headEnd type="none" w="med" len="med"/>
+                      <a:tailEnd type="none" w="med" len="med"/>
+                    </a:lnR>
+                    <a:lnT w="6350" cap="flat" cmpd="sng" algn="ctr">
+                      <a:solidFill>
+                        <a:srgbClr val="E2E2EC"/>
+                      </a:solidFill>
+                      <a:prstDash val="solid"/>
+                      <a:round/>
+                      <a:headEnd type="none" w="med" len="med"/>
+                      <a:tailEnd type="none" w="med" len="med"/>
+                    </a:lnT>
+                    <a:lnB w="6350" cap="flat" cmpd="sng" algn="ctr">
+                      <a:solidFill>
+                        <a:srgbClr val="E2E2EC"/>
+                      </a:solidFill>
+                      <a:prstDash val="solid"/>
+                      <a:round/>
+                      <a:headEnd type="none" w="med" len="med"/>
+                      <a:tailEnd type="none" w="med" len="med"/>
+                    </a:lnB>
+                    <a:solidFill>
+                      <a:srgbClr val="FFFFFF"/>
+                    </a:solidFill>
+                  </a:tcPr>
+                </a:tc>
+              </a:tr>
+            </a:tbl>
+          </a:graphicData>
+        </a:graphic>
+      </p:graphicFrame>
+      <p:sp>
+        <p:nvSpPr>
+          <p:cNvPr id="7" name="Shape 4"/>
+          <p:cNvSpPr/>
+          <p:nvPr/>
+        </p:nvSpPr>
+        <p:spPr>
+          <a:xfrm>
+            <a:off x="566928" y="4526280"/>
+            <a:ext cx="8010144" cy="329184"/>
+          </a:xfrm>
+          <a:prstGeom prst="roundRect">
+            <a:avLst>
+              <a:gd name="adj" fmla="val 19444"/>
+            </a:avLst>
+          </a:prstGeom>
+          <a:solidFill>
+            <a:srgbClr val="15154A"/>
+          </a:solidFill>
+          <a:ln/>
+        </p:spPr>
+      </p:sp>
+      <p:sp>
+        <p:nvSpPr>
+          <p:cNvPr id="8" name="Text 5"/>
+          <p:cNvSpPr/>
+          <p:nvPr/>
+        </p:nvSpPr>
+        <p:spPr>
+          <a:xfrm>
+            <a:off x="749808" y="4526280"/>
+            <a:ext cx="7680960" cy="329184"/>
+          </a:xfrm>
+          <a:prstGeom prst="rect">
+            <a:avLst/>
+          </a:prstGeom>
+          <a:noFill/>
+          <a:ln/>
+        </p:spPr>
+        <p:txBody>
+          <a:bodyPr wrap="square" lIns="0" tIns="0" rIns="0" bIns="0" rtlCol="0" anchor="ctr"/>
+          <a:lstStyle/>
+          <a:p>
+            <a:pPr indent="0" marL="0">
+              <a:buNone/>
+            </a:pPr>
+            <a:r>
+              <a:rPr lang="en-US" sz="1050" b="1" dirty="0">
+                <a:solidFill>
+                  <a:srgbClr val="FFFFFF"/>
+                </a:solidFill>
+                <a:latin typeface="Calibri" pitchFamily="34" charset="0"/>
+                <a:ea typeface="Calibri" pitchFamily="34" charset="-122"/>
+                <a:cs typeface="Calibri" pitchFamily="34" charset="-120"/>
+              </a:rPr>
+              <a:t>Agent Studio is Cloudera's production harness for AI agents</a:t>
+            </a:r>
+            <a:pPr indent="0" marL="0">
+              <a:buNone/>
+            </a:pPr>
+            <a:r>
+              <a:rPr lang="en-US" sz="1050" dirty="0">
+                <a:solidFill>
+                  <a:srgbClr val="C9C9E6"/>
+                </a:solidFill>
+                <a:latin typeface="Calibri" pitchFamily="34" charset="0"/>
+                <a:ea typeface="Calibri" pitchFamily="34" charset="-122"/>
+                <a:cs typeface="Calibri" pitchFamily="34" charset="-120"/>
+              </a:rPr>
+              <a:t> — purpose-built to close the gap between the 2% deploying at scale and everyone else.</a:t>
+            </a:r>
+            <a:endParaRPr lang="en-US" sz="1050" dirty="0"/>
+          </a:p>
+        </p:txBody>
+      </p:sp>
+      <p:sp>
+        <p:nvSpPr>
+          <p:cNvPr id="9" name="Text 6"/>
+          <p:cNvSpPr/>
+          <p:nvPr/>
+        </p:nvSpPr>
+        <p:spPr>
+          <a:xfrm>
+            <a:off x="566928" y="4759452"/>
+            <a:ext cx="6858000" cy="256032"/>
+          </a:xfrm>
+          <a:prstGeom prst="rect">
+            <a:avLst/>
+          </a:prstGeom>
+          <a:noFill/>
+          <a:ln/>
+        </p:spPr>
+        <p:txBody>
+          <a:bodyPr wrap="square" lIns="0" tIns="0" rIns="0" bIns="0" rtlCol="0" anchor="ctr"/>
+          <a:lstStyle/>
+          <a:p>
+            <a:pPr indent="0" marL="0">
+              <a:buNone/>
+            </a:pPr>
+            <a:r>
+              <a:rPr lang="en-US" sz="800" dirty="0">
+                <a:solidFill>
+                  <a:srgbClr val="9A9AB4"/>
+                </a:solidFill>
+                <a:latin typeface="Calibri" pitchFamily="34" charset="0"/>
+                <a:ea typeface="Calibri" pitchFamily="34" charset="-122"/>
+                <a:cs typeface="Calibri" pitchFamily="34" charset="-120"/>
+              </a:rPr>
+              <a:t>©2026 Cloudera, Inc. All Rights Reserved.</a:t>
+            </a:r>
+            <a:endParaRPr lang="en-US" sz="800" dirty="0"/>
+          </a:p>
+        </p:txBody>
+      </p:sp>
+      <p:sp>
+        <p:nvSpPr>
+          <p:cNvPr id="10" name="Text 7"/>
+          <p:cNvSpPr/>
+          <p:nvPr/>
+        </p:nvSpPr>
+        <p:spPr>
+          <a:xfrm>
+            <a:off x="7955280" y="4759452"/>
+            <a:ext cx="640080" cy="256032"/>
+          </a:xfrm>
+          <a:prstGeom prst="rect">
+            <a:avLst/>
+          </a:prstGeom>
+          <a:noFill/>
+          <a:ln/>
+        </p:spPr>
+        <p:txBody>
+          <a:bodyPr wrap="square" lIns="0" tIns="0" rIns="0" bIns="0" rtlCol="0" anchor="ctr"/>
+          <a:lstStyle/>
+          <a:p>
+            <a:pPr algn="r" indent="0" marL="0">
+              <a:buNone/>
+            </a:pPr>
+            <a:r>
+              <a:rPr lang="en-US" sz="800" dirty="0">
+                <a:solidFill>
+                  <a:srgbClr val="9A9AB4"/>
+                </a:solidFill>
+                <a:latin typeface="Calibri" pitchFamily="34" charset="0"/>
+                <a:ea typeface="Calibri" pitchFamily="34" charset="-122"/>
+                <a:cs typeface="Calibri" pitchFamily="34" charset="-120"/>
+              </a:rPr>
+              <a:t>22 / 22</a:t>
             </a:r>
             <a:endParaRPr lang="en-US" sz="800" dirty="0"/>
           </a:p>
@@ -19065,7 +22733,7 @@
                 <a:ea typeface="Calibri" pitchFamily="34" charset="-122"/>
                 <a:cs typeface="Calibri" pitchFamily="34" charset="-120"/>
               </a:rPr>
-              <a:t>3 / 20</a:t>
+              <a:t>3 / 22</a:t>
             </a:r>
             <a:endParaRPr lang="en-US" sz="800" dirty="0"/>
           </a:p>
@@ -20342,7 +24010,7 @@
                 <a:ea typeface="Calibri" pitchFamily="34" charset="-122"/>
                 <a:cs typeface="Calibri" pitchFamily="34" charset="-120"/>
               </a:rPr>
-              <a:t>4 / 20</a:t>
+              <a:t>4 / 22</a:t>
             </a:r>
             <a:endParaRPr lang="en-US" sz="800" dirty="0"/>
           </a:p>
@@ -21368,7 +25036,7 @@
                 <a:ea typeface="Calibri" pitchFamily="34" charset="-122"/>
                 <a:cs typeface="Calibri" pitchFamily="34" charset="-120"/>
               </a:rPr>
-              <a:t>5 / 20</a:t>
+              <a:t>5 / 22</a:t>
             </a:r>
             <a:endParaRPr lang="en-US" sz="800" dirty="0"/>
           </a:p>
@@ -23528,7 +27196,7 @@
                 <a:ea typeface="Calibri" pitchFamily="34" charset="-122"/>
                 <a:cs typeface="Calibri" pitchFamily="34" charset="-120"/>
               </a:rPr>
-              <a:t>6 / 20</a:t>
+              <a:t>6 / 22</a:t>
             </a:r>
             <a:endParaRPr lang="en-US" sz="800" dirty="0"/>
           </a:p>
@@ -24922,7 +28590,7 @@
                 <a:ea typeface="Calibri" pitchFamily="34" charset="-122"/>
                 <a:cs typeface="Calibri" pitchFamily="34" charset="-120"/>
               </a:rPr>
-              <a:t>7 / 20</a:t>
+              <a:t>7 / 22</a:t>
             </a:r>
             <a:endParaRPr lang="en-US" sz="800" dirty="0"/>
           </a:p>
@@ -25895,7 +29563,7 @@
                 <a:ea typeface="Calibri" pitchFamily="34" charset="-122"/>
                 <a:cs typeface="Calibri" pitchFamily="34" charset="-120"/>
               </a:rPr>
-              <a:t>8 / 20</a:t>
+              <a:t>8 / 22</a:t>
             </a:r>
             <a:endParaRPr lang="en-US" sz="800" dirty="0"/>
           </a:p>
@@ -27911,7 +31579,7 @@
                 <a:ea typeface="Calibri" pitchFamily="34" charset="-122"/>
                 <a:cs typeface="Calibri" pitchFamily="34" charset="-120"/>
               </a:rPr>
-              <a:t>9 / 20</a:t>
+              <a:t>9 / 22</a:t>
             </a:r>
             <a:endParaRPr lang="en-US" sz="800" dirty="0"/>
           </a:p>

--- a/Cloudera_AI_Landscape.pptx
+++ b/Cloudera_AI_Landscape.pptx
@@ -3299,9 +3299,9 @@
                 <a:solidFill>
                   <a:srgbClr val="EE5A29"/>
                 </a:solidFill>
-                <a:latin typeface="Arial" pitchFamily="34" charset="0"/>
-                <a:ea typeface="Arial" pitchFamily="34" charset="-122"/>
-                <a:cs typeface="Arial" pitchFamily="34" charset="-120"/>
+                <a:latin typeface="Plus Jakarta Sans" pitchFamily="34" charset="0"/>
+                <a:ea typeface="Plus Jakarta Sans" pitchFamily="34" charset="-122"/>
+                <a:cs typeface="Plus Jakarta Sans" pitchFamily="34" charset="-120"/>
               </a:rPr>
               <a:t>CLOUD</a:t>
             </a:r>
@@ -3313,9 +3313,9 @@
                 <a:solidFill>
                   <a:srgbClr val="EE5A29"/>
                 </a:solidFill>
-                <a:latin typeface="Arial" pitchFamily="34" charset="0"/>
-                <a:ea typeface="Arial" pitchFamily="34" charset="-122"/>
-                <a:cs typeface="Arial" pitchFamily="34" charset="-120"/>
+                <a:latin typeface="Plus Jakarta Sans" pitchFamily="34" charset="0"/>
+                <a:ea typeface="Plus Jakarta Sans" pitchFamily="34" charset="-122"/>
+                <a:cs typeface="Plus Jakarta Sans" pitchFamily="34" charset="-120"/>
               </a:rPr>
               <a:t>E</a:t>
             </a:r>
@@ -3327,9 +3327,9 @@
                 <a:solidFill>
                   <a:srgbClr val="EE5A29"/>
                 </a:solidFill>
-                <a:latin typeface="Arial" pitchFamily="34" charset="0"/>
-                <a:ea typeface="Arial" pitchFamily="34" charset="-122"/>
-                <a:cs typeface="Arial" pitchFamily="34" charset="-120"/>
+                <a:latin typeface="Plus Jakarta Sans" pitchFamily="34" charset="0"/>
+                <a:ea typeface="Plus Jakarta Sans" pitchFamily="34" charset="-122"/>
+                <a:cs typeface="Plus Jakarta Sans" pitchFamily="34" charset="-120"/>
               </a:rPr>
               <a:t>RA</a:t>
             </a:r>
@@ -3366,9 +3366,9 @@
                 <a:solidFill>
                   <a:srgbClr val="FFFFFF"/>
                 </a:solidFill>
-                <a:latin typeface="Arial" pitchFamily="34" charset="0"/>
-                <a:ea typeface="Arial" pitchFamily="34" charset="-122"/>
-                <a:cs typeface="Arial" pitchFamily="34" charset="-120"/>
+                <a:latin typeface="Plus Jakarta Sans" pitchFamily="34" charset="0"/>
+                <a:ea typeface="Plus Jakarta Sans" pitchFamily="34" charset="-122"/>
+                <a:cs typeface="Plus Jakarta Sans" pitchFamily="34" charset="-120"/>
               </a:rPr>
               <a:t>Cloudera </a:t>
             </a:r>
@@ -3380,9 +3380,9 @@
                 <a:solidFill>
                   <a:srgbClr val="EE5A29"/>
                 </a:solidFill>
-                <a:latin typeface="Arial" pitchFamily="34" charset="0"/>
-                <a:ea typeface="Arial" pitchFamily="34" charset="-122"/>
-                <a:cs typeface="Arial" pitchFamily="34" charset="-120"/>
+                <a:latin typeface="Plus Jakarta Sans" pitchFamily="34" charset="0"/>
+                <a:ea typeface="Plus Jakarta Sans" pitchFamily="34" charset="-122"/>
+                <a:cs typeface="Plus Jakarta Sans" pitchFamily="34" charset="-120"/>
               </a:rPr>
               <a:t>AI</a:t>
             </a:r>
@@ -3419,9 +3419,9 @@
                 <a:solidFill>
                   <a:srgbClr val="C9C9E6"/>
                 </a:solidFill>
-                <a:latin typeface="Arial" pitchFamily="34" charset="0"/>
-                <a:ea typeface="Arial" pitchFamily="34" charset="-122"/>
-                <a:cs typeface="Arial" pitchFamily="34" charset="-120"/>
+                <a:latin typeface="Plus Jakarta Sans" pitchFamily="34" charset="0"/>
+                <a:ea typeface="Plus Jakarta Sans" pitchFamily="34" charset="-122"/>
+                <a:cs typeface="Plus Jakarta Sans" pitchFamily="34" charset="-120"/>
               </a:rPr>
               <a:t>The Agentic Era</a:t>
             </a:r>
@@ -3461,9 +3461,9 @@
                 <a:solidFill>
                   <a:srgbClr val="C9C9E6"/>
                 </a:solidFill>
-                <a:latin typeface="Calibri" pitchFamily="34" charset="0"/>
-                <a:ea typeface="Calibri" pitchFamily="34" charset="-122"/>
-                <a:cs typeface="Calibri" pitchFamily="34" charset="-120"/>
+                <a:latin typeface="Plus Jakarta Sans" pitchFamily="34" charset="0"/>
+                <a:ea typeface="Plus Jakarta Sans" pitchFamily="34" charset="-122"/>
+                <a:cs typeface="Plus Jakarta Sans" pitchFamily="34" charset="-120"/>
               </a:rPr>
               <a:t>The latest in the AI landscape — and the anatomy of the AI agent: tools, memory, and control.</a:t>
             </a:r>
@@ -3500,9 +3500,9 @@
                 <a:solidFill>
                   <a:srgbClr val="EE5A29"/>
                 </a:solidFill>
-                <a:latin typeface="Calibri" pitchFamily="34" charset="0"/>
-                <a:ea typeface="Calibri" pitchFamily="34" charset="-122"/>
-                <a:cs typeface="Calibri" pitchFamily="34" charset="-120"/>
+                <a:latin typeface="Plus Jakarta Sans" pitchFamily="34" charset="0"/>
+                <a:ea typeface="Plus Jakarta Sans" pitchFamily="34" charset="-122"/>
+                <a:cs typeface="Plus Jakarta Sans" pitchFamily="34" charset="-120"/>
               </a:rPr>
               <a:t>JUNE 2026</a:t>
             </a:r>
@@ -3571,9 +3571,9 @@
                 <a:solidFill>
                   <a:srgbClr val="EE5A29"/>
                 </a:solidFill>
-                <a:latin typeface="Arial" pitchFamily="34" charset="0"/>
-                <a:ea typeface="Arial" pitchFamily="34" charset="-122"/>
-                <a:cs typeface="Arial" pitchFamily="34" charset="-120"/>
+                <a:latin typeface="Plus Jakarta Sans" pitchFamily="34" charset="0"/>
+                <a:ea typeface="Plus Jakarta Sans" pitchFamily="34" charset="-122"/>
+                <a:cs typeface="Plus Jakarta Sans" pitchFamily="34" charset="-120"/>
               </a:rPr>
               <a:t>CLOUD</a:t>
             </a:r>
@@ -3585,9 +3585,9 @@
                 <a:solidFill>
                   <a:srgbClr val="EE5A29"/>
                 </a:solidFill>
-                <a:latin typeface="Arial" pitchFamily="34" charset="0"/>
-                <a:ea typeface="Arial" pitchFamily="34" charset="-122"/>
-                <a:cs typeface="Arial" pitchFamily="34" charset="-120"/>
+                <a:latin typeface="Plus Jakarta Sans" pitchFamily="34" charset="0"/>
+                <a:ea typeface="Plus Jakarta Sans" pitchFamily="34" charset="-122"/>
+                <a:cs typeface="Plus Jakarta Sans" pitchFamily="34" charset="-120"/>
               </a:rPr>
               <a:t>E</a:t>
             </a:r>
@@ -3599,9 +3599,9 @@
                 <a:solidFill>
                   <a:srgbClr val="EE5A29"/>
                 </a:solidFill>
-                <a:latin typeface="Arial" pitchFamily="34" charset="0"/>
-                <a:ea typeface="Arial" pitchFamily="34" charset="-122"/>
-                <a:cs typeface="Arial" pitchFamily="34" charset="-120"/>
+                <a:latin typeface="Plus Jakarta Sans" pitchFamily="34" charset="0"/>
+                <a:ea typeface="Plus Jakarta Sans" pitchFamily="34" charset="-122"/>
+                <a:cs typeface="Plus Jakarta Sans" pitchFamily="34" charset="-120"/>
               </a:rPr>
               <a:t>RA</a:t>
             </a:r>
@@ -3658,9 +3658,9 @@
                 <a:solidFill>
                   <a:srgbClr val="EE5A29"/>
                 </a:solidFill>
-                <a:latin typeface="Calibri" pitchFamily="34" charset="0"/>
-                <a:ea typeface="Calibri" pitchFamily="34" charset="-122"/>
-                <a:cs typeface="Calibri" pitchFamily="34" charset="-120"/>
+                <a:latin typeface="Plus Jakarta Sans" pitchFamily="34" charset="0"/>
+                <a:ea typeface="Plus Jakarta Sans" pitchFamily="34" charset="-122"/>
+                <a:cs typeface="Plus Jakarta Sans" pitchFamily="34" charset="-120"/>
               </a:rPr>
               <a:t>MEMORY</a:t>
             </a:r>
@@ -3697,9 +3697,9 @@
                 <a:solidFill>
                   <a:srgbClr val="15154A"/>
                 </a:solidFill>
-                <a:latin typeface="Arial" pitchFamily="34" charset="0"/>
-                <a:ea typeface="Arial" pitchFamily="34" charset="-122"/>
-                <a:cs typeface="Arial" pitchFamily="34" charset="-120"/>
+                <a:latin typeface="Plus Jakarta Sans" pitchFamily="34" charset="0"/>
+                <a:ea typeface="Plus Jakarta Sans" pitchFamily="34" charset="-122"/>
+                <a:cs typeface="Plus Jakarta Sans" pitchFamily="34" charset="-120"/>
               </a:rPr>
               <a:t>Four Overlapping Domains</a:t>
             </a:r>
@@ -3810,9 +3810,9 @@
                 <a:solidFill>
                   <a:srgbClr val="15154A"/>
                 </a:solidFill>
-                <a:latin typeface="Arial" pitchFamily="34" charset="0"/>
-                <a:ea typeface="Arial" pitchFamily="34" charset="-122"/>
-                <a:cs typeface="Arial" pitchFamily="34" charset="-120"/>
+                <a:latin typeface="Plus Jakarta Sans" pitchFamily="34" charset="0"/>
+                <a:ea typeface="Plus Jakarta Sans" pitchFamily="34" charset="-122"/>
+                <a:cs typeface="Plus Jakarta Sans" pitchFamily="34" charset="-120"/>
               </a:rPr>
               <a:t>Agent memory</a:t>
             </a:r>
@@ -3852,9 +3852,9 @@
                 <a:solidFill>
                   <a:srgbClr val="5A5A72"/>
                 </a:solidFill>
-                <a:latin typeface="Calibri" pitchFamily="34" charset="0"/>
-                <a:ea typeface="Calibri" pitchFamily="34" charset="-122"/>
-                <a:cs typeface="Calibri" pitchFamily="34" charset="-120"/>
+                <a:latin typeface="Plus Jakarta Sans" pitchFamily="34" charset="0"/>
+                <a:ea typeface="Plus Jakarta Sans" pitchFamily="34" charset="-122"/>
+                <a:cs typeface="Plus Jakarta Sans" pitchFamily="34" charset="-120"/>
               </a:rPr>
               <a:t>Persistent, self-evolving cognitive state — integrates factual knowledge &amp; past experience over time.</a:t>
             </a:r>
@@ -3965,9 +3965,9 @@
                 <a:solidFill>
                   <a:srgbClr val="15154A"/>
                 </a:solidFill>
-                <a:latin typeface="Arial" pitchFamily="34" charset="0"/>
-                <a:ea typeface="Arial" pitchFamily="34" charset="-122"/>
-                <a:cs typeface="Arial" pitchFamily="34" charset="-120"/>
+                <a:latin typeface="Plus Jakarta Sans" pitchFamily="34" charset="0"/>
+                <a:ea typeface="Plus Jakarta Sans" pitchFamily="34" charset="-122"/>
+                <a:cs typeface="Plus Jakarta Sans" pitchFamily="34" charset="-120"/>
               </a:rPr>
               <a:t>LLM memory</a:t>
             </a:r>
@@ -4007,9 +4007,9 @@
                 <a:solidFill>
                   <a:srgbClr val="5A5A72"/>
                 </a:solidFill>
-                <a:latin typeface="Calibri" pitchFamily="34" charset="0"/>
-                <a:ea typeface="Calibri" pitchFamily="34" charset="-122"/>
-                <a:cs typeface="Calibri" pitchFamily="34" charset="-120"/>
+                <a:latin typeface="Plus Jakarta Sans" pitchFamily="34" charset="0"/>
+                <a:ea typeface="Plus Jakarta Sans" pitchFamily="34" charset="-122"/>
+                <a:cs typeface="Plus Jakarta Sans" pitchFamily="34" charset="-120"/>
               </a:rPr>
               <a:t>Architectural optimizations — context-window expansion, KV compression/reuse, long-context processing.</a:t>
             </a:r>
@@ -4120,9 +4120,9 @@
                 <a:solidFill>
                   <a:srgbClr val="15154A"/>
                 </a:solidFill>
-                <a:latin typeface="Arial" pitchFamily="34" charset="0"/>
-                <a:ea typeface="Arial" pitchFamily="34" charset="-122"/>
-                <a:cs typeface="Arial" pitchFamily="34" charset="-120"/>
+                <a:latin typeface="Plus Jakarta Sans" pitchFamily="34" charset="0"/>
+                <a:ea typeface="Plus Jakarta Sans" pitchFamily="34" charset="-122"/>
+                <a:cs typeface="Plus Jakarta Sans" pitchFamily="34" charset="-120"/>
               </a:rPr>
               <a:t>RAG</a:t>
             </a:r>
@@ -4162,9 +4162,9 @@
                 <a:solidFill>
                   <a:srgbClr val="5A5A72"/>
                 </a:solidFill>
-                <a:latin typeface="Calibri" pitchFamily="34" charset="0"/>
-                <a:ea typeface="Calibri" pitchFamily="34" charset="-122"/>
-                <a:cs typeface="Calibri" pitchFamily="34" charset="-120"/>
+                <a:latin typeface="Plus Jakarta Sans" pitchFamily="34" charset="0"/>
+                <a:ea typeface="Plus Jakarta Sans" pitchFamily="34" charset="-122"/>
+                <a:cs typeface="Plus Jakarta Sans" pitchFamily="34" charset="-120"/>
               </a:rPr>
               <a:t>Static knowledge access — retrieving fixed information from external databases to augment responses.</a:t>
             </a:r>
@@ -4275,9 +4275,9 @@
                 <a:solidFill>
                   <a:srgbClr val="15154A"/>
                 </a:solidFill>
-                <a:latin typeface="Arial" pitchFamily="34" charset="0"/>
-                <a:ea typeface="Arial" pitchFamily="34" charset="-122"/>
-                <a:cs typeface="Arial" pitchFamily="34" charset="-120"/>
+                <a:latin typeface="Plus Jakarta Sans" pitchFamily="34" charset="0"/>
+                <a:ea typeface="Plus Jakarta Sans" pitchFamily="34" charset="-122"/>
+                <a:cs typeface="Plus Jakarta Sans" pitchFamily="34" charset="-120"/>
               </a:rPr>
               <a:t>Context engineering</a:t>
             </a:r>
@@ -4317,9 +4317,9 @@
                 <a:solidFill>
                   <a:srgbClr val="5A5A72"/>
                 </a:solidFill>
-                <a:latin typeface="Calibri" pitchFamily="34" charset="0"/>
-                <a:ea typeface="Calibri" pitchFamily="34" charset="-122"/>
-                <a:cs typeface="Calibri" pitchFamily="34" charset="-120"/>
+                <a:latin typeface="Plus Jakarta Sans" pitchFamily="34" charset="0"/>
+                <a:ea typeface="Plus Jakarta Sans" pitchFamily="34" charset="-122"/>
+                <a:cs typeface="Plus Jakarta Sans" pitchFamily="34" charset="-120"/>
               </a:rPr>
               <a:t>Transient resource management — the prompt, tools &amp; protocols set up for one temporary task.</a:t>
             </a:r>
@@ -4356,9 +4356,9 @@
                 <a:solidFill>
                   <a:srgbClr val="9A9AB4"/>
                 </a:solidFill>
-                <a:latin typeface="Calibri" pitchFamily="34" charset="0"/>
-                <a:ea typeface="Calibri" pitchFamily="34" charset="-122"/>
-                <a:cs typeface="Calibri" pitchFamily="34" charset="-120"/>
+                <a:latin typeface="Plus Jakarta Sans" pitchFamily="34" charset="0"/>
+                <a:ea typeface="Plus Jakarta Sans" pitchFamily="34" charset="-122"/>
+                <a:cs typeface="Plus Jakarta Sans" pitchFamily="34" charset="-120"/>
               </a:rPr>
               <a:t>©2026 Cloudera, Inc. All Rights Reserved.</a:t>
             </a:r>
@@ -4395,9 +4395,9 @@
                 <a:solidFill>
                   <a:srgbClr val="9A9AB4"/>
                 </a:solidFill>
-                <a:latin typeface="Calibri" pitchFamily="34" charset="0"/>
-                <a:ea typeface="Calibri" pitchFamily="34" charset="-122"/>
-                <a:cs typeface="Calibri" pitchFamily="34" charset="-120"/>
+                <a:latin typeface="Plus Jakarta Sans" pitchFamily="34" charset="0"/>
+                <a:ea typeface="Plus Jakarta Sans" pitchFamily="34" charset="-122"/>
+                <a:cs typeface="Plus Jakarta Sans" pitchFamily="34" charset="-120"/>
               </a:rPr>
               <a:t>10 / 22</a:t>
             </a:r>
@@ -4466,9 +4466,9 @@
                 <a:solidFill>
                   <a:srgbClr val="EE5A29"/>
                 </a:solidFill>
-                <a:latin typeface="Arial" pitchFamily="34" charset="0"/>
-                <a:ea typeface="Arial" pitchFamily="34" charset="-122"/>
-                <a:cs typeface="Arial" pitchFamily="34" charset="-120"/>
+                <a:latin typeface="Plus Jakarta Sans" pitchFamily="34" charset="0"/>
+                <a:ea typeface="Plus Jakarta Sans" pitchFamily="34" charset="-122"/>
+                <a:cs typeface="Plus Jakarta Sans" pitchFamily="34" charset="-120"/>
               </a:rPr>
               <a:t>CLOUD</a:t>
             </a:r>
@@ -4480,9 +4480,9 @@
                 <a:solidFill>
                   <a:srgbClr val="EE5A29"/>
                 </a:solidFill>
-                <a:latin typeface="Arial" pitchFamily="34" charset="0"/>
-                <a:ea typeface="Arial" pitchFamily="34" charset="-122"/>
-                <a:cs typeface="Arial" pitchFamily="34" charset="-120"/>
+                <a:latin typeface="Plus Jakarta Sans" pitchFamily="34" charset="0"/>
+                <a:ea typeface="Plus Jakarta Sans" pitchFamily="34" charset="-122"/>
+                <a:cs typeface="Plus Jakarta Sans" pitchFamily="34" charset="-120"/>
               </a:rPr>
               <a:t>E</a:t>
             </a:r>
@@ -4494,9 +4494,9 @@
                 <a:solidFill>
                   <a:srgbClr val="EE5A29"/>
                 </a:solidFill>
-                <a:latin typeface="Arial" pitchFamily="34" charset="0"/>
-                <a:ea typeface="Arial" pitchFamily="34" charset="-122"/>
-                <a:cs typeface="Arial" pitchFamily="34" charset="-120"/>
+                <a:latin typeface="Plus Jakarta Sans" pitchFamily="34" charset="0"/>
+                <a:ea typeface="Plus Jakarta Sans" pitchFamily="34" charset="-122"/>
+                <a:cs typeface="Plus Jakarta Sans" pitchFamily="34" charset="-120"/>
               </a:rPr>
               <a:t>RA</a:t>
             </a:r>
@@ -4553,9 +4553,9 @@
                 <a:solidFill>
                   <a:srgbClr val="EE5A29"/>
                 </a:solidFill>
-                <a:latin typeface="Calibri" pitchFamily="34" charset="0"/>
-                <a:ea typeface="Calibri" pitchFamily="34" charset="-122"/>
-                <a:cs typeface="Calibri" pitchFamily="34" charset="-120"/>
+                <a:latin typeface="Plus Jakarta Sans" pitchFamily="34" charset="0"/>
+                <a:ea typeface="Plus Jakarta Sans" pitchFamily="34" charset="-122"/>
+                <a:cs typeface="Plus Jakarta Sans" pitchFamily="34" charset="-120"/>
               </a:rPr>
               <a:t>MEMORY</a:t>
             </a:r>
@@ -4592,9 +4592,9 @@
                 <a:solidFill>
                   <a:srgbClr val="15154A"/>
                 </a:solidFill>
-                <a:latin typeface="Arial" pitchFamily="34" charset="0"/>
-                <a:ea typeface="Arial" pitchFamily="34" charset="-122"/>
-                <a:cs typeface="Arial" pitchFamily="34" charset="-120"/>
+                <a:latin typeface="Plus Jakarta Sans" pitchFamily="34" charset="0"/>
+                <a:ea typeface="Plus Jakarta Sans" pitchFamily="34" charset="-122"/>
+                <a:cs typeface="Plus Jakarta Sans" pitchFamily="34" charset="-120"/>
               </a:rPr>
               <a:t>Three Functions of Memory</a:t>
             </a:r>
@@ -4665,9 +4665,9 @@
                 <a:solidFill>
                   <a:srgbClr val="15154A"/>
                 </a:solidFill>
-                <a:latin typeface="Arial" pitchFamily="34" charset="0"/>
-                <a:ea typeface="Arial" pitchFamily="34" charset="-122"/>
-                <a:cs typeface="Arial" pitchFamily="34" charset="-120"/>
+                <a:latin typeface="Plus Jakarta Sans" pitchFamily="34" charset="0"/>
+                <a:ea typeface="Plus Jakarta Sans" pitchFamily="34" charset="-122"/>
+                <a:cs typeface="Plus Jakarta Sans" pitchFamily="34" charset="-120"/>
               </a:rPr>
               <a:t>Factual (semantic)</a:t>
             </a:r>
@@ -4707,9 +4707,9 @@
                 <a:solidFill>
                   <a:srgbClr val="5A5A72"/>
                 </a:solidFill>
-                <a:latin typeface="Calibri" pitchFamily="34" charset="0"/>
-                <a:ea typeface="Calibri" pitchFamily="34" charset="-122"/>
-                <a:cs typeface="Calibri" pitchFamily="34" charset="-120"/>
+                <a:latin typeface="Plus Jakarta Sans" pitchFamily="34" charset="0"/>
+                <a:ea typeface="Plus Jakarta Sans" pitchFamily="34" charset="-122"/>
+                <a:cs typeface="Plus Jakarta Sans" pitchFamily="34" charset="-120"/>
               </a:rPr>
               <a:t>Objective truths &amp; general knowledge; helps the agent understand entities. Often in the model’s parametric memory.</a:t>
             </a:r>
@@ -4780,9 +4780,9 @@
                 <a:solidFill>
                   <a:srgbClr val="15154A"/>
                 </a:solidFill>
-                <a:latin typeface="Arial" pitchFamily="34" charset="0"/>
-                <a:ea typeface="Arial" pitchFamily="34" charset="-122"/>
-                <a:cs typeface="Arial" pitchFamily="34" charset="-120"/>
+                <a:latin typeface="Plus Jakarta Sans" pitchFamily="34" charset="0"/>
+                <a:ea typeface="Plus Jakarta Sans" pitchFamily="34" charset="-122"/>
+                <a:cs typeface="Plus Jakarta Sans" pitchFamily="34" charset="-120"/>
               </a:rPr>
               <a:t>Experiential (episodic)</a:t>
             </a:r>
@@ -4822,9 +4822,9 @@
                 <a:solidFill>
                   <a:srgbClr val="5A5A72"/>
                 </a:solidFill>
-                <a:latin typeface="Calibri" pitchFamily="34" charset="0"/>
-                <a:ea typeface="Calibri" pitchFamily="34" charset="-122"/>
-                <a:cs typeface="Calibri" pitchFamily="34" charset="-120"/>
+                <a:latin typeface="Plus Jakarta Sans" pitchFamily="34" charset="0"/>
+                <a:ea typeface="Plus Jakarta Sans" pitchFamily="34" charset="-122"/>
+                <a:cs typeface="Plus Jakarta Sans" pitchFamily="34" charset="-120"/>
               </a:rPr>
               <a:t>Specific past events &amp; interactions; stored in a vector DB; key to personalization &amp; learning from mistakes.</a:t>
             </a:r>
@@ -4895,9 +4895,9 @@
                 <a:solidFill>
                   <a:srgbClr val="15154A"/>
                 </a:solidFill>
-                <a:latin typeface="Arial" pitchFamily="34" charset="0"/>
-                <a:ea typeface="Arial" pitchFamily="34" charset="-122"/>
-                <a:cs typeface="Arial" pitchFamily="34" charset="-120"/>
+                <a:latin typeface="Plus Jakarta Sans" pitchFamily="34" charset="0"/>
+                <a:ea typeface="Plus Jakarta Sans" pitchFamily="34" charset="-122"/>
+                <a:cs typeface="Plus Jakarta Sans" pitchFamily="34" charset="-120"/>
               </a:rPr>
               <a:t>Working</a:t>
             </a:r>
@@ -4937,9 +4937,9 @@
                 <a:solidFill>
                   <a:srgbClr val="5A5A72"/>
                 </a:solidFill>
-                <a:latin typeface="Calibri" pitchFamily="34" charset="0"/>
-                <a:ea typeface="Calibri" pitchFamily="34" charset="-122"/>
-                <a:cs typeface="Calibri" pitchFamily="34" charset="-120"/>
+                <a:latin typeface="Plus Jakarta Sans" pitchFamily="34" charset="0"/>
+                <a:ea typeface="Plus Jakarta Sans" pitchFamily="34" charset="-122"/>
+                <a:cs typeface="Plus Jakarta Sans" pitchFamily="34" charset="-120"/>
               </a:rPr>
               <a:t>Temporary scratchpad for the current task — intermediate reasoning; cleared or promoted to long-term after.</a:t>
             </a:r>
@@ -4998,9 +4998,9 @@
                 <a:solidFill>
                   <a:srgbClr val="15154A"/>
                 </a:solidFill>
-                <a:latin typeface="Arial" pitchFamily="34" charset="0"/>
-                <a:ea typeface="Arial" pitchFamily="34" charset="-122"/>
-                <a:cs typeface="Arial" pitchFamily="34" charset="-120"/>
+                <a:latin typeface="Plus Jakarta Sans" pitchFamily="34" charset="0"/>
+                <a:ea typeface="Plus Jakarta Sans" pitchFamily="34" charset="-122"/>
+                <a:cs typeface="Plus Jakarta Sans" pitchFamily="34" charset="-120"/>
               </a:rPr>
               <a:t>Experiential memory comes in flavors</a:t>
             </a:r>
@@ -5064,9 +5064,9 @@
                 <a:solidFill>
                   <a:srgbClr val="15154A"/>
                 </a:solidFill>
-                <a:latin typeface="Calibri" pitchFamily="34" charset="0"/>
-                <a:ea typeface="Calibri" pitchFamily="34" charset="-122"/>
-                <a:cs typeface="Calibri" pitchFamily="34" charset="-120"/>
+                <a:latin typeface="Plus Jakarta Sans" pitchFamily="34" charset="0"/>
+                <a:ea typeface="Plus Jakarta Sans" pitchFamily="34" charset="-122"/>
+                <a:cs typeface="Plus Jakarta Sans" pitchFamily="34" charset="-120"/>
               </a:rPr>
               <a:t>Case-based</a:t>
             </a:r>
@@ -5103,9 +5103,9 @@
                 <a:solidFill>
                   <a:srgbClr val="EE5A29"/>
                 </a:solidFill>
-                <a:latin typeface="Arial" pitchFamily="34" charset="0"/>
-                <a:ea typeface="Arial" pitchFamily="34" charset="-122"/>
-                <a:cs typeface="Arial" pitchFamily="34" charset="-120"/>
+                <a:latin typeface="Plus Jakarta Sans" pitchFamily="34" charset="0"/>
+                <a:ea typeface="Plus Jakarta Sans" pitchFamily="34" charset="-122"/>
+                <a:cs typeface="Plus Jakarta Sans" pitchFamily="34" charset="-120"/>
               </a:rPr>
               <a:t>→</a:t>
             </a:r>
@@ -5169,9 +5169,9 @@
                 <a:solidFill>
                   <a:srgbClr val="15154A"/>
                 </a:solidFill>
-                <a:latin typeface="Calibri" pitchFamily="34" charset="0"/>
-                <a:ea typeface="Calibri" pitchFamily="34" charset="-122"/>
-                <a:cs typeface="Calibri" pitchFamily="34" charset="-120"/>
+                <a:latin typeface="Plus Jakarta Sans" pitchFamily="34" charset="0"/>
+                <a:ea typeface="Plus Jakarta Sans" pitchFamily="34" charset="-122"/>
+                <a:cs typeface="Plus Jakarta Sans" pitchFamily="34" charset="-120"/>
               </a:rPr>
               <a:t>Skill-based</a:t>
             </a:r>
@@ -5208,9 +5208,9 @@
                 <a:solidFill>
                   <a:srgbClr val="EE5A29"/>
                 </a:solidFill>
-                <a:latin typeface="Arial" pitchFamily="34" charset="0"/>
-                <a:ea typeface="Arial" pitchFamily="34" charset="-122"/>
-                <a:cs typeface="Arial" pitchFamily="34" charset="-120"/>
+                <a:latin typeface="Plus Jakarta Sans" pitchFamily="34" charset="0"/>
+                <a:ea typeface="Plus Jakarta Sans" pitchFamily="34" charset="-122"/>
+                <a:cs typeface="Plus Jakarta Sans" pitchFamily="34" charset="-120"/>
               </a:rPr>
               <a:t>→</a:t>
             </a:r>
@@ -5274,9 +5274,9 @@
                 <a:solidFill>
                   <a:srgbClr val="15154A"/>
                 </a:solidFill>
-                <a:latin typeface="Calibri" pitchFamily="34" charset="0"/>
-                <a:ea typeface="Calibri" pitchFamily="34" charset="-122"/>
-                <a:cs typeface="Calibri" pitchFamily="34" charset="-120"/>
+                <a:latin typeface="Plus Jakarta Sans" pitchFamily="34" charset="0"/>
+                <a:ea typeface="Plus Jakarta Sans" pitchFamily="34" charset="-122"/>
+                <a:cs typeface="Plus Jakarta Sans" pitchFamily="34" charset="-120"/>
               </a:rPr>
               <a:t>Strategy-based</a:t>
             </a:r>
@@ -5313,9 +5313,9 @@
                 <a:solidFill>
                   <a:srgbClr val="EE5A29"/>
                 </a:solidFill>
-                <a:latin typeface="Arial" pitchFamily="34" charset="0"/>
-                <a:ea typeface="Arial" pitchFamily="34" charset="-122"/>
-                <a:cs typeface="Arial" pitchFamily="34" charset="-120"/>
+                <a:latin typeface="Plus Jakarta Sans" pitchFamily="34" charset="0"/>
+                <a:ea typeface="Plus Jakarta Sans" pitchFamily="34" charset="-122"/>
+                <a:cs typeface="Plus Jakarta Sans" pitchFamily="34" charset="-120"/>
               </a:rPr>
               <a:t>→</a:t>
             </a:r>
@@ -5379,9 +5379,9 @@
                 <a:solidFill>
                   <a:srgbClr val="15154A"/>
                 </a:solidFill>
-                <a:latin typeface="Calibri" pitchFamily="34" charset="0"/>
-                <a:ea typeface="Calibri" pitchFamily="34" charset="-122"/>
-                <a:cs typeface="Calibri" pitchFamily="34" charset="-120"/>
+                <a:latin typeface="Plus Jakarta Sans" pitchFamily="34" charset="0"/>
+                <a:ea typeface="Plus Jakarta Sans" pitchFamily="34" charset="-122"/>
+                <a:cs typeface="Plus Jakarta Sans" pitchFamily="34" charset="-120"/>
               </a:rPr>
               <a:t>Hybrid</a:t>
             </a:r>
@@ -5418,9 +5418,9 @@
                 <a:solidFill>
                   <a:srgbClr val="9A9AB4"/>
                 </a:solidFill>
-                <a:latin typeface="Calibri" pitchFamily="34" charset="0"/>
-                <a:ea typeface="Calibri" pitchFamily="34" charset="-122"/>
-                <a:cs typeface="Calibri" pitchFamily="34" charset="-120"/>
+                <a:latin typeface="Plus Jakarta Sans" pitchFamily="34" charset="0"/>
+                <a:ea typeface="Plus Jakarta Sans" pitchFamily="34" charset="-122"/>
+                <a:cs typeface="Plus Jakarta Sans" pitchFamily="34" charset="-120"/>
               </a:rPr>
               <a:t>©2026 Cloudera, Inc. All Rights Reserved.</a:t>
             </a:r>
@@ -5457,9 +5457,9 @@
                 <a:solidFill>
                   <a:srgbClr val="9A9AB4"/>
                 </a:solidFill>
-                <a:latin typeface="Calibri" pitchFamily="34" charset="0"/>
-                <a:ea typeface="Calibri" pitchFamily="34" charset="-122"/>
-                <a:cs typeface="Calibri" pitchFamily="34" charset="-120"/>
+                <a:latin typeface="Plus Jakarta Sans" pitchFamily="34" charset="0"/>
+                <a:ea typeface="Plus Jakarta Sans" pitchFamily="34" charset="-122"/>
+                <a:cs typeface="Plus Jakarta Sans" pitchFamily="34" charset="-120"/>
               </a:rPr>
               <a:t>11 / 22</a:t>
             </a:r>
@@ -5528,9 +5528,9 @@
                 <a:solidFill>
                   <a:srgbClr val="EE5A29"/>
                 </a:solidFill>
-                <a:latin typeface="Arial" pitchFamily="34" charset="0"/>
-                <a:ea typeface="Arial" pitchFamily="34" charset="-122"/>
-                <a:cs typeface="Arial" pitchFamily="34" charset="-120"/>
+                <a:latin typeface="Plus Jakarta Sans" pitchFamily="34" charset="0"/>
+                <a:ea typeface="Plus Jakarta Sans" pitchFamily="34" charset="-122"/>
+                <a:cs typeface="Plus Jakarta Sans" pitchFamily="34" charset="-120"/>
               </a:rPr>
               <a:t>CLOUD</a:t>
             </a:r>
@@ -5542,9 +5542,9 @@
                 <a:solidFill>
                   <a:srgbClr val="EE5A29"/>
                 </a:solidFill>
-                <a:latin typeface="Arial" pitchFamily="34" charset="0"/>
-                <a:ea typeface="Arial" pitchFamily="34" charset="-122"/>
-                <a:cs typeface="Arial" pitchFamily="34" charset="-120"/>
+                <a:latin typeface="Plus Jakarta Sans" pitchFamily="34" charset="0"/>
+                <a:ea typeface="Plus Jakarta Sans" pitchFamily="34" charset="-122"/>
+                <a:cs typeface="Plus Jakarta Sans" pitchFamily="34" charset="-120"/>
               </a:rPr>
               <a:t>E</a:t>
             </a:r>
@@ -5556,9 +5556,9 @@
                 <a:solidFill>
                   <a:srgbClr val="EE5A29"/>
                 </a:solidFill>
-                <a:latin typeface="Arial" pitchFamily="34" charset="0"/>
-                <a:ea typeface="Arial" pitchFamily="34" charset="-122"/>
-                <a:cs typeface="Arial" pitchFamily="34" charset="-120"/>
+                <a:latin typeface="Plus Jakarta Sans" pitchFamily="34" charset="0"/>
+                <a:ea typeface="Plus Jakarta Sans" pitchFamily="34" charset="-122"/>
+                <a:cs typeface="Plus Jakarta Sans" pitchFamily="34" charset="-120"/>
               </a:rPr>
               <a:t>RA</a:t>
             </a:r>
@@ -5615,9 +5615,9 @@
                 <a:solidFill>
                   <a:srgbClr val="EE5A29"/>
                 </a:solidFill>
-                <a:latin typeface="Calibri" pitchFamily="34" charset="0"/>
-                <a:ea typeface="Calibri" pitchFamily="34" charset="-122"/>
-                <a:cs typeface="Calibri" pitchFamily="34" charset="-120"/>
+                <a:latin typeface="Plus Jakarta Sans" pitchFamily="34" charset="0"/>
+                <a:ea typeface="Plus Jakarta Sans" pitchFamily="34" charset="-122"/>
+                <a:cs typeface="Plus Jakarta Sans" pitchFamily="34" charset="-120"/>
               </a:rPr>
               <a:t>MEMORY</a:t>
             </a:r>
@@ -5654,9 +5654,9 @@
                 <a:solidFill>
                   <a:srgbClr val="15154A"/>
                 </a:solidFill>
-                <a:latin typeface="Arial" pitchFamily="34" charset="0"/>
-                <a:ea typeface="Arial" pitchFamily="34" charset="-122"/>
-                <a:cs typeface="Arial" pitchFamily="34" charset="-120"/>
+                <a:latin typeface="Plus Jakarta Sans" pitchFamily="34" charset="0"/>
+                <a:ea typeface="Plus Jakarta Sans" pitchFamily="34" charset="-122"/>
+                <a:cs typeface="Plus Jakarta Sans" pitchFamily="34" charset="-120"/>
               </a:rPr>
               <a:t>Recent Memory Mechanisms</a:t>
             </a:r>
@@ -5705,16 +5705,16 @@
                           <a:solidFill>
                             <a:srgbClr val="FFFFFF"/>
                           </a:solidFill>
-                          <a:latin typeface="Calibri" pitchFamily="34" charset="0"/>
-                          <a:ea typeface="Calibri" pitchFamily="34" charset="-122"/>
-                          <a:cs typeface="Calibri" pitchFamily="34" charset="-120"/>
+                          <a:latin typeface="Plus Jakarta Sans" pitchFamily="34" charset="0"/>
+                          <a:ea typeface="Plus Jakarta Sans" pitchFamily="34" charset="-122"/>
+                          <a:cs typeface="Plus Jakarta Sans" pitchFamily="34" charset="-120"/>
                         </a:rPr>
                         <a:t>Feature</a:t>
                       </a:r>
                       <a:endParaRPr lang="en-US" sz="1100" dirty="0">
-                        <a:latin typeface="Calibri" charset="0"/>
-                        <a:ea typeface="Calibri" charset="0"/>
-                        <a:cs typeface="Calibri" charset="0"/>
+                        <a:latin typeface="Plus Jakarta Sans" charset="0"/>
+                        <a:ea typeface="Plus Jakarta Sans" charset="0"/>
+                        <a:cs typeface="Plus Jakarta Sans" charset="0"/>
                       </a:endParaRPr>
                     </a:p>
                   </a:txBody>
@@ -5773,16 +5773,16 @@
                           <a:solidFill>
                             <a:srgbClr val="FFFFFF"/>
                           </a:solidFill>
-                          <a:latin typeface="Calibri" pitchFamily="34" charset="0"/>
-                          <a:ea typeface="Calibri" pitchFamily="34" charset="-122"/>
-                          <a:cs typeface="Calibri" pitchFamily="34" charset="-120"/>
+                          <a:latin typeface="Plus Jakarta Sans" pitchFamily="34" charset="0"/>
+                          <a:ea typeface="Plus Jakarta Sans" pitchFamily="34" charset="-122"/>
+                          <a:cs typeface="Plus Jakarta Sans" pitchFamily="34" charset="-120"/>
                         </a:rPr>
                         <a:t>LightMem</a:t>
                       </a:r>
                       <a:endParaRPr lang="en-US" sz="1100" dirty="0">
-                        <a:latin typeface="Calibri" charset="0"/>
-                        <a:ea typeface="Calibri" charset="0"/>
-                        <a:cs typeface="Calibri" charset="0"/>
+                        <a:latin typeface="Plus Jakarta Sans" charset="0"/>
+                        <a:ea typeface="Plus Jakarta Sans" charset="0"/>
+                        <a:cs typeface="Plus Jakarta Sans" charset="0"/>
                       </a:endParaRPr>
                     </a:p>
                   </a:txBody>
@@ -5841,16 +5841,16 @@
                           <a:solidFill>
                             <a:srgbClr val="FFFFFF"/>
                           </a:solidFill>
-                          <a:latin typeface="Calibri" pitchFamily="34" charset="0"/>
-                          <a:ea typeface="Calibri" pitchFamily="34" charset="-122"/>
-                          <a:cs typeface="Calibri" pitchFamily="34" charset="-120"/>
+                          <a:latin typeface="Plus Jakarta Sans" pitchFamily="34" charset="0"/>
+                          <a:ea typeface="Plus Jakarta Sans" pitchFamily="34" charset="-122"/>
+                          <a:cs typeface="Plus Jakarta Sans" pitchFamily="34" charset="-120"/>
                         </a:rPr>
                         <a:t>MemSearch</a:t>
                       </a:r>
                       <a:endParaRPr lang="en-US" sz="1100" dirty="0">
-                        <a:latin typeface="Calibri" charset="0"/>
-                        <a:ea typeface="Calibri" charset="0"/>
-                        <a:cs typeface="Calibri" charset="0"/>
+                        <a:latin typeface="Plus Jakarta Sans" charset="0"/>
+                        <a:ea typeface="Plus Jakarta Sans" charset="0"/>
+                        <a:cs typeface="Plus Jakarta Sans" charset="0"/>
                       </a:endParaRPr>
                     </a:p>
                   </a:txBody>
@@ -5911,16 +5911,16 @@
                           <a:solidFill>
                             <a:srgbClr val="15154A"/>
                           </a:solidFill>
-                          <a:latin typeface="Calibri" pitchFamily="34" charset="0"/>
-                          <a:ea typeface="Calibri" pitchFamily="34" charset="-122"/>
-                          <a:cs typeface="Calibri" pitchFamily="34" charset="-120"/>
+                          <a:latin typeface="Plus Jakarta Sans" pitchFamily="34" charset="0"/>
+                          <a:ea typeface="Plus Jakarta Sans" pitchFamily="34" charset="-122"/>
+                          <a:cs typeface="Plus Jakarta Sans" pitchFamily="34" charset="-120"/>
                         </a:rPr>
                         <a:t>Primary goal</a:t>
                       </a:r>
                       <a:endParaRPr lang="en-US" sz="1050" dirty="0">
-                        <a:latin typeface="Calibri" charset="0"/>
-                        <a:ea typeface="Calibri" charset="0"/>
-                        <a:cs typeface="Calibri" charset="0"/>
+                        <a:latin typeface="Plus Jakarta Sans" charset="0"/>
+                        <a:ea typeface="Plus Jakarta Sans" charset="0"/>
+                        <a:cs typeface="Plus Jakarta Sans" charset="0"/>
                       </a:endParaRPr>
                     </a:p>
                   </a:txBody>
@@ -5979,16 +5979,16 @@
                           <a:solidFill>
                             <a:srgbClr val="5A5A72"/>
                           </a:solidFill>
-                          <a:latin typeface="Calibri" pitchFamily="34" charset="0"/>
-                          <a:ea typeface="Calibri" pitchFamily="34" charset="-122"/>
-                          <a:cs typeface="Calibri" pitchFamily="34" charset="-120"/>
+                          <a:latin typeface="Plus Jakarta Sans" pitchFamily="34" charset="0"/>
+                          <a:ea typeface="Plus Jakarta Sans" pitchFamily="34" charset="-122"/>
+                          <a:cs typeface="Plus Jakarta Sans" pitchFamily="34" charset="-120"/>
                         </a:rPr>
                         <a:t>Token efficiency &amp; prompt compression</a:t>
                       </a:r>
                       <a:endParaRPr lang="en-US" sz="1050" dirty="0">
-                        <a:latin typeface="Calibri" charset="0"/>
-                        <a:ea typeface="Calibri" charset="0"/>
-                        <a:cs typeface="Calibri" charset="0"/>
+                        <a:latin typeface="Plus Jakarta Sans" charset="0"/>
+                        <a:ea typeface="Plus Jakarta Sans" charset="0"/>
+                        <a:cs typeface="Plus Jakarta Sans" charset="0"/>
                       </a:endParaRPr>
                     </a:p>
                   </a:txBody>
@@ -6047,16 +6047,16 @@
                           <a:solidFill>
                             <a:srgbClr val="5A5A72"/>
                           </a:solidFill>
-                          <a:latin typeface="Calibri" pitchFamily="34" charset="0"/>
-                          <a:ea typeface="Calibri" pitchFamily="34" charset="-122"/>
-                          <a:cs typeface="Calibri" pitchFamily="34" charset="-120"/>
+                          <a:latin typeface="Plus Jakarta Sans" pitchFamily="34" charset="0"/>
+                          <a:ea typeface="Plus Jakarta Sans" pitchFamily="34" charset="-122"/>
+                          <a:cs typeface="Plus Jakarta Sans" pitchFamily="34" charset="-120"/>
                         </a:rPr>
                         <a:t>Data transparency &amp; easy auditing</a:t>
                       </a:r>
                       <a:endParaRPr lang="en-US" sz="1050" dirty="0">
-                        <a:latin typeface="Calibri" charset="0"/>
-                        <a:ea typeface="Calibri" charset="0"/>
-                        <a:cs typeface="Calibri" charset="0"/>
+                        <a:latin typeface="Plus Jakarta Sans" charset="0"/>
+                        <a:ea typeface="Plus Jakarta Sans" charset="0"/>
+                        <a:cs typeface="Plus Jakarta Sans" charset="0"/>
                       </a:endParaRPr>
                     </a:p>
                   </a:txBody>
@@ -6117,16 +6117,16 @@
                           <a:solidFill>
                             <a:srgbClr val="15154A"/>
                           </a:solidFill>
-                          <a:latin typeface="Calibri" pitchFamily="34" charset="0"/>
-                          <a:ea typeface="Calibri" pitchFamily="34" charset="-122"/>
-                          <a:cs typeface="Calibri" pitchFamily="34" charset="-120"/>
+                          <a:latin typeface="Plus Jakarta Sans" pitchFamily="34" charset="0"/>
+                          <a:ea typeface="Plus Jakarta Sans" pitchFamily="34" charset="-122"/>
+                          <a:cs typeface="Plus Jakarta Sans" pitchFamily="34" charset="-120"/>
                         </a:rPr>
                         <a:t>Source of truth</a:t>
                       </a:r>
                       <a:endParaRPr lang="en-US" sz="1050" dirty="0">
-                        <a:latin typeface="Calibri" charset="0"/>
-                        <a:ea typeface="Calibri" charset="0"/>
-                        <a:cs typeface="Calibri" charset="0"/>
+                        <a:latin typeface="Plus Jakarta Sans" charset="0"/>
+                        <a:ea typeface="Plus Jakarta Sans" charset="0"/>
+                        <a:cs typeface="Plus Jakarta Sans" charset="0"/>
                       </a:endParaRPr>
                     </a:p>
                   </a:txBody>
@@ -6185,16 +6185,16 @@
                           <a:solidFill>
                             <a:srgbClr val="5A5A72"/>
                           </a:solidFill>
-                          <a:latin typeface="Calibri" pitchFamily="34" charset="0"/>
-                          <a:ea typeface="Calibri" pitchFamily="34" charset="-122"/>
-                          <a:cs typeface="Calibri" pitchFamily="34" charset="-120"/>
+                          <a:latin typeface="Plus Jakarta Sans" pitchFamily="34" charset="0"/>
+                          <a:ea typeface="Plus Jakarta Sans" pitchFamily="34" charset="-122"/>
+                          <a:cs typeface="Plus Jakarta Sans" pitchFamily="34" charset="-120"/>
                         </a:rPr>
                         <a:t>Vector database (summaries)</a:t>
                       </a:r>
                       <a:endParaRPr lang="en-US" sz="1050" dirty="0">
-                        <a:latin typeface="Calibri" charset="0"/>
-                        <a:ea typeface="Calibri" charset="0"/>
-                        <a:cs typeface="Calibri" charset="0"/>
+                        <a:latin typeface="Plus Jakarta Sans" charset="0"/>
+                        <a:ea typeface="Plus Jakarta Sans" charset="0"/>
+                        <a:cs typeface="Plus Jakarta Sans" charset="0"/>
                       </a:endParaRPr>
                     </a:p>
                   </a:txBody>
@@ -6253,16 +6253,16 @@
                           <a:solidFill>
                             <a:srgbClr val="5A5A72"/>
                           </a:solidFill>
-                          <a:latin typeface="Calibri" pitchFamily="34" charset="0"/>
-                          <a:ea typeface="Calibri" pitchFamily="34" charset="-122"/>
-                          <a:cs typeface="Calibri" pitchFamily="34" charset="-120"/>
+                          <a:latin typeface="Plus Jakarta Sans" pitchFamily="34" charset="0"/>
+                          <a:ea typeface="Plus Jakarta Sans" pitchFamily="34" charset="-122"/>
+                          <a:cs typeface="Plus Jakarta Sans" pitchFamily="34" charset="-120"/>
                         </a:rPr>
                         <a:t>Local .md files (full text)</a:t>
                       </a:r>
                       <a:endParaRPr lang="en-US" sz="1050" dirty="0">
-                        <a:latin typeface="Calibri" charset="0"/>
-                        <a:ea typeface="Calibri" charset="0"/>
-                        <a:cs typeface="Calibri" charset="0"/>
+                        <a:latin typeface="Plus Jakarta Sans" charset="0"/>
+                        <a:ea typeface="Plus Jakarta Sans" charset="0"/>
+                        <a:cs typeface="Plus Jakarta Sans" charset="0"/>
                       </a:endParaRPr>
                     </a:p>
                   </a:txBody>
@@ -6323,16 +6323,16 @@
                           <a:solidFill>
                             <a:srgbClr val="15154A"/>
                           </a:solidFill>
-                          <a:latin typeface="Calibri" pitchFamily="34" charset="0"/>
-                          <a:ea typeface="Calibri" pitchFamily="34" charset="-122"/>
-                          <a:cs typeface="Calibri" pitchFamily="34" charset="-120"/>
+                          <a:latin typeface="Plus Jakarta Sans" pitchFamily="34" charset="0"/>
+                          <a:ea typeface="Plus Jakarta Sans" pitchFamily="34" charset="-122"/>
+                          <a:cs typeface="Plus Jakarta Sans" pitchFamily="34" charset="-120"/>
                         </a:rPr>
                         <a:t>Vector-DB role</a:t>
                       </a:r>
                       <a:endParaRPr lang="en-US" sz="1050" dirty="0">
-                        <a:latin typeface="Calibri" charset="0"/>
-                        <a:ea typeface="Calibri" charset="0"/>
-                        <a:cs typeface="Calibri" charset="0"/>
+                        <a:latin typeface="Plus Jakarta Sans" charset="0"/>
+                        <a:ea typeface="Plus Jakarta Sans" charset="0"/>
+                        <a:cs typeface="Plus Jakarta Sans" charset="0"/>
                       </a:endParaRPr>
                     </a:p>
                   </a:txBody>
@@ -6391,16 +6391,16 @@
                           <a:solidFill>
                             <a:srgbClr val="5A5A72"/>
                           </a:solidFill>
-                          <a:latin typeface="Calibri" pitchFamily="34" charset="0"/>
-                          <a:ea typeface="Calibri" pitchFamily="34" charset="-122"/>
-                          <a:cs typeface="Calibri" pitchFamily="34" charset="-120"/>
+                          <a:latin typeface="Plus Jakarta Sans" pitchFamily="34" charset="0"/>
+                          <a:ea typeface="Plus Jakarta Sans" pitchFamily="34" charset="-122"/>
+                          <a:cs typeface="Plus Jakarta Sans" pitchFamily="34" charset="-120"/>
                         </a:rPr>
                         <a:t>Core persistent storage</a:t>
                       </a:r>
                       <a:endParaRPr lang="en-US" sz="1050" dirty="0">
-                        <a:latin typeface="Calibri" charset="0"/>
-                        <a:ea typeface="Calibri" charset="0"/>
-                        <a:cs typeface="Calibri" charset="0"/>
+                        <a:latin typeface="Plus Jakarta Sans" charset="0"/>
+                        <a:ea typeface="Plus Jakarta Sans" charset="0"/>
+                        <a:cs typeface="Plus Jakarta Sans" charset="0"/>
                       </a:endParaRPr>
                     </a:p>
                   </a:txBody>
@@ -6459,16 +6459,16 @@
                           <a:solidFill>
                             <a:srgbClr val="5A5A72"/>
                           </a:solidFill>
-                          <a:latin typeface="Calibri" pitchFamily="34" charset="0"/>
-                          <a:ea typeface="Calibri" pitchFamily="34" charset="-122"/>
-                          <a:cs typeface="Calibri" pitchFamily="34" charset="-120"/>
+                          <a:latin typeface="Plus Jakarta Sans" pitchFamily="34" charset="0"/>
+                          <a:ea typeface="Plus Jakarta Sans" pitchFamily="34" charset="-122"/>
+                          <a:cs typeface="Plus Jakarta Sans" pitchFamily="34" charset="-120"/>
                         </a:rPr>
                         <a:t>Disposable search index</a:t>
                       </a:r>
                       <a:endParaRPr lang="en-US" sz="1050" dirty="0">
-                        <a:latin typeface="Calibri" charset="0"/>
-                        <a:ea typeface="Calibri" charset="0"/>
-                        <a:cs typeface="Calibri" charset="0"/>
+                        <a:latin typeface="Plus Jakarta Sans" charset="0"/>
+                        <a:ea typeface="Plus Jakarta Sans" charset="0"/>
+                        <a:cs typeface="Plus Jakarta Sans" charset="0"/>
                       </a:endParaRPr>
                     </a:p>
                   </a:txBody>
@@ -6529,16 +6529,16 @@
                           <a:solidFill>
                             <a:srgbClr val="15154A"/>
                           </a:solidFill>
-                          <a:latin typeface="Calibri" pitchFamily="34" charset="0"/>
-                          <a:ea typeface="Calibri" pitchFamily="34" charset="-122"/>
-                          <a:cs typeface="Calibri" pitchFamily="34" charset="-120"/>
+                          <a:latin typeface="Plus Jakarta Sans" pitchFamily="34" charset="0"/>
+                          <a:ea typeface="Plus Jakarta Sans" pitchFamily="34" charset="-122"/>
+                          <a:cs typeface="Plus Jakarta Sans" pitchFamily="34" charset="-120"/>
                         </a:rPr>
                         <a:t>Update mechanism</a:t>
                       </a:r>
                       <a:endParaRPr lang="en-US" sz="1050" dirty="0">
-                        <a:latin typeface="Calibri" charset="0"/>
-                        <a:ea typeface="Calibri" charset="0"/>
-                        <a:cs typeface="Calibri" charset="0"/>
+                        <a:latin typeface="Plus Jakarta Sans" charset="0"/>
+                        <a:ea typeface="Plus Jakarta Sans" charset="0"/>
+                        <a:cs typeface="Plus Jakarta Sans" charset="0"/>
                       </a:endParaRPr>
                     </a:p>
                   </a:txBody>
@@ -6597,16 +6597,16 @@
                           <a:solidFill>
                             <a:srgbClr val="5A5A72"/>
                           </a:solidFill>
-                          <a:latin typeface="Calibri" pitchFamily="34" charset="0"/>
-                          <a:ea typeface="Calibri" pitchFamily="34" charset="-122"/>
-                          <a:cs typeface="Calibri" pitchFamily="34" charset="-120"/>
+                          <a:latin typeface="Plus Jakarta Sans" pitchFamily="34" charset="0"/>
+                          <a:ea typeface="Plus Jakarta Sans" pitchFamily="34" charset="-122"/>
+                          <a:cs typeface="Plus Jakarta Sans" pitchFamily="34" charset="-120"/>
                         </a:rPr>
                         <a:t>“Sleep-time” offline summaries</a:t>
                       </a:r>
                       <a:endParaRPr lang="en-US" sz="1050" dirty="0">
-                        <a:latin typeface="Calibri" charset="0"/>
-                        <a:ea typeface="Calibri" charset="0"/>
-                        <a:cs typeface="Calibri" charset="0"/>
+                        <a:latin typeface="Plus Jakarta Sans" charset="0"/>
+                        <a:ea typeface="Plus Jakarta Sans" charset="0"/>
+                        <a:cs typeface="Plus Jakarta Sans" charset="0"/>
                       </a:endParaRPr>
                     </a:p>
                   </a:txBody>
@@ -6665,16 +6665,16 @@
                           <a:solidFill>
                             <a:srgbClr val="5A5A72"/>
                           </a:solidFill>
-                          <a:latin typeface="Calibri" pitchFamily="34" charset="0"/>
-                          <a:ea typeface="Calibri" pitchFamily="34" charset="-122"/>
-                          <a:cs typeface="Calibri" pitchFamily="34" charset="-120"/>
+                          <a:latin typeface="Plus Jakarta Sans" pitchFamily="34" charset="0"/>
+                          <a:ea typeface="Plus Jakarta Sans" pitchFamily="34" charset="-122"/>
+                          <a:cs typeface="Plus Jakarta Sans" pitchFamily="34" charset="-120"/>
                         </a:rPr>
                         <a:t>Real-time file-watcher syncing</a:t>
                       </a:r>
                       <a:endParaRPr lang="en-US" sz="1050" dirty="0">
-                        <a:latin typeface="Calibri" charset="0"/>
-                        <a:ea typeface="Calibri" charset="0"/>
-                        <a:cs typeface="Calibri" charset="0"/>
+                        <a:latin typeface="Plus Jakarta Sans" charset="0"/>
+                        <a:ea typeface="Plus Jakarta Sans" charset="0"/>
+                        <a:cs typeface="Plus Jakarta Sans" charset="0"/>
                       </a:endParaRPr>
                     </a:p>
                   </a:txBody>
@@ -6735,16 +6735,16 @@
                           <a:solidFill>
                             <a:srgbClr val="15154A"/>
                           </a:solidFill>
-                          <a:latin typeface="Calibri" pitchFamily="34" charset="0"/>
-                          <a:ea typeface="Calibri" pitchFamily="34" charset="-122"/>
-                          <a:cs typeface="Calibri" pitchFamily="34" charset="-120"/>
+                          <a:latin typeface="Plus Jakarta Sans" pitchFamily="34" charset="0"/>
+                          <a:ea typeface="Plus Jakarta Sans" pitchFamily="34" charset="-122"/>
+                          <a:cs typeface="Plus Jakarta Sans" pitchFamily="34" charset="-120"/>
                         </a:rPr>
                         <a:t>Best feature</a:t>
                       </a:r>
                       <a:endParaRPr lang="en-US" sz="1050" dirty="0">
-                        <a:latin typeface="Calibri" charset="0"/>
-                        <a:ea typeface="Calibri" charset="0"/>
-                        <a:cs typeface="Calibri" charset="0"/>
+                        <a:latin typeface="Plus Jakarta Sans" charset="0"/>
+                        <a:ea typeface="Plus Jakarta Sans" charset="0"/>
+                        <a:cs typeface="Plus Jakarta Sans" charset="0"/>
                       </a:endParaRPr>
                     </a:p>
                   </a:txBody>
@@ -6803,16 +6803,16 @@
                           <a:solidFill>
                             <a:srgbClr val="5A5A72"/>
                           </a:solidFill>
-                          <a:latin typeface="Calibri" pitchFamily="34" charset="0"/>
-                          <a:ea typeface="Calibri" pitchFamily="34" charset="-122"/>
-                          <a:cs typeface="Calibri" pitchFamily="34" charset="-120"/>
+                          <a:latin typeface="Plus Jakarta Sans" pitchFamily="34" charset="0"/>
+                          <a:ea typeface="Plus Jakarta Sans" pitchFamily="34" charset="-122"/>
+                          <a:cs typeface="Plus Jakarta Sans" pitchFamily="34" charset="-120"/>
                         </a:rPr>
                         <a:t>Massive API cost/latency reduction</a:t>
                       </a:r>
                       <a:endParaRPr lang="en-US" sz="1050" dirty="0">
-                        <a:latin typeface="Calibri" charset="0"/>
-                        <a:ea typeface="Calibri" charset="0"/>
-                        <a:cs typeface="Calibri" charset="0"/>
+                        <a:latin typeface="Plus Jakarta Sans" charset="0"/>
+                        <a:ea typeface="Plus Jakarta Sans" charset="0"/>
+                        <a:cs typeface="Plus Jakarta Sans" charset="0"/>
                       </a:endParaRPr>
                     </a:p>
                   </a:txBody>
@@ -6871,16 +6871,16 @@
                           <a:solidFill>
                             <a:srgbClr val="5A5A72"/>
                           </a:solidFill>
-                          <a:latin typeface="Calibri" pitchFamily="34" charset="0"/>
-                          <a:ea typeface="Calibri" pitchFamily="34" charset="-122"/>
-                          <a:cs typeface="Calibri" pitchFamily="34" charset="-120"/>
+                          <a:latin typeface="Plus Jakarta Sans" pitchFamily="34" charset="0"/>
+                          <a:ea typeface="Plus Jakarta Sans" pitchFamily="34" charset="-122"/>
+                          <a:cs typeface="Plus Jakarta Sans" pitchFamily="34" charset="-120"/>
                         </a:rPr>
                         <a:t>Git-friendly, editable memory files</a:t>
                       </a:r>
                       <a:endParaRPr lang="en-US" sz="1050" dirty="0">
-                        <a:latin typeface="Calibri" charset="0"/>
-                        <a:ea typeface="Calibri" charset="0"/>
-                        <a:cs typeface="Calibri" charset="0"/>
+                        <a:latin typeface="Plus Jakarta Sans" charset="0"/>
+                        <a:ea typeface="Plus Jakarta Sans" charset="0"/>
+                        <a:cs typeface="Plus Jakarta Sans" charset="0"/>
                       </a:endParaRPr>
                     </a:p>
                   </a:txBody>
@@ -6960,9 +6960,9 @@
                 <a:solidFill>
                   <a:srgbClr val="9A9AB4"/>
                 </a:solidFill>
-                <a:latin typeface="Calibri" pitchFamily="34" charset="0"/>
-                <a:ea typeface="Calibri" pitchFamily="34" charset="-122"/>
-                <a:cs typeface="Calibri" pitchFamily="34" charset="-120"/>
+                <a:latin typeface="Plus Jakarta Sans" pitchFamily="34" charset="0"/>
+                <a:ea typeface="Plus Jakarta Sans" pitchFamily="34" charset="-122"/>
+                <a:cs typeface="Plus Jakarta Sans" pitchFamily="34" charset="-120"/>
               </a:rPr>
               <a:t>©2026 Cloudera, Inc. All Rights Reserved.</a:t>
             </a:r>
@@ -6999,9 +6999,9 @@
                 <a:solidFill>
                   <a:srgbClr val="9A9AB4"/>
                 </a:solidFill>
-                <a:latin typeface="Calibri" pitchFamily="34" charset="0"/>
-                <a:ea typeface="Calibri" pitchFamily="34" charset="-122"/>
-                <a:cs typeface="Calibri" pitchFamily="34" charset="-120"/>
+                <a:latin typeface="Plus Jakarta Sans" pitchFamily="34" charset="0"/>
+                <a:ea typeface="Plus Jakarta Sans" pitchFamily="34" charset="-122"/>
+                <a:cs typeface="Plus Jakarta Sans" pitchFamily="34" charset="-120"/>
               </a:rPr>
               <a:t>12 / 22</a:t>
             </a:r>
@@ -7616,9 +7616,9 @@
                 <a:solidFill>
                   <a:srgbClr val="EE5A29"/>
                 </a:solidFill>
-                <a:latin typeface="Calibri" pitchFamily="34" charset="0"/>
-                <a:ea typeface="Calibri" pitchFamily="34" charset="-122"/>
-                <a:cs typeface="Calibri" pitchFamily="34" charset="-120"/>
+                <a:latin typeface="Plus Jakarta Sans" pitchFamily="34" charset="0"/>
+                <a:ea typeface="Plus Jakarta Sans" pitchFamily="34" charset="-122"/>
+                <a:cs typeface="Plus Jakarta Sans" pitchFamily="34" charset="-120"/>
               </a:rPr>
               <a:t>THE ENGINEERING EVOLUTION</a:t>
             </a:r>
@@ -7655,9 +7655,9 @@
                 <a:solidFill>
                   <a:srgbClr val="FFFFFF"/>
                 </a:solidFill>
-                <a:latin typeface="Arial" pitchFamily="34" charset="0"/>
-                <a:ea typeface="Arial" pitchFamily="34" charset="-122"/>
-                <a:cs typeface="Arial" pitchFamily="34" charset="-120"/>
+                <a:latin typeface="Plus Jakarta Sans" pitchFamily="34" charset="0"/>
+                <a:ea typeface="Plus Jakarta Sans" pitchFamily="34" charset="-122"/>
+                <a:cs typeface="Plus Jakarta Sans" pitchFamily="34" charset="-120"/>
               </a:rPr>
               <a:t>From Prompt to Harness Engineering</a:t>
             </a:r>
@@ -7723,9 +7723,9 @@
                 <a:solidFill>
                   <a:srgbClr val="FFFFFF"/>
                 </a:solidFill>
-                <a:latin typeface="Calibri" pitchFamily="34" charset="0"/>
-                <a:ea typeface="Calibri" pitchFamily="34" charset="-122"/>
-                <a:cs typeface="Calibri" pitchFamily="34" charset="-120"/>
+                <a:latin typeface="Plus Jakarta Sans" pitchFamily="34" charset="0"/>
+                <a:ea typeface="Plus Jakarta Sans" pitchFamily="34" charset="-122"/>
+                <a:cs typeface="Plus Jakarta Sans" pitchFamily="34" charset="-120"/>
               </a:rPr>
               <a:t>Prompt engineering</a:t>
             </a:r>
@@ -7762,9 +7762,9 @@
                 <a:solidFill>
                   <a:srgbClr val="EE5A29"/>
                 </a:solidFill>
-                <a:latin typeface="Arial" pitchFamily="34" charset="0"/>
-                <a:ea typeface="Arial" pitchFamily="34" charset="-122"/>
-                <a:cs typeface="Arial" pitchFamily="34" charset="-120"/>
+                <a:latin typeface="Plus Jakarta Sans" pitchFamily="34" charset="0"/>
+                <a:ea typeface="Plus Jakarta Sans" pitchFamily="34" charset="-122"/>
+                <a:cs typeface="Plus Jakarta Sans" pitchFamily="34" charset="-120"/>
               </a:rPr>
               <a:t>→</a:t>
             </a:r>
@@ -7830,9 +7830,9 @@
                 <a:solidFill>
                   <a:srgbClr val="FFFFFF"/>
                 </a:solidFill>
-                <a:latin typeface="Calibri" pitchFamily="34" charset="0"/>
-                <a:ea typeface="Calibri" pitchFamily="34" charset="-122"/>
-                <a:cs typeface="Calibri" pitchFamily="34" charset="-120"/>
+                <a:latin typeface="Plus Jakarta Sans" pitchFamily="34" charset="0"/>
+                <a:ea typeface="Plus Jakarta Sans" pitchFamily="34" charset="-122"/>
+                <a:cs typeface="Plus Jakarta Sans" pitchFamily="34" charset="-120"/>
               </a:rPr>
               <a:t>Context engineering</a:t>
             </a:r>
@@ -7869,9 +7869,9 @@
                 <a:solidFill>
                   <a:srgbClr val="EE5A29"/>
                 </a:solidFill>
-                <a:latin typeface="Arial" pitchFamily="34" charset="0"/>
-                <a:ea typeface="Arial" pitchFamily="34" charset="-122"/>
-                <a:cs typeface="Arial" pitchFamily="34" charset="-120"/>
+                <a:latin typeface="Plus Jakarta Sans" pitchFamily="34" charset="0"/>
+                <a:ea typeface="Plus Jakarta Sans" pitchFamily="34" charset="-122"/>
+                <a:cs typeface="Plus Jakarta Sans" pitchFamily="34" charset="-120"/>
               </a:rPr>
               <a:t>→</a:t>
             </a:r>
@@ -7935,9 +7935,9 @@
                 <a:solidFill>
                   <a:srgbClr val="FFFFFF"/>
                 </a:solidFill>
-                <a:latin typeface="Calibri" pitchFamily="34" charset="0"/>
-                <a:ea typeface="Calibri" pitchFamily="34" charset="-122"/>
-                <a:cs typeface="Calibri" pitchFamily="34" charset="-120"/>
+                <a:latin typeface="Plus Jakarta Sans" pitchFamily="34" charset="0"/>
+                <a:ea typeface="Plus Jakarta Sans" pitchFamily="34" charset="-122"/>
+                <a:cs typeface="Plus Jakarta Sans" pitchFamily="34" charset="-120"/>
               </a:rPr>
               <a:t>Harness engineering</a:t>
             </a:r>
@@ -8003,9 +8003,9 @@
                 <a:solidFill>
                   <a:srgbClr val="FFFFFF"/>
                 </a:solidFill>
-                <a:latin typeface="Arial" pitchFamily="34" charset="0"/>
-                <a:ea typeface="Arial" pitchFamily="34" charset="-122"/>
-                <a:cs typeface="Arial" pitchFamily="34" charset="-120"/>
+                <a:latin typeface="Plus Jakarta Sans" pitchFamily="34" charset="0"/>
+                <a:ea typeface="Plus Jakarta Sans" pitchFamily="34" charset="-122"/>
+                <a:cs typeface="Plus Jakarta Sans" pitchFamily="34" charset="-120"/>
               </a:rPr>
               <a:t>1 · Tiered context</a:t>
             </a:r>
@@ -8045,9 +8045,9 @@
                 <a:solidFill>
                   <a:srgbClr val="C9C9E6"/>
                 </a:solidFill>
-                <a:latin typeface="Calibri" pitchFamily="34" charset="0"/>
-                <a:ea typeface="Calibri" pitchFamily="34" charset="-122"/>
-                <a:cs typeface="Calibri" pitchFamily="34" charset="-120"/>
+                <a:latin typeface="Plus Jakarta Sans" pitchFamily="34" charset="0"/>
+                <a:ea typeface="Plus Jakarta Sans" pitchFamily="34" charset="-122"/>
+                <a:cs typeface="Plus Jakarta Sans" pitchFamily="34" charset="-120"/>
               </a:rPr>
               <a:t>Structured layers feed the model only what it needs.</a:t>
             </a:r>
@@ -8113,9 +8113,9 @@
                 <a:solidFill>
                   <a:srgbClr val="FFFFFF"/>
                 </a:solidFill>
-                <a:latin typeface="Arial" pitchFamily="34" charset="0"/>
-                <a:ea typeface="Arial" pitchFamily="34" charset="-122"/>
-                <a:cs typeface="Arial" pitchFamily="34" charset="-120"/>
+                <a:latin typeface="Plus Jakarta Sans" pitchFamily="34" charset="0"/>
+                <a:ea typeface="Plus Jakarta Sans" pitchFamily="34" charset="-122"/>
+                <a:cs typeface="Plus Jakarta Sans" pitchFamily="34" charset="-120"/>
               </a:rPr>
               <a:t>2 · Specialized roles</a:t>
             </a:r>
@@ -8155,9 +8155,9 @@
                 <a:solidFill>
                   <a:srgbClr val="C9C9E6"/>
                 </a:solidFill>
-                <a:latin typeface="Calibri" pitchFamily="34" charset="0"/>
-                <a:ea typeface="Calibri" pitchFamily="34" charset="-122"/>
-                <a:cs typeface="Calibri" pitchFamily="34" charset="-120"/>
+                <a:latin typeface="Plus Jakarta Sans" pitchFamily="34" charset="0"/>
+                <a:ea typeface="Plus Jakarta Sans" pitchFamily="34" charset="-122"/>
+                <a:cs typeface="Plus Jakarta Sans" pitchFamily="34" charset="-120"/>
               </a:rPr>
               <a:t>Sub-agents with focused jobs and clean contexts.</a:t>
             </a:r>
@@ -8223,9 +8223,9 @@
                 <a:solidFill>
                   <a:srgbClr val="FFFFFF"/>
                 </a:solidFill>
-                <a:latin typeface="Arial" pitchFamily="34" charset="0"/>
-                <a:ea typeface="Arial" pitchFamily="34" charset="-122"/>
-                <a:cs typeface="Arial" pitchFamily="34" charset="-120"/>
+                <a:latin typeface="Plus Jakarta Sans" pitchFamily="34" charset="0"/>
+                <a:ea typeface="Plus Jakarta Sans" pitchFamily="34" charset="-122"/>
+                <a:cs typeface="Plus Jakarta Sans" pitchFamily="34" charset="-120"/>
               </a:rPr>
               <a:t>3 · Persistent memory</a:t>
             </a:r>
@@ -8265,9 +8265,9 @@
                 <a:solidFill>
                   <a:srgbClr val="C9C9E6"/>
                 </a:solidFill>
-                <a:latin typeface="Calibri" pitchFamily="34" charset="0"/>
-                <a:ea typeface="Calibri" pitchFamily="34" charset="-122"/>
-                <a:cs typeface="Calibri" pitchFamily="34" charset="-120"/>
+                <a:latin typeface="Plus Jakarta Sans" pitchFamily="34" charset="0"/>
+                <a:ea typeface="Plus Jakarta Sans" pitchFamily="34" charset="-122"/>
+                <a:cs typeface="Plus Jakarta Sans" pitchFamily="34" charset="-120"/>
               </a:rPr>
               <a:t>File-based state that survives the context window.</a:t>
             </a:r>
@@ -8333,9 +8333,9 @@
                 <a:solidFill>
                   <a:srgbClr val="FFFFFF"/>
                 </a:solidFill>
-                <a:latin typeface="Arial" pitchFamily="34" charset="0"/>
-                <a:ea typeface="Arial" pitchFamily="34" charset="-122"/>
-                <a:cs typeface="Arial" pitchFamily="34" charset="-120"/>
+                <a:latin typeface="Plus Jakarta Sans" pitchFamily="34" charset="0"/>
+                <a:ea typeface="Plus Jakarta Sans" pitchFamily="34" charset="-122"/>
+                <a:cs typeface="Plus Jakarta Sans" pitchFamily="34" charset="-120"/>
               </a:rPr>
               <a:t>4 · Structured execution</a:t>
             </a:r>
@@ -8375,9 +8375,9 @@
                 <a:solidFill>
                   <a:srgbClr val="C9C9E6"/>
                 </a:solidFill>
-                <a:latin typeface="Calibri" pitchFamily="34" charset="0"/>
-                <a:ea typeface="Calibri" pitchFamily="34" charset="-122"/>
-                <a:cs typeface="Calibri" pitchFamily="34" charset="-120"/>
+                <a:latin typeface="Plus Jakarta Sans" pitchFamily="34" charset="0"/>
+                <a:ea typeface="Plus Jakarta Sans" pitchFamily="34" charset="-122"/>
+                <a:cs typeface="Plus Jakarta Sans" pitchFamily="34" charset="-120"/>
               </a:rPr>
               <a:t>Plan → execute → verify, with feedback loops &amp; guardrails.</a:t>
             </a:r>
@@ -8414,9 +8414,9 @@
                 <a:solidFill>
                   <a:srgbClr val="C9C9E6"/>
                 </a:solidFill>
-                <a:latin typeface="Calibri" pitchFamily="34" charset="0"/>
-                <a:ea typeface="Calibri" pitchFamily="34" charset="-122"/>
-                <a:cs typeface="Calibri" pitchFamily="34" charset="-120"/>
+                <a:latin typeface="Plus Jakarta Sans" pitchFamily="34" charset="0"/>
+                <a:ea typeface="Plus Jakarta Sans" pitchFamily="34" charset="-122"/>
+                <a:cs typeface="Plus Jakarta Sans" pitchFamily="34" charset="-120"/>
               </a:rPr>
               <a:t>Build the </a:t>
             </a:r>
@@ -8428,9 +8428,9 @@
                 <a:solidFill>
                   <a:srgbClr val="FFFFFF"/>
                 </a:solidFill>
-                <a:latin typeface="Calibri" pitchFamily="34" charset="0"/>
-                <a:ea typeface="Calibri" pitchFamily="34" charset="-122"/>
-                <a:cs typeface="Calibri" pitchFamily="34" charset="-120"/>
+                <a:latin typeface="Plus Jakarta Sans" pitchFamily="34" charset="0"/>
+                <a:ea typeface="Plus Jakarta Sans" pitchFamily="34" charset="-122"/>
+                <a:cs typeface="Plus Jakarta Sans" pitchFamily="34" charset="-120"/>
               </a:rPr>
               <a:t>stage</a:t>
             </a:r>
@@ -8442,9 +8442,9 @@
                 <a:solidFill>
                   <a:srgbClr val="C9C9E6"/>
                 </a:solidFill>
-                <a:latin typeface="Calibri" pitchFamily="34" charset="0"/>
-                <a:ea typeface="Calibri" pitchFamily="34" charset="-122"/>
-                <a:cs typeface="Calibri" pitchFamily="34" charset="-120"/>
+                <a:latin typeface="Plus Jakarta Sans" pitchFamily="34" charset="0"/>
+                <a:ea typeface="Plus Jakarta Sans" pitchFamily="34" charset="-122"/>
+                <a:cs typeface="Plus Jakarta Sans" pitchFamily="34" charset="-120"/>
               </a:rPr>
               <a:t> on which the model performs — not just the line it reads.</a:t>
             </a:r>
@@ -8481,9 +8481,9 @@
                 <a:solidFill>
                   <a:srgbClr val="9A9AC4"/>
                 </a:solidFill>
-                <a:latin typeface="Calibri" pitchFamily="34" charset="0"/>
-                <a:ea typeface="Calibri" pitchFamily="34" charset="-122"/>
-                <a:cs typeface="Calibri" pitchFamily="34" charset="-120"/>
+                <a:latin typeface="Plus Jakarta Sans" pitchFamily="34" charset="0"/>
+                <a:ea typeface="Plus Jakarta Sans" pitchFamily="34" charset="-122"/>
+                <a:cs typeface="Plus Jakarta Sans" pitchFamily="34" charset="-120"/>
               </a:rPr>
               <a:t>©2026 Cloudera, Inc. All Rights Reserved.</a:t>
             </a:r>
@@ -8520,9 +8520,9 @@
                 <a:solidFill>
                   <a:srgbClr val="9A9AC4"/>
                 </a:solidFill>
-                <a:latin typeface="Calibri" pitchFamily="34" charset="0"/>
-                <a:ea typeface="Calibri" pitchFamily="34" charset="-122"/>
-                <a:cs typeface="Calibri" pitchFamily="34" charset="-120"/>
+                <a:latin typeface="Plus Jakarta Sans" pitchFamily="34" charset="0"/>
+                <a:ea typeface="Plus Jakarta Sans" pitchFamily="34" charset="-122"/>
+                <a:cs typeface="Plus Jakarta Sans" pitchFamily="34" charset="-120"/>
               </a:rPr>
               <a:t>13 / 22</a:t>
             </a:r>
@@ -9095,9 +9095,9 @@
                 <a:solidFill>
                   <a:srgbClr val="EE5A29"/>
                 </a:solidFill>
-                <a:latin typeface="Calibri" pitchFamily="34" charset="0"/>
-                <a:ea typeface="Calibri" pitchFamily="34" charset="-122"/>
-                <a:cs typeface="Calibri" pitchFamily="34" charset="-120"/>
+                <a:latin typeface="Plus Jakarta Sans" pitchFamily="34" charset="0"/>
+                <a:ea typeface="Plus Jakarta Sans" pitchFamily="34" charset="-122"/>
+                <a:cs typeface="Plus Jakarta Sans" pitchFamily="34" charset="-120"/>
               </a:rPr>
               <a:t>IN SUMMARY</a:t>
             </a:r>
@@ -9154,9 +9154,9 @@
                 <a:solidFill>
                   <a:srgbClr val="FFFFFF"/>
                 </a:solidFill>
-                <a:latin typeface="Arial" pitchFamily="34" charset="0"/>
-                <a:ea typeface="Arial" pitchFamily="34" charset="-122"/>
-                <a:cs typeface="Arial" pitchFamily="34" charset="-120"/>
+                <a:latin typeface="Plus Jakarta Sans" pitchFamily="34" charset="0"/>
+                <a:ea typeface="Plus Jakarta Sans" pitchFamily="34" charset="-122"/>
+                <a:cs typeface="Plus Jakarta Sans" pitchFamily="34" charset="-120"/>
               </a:rPr>
               <a:t>Five Things to Remember</a:t>
             </a:r>
@@ -9216,9 +9216,9 @@
                 <a:solidFill>
                   <a:srgbClr val="FFFFFF"/>
                 </a:solidFill>
-                <a:latin typeface="Calibri" pitchFamily="34" charset="0"/>
-                <a:ea typeface="Calibri" pitchFamily="34" charset="-122"/>
-                <a:cs typeface="Calibri" pitchFamily="34" charset="-120"/>
+                <a:latin typeface="Plus Jakarta Sans" pitchFamily="34" charset="0"/>
+                <a:ea typeface="Plus Jakarta Sans" pitchFamily="34" charset="-122"/>
+                <a:cs typeface="Plus Jakarta Sans" pitchFamily="34" charset="-120"/>
               </a:rPr>
               <a:t>2026 is about autonomy — </a:t>
             </a:r>
@@ -9233,9 +9233,9 @@
                 <a:solidFill>
                   <a:srgbClr val="C9C9E6"/>
                 </a:solidFill>
-                <a:latin typeface="Calibri" pitchFamily="34" charset="0"/>
-                <a:ea typeface="Calibri" pitchFamily="34" charset="-122"/>
-                <a:cs typeface="Calibri" pitchFamily="34" charset="-120"/>
+                <a:latin typeface="Plus Jakarta Sans" pitchFamily="34" charset="0"/>
+                <a:ea typeface="Plus Jakarta Sans" pitchFamily="34" charset="-122"/>
+                <a:cs typeface="Plus Jakarta Sans" pitchFamily="34" charset="-120"/>
               </a:rPr>
               <a:t>self-correcting loops, MCP connectivity, and “computer use”.</a:t>
             </a:r>
@@ -9295,9 +9295,9 @@
                 <a:solidFill>
                   <a:srgbClr val="FFFFFF"/>
                 </a:solidFill>
-                <a:latin typeface="Calibri" pitchFamily="34" charset="0"/>
-                <a:ea typeface="Calibri" pitchFamily="34" charset="-122"/>
-                <a:cs typeface="Calibri" pitchFamily="34" charset="-120"/>
+                <a:latin typeface="Plus Jakarta Sans" pitchFamily="34" charset="0"/>
+                <a:ea typeface="Plus Jakarta Sans" pitchFamily="34" charset="-122"/>
+                <a:cs typeface="Plus Jakarta Sans" pitchFamily="34" charset="-120"/>
               </a:rPr>
               <a:t>Agents = Tools + Memory + Control — </a:t>
             </a:r>
@@ -9312,9 +9312,9 @@
                 <a:solidFill>
                   <a:srgbClr val="C9C9E6"/>
                 </a:solidFill>
-                <a:latin typeface="Calibri" pitchFamily="34" charset="0"/>
-                <a:ea typeface="Calibri" pitchFamily="34" charset="-122"/>
-                <a:cs typeface="Calibri" pitchFamily="34" charset="-120"/>
+                <a:latin typeface="Plus Jakarta Sans" pitchFamily="34" charset="0"/>
+                <a:ea typeface="Plus Jakarta Sans" pitchFamily="34" charset="-122"/>
+                <a:cs typeface="Plus Jakarta Sans" pitchFamily="34" charset="-120"/>
               </a:rPr>
               <a:t>master all three to go from chatbot to operator.</a:t>
             </a:r>
@@ -9374,9 +9374,9 @@
                 <a:solidFill>
                   <a:srgbClr val="FFFFFF"/>
                 </a:solidFill>
-                <a:latin typeface="Calibri" pitchFamily="34" charset="0"/>
-                <a:ea typeface="Calibri" pitchFamily="34" charset="-122"/>
-                <a:cs typeface="Calibri" pitchFamily="34" charset="-120"/>
+                <a:latin typeface="Plus Jakarta Sans" pitchFamily="34" charset="0"/>
+                <a:ea typeface="Plus Jakarta Sans" pitchFamily="34" charset="-122"/>
+                <a:cs typeface="Plus Jakarta Sans" pitchFamily="34" charset="-120"/>
               </a:rPr>
               <a:t>Tool design is the highest-leverage work — </a:t>
             </a:r>
@@ -9391,9 +9391,9 @@
                 <a:solidFill>
                   <a:srgbClr val="C9C9E6"/>
                 </a:solidFill>
-                <a:latin typeface="Calibri" pitchFamily="34" charset="0"/>
-                <a:ea typeface="Calibri" pitchFamily="34" charset="-122"/>
-                <a:cs typeface="Calibri" pitchFamily="34" charset="-120"/>
+                <a:latin typeface="Plus Jakarta Sans" pitchFamily="34" charset="0"/>
+                <a:ea typeface="Plus Jakarta Sans" pitchFamily="34" charset="-122"/>
+                <a:cs typeface="Plus Jakarta Sans" pitchFamily="34" charset="-120"/>
               </a:rPr>
               <a:t>clear descriptions &amp; progressive disclosure move accuracy double digits.</a:t>
             </a:r>
@@ -9453,9 +9453,9 @@
                 <a:solidFill>
                   <a:srgbClr val="FFFFFF"/>
                 </a:solidFill>
-                <a:latin typeface="Calibri" pitchFamily="34" charset="0"/>
-                <a:ea typeface="Calibri" pitchFamily="34" charset="-122"/>
-                <a:cs typeface="Calibri" pitchFamily="34" charset="-120"/>
+                <a:latin typeface="Plus Jakarta Sans" pitchFamily="34" charset="0"/>
+                <a:ea typeface="Plus Jakarta Sans" pitchFamily="34" charset="-122"/>
+                <a:cs typeface="Plus Jakarta Sans" pitchFamily="34" charset="-120"/>
               </a:rPr>
               <a:t>Memory is multi-layered — </a:t>
             </a:r>
@@ -9470,9 +9470,9 @@
                 <a:solidFill>
                   <a:srgbClr val="C9C9E6"/>
                 </a:solidFill>
-                <a:latin typeface="Calibri" pitchFamily="34" charset="0"/>
-                <a:ea typeface="Calibri" pitchFamily="34" charset="-122"/>
-                <a:cs typeface="Calibri" pitchFamily="34" charset="-120"/>
+                <a:latin typeface="Plus Jakarta Sans" pitchFamily="34" charset="0"/>
+                <a:ea typeface="Plus Jakarta Sans" pitchFamily="34" charset="-122"/>
+                <a:cs typeface="Plus Jakarta Sans" pitchFamily="34" charset="-120"/>
               </a:rPr>
               <a:t>factual, experiential, and working — with new transparent &amp; efficient mechanisms.</a:t>
             </a:r>
@@ -9532,9 +9532,9 @@
                 <a:solidFill>
                   <a:srgbClr val="FFFFFF"/>
                 </a:solidFill>
-                <a:latin typeface="Calibri" pitchFamily="34" charset="0"/>
-                <a:ea typeface="Calibri" pitchFamily="34" charset="-122"/>
-                <a:cs typeface="Calibri" pitchFamily="34" charset="-120"/>
+                <a:latin typeface="Plus Jakarta Sans" pitchFamily="34" charset="0"/>
+                <a:ea typeface="Plus Jakarta Sans" pitchFamily="34" charset="-122"/>
+                <a:cs typeface="Plus Jakarta Sans" pitchFamily="34" charset="-120"/>
               </a:rPr>
               <a:t>Production needs governance — </a:t>
             </a:r>
@@ -9549,9 +9549,9 @@
                 <a:solidFill>
                   <a:srgbClr val="C9C9E6"/>
                 </a:solidFill>
-                <a:latin typeface="Calibri" pitchFamily="34" charset="0"/>
-                <a:ea typeface="Calibri" pitchFamily="34" charset="-122"/>
-                <a:cs typeface="Calibri" pitchFamily="34" charset="-120"/>
+                <a:latin typeface="Plus Jakarta Sans" pitchFamily="34" charset="0"/>
+                <a:ea typeface="Plus Jakarta Sans" pitchFamily="34" charset="-122"/>
+                <a:cs typeface="Plus Jakarta Sans" pitchFamily="34" charset="-120"/>
               </a:rPr>
               <a:t>only 2% are at scale; the gap is data, controls, and oversight.</a:t>
             </a:r>
@@ -9588,9 +9588,9 @@
                 <a:solidFill>
                   <a:srgbClr val="9A9AC4"/>
                 </a:solidFill>
-                <a:latin typeface="Calibri" pitchFamily="34" charset="0"/>
-                <a:ea typeface="Calibri" pitchFamily="34" charset="-122"/>
-                <a:cs typeface="Calibri" pitchFamily="34" charset="-120"/>
+                <a:latin typeface="Plus Jakarta Sans" pitchFamily="34" charset="0"/>
+                <a:ea typeface="Plus Jakarta Sans" pitchFamily="34" charset="-122"/>
+                <a:cs typeface="Plus Jakarta Sans" pitchFamily="34" charset="-120"/>
               </a:rPr>
               <a:t>©2026 Cloudera, Inc. All Rights Reserved.</a:t>
             </a:r>
@@ -9627,9 +9627,9 @@
                 <a:solidFill>
                   <a:srgbClr val="9A9AC4"/>
                 </a:solidFill>
-                <a:latin typeface="Calibri" pitchFamily="34" charset="0"/>
-                <a:ea typeface="Calibri" pitchFamily="34" charset="-122"/>
-                <a:cs typeface="Calibri" pitchFamily="34" charset="-120"/>
+                <a:latin typeface="Plus Jakarta Sans" pitchFamily="34" charset="0"/>
+                <a:ea typeface="Plus Jakarta Sans" pitchFamily="34" charset="-122"/>
+                <a:cs typeface="Plus Jakarta Sans" pitchFamily="34" charset="-120"/>
               </a:rPr>
               <a:t>14 / 22</a:t>
             </a:r>
@@ -10241,9 +10241,9 @@
                 <a:solidFill>
                   <a:srgbClr val="FFFFFF"/>
                 </a:solidFill>
-                <a:latin typeface="Arial" pitchFamily="34" charset="0"/>
-                <a:ea typeface="Arial" pitchFamily="34" charset="-122"/>
-                <a:cs typeface="Arial" pitchFamily="34" charset="-120"/>
+                <a:latin typeface="Plus Jakarta Sans" pitchFamily="34" charset="0"/>
+                <a:ea typeface="Plus Jakarta Sans" pitchFamily="34" charset="-122"/>
+                <a:cs typeface="Plus Jakarta Sans" pitchFamily="34" charset="-120"/>
               </a:rPr>
               <a:t>Harness Engineering</a:t>
             </a:r>
@@ -10303,9 +10303,9 @@
                 <a:solidFill>
                   <a:srgbClr val="C9C9E6"/>
                 </a:solidFill>
-                <a:latin typeface="Calibri" pitchFamily="34" charset="0"/>
-                <a:ea typeface="Calibri" pitchFamily="34" charset="-122"/>
-                <a:cs typeface="Calibri" pitchFamily="34" charset="-120"/>
+                <a:latin typeface="Plus Jakarta Sans" pitchFamily="34" charset="0"/>
+                <a:ea typeface="Plus Jakarta Sans" pitchFamily="34" charset="-122"/>
+                <a:cs typeface="Plus Jakarta Sans" pitchFamily="34" charset="-120"/>
               </a:rPr>
               <a:t>Intelligence is no longer the bottleneck. The new paradigm: build the environment that lets agents run reliably at scale.</a:t>
             </a:r>
@@ -10342,9 +10342,9 @@
                 <a:solidFill>
                   <a:srgbClr val="9A9AC4"/>
                 </a:solidFill>
-                <a:latin typeface="Calibri" pitchFamily="34" charset="0"/>
-                <a:ea typeface="Calibri" pitchFamily="34" charset="-122"/>
-                <a:cs typeface="Calibri" pitchFamily="34" charset="-120"/>
+                <a:latin typeface="Plus Jakarta Sans" pitchFamily="34" charset="0"/>
+                <a:ea typeface="Plus Jakarta Sans" pitchFamily="34" charset="-122"/>
+                <a:cs typeface="Plus Jakarta Sans" pitchFamily="34" charset="-120"/>
               </a:rPr>
               <a:t>©2026 Cloudera, Inc. All Rights Reserved.</a:t>
             </a:r>
@@ -10381,9 +10381,9 @@
                 <a:solidFill>
                   <a:srgbClr val="9A9AC4"/>
                 </a:solidFill>
-                <a:latin typeface="Calibri" pitchFamily="34" charset="0"/>
-                <a:ea typeface="Calibri" pitchFamily="34" charset="-122"/>
-                <a:cs typeface="Calibri" pitchFamily="34" charset="-120"/>
+                <a:latin typeface="Plus Jakarta Sans" pitchFamily="34" charset="0"/>
+                <a:ea typeface="Plus Jakarta Sans" pitchFamily="34" charset="-122"/>
+                <a:cs typeface="Plus Jakarta Sans" pitchFamily="34" charset="-120"/>
               </a:rPr>
               <a:t>15 / 22</a:t>
             </a:r>
@@ -10452,9 +10452,9 @@
                 <a:solidFill>
                   <a:srgbClr val="EE5A29"/>
                 </a:solidFill>
-                <a:latin typeface="Arial" pitchFamily="34" charset="0"/>
-                <a:ea typeface="Arial" pitchFamily="34" charset="-122"/>
-                <a:cs typeface="Arial" pitchFamily="34" charset="-120"/>
+                <a:latin typeface="Plus Jakarta Sans" pitchFamily="34" charset="0"/>
+                <a:ea typeface="Plus Jakarta Sans" pitchFamily="34" charset="-122"/>
+                <a:cs typeface="Plus Jakarta Sans" pitchFamily="34" charset="-120"/>
               </a:rPr>
               <a:t>CLOUD</a:t>
             </a:r>
@@ -10466,9 +10466,9 @@
                 <a:solidFill>
                   <a:srgbClr val="EE5A29"/>
                 </a:solidFill>
-                <a:latin typeface="Arial" pitchFamily="34" charset="0"/>
-                <a:ea typeface="Arial" pitchFamily="34" charset="-122"/>
-                <a:cs typeface="Arial" pitchFamily="34" charset="-120"/>
+                <a:latin typeface="Plus Jakarta Sans" pitchFamily="34" charset="0"/>
+                <a:ea typeface="Plus Jakarta Sans" pitchFamily="34" charset="-122"/>
+                <a:cs typeface="Plus Jakarta Sans" pitchFamily="34" charset="-120"/>
               </a:rPr>
               <a:t>E</a:t>
             </a:r>
@@ -10480,9 +10480,9 @@
                 <a:solidFill>
                   <a:srgbClr val="EE5A29"/>
                 </a:solidFill>
-                <a:latin typeface="Arial" pitchFamily="34" charset="0"/>
-                <a:ea typeface="Arial" pitchFamily="34" charset="-122"/>
-                <a:cs typeface="Arial" pitchFamily="34" charset="-120"/>
+                <a:latin typeface="Plus Jakarta Sans" pitchFamily="34" charset="0"/>
+                <a:ea typeface="Plus Jakarta Sans" pitchFamily="34" charset="-122"/>
+                <a:cs typeface="Plus Jakarta Sans" pitchFamily="34" charset="-120"/>
               </a:rPr>
               <a:t>RA</a:t>
             </a:r>
@@ -10539,9 +10539,9 @@
                 <a:solidFill>
                   <a:srgbClr val="EE5A29"/>
                 </a:solidFill>
-                <a:latin typeface="Calibri" pitchFamily="34" charset="0"/>
-                <a:ea typeface="Calibri" pitchFamily="34" charset="-122"/>
-                <a:cs typeface="Calibri" pitchFamily="34" charset="-120"/>
+                <a:latin typeface="Plus Jakarta Sans" pitchFamily="34" charset="0"/>
+                <a:ea typeface="Plus Jakarta Sans" pitchFamily="34" charset="-122"/>
+                <a:cs typeface="Plus Jakarta Sans" pitchFamily="34" charset="-120"/>
               </a:rPr>
               <a:t>THE CORE INSIGHT</a:t>
             </a:r>
@@ -10578,9 +10578,9 @@
                 <a:solidFill>
                   <a:srgbClr val="15154A"/>
                 </a:solidFill>
-                <a:latin typeface="Arial" pitchFamily="34" charset="0"/>
-                <a:ea typeface="Arial" pitchFamily="34" charset="-122"/>
-                <a:cs typeface="Arial" pitchFamily="34" charset="-120"/>
+                <a:latin typeface="Plus Jakarta Sans" pitchFamily="34" charset="0"/>
+                <a:ea typeface="Plus Jakarta Sans" pitchFamily="34" charset="-122"/>
+                <a:cs typeface="Plus Jakarta Sans" pitchFamily="34" charset="-120"/>
               </a:rPr>
               <a:t>The Bottleneck Is Infrastructure, Not Intelligence</a:t>
             </a:r>
@@ -10664,9 +10664,9 @@
                 <a:solidFill>
                   <a:srgbClr val="EE5A29"/>
                 </a:solidFill>
-                <a:latin typeface="Arial" pitchFamily="34" charset="0"/>
-                <a:ea typeface="Arial" pitchFamily="34" charset="-122"/>
-                <a:cs typeface="Arial" pitchFamily="34" charset="-120"/>
+                <a:latin typeface="Plus Jakarta Sans" pitchFamily="34" charset="0"/>
+                <a:ea typeface="Plus Jakarta Sans" pitchFamily="34" charset="-122"/>
+                <a:cs typeface="Plus Jakarta Sans" pitchFamily="34" charset="-120"/>
               </a:rPr>
               <a:t>THE EXPECTATION</a:t>
             </a:r>
@@ -10703,9 +10703,9 @@
                 <a:solidFill>
                   <a:srgbClr val="5A5A72"/>
                 </a:solidFill>
-                <a:latin typeface="Calibri" pitchFamily="34" charset="0"/>
-                <a:ea typeface="Calibri" pitchFamily="34" charset="-122"/>
-                <a:cs typeface="Calibri" pitchFamily="34" charset="-120"/>
+                <a:latin typeface="Plus Jakarta Sans" pitchFamily="34" charset="0"/>
+                <a:ea typeface="Plus Jakarta Sans" pitchFamily="34" charset="-122"/>
+                <a:cs typeface="Plus Jakarta Sans" pitchFamily="34" charset="-120"/>
               </a:rPr>
               <a:t>Focusing purely on Model Intelligence</a:t>
             </a:r>
@@ -10745,9 +10745,9 @@
                 <a:solidFill>
                   <a:srgbClr val="5A5A72"/>
                 </a:solidFill>
-                <a:latin typeface="Calibri" pitchFamily="34" charset="0"/>
-                <a:ea typeface="Calibri" pitchFamily="34" charset="-122"/>
-                <a:cs typeface="Calibri" pitchFamily="34" charset="-120"/>
+                <a:latin typeface="Plus Jakarta Sans" pitchFamily="34" charset="0"/>
+                <a:ea typeface="Plus Jakarta Sans" pitchFamily="34" charset="-122"/>
+                <a:cs typeface="Plus Jakarta Sans" pitchFamily="34" charset="-120"/>
               </a:rPr>
               <a:t>Power without route: </a:t>
             </a:r>
@@ -10762,9 +10762,9 @@
                 <a:solidFill>
                   <a:srgbClr val="5A5A72"/>
                 </a:solidFill>
-                <a:latin typeface="Calibri" pitchFamily="34" charset="0"/>
-                <a:ea typeface="Calibri" pitchFamily="34" charset="-122"/>
-                <a:cs typeface="Calibri" pitchFamily="34" charset="-120"/>
+                <a:latin typeface="Plus Jakarta Sans" pitchFamily="34" charset="0"/>
+                <a:ea typeface="Plus Jakarta Sans" pitchFamily="34" charset="-122"/>
+                <a:cs typeface="Plus Jakarta Sans" pitchFamily="34" charset="-120"/>
               </a:rPr>
               <a:t>untethered capability, zero system integration. Potential trapped.
 </a:t>
@@ -10866,9 +10866,9 @@
                 <a:solidFill>
                   <a:srgbClr val="1FA971"/>
                 </a:solidFill>
-                <a:latin typeface="Arial" pitchFamily="34" charset="0"/>
-                <a:ea typeface="Arial" pitchFamily="34" charset="-122"/>
-                <a:cs typeface="Arial" pitchFamily="34" charset="-120"/>
+                <a:latin typeface="Plus Jakarta Sans" pitchFamily="34" charset="0"/>
+                <a:ea typeface="Plus Jakarta Sans" pitchFamily="34" charset="-122"/>
+                <a:cs typeface="Plus Jakarta Sans" pitchFamily="34" charset="-120"/>
               </a:rPr>
               <a:t>THE REALITY</a:t>
             </a:r>
@@ -10905,9 +10905,9 @@
                 <a:solidFill>
                   <a:srgbClr val="5A5A72"/>
                 </a:solidFill>
-                <a:latin typeface="Calibri" pitchFamily="34" charset="0"/>
-                <a:ea typeface="Calibri" pitchFamily="34" charset="-122"/>
-                <a:cs typeface="Calibri" pitchFamily="34" charset="-120"/>
+                <a:latin typeface="Plus Jakarta Sans" pitchFamily="34" charset="0"/>
+                <a:ea typeface="Plus Jakarta Sans" pitchFamily="34" charset="-122"/>
+                <a:cs typeface="Plus Jakarta Sans" pitchFamily="34" charset="-120"/>
               </a:rPr>
               <a:t>Focusing on System Infrastructure (Harness)</a:t>
             </a:r>
@@ -10947,9 +10947,9 @@
                 <a:solidFill>
                   <a:srgbClr val="15154A"/>
                 </a:solidFill>
-                <a:latin typeface="Calibri" pitchFamily="34" charset="0"/>
-                <a:ea typeface="Calibri" pitchFamily="34" charset="-122"/>
-                <a:cs typeface="Calibri" pitchFamily="34" charset="-120"/>
+                <a:latin typeface="Plus Jakarta Sans" pitchFamily="34" charset="0"/>
+                <a:ea typeface="Plus Jakarta Sans" pitchFamily="34" charset="-122"/>
+                <a:cs typeface="Plus Jakarta Sans" pitchFamily="34" charset="-120"/>
               </a:rPr>
               <a:t>Can.ac benchmark: </a:t>
             </a:r>
@@ -10964,9 +10964,9 @@
                 <a:solidFill>
                   <a:srgbClr val="1FA971"/>
                 </a:solidFill>
-                <a:latin typeface="Calibri" pitchFamily="34" charset="0"/>
-                <a:ea typeface="Calibri" pitchFamily="34" charset="-122"/>
-                <a:cs typeface="Calibri" pitchFamily="34" charset="-120"/>
+                <a:latin typeface="Plus Jakarta Sans" pitchFamily="34" charset="0"/>
+                <a:ea typeface="Plus Jakarta Sans" pitchFamily="34" charset="-122"/>
+                <a:cs typeface="Plus Jakarta Sans" pitchFamily="34" charset="-120"/>
               </a:rPr>
               <a:t>6.7% → 68.3%</a:t>
             </a:r>
@@ -10981,9 +10981,9 @@
                 <a:solidFill>
                   <a:srgbClr val="5A5A72"/>
                 </a:solidFill>
-                <a:latin typeface="Calibri" pitchFamily="34" charset="0"/>
-                <a:ea typeface="Calibri" pitchFamily="34" charset="-122"/>
-                <a:cs typeface="Calibri" pitchFamily="34" charset="-120"/>
+                <a:latin typeface="Plus Jakarta Sans" pitchFamily="34" charset="0"/>
+                <a:ea typeface="Plus Jakarta Sans" pitchFamily="34" charset="-122"/>
+                <a:cs typeface="Plus Jakarta Sans" pitchFamily="34" charset="-120"/>
               </a:rPr>
               <a:t> by changing harness tool formats only — zero model changes.
 </a:t>
@@ -10999,9 +10999,9 @@
                 <a:solidFill>
                   <a:srgbClr val="15154A"/>
                 </a:solidFill>
-                <a:latin typeface="Calibri" pitchFamily="34" charset="0"/>
-                <a:ea typeface="Calibri" pitchFamily="34" charset="-122"/>
-                <a:cs typeface="Calibri" pitchFamily="34" charset="-120"/>
+                <a:latin typeface="Plus Jakarta Sans" pitchFamily="34" charset="0"/>
+                <a:ea typeface="Plus Jakarta Sans" pitchFamily="34" charset="-122"/>
+                <a:cs typeface="Plus Jakarta Sans" pitchFamily="34" charset="-120"/>
               </a:rPr>
               <a:t>LangChain Terminal Bench 2.0: </a:t>
             </a:r>
@@ -11016,9 +11016,9 @@
                 <a:solidFill>
                   <a:srgbClr val="1FA971"/>
                 </a:solidFill>
-                <a:latin typeface="Calibri" pitchFamily="34" charset="0"/>
-                <a:ea typeface="Calibri" pitchFamily="34" charset="-122"/>
-                <a:cs typeface="Calibri" pitchFamily="34" charset="-120"/>
+                <a:latin typeface="Plus Jakarta Sans" pitchFamily="34" charset="0"/>
+                <a:ea typeface="Plus Jakarta Sans" pitchFamily="34" charset="-122"/>
+                <a:cs typeface="Plus Jakarta Sans" pitchFamily="34" charset="-120"/>
               </a:rPr>
               <a:t>30th → 5th place (+13.7 pts)</a:t>
             </a:r>
@@ -11033,9 +11033,9 @@
                 <a:solidFill>
                   <a:srgbClr val="5A5A72"/>
                 </a:solidFill>
-                <a:latin typeface="Calibri" pitchFamily="34" charset="0"/>
-                <a:ea typeface="Calibri" pitchFamily="34" charset="-122"/>
-                <a:cs typeface="Calibri" pitchFamily="34" charset="-120"/>
+                <a:latin typeface="Plus Jakarta Sans" pitchFamily="34" charset="0"/>
+                <a:ea typeface="Plus Jakarta Sans" pitchFamily="34" charset="-122"/>
+                <a:cs typeface="Plus Jakarta Sans" pitchFamily="34" charset="-120"/>
               </a:rPr>
               <a:t> purely through environmental constraints.</a:t>
             </a:r>
@@ -11072,9 +11072,9 @@
                 <a:solidFill>
                   <a:srgbClr val="9A9AB4"/>
                 </a:solidFill>
-                <a:latin typeface="Calibri" pitchFamily="34" charset="0"/>
-                <a:ea typeface="Calibri" pitchFamily="34" charset="-122"/>
-                <a:cs typeface="Calibri" pitchFamily="34" charset="-120"/>
+                <a:latin typeface="Plus Jakarta Sans" pitchFamily="34" charset="0"/>
+                <a:ea typeface="Plus Jakarta Sans" pitchFamily="34" charset="-122"/>
+                <a:cs typeface="Plus Jakarta Sans" pitchFamily="34" charset="-120"/>
               </a:rPr>
               <a:t>©2026 Cloudera, Inc. All Rights Reserved. · Empirical proof: harness adjustments alone, zero model weight changes.</a:t>
             </a:r>
@@ -11111,9 +11111,9 @@
                 <a:solidFill>
                   <a:srgbClr val="9A9AB4"/>
                 </a:solidFill>
-                <a:latin typeface="Calibri" pitchFamily="34" charset="0"/>
-                <a:ea typeface="Calibri" pitchFamily="34" charset="-122"/>
-                <a:cs typeface="Calibri" pitchFamily="34" charset="-120"/>
+                <a:latin typeface="Plus Jakarta Sans" pitchFamily="34" charset="0"/>
+                <a:ea typeface="Plus Jakarta Sans" pitchFamily="34" charset="-122"/>
+                <a:cs typeface="Plus Jakarta Sans" pitchFamily="34" charset="-120"/>
               </a:rPr>
               <a:t>16 / 22</a:t>
             </a:r>
@@ -11182,9 +11182,9 @@
                 <a:solidFill>
                   <a:srgbClr val="EE5A29"/>
                 </a:solidFill>
-                <a:latin typeface="Arial" pitchFamily="34" charset="0"/>
-                <a:ea typeface="Arial" pitchFamily="34" charset="-122"/>
-                <a:cs typeface="Arial" pitchFamily="34" charset="-120"/>
+                <a:latin typeface="Plus Jakarta Sans" pitchFamily="34" charset="0"/>
+                <a:ea typeface="Plus Jakarta Sans" pitchFamily="34" charset="-122"/>
+                <a:cs typeface="Plus Jakarta Sans" pitchFamily="34" charset="-120"/>
               </a:rPr>
               <a:t>CLOUD</a:t>
             </a:r>
@@ -11196,9 +11196,9 @@
                 <a:solidFill>
                   <a:srgbClr val="EE5A29"/>
                 </a:solidFill>
-                <a:latin typeface="Arial" pitchFamily="34" charset="0"/>
-                <a:ea typeface="Arial" pitchFamily="34" charset="-122"/>
-                <a:cs typeface="Arial" pitchFamily="34" charset="-120"/>
+                <a:latin typeface="Plus Jakarta Sans" pitchFamily="34" charset="0"/>
+                <a:ea typeface="Plus Jakarta Sans" pitchFamily="34" charset="-122"/>
+                <a:cs typeface="Plus Jakarta Sans" pitchFamily="34" charset="-120"/>
               </a:rPr>
               <a:t>E</a:t>
             </a:r>
@@ -11210,9 +11210,9 @@
                 <a:solidFill>
                   <a:srgbClr val="EE5A29"/>
                 </a:solidFill>
-                <a:latin typeface="Arial" pitchFamily="34" charset="0"/>
-                <a:ea typeface="Arial" pitchFamily="34" charset="-122"/>
-                <a:cs typeface="Arial" pitchFamily="34" charset="-120"/>
+                <a:latin typeface="Plus Jakarta Sans" pitchFamily="34" charset="0"/>
+                <a:ea typeface="Plus Jakarta Sans" pitchFamily="34" charset="-122"/>
+                <a:cs typeface="Plus Jakarta Sans" pitchFamily="34" charset="-120"/>
               </a:rPr>
               <a:t>RA</a:t>
             </a:r>
@@ -11269,9 +11269,9 @@
                 <a:solidFill>
                   <a:srgbClr val="EE5A29"/>
                 </a:solidFill>
-                <a:latin typeface="Calibri" pitchFamily="34" charset="0"/>
-                <a:ea typeface="Calibri" pitchFamily="34" charset="-122"/>
-                <a:cs typeface="Calibri" pitchFamily="34" charset="-120"/>
+                <a:latin typeface="Plus Jakarta Sans" pitchFamily="34" charset="0"/>
+                <a:ea typeface="Plus Jakarta Sans" pitchFamily="34" charset="-122"/>
+                <a:cs typeface="Plus Jakarta Sans" pitchFamily="34" charset="-120"/>
               </a:rPr>
               <a:t>THE ENGINEERING EVOLUTION</a:t>
             </a:r>
@@ -11308,9 +11308,9 @@
                 <a:solidFill>
                   <a:srgbClr val="15154A"/>
                 </a:solidFill>
-                <a:latin typeface="Arial" pitchFamily="34" charset="0"/>
-                <a:ea typeface="Arial" pitchFamily="34" charset="-122"/>
-                <a:cs typeface="Arial" pitchFamily="34" charset="-120"/>
+                <a:latin typeface="Plus Jakarta Sans" pitchFamily="34" charset="0"/>
+                <a:ea typeface="Plus Jakarta Sans" pitchFamily="34" charset="-122"/>
+                <a:cs typeface="Plus Jakarta Sans" pitchFamily="34" charset="-120"/>
               </a:rPr>
               <a:t>The Three Eras of AI Engineering</a:t>
             </a:r>
@@ -11381,9 +11381,9 @@
                 <a:solidFill>
                   <a:srgbClr val="5A5A72"/>
                 </a:solidFill>
-                <a:latin typeface="Arial" pitchFamily="34" charset="0"/>
-                <a:ea typeface="Arial" pitchFamily="34" charset="-122"/>
-                <a:cs typeface="Arial" pitchFamily="34" charset="-120"/>
+                <a:latin typeface="Plus Jakarta Sans" pitchFamily="34" charset="0"/>
+                <a:ea typeface="Plus Jakarta Sans" pitchFamily="34" charset="-122"/>
+                <a:cs typeface="Plus Jakarta Sans" pitchFamily="34" charset="-120"/>
               </a:rPr>
               <a:t>PROMPT ENGINEERING</a:t>
             </a:r>
@@ -11459,9 +11459,9 @@
                 <a:solidFill>
                   <a:srgbClr val="15154A"/>
                 </a:solidFill>
-                <a:latin typeface="Arial" pitchFamily="34" charset="0"/>
-                <a:ea typeface="Arial" pitchFamily="34" charset="-122"/>
-                <a:cs typeface="Arial" pitchFamily="34" charset="-120"/>
+                <a:latin typeface="Plus Jakarta Sans" pitchFamily="34" charset="0"/>
+                <a:ea typeface="Plus Jakarta Sans" pitchFamily="34" charset="-122"/>
+                <a:cs typeface="Plus Jakarta Sans" pitchFamily="34" charset="-120"/>
               </a:rPr>
               <a:t>How do I ask?</a:t>
             </a:r>
@@ -11557,9 +11557,9 @@
                 <a:solidFill>
                   <a:srgbClr val="15154A"/>
                 </a:solidFill>
-                <a:latin typeface="Calibri" pitchFamily="34" charset="0"/>
-                <a:ea typeface="Calibri" pitchFamily="34" charset="-122"/>
-                <a:cs typeface="Calibri" pitchFamily="34" charset="-120"/>
+                <a:latin typeface="Plus Jakarta Sans" pitchFamily="34" charset="0"/>
+                <a:ea typeface="Plus Jakarta Sans" pitchFamily="34" charset="-122"/>
+                <a:cs typeface="Plus Jakarta Sans" pitchFamily="34" charset="-120"/>
               </a:rPr>
               <a:t>Chatbot</a:t>
             </a:r>
@@ -11635,9 +11635,9 @@
                 <a:solidFill>
                   <a:srgbClr val="15154A"/>
                 </a:solidFill>
-                <a:latin typeface="Calibri" pitchFamily="34" charset="0"/>
-                <a:ea typeface="Calibri" pitchFamily="34" charset="-122"/>
-                <a:cs typeface="Calibri" pitchFamily="34" charset="-120"/>
+                <a:latin typeface="Plus Jakarta Sans" pitchFamily="34" charset="0"/>
+                <a:ea typeface="Plus Jakarta Sans" pitchFamily="34" charset="-122"/>
+                <a:cs typeface="Plus Jakarta Sans" pitchFamily="34" charset="-120"/>
               </a:rPr>
               <a:t>Input expression</a:t>
             </a:r>
@@ -11713,9 +11713,9 @@
                 <a:solidFill>
                   <a:srgbClr val="15154A"/>
                 </a:solidFill>
-                <a:latin typeface="Calibri" pitchFamily="34" charset="0"/>
-                <a:ea typeface="Calibri" pitchFamily="34" charset="-122"/>
-                <a:cs typeface="Calibri" pitchFamily="34" charset="-120"/>
+                <a:latin typeface="Plus Jakarta Sans" pitchFamily="34" charset="0"/>
+                <a:ea typeface="Plus Jakarta Sans" pitchFamily="34" charset="-122"/>
+                <a:cs typeface="Plus Jakarta Sans" pitchFamily="34" charset="-120"/>
               </a:rPr>
               <a:t>Chain-of-Thought, Few-Shot</a:t>
             </a:r>
@@ -11786,9 +11786,9 @@
                 <a:solidFill>
                   <a:srgbClr val="5A5A72"/>
                 </a:solidFill>
-                <a:latin typeface="Arial" pitchFamily="34" charset="0"/>
-                <a:ea typeface="Arial" pitchFamily="34" charset="-122"/>
-                <a:cs typeface="Arial" pitchFamily="34" charset="-120"/>
+                <a:latin typeface="Plus Jakarta Sans" pitchFamily="34" charset="0"/>
+                <a:ea typeface="Plus Jakarta Sans" pitchFamily="34" charset="-122"/>
+                <a:cs typeface="Plus Jakarta Sans" pitchFamily="34" charset="-120"/>
               </a:rPr>
               <a:t>CONTEXT ENGINEERING</a:t>
             </a:r>
@@ -11864,9 +11864,9 @@
                 <a:solidFill>
                   <a:srgbClr val="15154A"/>
                 </a:solidFill>
-                <a:latin typeface="Arial" pitchFamily="34" charset="0"/>
-                <a:ea typeface="Arial" pitchFamily="34" charset="-122"/>
-                <a:cs typeface="Arial" pitchFamily="34" charset="-120"/>
+                <a:latin typeface="Plus Jakarta Sans" pitchFamily="34" charset="0"/>
+                <a:ea typeface="Plus Jakarta Sans" pitchFamily="34" charset="-122"/>
+                <a:cs typeface="Plus Jakarta Sans" pitchFamily="34" charset="-120"/>
               </a:rPr>
               <a:t>What do I show?</a:t>
             </a:r>
@@ -11962,9 +11962,9 @@
                 <a:solidFill>
                   <a:srgbClr val="15154A"/>
                 </a:solidFill>
-                <a:latin typeface="Calibri" pitchFamily="34" charset="0"/>
-                <a:ea typeface="Calibri" pitchFamily="34" charset="-122"/>
-                <a:cs typeface="Calibri" pitchFamily="34" charset="-120"/>
+                <a:latin typeface="Plus Jakarta Sans" pitchFamily="34" charset="0"/>
+                <a:ea typeface="Plus Jakarta Sans" pitchFamily="34" charset="-122"/>
+                <a:cs typeface="Plus Jakarta Sans" pitchFamily="34" charset="-120"/>
               </a:rPr>
               <a:t>The Researcher (RAG)</a:t>
             </a:r>
@@ -12040,9 +12040,9 @@
                 <a:solidFill>
                   <a:srgbClr val="15154A"/>
                 </a:solidFill>
-                <a:latin typeface="Calibri" pitchFamily="34" charset="0"/>
-                <a:ea typeface="Calibri" pitchFamily="34" charset="-122"/>
-                <a:cs typeface="Calibri" pitchFamily="34" charset="-120"/>
+                <a:latin typeface="Plus Jakarta Sans" pitchFamily="34" charset="0"/>
+                <a:ea typeface="Plus Jakarta Sans" pitchFamily="34" charset="-122"/>
+                <a:cs typeface="Plus Jakarta Sans" pitchFamily="34" charset="-120"/>
               </a:rPr>
               <a:t>Window overload</a:t>
             </a:r>
@@ -12118,9 +12118,9 @@
                 <a:solidFill>
                   <a:srgbClr val="15154A"/>
                 </a:solidFill>
-                <a:latin typeface="Calibri" pitchFamily="34" charset="0"/>
-                <a:ea typeface="Calibri" pitchFamily="34" charset="-122"/>
-                <a:cs typeface="Calibri" pitchFamily="34" charset="-120"/>
+                <a:latin typeface="Plus Jakarta Sans" pitchFamily="34" charset="0"/>
+                <a:ea typeface="Plus Jakarta Sans" pitchFamily="34" charset="-122"/>
+                <a:cs typeface="Plus Jakarta Sans" pitchFamily="34" charset="-120"/>
               </a:rPr>
               <a:t>Vector search, Tool calling</a:t>
             </a:r>
@@ -12191,9 +12191,9 @@
                 <a:solidFill>
                   <a:srgbClr val="4F4FF5"/>
                 </a:solidFill>
-                <a:latin typeface="Arial" pitchFamily="34" charset="0"/>
-                <a:ea typeface="Arial" pitchFamily="34" charset="-122"/>
-                <a:cs typeface="Arial" pitchFamily="34" charset="-120"/>
+                <a:latin typeface="Plus Jakarta Sans" pitchFamily="34" charset="0"/>
+                <a:ea typeface="Plus Jakarta Sans" pitchFamily="34" charset="-122"/>
+                <a:cs typeface="Plus Jakarta Sans" pitchFamily="34" charset="-120"/>
               </a:rPr>
               <a:t>HARNESS ENGINEERING</a:t>
             </a:r>
@@ -12269,9 +12269,9 @@
                 <a:solidFill>
                   <a:srgbClr val="15154A"/>
                 </a:solidFill>
-                <a:latin typeface="Arial" pitchFamily="34" charset="0"/>
-                <a:ea typeface="Arial" pitchFamily="34" charset="-122"/>
-                <a:cs typeface="Arial" pitchFamily="34" charset="-120"/>
+                <a:latin typeface="Plus Jakarta Sans" pitchFamily="34" charset="0"/>
+                <a:ea typeface="Plus Jakarta Sans" pitchFamily="34" charset="-122"/>
+                <a:cs typeface="Plus Jakarta Sans" pitchFamily="34" charset="-120"/>
               </a:rPr>
               <a:t>How does it run?</a:t>
             </a:r>
@@ -12367,9 +12367,9 @@
                 <a:solidFill>
                   <a:srgbClr val="15154A"/>
                 </a:solidFill>
-                <a:latin typeface="Calibri" pitchFamily="34" charset="0"/>
-                <a:ea typeface="Calibri" pitchFamily="34" charset="-122"/>
-                <a:cs typeface="Calibri" pitchFamily="34" charset="-120"/>
+                <a:latin typeface="Plus Jakarta Sans" pitchFamily="34" charset="0"/>
+                <a:ea typeface="Plus Jakarta Sans" pitchFamily="34" charset="-122"/>
+                <a:cs typeface="Plus Jakarta Sans" pitchFamily="34" charset="-120"/>
               </a:rPr>
               <a:t>Autonomous Worker</a:t>
             </a:r>
@@ -12445,9 +12445,9 @@
                 <a:solidFill>
                   <a:srgbClr val="15154A"/>
                 </a:solidFill>
-                <a:latin typeface="Calibri" pitchFamily="34" charset="0"/>
-                <a:ea typeface="Calibri" pitchFamily="34" charset="-122"/>
-                <a:cs typeface="Calibri" pitchFamily="34" charset="-120"/>
+                <a:latin typeface="Plus Jakarta Sans" pitchFamily="34" charset="0"/>
+                <a:ea typeface="Plus Jakarta Sans" pitchFamily="34" charset="-122"/>
+                <a:cs typeface="Plus Jakarta Sans" pitchFamily="34" charset="-120"/>
               </a:rPr>
               <a:t>Environmental constraints</a:t>
             </a:r>
@@ -12523,9 +12523,9 @@
                 <a:solidFill>
                   <a:srgbClr val="4F4FF5"/>
                 </a:solidFill>
-                <a:latin typeface="Calibri" pitchFamily="34" charset="0"/>
-                <a:ea typeface="Calibri" pitchFamily="34" charset="-122"/>
-                <a:cs typeface="Calibri" pitchFamily="34" charset="-120"/>
+                <a:latin typeface="Plus Jakarta Sans" pitchFamily="34" charset="0"/>
+                <a:ea typeface="Plus Jakarta Sans" pitchFamily="34" charset="-122"/>
+                <a:cs typeface="Plus Jakarta Sans" pitchFamily="34" charset="-120"/>
               </a:rPr>
               <a:t>Execution loops, Memory, State</a:t>
             </a:r>
@@ -12562,9 +12562,9 @@
                 <a:solidFill>
                   <a:srgbClr val="9A9AB4"/>
                 </a:solidFill>
-                <a:latin typeface="Calibri" pitchFamily="34" charset="0"/>
-                <a:ea typeface="Calibri" pitchFamily="34" charset="-122"/>
-                <a:cs typeface="Calibri" pitchFamily="34" charset="-120"/>
+                <a:latin typeface="Plus Jakarta Sans" pitchFamily="34" charset="0"/>
+                <a:ea typeface="Plus Jakarta Sans" pitchFamily="34" charset="-122"/>
+                <a:cs typeface="Plus Jakarta Sans" pitchFamily="34" charset="-120"/>
               </a:rPr>
               <a:t>©2026 Cloudera, Inc. All Rights Reserved.</a:t>
             </a:r>
@@ -12601,9 +12601,9 @@
                 <a:solidFill>
                   <a:srgbClr val="9A9AB4"/>
                 </a:solidFill>
-                <a:latin typeface="Calibri" pitchFamily="34" charset="0"/>
-                <a:ea typeface="Calibri" pitchFamily="34" charset="-122"/>
-                <a:cs typeface="Calibri" pitchFamily="34" charset="-120"/>
+                <a:latin typeface="Plus Jakarta Sans" pitchFamily="34" charset="0"/>
+                <a:ea typeface="Plus Jakarta Sans" pitchFamily="34" charset="-122"/>
+                <a:cs typeface="Plus Jakarta Sans" pitchFamily="34" charset="-120"/>
               </a:rPr>
               <a:t>17 / 22</a:t>
             </a:r>
@@ -12672,9 +12672,9 @@
                 <a:solidFill>
                   <a:srgbClr val="EE5A29"/>
                 </a:solidFill>
-                <a:latin typeface="Arial" pitchFamily="34" charset="0"/>
-                <a:ea typeface="Arial" pitchFamily="34" charset="-122"/>
-                <a:cs typeface="Arial" pitchFamily="34" charset="-120"/>
+                <a:latin typeface="Plus Jakarta Sans" pitchFamily="34" charset="0"/>
+                <a:ea typeface="Plus Jakarta Sans" pitchFamily="34" charset="-122"/>
+                <a:cs typeface="Plus Jakarta Sans" pitchFamily="34" charset="-120"/>
               </a:rPr>
               <a:t>CLOUD</a:t>
             </a:r>
@@ -12686,9 +12686,9 @@
                 <a:solidFill>
                   <a:srgbClr val="EE5A29"/>
                 </a:solidFill>
-                <a:latin typeface="Arial" pitchFamily="34" charset="0"/>
-                <a:ea typeface="Arial" pitchFamily="34" charset="-122"/>
-                <a:cs typeface="Arial" pitchFamily="34" charset="-120"/>
+                <a:latin typeface="Plus Jakarta Sans" pitchFamily="34" charset="0"/>
+                <a:ea typeface="Plus Jakarta Sans" pitchFamily="34" charset="-122"/>
+                <a:cs typeface="Plus Jakarta Sans" pitchFamily="34" charset="-120"/>
               </a:rPr>
               <a:t>E</a:t>
             </a:r>
@@ -12700,9 +12700,9 @@
                 <a:solidFill>
                   <a:srgbClr val="EE5A29"/>
                 </a:solidFill>
-                <a:latin typeface="Arial" pitchFamily="34" charset="0"/>
-                <a:ea typeface="Arial" pitchFamily="34" charset="-122"/>
-                <a:cs typeface="Arial" pitchFamily="34" charset="-120"/>
+                <a:latin typeface="Plus Jakarta Sans" pitchFamily="34" charset="0"/>
+                <a:ea typeface="Plus Jakarta Sans" pitchFamily="34" charset="-122"/>
+                <a:cs typeface="Plus Jakarta Sans" pitchFamily="34" charset="-120"/>
               </a:rPr>
               <a:t>RA</a:t>
             </a:r>
@@ -12759,9 +12759,9 @@
                 <a:solidFill>
                   <a:srgbClr val="EE5A29"/>
                 </a:solidFill>
-                <a:latin typeface="Calibri" pitchFamily="34" charset="0"/>
-                <a:ea typeface="Calibri" pitchFamily="34" charset="-122"/>
-                <a:cs typeface="Calibri" pitchFamily="34" charset="-120"/>
+                <a:latin typeface="Plus Jakarta Sans" pitchFamily="34" charset="0"/>
+                <a:ea typeface="Plus Jakarta Sans" pitchFamily="34" charset="-122"/>
+                <a:cs typeface="Plus Jakarta Sans" pitchFamily="34" charset="-120"/>
               </a:rPr>
               <a:t>HARNESS ENGINEERING</a:t>
             </a:r>
@@ -12798,9 +12798,9 @@
                 <a:solidFill>
                   <a:srgbClr val="15154A"/>
                 </a:solidFill>
-                <a:latin typeface="Arial" pitchFamily="34" charset="0"/>
-                <a:ea typeface="Arial" pitchFamily="34" charset="-122"/>
-                <a:cs typeface="Arial" pitchFamily="34" charset="-120"/>
+                <a:latin typeface="Plus Jakarta Sans" pitchFamily="34" charset="0"/>
+                <a:ea typeface="Plus Jakarta Sans" pitchFamily="34" charset="-122"/>
+                <a:cs typeface="Plus Jakarta Sans" pitchFamily="34" charset="-120"/>
               </a:rPr>
               <a:t>The Four Pillars of a Production Harness</a:t>
             </a:r>
@@ -12886,9 +12886,9 @@
                 <a:solidFill>
                   <a:srgbClr val="FFFFFF"/>
                 </a:solidFill>
-                <a:latin typeface="Arial" pitchFamily="34" charset="0"/>
-                <a:ea typeface="Arial" pitchFamily="34" charset="-122"/>
-                <a:cs typeface="Arial" pitchFamily="34" charset="-120"/>
+                <a:latin typeface="Plus Jakarta Sans" pitchFamily="34" charset="0"/>
+                <a:ea typeface="Plus Jakarta Sans" pitchFamily="34" charset="-122"/>
+                <a:cs typeface="Plus Jakarta Sans" pitchFamily="34" charset="-120"/>
               </a:rPr>
               <a:t>1</a:t>
             </a:r>
@@ -12928,9 +12928,9 @@
                 <a:solidFill>
                   <a:srgbClr val="15154A"/>
                 </a:solidFill>
-                <a:latin typeface="Arial" pitchFamily="34" charset="0"/>
-                <a:ea typeface="Arial" pitchFamily="34" charset="-122"/>
-                <a:cs typeface="Arial" pitchFamily="34" charset="-120"/>
+                <a:latin typeface="Plus Jakarta Sans" pitchFamily="34" charset="0"/>
+                <a:ea typeface="Plus Jakarta Sans" pitchFamily="34" charset="-122"/>
+                <a:cs typeface="Plus Jakarta Sans" pitchFamily="34" charset="-120"/>
               </a:rPr>
               <a:t>Progressive Context Architecture</a:t>
             </a:r>
@@ -12990,9 +12990,9 @@
                 <a:solidFill>
                   <a:srgbClr val="EE5A29"/>
                 </a:solidFill>
-                <a:latin typeface="Calibri" pitchFamily="34" charset="0"/>
-                <a:ea typeface="Calibri" pitchFamily="34" charset="-122"/>
-                <a:cs typeface="Calibri" pitchFamily="34" charset="-120"/>
+                <a:latin typeface="Plus Jakarta Sans" pitchFamily="34" charset="0"/>
+                <a:ea typeface="Plus Jakarta Sans" pitchFamily="34" charset="-122"/>
+                <a:cs typeface="Plus Jakarta Sans" pitchFamily="34" charset="-120"/>
               </a:rPr>
               <a:t>RULE: Give the agent only what it needs for this step.</a:t>
             </a:r>
@@ -13036,9 +13036,9 @@
                 <a:solidFill>
                   <a:srgbClr val="5A5A72"/>
                 </a:solidFill>
-                <a:latin typeface="Calibri" pitchFamily="34" charset="0"/>
-                <a:ea typeface="Calibri" pitchFamily="34" charset="-122"/>
-                <a:cs typeface="Calibri" pitchFamily="34" charset="-120"/>
+                <a:latin typeface="Plus Jakarta Sans" pitchFamily="34" charset="0"/>
+                <a:ea typeface="Plus Jakarta Sans" pitchFamily="34" charset="-122"/>
+                <a:cs typeface="Plus Jakarta Sans" pitchFamily="34" charset="-120"/>
               </a:rPr>
               <a:t>Tier 1 Always-On: AGENTS.md, project structure, dynamic feedback loop</a:t>
             </a:r>
@@ -13060,9 +13060,9 @@
                 <a:solidFill>
                   <a:srgbClr val="5A5A72"/>
                 </a:solidFill>
-                <a:latin typeface="Calibri" pitchFamily="34" charset="0"/>
-                <a:ea typeface="Calibri" pitchFamily="34" charset="-122"/>
-                <a:cs typeface="Calibri" pitchFamily="34" charset="-120"/>
+                <a:latin typeface="Plus Jakarta Sans" pitchFamily="34" charset="0"/>
+                <a:ea typeface="Plus Jakarta Sans" pitchFamily="34" charset="-122"/>
+                <a:cs typeface="Plus Jakarta Sans" pitchFamily="34" charset="-120"/>
               </a:rPr>
               <a:t>Tier 2 On-Demand: loaded by active skills &amp; sub-agent roles</a:t>
             </a:r>
@@ -13084,9 +13084,9 @@
                 <a:solidFill>
                   <a:srgbClr val="5A5A72"/>
                 </a:solidFill>
-                <a:latin typeface="Calibri" pitchFamily="34" charset="0"/>
-                <a:ea typeface="Calibri" pitchFamily="34" charset="-122"/>
-                <a:cs typeface="Calibri" pitchFamily="34" charset="-120"/>
+                <a:latin typeface="Plus Jakarta Sans" pitchFamily="34" charset="0"/>
+                <a:ea typeface="Plus Jakarta Sans" pitchFamily="34" charset="-122"/>
+                <a:cs typeface="Plus Jakarta Sans" pitchFamily="34" charset="-120"/>
               </a:rPr>
               <a:t>Tier 3 Cold Storage: vector DBs, full codebase — queried via tools</a:t>
             </a:r>
@@ -13172,9 +13172,9 @@
                 <a:solidFill>
                   <a:srgbClr val="FFFFFF"/>
                 </a:solidFill>
-                <a:latin typeface="Arial" pitchFamily="34" charset="0"/>
-                <a:ea typeface="Arial" pitchFamily="34" charset="-122"/>
-                <a:cs typeface="Arial" pitchFamily="34" charset="-120"/>
+                <a:latin typeface="Plus Jakarta Sans" pitchFamily="34" charset="0"/>
+                <a:ea typeface="Plus Jakarta Sans" pitchFamily="34" charset="-122"/>
+                <a:cs typeface="Plus Jakarta Sans" pitchFamily="34" charset="-120"/>
               </a:rPr>
               <a:t>2</a:t>
             </a:r>
@@ -13214,9 +13214,9 @@
                 <a:solidFill>
                   <a:srgbClr val="15154A"/>
                 </a:solidFill>
-                <a:latin typeface="Arial" pitchFamily="34" charset="0"/>
-                <a:ea typeface="Arial" pitchFamily="34" charset="-122"/>
-                <a:cs typeface="Arial" pitchFamily="34" charset="-120"/>
+                <a:latin typeface="Plus Jakarta Sans" pitchFamily="34" charset="0"/>
+                <a:ea typeface="Plus Jakarta Sans" pitchFamily="34" charset="-122"/>
+                <a:cs typeface="Plus Jakarta Sans" pitchFamily="34" charset="-120"/>
               </a:rPr>
               <a:t>Agent Specialization &amp; Parallelism</a:t>
             </a:r>
@@ -13276,9 +13276,9 @@
                 <a:solidFill>
                   <a:srgbClr val="EE5A29"/>
                 </a:solidFill>
-                <a:latin typeface="Calibri" pitchFamily="34" charset="0"/>
-                <a:ea typeface="Calibri" pitchFamily="34" charset="-122"/>
-                <a:cs typeface="Calibri" pitchFamily="34" charset="-120"/>
+                <a:latin typeface="Plus Jakarta Sans" pitchFamily="34" charset="0"/>
+                <a:ea typeface="Plus Jakarta Sans" pitchFamily="34" charset="-122"/>
+                <a:cs typeface="Plus Jakarta Sans" pitchFamily="34" charset="-120"/>
               </a:rPr>
               <a:t>RULE: Focused agents with restricted toolsets outperform generalist 'god-mode' agents.</a:t>
             </a:r>
@@ -13322,9 +13322,9 @@
                 <a:solidFill>
                   <a:srgbClr val="5A5A72"/>
                 </a:solidFill>
-                <a:latin typeface="Calibri" pitchFamily="34" charset="0"/>
-                <a:ea typeface="Calibri" pitchFamily="34" charset="-122"/>
-                <a:cs typeface="Calibri" pitchFamily="34" charset="-120"/>
+                <a:latin typeface="Plus Jakarta Sans" pitchFamily="34" charset="0"/>
+                <a:ea typeface="Plus Jakarta Sans" pitchFamily="34" charset="-122"/>
+                <a:cs typeface="Plus Jakarta Sans" pitchFamily="34" charset="-120"/>
               </a:rPr>
               <a:t>Planner Agent: read-only (Grep, Glob) → outputs structural JSON plan</a:t>
             </a:r>
@@ -13346,9 +13346,9 @@
                 <a:solidFill>
                   <a:srgbClr val="5A5A72"/>
                 </a:solidFill>
-                <a:latin typeface="Calibri" pitchFamily="34" charset="0"/>
-                <a:ea typeface="Calibri" pitchFamily="34" charset="-122"/>
-                <a:cs typeface="Calibri" pitchFamily="34" charset="-120"/>
+                <a:latin typeface="Plus Jakarta Sans" pitchFamily="34" charset="0"/>
+                <a:ea typeface="Plus Jakarta Sans" pitchFamily="34" charset="-122"/>
+                <a:cs typeface="Plus Jakarta Sans" pitchFamily="34" charset="-120"/>
               </a:rPr>
               <a:t>Execution Agent: scoped write access, parallelizes tool calls</a:t>
             </a:r>
@@ -13370,9 +13370,9 @@
                 <a:solidFill>
                   <a:srgbClr val="5A5A72"/>
                 </a:solidFill>
-                <a:latin typeface="Calibri" pitchFamily="34" charset="0"/>
-                <a:ea typeface="Calibri" pitchFamily="34" charset="-122"/>
-                <a:cs typeface="Calibri" pitchFamily="34" charset="-120"/>
+                <a:latin typeface="Plus Jakarta Sans" pitchFamily="34" charset="0"/>
+                <a:ea typeface="Plus Jakarta Sans" pitchFamily="34" charset="-122"/>
+                <a:cs typeface="Plus Jakarta Sans" pitchFamily="34" charset="-120"/>
               </a:rPr>
               <a:t>Review Agent: read + flag access, critiques against the JSON plan</a:t>
             </a:r>
@@ -13458,9 +13458,9 @@
                 <a:solidFill>
                   <a:srgbClr val="FFFFFF"/>
                 </a:solidFill>
-                <a:latin typeface="Arial" pitchFamily="34" charset="0"/>
-                <a:ea typeface="Arial" pitchFamily="34" charset="-122"/>
-                <a:cs typeface="Arial" pitchFamily="34" charset="-120"/>
+                <a:latin typeface="Plus Jakarta Sans" pitchFamily="34" charset="0"/>
+                <a:ea typeface="Plus Jakarta Sans" pitchFamily="34" charset="-122"/>
+                <a:cs typeface="Plus Jakarta Sans" pitchFamily="34" charset="-120"/>
               </a:rPr>
               <a:t>3</a:t>
             </a:r>
@@ -13500,9 +13500,9 @@
                 <a:solidFill>
                   <a:srgbClr val="15154A"/>
                 </a:solidFill>
-                <a:latin typeface="Arial" pitchFamily="34" charset="0"/>
-                <a:ea typeface="Arial" pitchFamily="34" charset="-122"/>
-                <a:cs typeface="Arial" pitchFamily="34" charset="-120"/>
+                <a:latin typeface="Plus Jakarta Sans" pitchFamily="34" charset="0"/>
+                <a:ea typeface="Plus Jakarta Sans" pitchFamily="34" charset="-122"/>
+                <a:cs typeface="Plus Jakarta Sans" pitchFamily="34" charset="-120"/>
               </a:rPr>
               <a:t>Persistent Memory &amp; State</a:t>
             </a:r>
@@ -13562,9 +13562,9 @@
                 <a:solidFill>
                   <a:srgbClr val="EE5A29"/>
                 </a:solidFill>
-                <a:latin typeface="Calibri" pitchFamily="34" charset="0"/>
-                <a:ea typeface="Calibri" pitchFamily="34" charset="-122"/>
-                <a:cs typeface="Calibri" pitchFamily="34" charset="-120"/>
+                <a:latin typeface="Plus Jakarta Sans" pitchFamily="34" charset="0"/>
+                <a:ea typeface="Plus Jakarta Sans" pitchFamily="34" charset="-122"/>
+                <a:cs typeface="Plus Jakarta Sans" pitchFamily="34" charset="-120"/>
               </a:rPr>
               <a:t>RULE: Memory lives in the file system, not the prompt window.</a:t>
             </a:r>
@@ -13608,9 +13608,9 @@
                 <a:solidFill>
                   <a:srgbClr val="5A5A72"/>
                 </a:solidFill>
-                <a:latin typeface="Calibri" pitchFamily="34" charset="0"/>
-                <a:ea typeface="Calibri" pitchFamily="34" charset="-122"/>
-                <a:cs typeface="Calibri" pitchFamily="34" charset="-120"/>
+                <a:latin typeface="Plus Jakarta Sans" pitchFamily="34" charset="0"/>
+                <a:ea typeface="Plus Jakarta Sans" pitchFamily="34" charset="-122"/>
+                <a:cs typeface="Plus Jakarta Sans" pitchFamily="34" charset="-120"/>
               </a:rPr>
               <a:t>Boot → read git log → find next task via progress.json</a:t>
             </a:r>
@@ -13632,9 +13632,9 @@
                 <a:solidFill>
                   <a:srgbClr val="5A5A72"/>
                 </a:solidFill>
-                <a:latin typeface="Calibri" pitchFamily="34" charset="0"/>
-                <a:ea typeface="Calibri" pitchFamily="34" charset="-122"/>
-                <a:cs typeface="Calibri" pitchFamily="34" charset="-120"/>
+                <a:latin typeface="Plus Jakarta Sans" pitchFamily="34" charset="0"/>
+                <a:ea typeface="Plus Jakarta Sans" pitchFamily="34" charset="-122"/>
+                <a:cs typeface="Plus Jakarta Sans" pitchFamily="34" charset="-120"/>
               </a:rPr>
               <a:t>Execute → record state back to progress.json after every step</a:t>
             </a:r>
@@ -13656,9 +13656,9 @@
                 <a:solidFill>
                   <a:srgbClr val="5A5A72"/>
                 </a:solidFill>
-                <a:latin typeface="Calibri" pitchFamily="34" charset="0"/>
-                <a:ea typeface="Calibri" pitchFamily="34" charset="-122"/>
-                <a:cs typeface="Calibri" pitchFamily="34" charset="-120"/>
+                <a:latin typeface="Plus Jakarta Sans" pitchFamily="34" charset="0"/>
+                <a:ea typeface="Plus Jakarta Sans" pitchFamily="34" charset="-122"/>
+                <a:cs typeface="Plus Jakarta Sans" pitchFamily="34" charset="-120"/>
               </a:rPr>
               <a:t>Failure mode: 'one-shot' attempts lose context and declare premature victory</a:t>
             </a:r>
@@ -13744,9 +13744,9 @@
                 <a:solidFill>
                   <a:srgbClr val="FFFFFF"/>
                 </a:solidFill>
-                <a:latin typeface="Arial" pitchFamily="34" charset="0"/>
-                <a:ea typeface="Arial" pitchFamily="34" charset="-122"/>
-                <a:cs typeface="Arial" pitchFamily="34" charset="-120"/>
+                <a:latin typeface="Plus Jakarta Sans" pitchFamily="34" charset="0"/>
+                <a:ea typeface="Plus Jakarta Sans" pitchFamily="34" charset="-122"/>
+                <a:cs typeface="Plus Jakarta Sans" pitchFamily="34" charset="-120"/>
               </a:rPr>
               <a:t>4</a:t>
             </a:r>
@@ -13786,9 +13786,9 @@
                 <a:solidFill>
                   <a:srgbClr val="15154A"/>
                 </a:solidFill>
-                <a:latin typeface="Arial" pitchFamily="34" charset="0"/>
-                <a:ea typeface="Arial" pitchFamily="34" charset="-122"/>
-                <a:cs typeface="Arial" pitchFamily="34" charset="-120"/>
+                <a:latin typeface="Plus Jakarta Sans" pitchFamily="34" charset="0"/>
+                <a:ea typeface="Plus Jakarta Sans" pitchFamily="34" charset="-122"/>
+                <a:cs typeface="Plus Jakarta Sans" pitchFamily="34" charset="-120"/>
               </a:rPr>
               <a:t>Structured Execution &amp; Backpressure</a:t>
             </a:r>
@@ -13848,9 +13848,9 @@
                 <a:solidFill>
                   <a:srgbClr val="EE5A29"/>
                 </a:solidFill>
-                <a:latin typeface="Calibri" pitchFamily="34" charset="0"/>
-                <a:ea typeface="Calibri" pitchFamily="34" charset="-122"/>
-                <a:cs typeface="Calibri" pitchFamily="34" charset="-120"/>
+                <a:latin typeface="Plus Jakarta Sans" pitchFamily="34" charset="0"/>
+                <a:ea typeface="Plus Jakarta Sans" pitchFamily="34" charset="-122"/>
+                <a:cs typeface="Plus Jakarta Sans" pitchFamily="34" charset="-120"/>
               </a:rPr>
               <a:t>RULE: If a rule cannot be enforced mechanically, the agent will eventually deviate.</a:t>
             </a:r>
@@ -13894,9 +13894,9 @@
                 <a:solidFill>
                   <a:srgbClr val="5A5A72"/>
                 </a:solidFill>
-                <a:latin typeface="Calibri" pitchFamily="34" charset="0"/>
-                <a:ea typeface="Calibri" pitchFamily="34" charset="-122"/>
-                <a:cs typeface="Calibri" pitchFamily="34" charset="-120"/>
+                <a:latin typeface="Plus Jakarta Sans" pitchFamily="34" charset="0"/>
+                <a:ea typeface="Plus Jakarta Sans" pitchFamily="34" charset="-122"/>
+                <a:cs typeface="Plus Jakarta Sans" pitchFamily="34" charset="-120"/>
               </a:rPr>
               <a:t>Upstream: custom linters &amp; ArchUnit guide before execution</a:t>
             </a:r>
@@ -13918,9 +13918,9 @@
                 <a:solidFill>
                   <a:srgbClr val="5A5A72"/>
                 </a:solidFill>
-                <a:latin typeface="Calibri" pitchFamily="34" charset="0"/>
-                <a:ea typeface="Calibri" pitchFamily="34" charset="-122"/>
-                <a:cs typeface="Calibri" pitchFamily="34" charset="-120"/>
+                <a:latin typeface="Plus Jakarta Sans" pitchFamily="34" charset="0"/>
+                <a:ea typeface="Plus Jakarta Sans" pitchFamily="34" charset="-122"/>
+                <a:cs typeface="Plus Jakarta Sans" pitchFamily="34" charset="-120"/>
               </a:rPr>
               <a:t>Downstream: CI/CD &amp; browser tests reject invalid outputs</a:t>
             </a:r>
@@ -13942,9 +13942,9 @@
                 <a:solidFill>
                   <a:srgbClr val="5A5A72"/>
                 </a:solidFill>
-                <a:latin typeface="Calibri" pitchFamily="34" charset="0"/>
-                <a:ea typeface="Calibri" pitchFamily="34" charset="-122"/>
-                <a:cs typeface="Calibri" pitchFamily="34" charset="-120"/>
+                <a:latin typeface="Plus Jakarta Sans" pitchFamily="34" charset="0"/>
+                <a:ea typeface="Plus Jakarta Sans" pitchFamily="34" charset="-122"/>
+                <a:cs typeface="Plus Jakarta Sans" pitchFamily="34" charset="-120"/>
               </a:rPr>
               <a:t>Self-correction loop: reject → retry, separate thinking from execution</a:t>
             </a:r>
@@ -13981,9 +13981,9 @@
                 <a:solidFill>
                   <a:srgbClr val="9A9AB4"/>
                 </a:solidFill>
-                <a:latin typeface="Calibri" pitchFamily="34" charset="0"/>
-                <a:ea typeface="Calibri" pitchFamily="34" charset="-122"/>
-                <a:cs typeface="Calibri" pitchFamily="34" charset="-120"/>
+                <a:latin typeface="Plus Jakarta Sans" pitchFamily="34" charset="0"/>
+                <a:ea typeface="Plus Jakarta Sans" pitchFamily="34" charset="-122"/>
+                <a:cs typeface="Plus Jakarta Sans" pitchFamily="34" charset="-120"/>
               </a:rPr>
               <a:t>©2026 Cloudera, Inc. All Rights Reserved.</a:t>
             </a:r>
@@ -14020,9 +14020,9 @@
                 <a:solidFill>
                   <a:srgbClr val="9A9AB4"/>
                 </a:solidFill>
-                <a:latin typeface="Calibri" pitchFamily="34" charset="0"/>
-                <a:ea typeface="Calibri" pitchFamily="34" charset="-122"/>
-                <a:cs typeface="Calibri" pitchFamily="34" charset="-120"/>
+                <a:latin typeface="Plus Jakarta Sans" pitchFamily="34" charset="0"/>
+                <a:ea typeface="Plus Jakarta Sans" pitchFamily="34" charset="-122"/>
+                <a:cs typeface="Plus Jakarta Sans" pitchFamily="34" charset="-120"/>
               </a:rPr>
               <a:t>18 / 22</a:t>
             </a:r>
@@ -14091,9 +14091,9 @@
                 <a:solidFill>
                   <a:srgbClr val="EE5A29"/>
                 </a:solidFill>
-                <a:latin typeface="Arial" pitchFamily="34" charset="0"/>
-                <a:ea typeface="Arial" pitchFamily="34" charset="-122"/>
-                <a:cs typeface="Arial" pitchFamily="34" charset="-120"/>
+                <a:latin typeface="Plus Jakarta Sans" pitchFamily="34" charset="0"/>
+                <a:ea typeface="Plus Jakarta Sans" pitchFamily="34" charset="-122"/>
+                <a:cs typeface="Plus Jakarta Sans" pitchFamily="34" charset="-120"/>
               </a:rPr>
               <a:t>CLOUD</a:t>
             </a:r>
@@ -14105,9 +14105,9 @@
                 <a:solidFill>
                   <a:srgbClr val="EE5A29"/>
                 </a:solidFill>
-                <a:latin typeface="Arial" pitchFamily="34" charset="0"/>
-                <a:ea typeface="Arial" pitchFamily="34" charset="-122"/>
-                <a:cs typeface="Arial" pitchFamily="34" charset="-120"/>
+                <a:latin typeface="Plus Jakarta Sans" pitchFamily="34" charset="0"/>
+                <a:ea typeface="Plus Jakarta Sans" pitchFamily="34" charset="-122"/>
+                <a:cs typeface="Plus Jakarta Sans" pitchFamily="34" charset="-120"/>
               </a:rPr>
               <a:t>E</a:t>
             </a:r>
@@ -14119,9 +14119,9 @@
                 <a:solidFill>
                   <a:srgbClr val="EE5A29"/>
                 </a:solidFill>
-                <a:latin typeface="Arial" pitchFamily="34" charset="0"/>
-                <a:ea typeface="Arial" pitchFamily="34" charset="-122"/>
-                <a:cs typeface="Arial" pitchFamily="34" charset="-120"/>
+                <a:latin typeface="Plus Jakarta Sans" pitchFamily="34" charset="0"/>
+                <a:ea typeface="Plus Jakarta Sans" pitchFamily="34" charset="-122"/>
+                <a:cs typeface="Plus Jakarta Sans" pitchFamily="34" charset="-120"/>
               </a:rPr>
               <a:t>RA</a:t>
             </a:r>
@@ -14178,9 +14178,9 @@
                 <a:solidFill>
                   <a:srgbClr val="EE5A29"/>
                 </a:solidFill>
-                <a:latin typeface="Calibri" pitchFamily="34" charset="0"/>
-                <a:ea typeface="Calibri" pitchFamily="34" charset="-122"/>
-                <a:cs typeface="Calibri" pitchFamily="34" charset="-120"/>
+                <a:latin typeface="Plus Jakarta Sans" pitchFamily="34" charset="0"/>
+                <a:ea typeface="Plus Jakarta Sans" pitchFamily="34" charset="-122"/>
+                <a:cs typeface="Plus Jakarta Sans" pitchFamily="34" charset="-120"/>
               </a:rPr>
               <a:t>CONTEXT ENGINEERING</a:t>
             </a:r>
@@ -14217,9 +14217,9 @@
                 <a:solidFill>
                   <a:srgbClr val="15154A"/>
                 </a:solidFill>
-                <a:latin typeface="Arial" pitchFamily="34" charset="0"/>
-                <a:ea typeface="Arial" pitchFamily="34" charset="-122"/>
-                <a:cs typeface="Arial" pitchFamily="34" charset="-120"/>
+                <a:latin typeface="Plus Jakarta Sans" pitchFamily="34" charset="0"/>
+                <a:ea typeface="Plus Jakarta Sans" pitchFamily="34" charset="-122"/>
+                <a:cs typeface="Plus Jakarta Sans" pitchFamily="34" charset="-120"/>
               </a:rPr>
               <a:t>The Context Paradox: More Info ≠ More Intelligence</a:t>
             </a:r>
@@ -14319,9 +14319,9 @@
                 <a:solidFill>
                   <a:srgbClr val="1FA971"/>
                 </a:solidFill>
-                <a:latin typeface="Calibri" pitchFamily="34" charset="0"/>
-                <a:ea typeface="Calibri" pitchFamily="34" charset="-122"/>
-                <a:cs typeface="Calibri" pitchFamily="34" charset="-120"/>
+                <a:latin typeface="Plus Jakarta Sans" pitchFamily="34" charset="0"/>
+                <a:ea typeface="Plus Jakarta Sans" pitchFamily="34" charset="-122"/>
+                <a:cs typeface="Plus Jakarta Sans" pitchFamily="34" charset="-120"/>
               </a:rPr>
               <a:t>THE SMART ZONE (0–40%)</a:t>
             </a:r>
@@ -14361,9 +14361,9 @@
                 <a:solidFill>
                   <a:srgbClr val="5A5A72"/>
                 </a:solidFill>
-                <a:latin typeface="Calibri" pitchFamily="34" charset="0"/>
-                <a:ea typeface="Calibri" pitchFamily="34" charset="-122"/>
-                <a:cs typeface="Calibri" pitchFamily="34" charset="-120"/>
+                <a:latin typeface="Plus Jakarta Sans" pitchFamily="34" charset="0"/>
+                <a:ea typeface="Plus Jakarta Sans" pitchFamily="34" charset="-122"/>
+                <a:cs typeface="Plus Jakarta Sans" pitchFamily="34" charset="-120"/>
               </a:rPr>
               <a:t>Focused &amp; accurate reasoning.</a:t>
             </a:r>
@@ -14381,9 +14381,9 @@
                 <a:solidFill>
                   <a:srgbClr val="5A5A72"/>
                 </a:solidFill>
-                <a:latin typeface="Calibri" pitchFamily="34" charset="0"/>
-                <a:ea typeface="Calibri" pitchFamily="34" charset="-122"/>
-                <a:cs typeface="Calibri" pitchFamily="34" charset="-120"/>
+                <a:latin typeface="Plus Jakarta Sans" pitchFamily="34" charset="0"/>
+                <a:ea typeface="Plus Jakarta Sans" pitchFamily="34" charset="-122"/>
+                <a:cs typeface="Plus Jakarta Sans" pitchFamily="34" charset="-120"/>
               </a:rPr>
               <a:t>High signal-to-noise.</a:t>
             </a:r>
@@ -14420,9 +14420,9 @@
                 <a:solidFill>
                   <a:srgbClr val="C8870B"/>
                 </a:solidFill>
-                <a:latin typeface="Calibri" pitchFamily="34" charset="0"/>
-                <a:ea typeface="Calibri" pitchFamily="34" charset="-122"/>
-                <a:cs typeface="Calibri" pitchFamily="34" charset="-120"/>
+                <a:latin typeface="Plus Jakarta Sans" pitchFamily="34" charset="0"/>
+                <a:ea typeface="Plus Jakarta Sans" pitchFamily="34" charset="-122"/>
+                <a:cs typeface="Plus Jakarta Sans" pitchFamily="34" charset="-120"/>
               </a:rPr>
               <a:t>THE DUMB ZONE (40–100%)</a:t>
             </a:r>
@@ -14462,9 +14462,9 @@
                 <a:solidFill>
                   <a:srgbClr val="5A5A72"/>
                 </a:solidFill>
-                <a:latin typeface="Calibri" pitchFamily="34" charset="0"/>
-                <a:ea typeface="Calibri" pitchFamily="34" charset="-122"/>
-                <a:cs typeface="Calibri" pitchFamily="34" charset="-120"/>
+                <a:latin typeface="Plus Jakarta Sans" pitchFamily="34" charset="0"/>
+                <a:ea typeface="Plus Jakarta Sans" pitchFamily="34" charset="-122"/>
+                <a:cs typeface="Plus Jakarta Sans" pitchFamily="34" charset="-120"/>
               </a:rPr>
               <a:t>Hallucinations, infinite loops, context overload.</a:t>
             </a:r>
@@ -14482,9 +14482,9 @@
                 <a:solidFill>
                   <a:srgbClr val="5A5A72"/>
                 </a:solidFill>
-                <a:latin typeface="Calibri" pitchFamily="34" charset="0"/>
-                <a:ea typeface="Calibri" pitchFamily="34" charset="-122"/>
-                <a:cs typeface="Calibri" pitchFamily="34" charset="-120"/>
+                <a:latin typeface="Plus Jakarta Sans" pitchFamily="34" charset="0"/>
+                <a:ea typeface="Plus Jakarta Sans" pitchFamily="34" charset="-122"/>
+                <a:cs typeface="Plus Jakarta Sans" pitchFamily="34" charset="-120"/>
               </a:rPr>
               <a:t>Reasoning quality collapses.</a:t>
             </a:r>
@@ -14894,9 +14894,9 @@
                 <a:solidFill>
                   <a:srgbClr val="C8870B"/>
                 </a:solidFill>
-                <a:latin typeface="Calibri" pitchFamily="34" charset="0"/>
-                <a:ea typeface="Calibri" pitchFamily="34" charset="-122"/>
-                <a:cs typeface="Calibri" pitchFamily="34" charset="-120"/>
+                <a:latin typeface="Plus Jakarta Sans" pitchFamily="34" charset="0"/>
+                <a:ea typeface="Plus Jakarta Sans" pitchFamily="34" charset="-122"/>
+                <a:cs typeface="Plus Jakarta Sans" pitchFamily="34" charset="-120"/>
               </a:rPr>
               <a:t>INDUSTRY CONSENSUS</a:t>
             </a:r>
@@ -14936,9 +14936,9 @@
                 <a:solidFill>
                   <a:srgbClr val="5A5A72"/>
                 </a:solidFill>
-                <a:latin typeface="Calibri" pitchFamily="34" charset="0"/>
-                <a:ea typeface="Calibri" pitchFamily="34" charset="-122"/>
-                <a:cs typeface="Calibri" pitchFamily="34" charset="-120"/>
+                <a:latin typeface="Plus Jakarta Sans" pitchFamily="34" charset="0"/>
+                <a:ea typeface="Plus Jakarta Sans" pitchFamily="34" charset="-122"/>
+                <a:cs typeface="Plus Jakarta Sans" pitchFamily="34" charset="-120"/>
               </a:rPr>
               <a:t>Context &gt; 40% degrades reasoning. Constraints must be mechanical.</a:t>
             </a:r>
@@ -15009,9 +15009,9 @@
                 <a:solidFill>
                   <a:srgbClr val="15154A"/>
                 </a:solidFill>
-                <a:latin typeface="Arial" pitchFamily="34" charset="0"/>
-                <a:ea typeface="Arial" pitchFamily="34" charset="-122"/>
-                <a:cs typeface="Arial" pitchFamily="34" charset="-120"/>
+                <a:latin typeface="Plus Jakarta Sans" pitchFamily="34" charset="0"/>
+                <a:ea typeface="Plus Jakarta Sans" pitchFamily="34" charset="-122"/>
+                <a:cs typeface="Plus Jakarta Sans" pitchFamily="34" charset="-120"/>
               </a:rPr>
               <a:t>Progressive loading</a:t>
             </a:r>
@@ -15048,9 +15048,9 @@
                 <a:solidFill>
                   <a:srgbClr val="5A5A72"/>
                 </a:solidFill>
-                <a:latin typeface="Calibri" pitchFamily="34" charset="0"/>
-                <a:ea typeface="Calibri" pitchFamily="34" charset="-122"/>
-                <a:cs typeface="Calibri" pitchFamily="34" charset="-120"/>
+                <a:latin typeface="Plus Jakarta Sans" pitchFamily="34" charset="0"/>
+                <a:ea typeface="Plus Jakarta Sans" pitchFamily="34" charset="-122"/>
+                <a:cs typeface="Plus Jakarta Sans" pitchFamily="34" charset="-120"/>
               </a:rPr>
               <a:t>Tool Search Tool, defer_loading — don't preload everything</a:t>
             </a:r>
@@ -15121,9 +15121,9 @@
                 <a:solidFill>
                   <a:srgbClr val="15154A"/>
                 </a:solidFill>
-                <a:latin typeface="Arial" pitchFamily="34" charset="0"/>
-                <a:ea typeface="Arial" pitchFamily="34" charset="-122"/>
-                <a:cs typeface="Arial" pitchFamily="34" charset="-120"/>
+                <a:latin typeface="Plus Jakarta Sans" pitchFamily="34" charset="0"/>
+                <a:ea typeface="Plus Jakarta Sans" pitchFamily="34" charset="-122"/>
+                <a:cs typeface="Plus Jakarta Sans" pitchFamily="34" charset="-120"/>
               </a:rPr>
               <a:t>Context compaction</a:t>
             </a:r>
@@ -15160,9 +15160,9 @@
                 <a:solidFill>
                   <a:srgbClr val="5A5A72"/>
                 </a:solidFill>
-                <a:latin typeface="Calibri" pitchFamily="34" charset="0"/>
-                <a:ea typeface="Calibri" pitchFamily="34" charset="-122"/>
-                <a:cs typeface="Calibri" pitchFamily="34" charset="-120"/>
+                <a:latin typeface="Plus Jakarta Sans" pitchFamily="34" charset="0"/>
+                <a:ea typeface="Plus Jakarta Sans" pitchFamily="34" charset="-122"/>
+                <a:cs typeface="Plus Jakarta Sans" pitchFamily="34" charset="-120"/>
               </a:rPr>
               <a:t>Summarize conversation mid-run before limits are hit</a:t>
             </a:r>
@@ -15233,9 +15233,9 @@
                 <a:solidFill>
                   <a:srgbClr val="15154A"/>
                 </a:solidFill>
-                <a:latin typeface="Arial" pitchFamily="34" charset="0"/>
-                <a:ea typeface="Arial" pitchFamily="34" charset="-122"/>
-                <a:cs typeface="Arial" pitchFamily="34" charset="-120"/>
+                <a:latin typeface="Plus Jakarta Sans" pitchFamily="34" charset="0"/>
+                <a:ea typeface="Plus Jakarta Sans" pitchFamily="34" charset="-122"/>
+                <a:cs typeface="Plus Jakarta Sans" pitchFamily="34" charset="-120"/>
               </a:rPr>
               <a:t>Sub-agents</a:t>
             </a:r>
@@ -15272,9 +15272,9 @@
                 <a:solidFill>
                   <a:srgbClr val="5A5A72"/>
                 </a:solidFill>
-                <a:latin typeface="Calibri" pitchFamily="34" charset="0"/>
-                <a:ea typeface="Calibri" pitchFamily="34" charset="-122"/>
-                <a:cs typeface="Calibri" pitchFamily="34" charset="-120"/>
+                <a:latin typeface="Plus Jakarta Sans" pitchFamily="34" charset="0"/>
+                <a:ea typeface="Plus Jakarta Sans" pitchFamily="34" charset="-122"/>
+                <a:cs typeface="Plus Jakarta Sans" pitchFamily="34" charset="-120"/>
               </a:rPr>
               <a:t>Each sub-agent gets a fresh, clean context window</a:t>
             </a:r>
@@ -15345,9 +15345,9 @@
                 <a:solidFill>
                   <a:srgbClr val="15154A"/>
                 </a:solidFill>
-                <a:latin typeface="Arial" pitchFamily="34" charset="0"/>
-                <a:ea typeface="Arial" pitchFamily="34" charset="-122"/>
-                <a:cs typeface="Arial" pitchFamily="34" charset="-120"/>
+                <a:latin typeface="Plus Jakarta Sans" pitchFamily="34" charset="0"/>
+                <a:ea typeface="Plus Jakarta Sans" pitchFamily="34" charset="-122"/>
+                <a:cs typeface="Plus Jakarta Sans" pitchFamily="34" charset="-120"/>
               </a:rPr>
               <a:t>Structured notes</a:t>
             </a:r>
@@ -15384,9 +15384,9 @@
                 <a:solidFill>
                   <a:srgbClr val="5A5A72"/>
                 </a:solidFill>
-                <a:latin typeface="Calibri" pitchFamily="34" charset="0"/>
-                <a:ea typeface="Calibri" pitchFamily="34" charset="-122"/>
-                <a:cs typeface="Calibri" pitchFamily="34" charset="-120"/>
+                <a:latin typeface="Plus Jakarta Sans" pitchFamily="34" charset="0"/>
+                <a:ea typeface="Plus Jakarta Sans" pitchFamily="34" charset="-122"/>
+                <a:cs typeface="Plus Jakarta Sans" pitchFamily="34" charset="-120"/>
               </a:rPr>
               <a:t>Write progress.json — memory outside the prompt</a:t>
             </a:r>
@@ -15423,9 +15423,9 @@
                 <a:solidFill>
                   <a:srgbClr val="9A9AB4"/>
                 </a:solidFill>
-                <a:latin typeface="Calibri" pitchFamily="34" charset="0"/>
-                <a:ea typeface="Calibri" pitchFamily="34" charset="-122"/>
-                <a:cs typeface="Calibri" pitchFamily="34" charset="-120"/>
+                <a:latin typeface="Plus Jakarta Sans" pitchFamily="34" charset="0"/>
+                <a:ea typeface="Plus Jakarta Sans" pitchFamily="34" charset="-122"/>
+                <a:cs typeface="Plus Jakarta Sans" pitchFamily="34" charset="-120"/>
               </a:rPr>
               <a:t>©2026 Cloudera, Inc. All Rights Reserved. · Source: Harness Engineering PDF; context degradation is a practitioner-community consensus, not a single paper.</a:t>
             </a:r>
@@ -15462,9 +15462,9 @@
                 <a:solidFill>
                   <a:srgbClr val="9A9AB4"/>
                 </a:solidFill>
-                <a:latin typeface="Calibri" pitchFamily="34" charset="0"/>
-                <a:ea typeface="Calibri" pitchFamily="34" charset="-122"/>
-                <a:cs typeface="Calibri" pitchFamily="34" charset="-120"/>
+                <a:latin typeface="Plus Jakarta Sans" pitchFamily="34" charset="0"/>
+                <a:ea typeface="Plus Jakarta Sans" pitchFamily="34" charset="-122"/>
+                <a:cs typeface="Plus Jakarta Sans" pitchFamily="34" charset="-120"/>
               </a:rPr>
               <a:t>19 / 22</a:t>
             </a:r>
@@ -15533,9 +15533,9 @@
                 <a:solidFill>
                   <a:srgbClr val="EE5A29"/>
                 </a:solidFill>
-                <a:latin typeface="Arial" pitchFamily="34" charset="0"/>
-                <a:ea typeface="Arial" pitchFamily="34" charset="-122"/>
-                <a:cs typeface="Arial" pitchFamily="34" charset="-120"/>
+                <a:latin typeface="Plus Jakarta Sans" pitchFamily="34" charset="0"/>
+                <a:ea typeface="Plus Jakarta Sans" pitchFamily="34" charset="-122"/>
+                <a:cs typeface="Plus Jakarta Sans" pitchFamily="34" charset="-120"/>
               </a:rPr>
               <a:t>CLOUD</a:t>
             </a:r>
@@ -15547,9 +15547,9 @@
                 <a:solidFill>
                   <a:srgbClr val="EE5A29"/>
                 </a:solidFill>
-                <a:latin typeface="Arial" pitchFamily="34" charset="0"/>
-                <a:ea typeface="Arial" pitchFamily="34" charset="-122"/>
-                <a:cs typeface="Arial" pitchFamily="34" charset="-120"/>
+                <a:latin typeface="Plus Jakarta Sans" pitchFamily="34" charset="0"/>
+                <a:ea typeface="Plus Jakarta Sans" pitchFamily="34" charset="-122"/>
+                <a:cs typeface="Plus Jakarta Sans" pitchFamily="34" charset="-120"/>
               </a:rPr>
               <a:t>E</a:t>
             </a:r>
@@ -15561,9 +15561,9 @@
                 <a:solidFill>
                   <a:srgbClr val="EE5A29"/>
                 </a:solidFill>
-                <a:latin typeface="Arial" pitchFamily="34" charset="0"/>
-                <a:ea typeface="Arial" pitchFamily="34" charset="-122"/>
-                <a:cs typeface="Arial" pitchFamily="34" charset="-120"/>
+                <a:latin typeface="Plus Jakarta Sans" pitchFamily="34" charset="0"/>
+                <a:ea typeface="Plus Jakarta Sans" pitchFamily="34" charset="-122"/>
+                <a:cs typeface="Plus Jakarta Sans" pitchFamily="34" charset="-120"/>
               </a:rPr>
               <a:t>RA</a:t>
             </a:r>
@@ -15600,9 +15600,9 @@
                 <a:solidFill>
                   <a:srgbClr val="EE5A29"/>
                 </a:solidFill>
-                <a:latin typeface="Arial" pitchFamily="34" charset="0"/>
-                <a:ea typeface="Arial" pitchFamily="34" charset="-122"/>
-                <a:cs typeface="Arial" pitchFamily="34" charset="-120"/>
+                <a:latin typeface="Plus Jakarta Sans" pitchFamily="34" charset="0"/>
+                <a:ea typeface="Plus Jakarta Sans" pitchFamily="34" charset="-122"/>
+                <a:cs typeface="Plus Jakarta Sans" pitchFamily="34" charset="-120"/>
               </a:rPr>
               <a:t>1</a:t>
             </a:r>
@@ -15639,9 +15639,9 @@
                 <a:solidFill>
                   <a:srgbClr val="15154A"/>
                 </a:solidFill>
-                <a:latin typeface="Calibri" pitchFamily="34" charset="0"/>
-                <a:ea typeface="Calibri" pitchFamily="34" charset="-122"/>
-                <a:cs typeface="Calibri" pitchFamily="34" charset="-120"/>
+                <a:latin typeface="Plus Jakarta Sans" pitchFamily="34" charset="0"/>
+                <a:ea typeface="Plus Jakarta Sans" pitchFamily="34" charset="-122"/>
+                <a:cs typeface="Plus Jakarta Sans" pitchFamily="34" charset="-120"/>
               </a:rPr>
               <a:t>The Latest in the AI Landscape</a:t>
             </a:r>
@@ -15701,9 +15701,9 @@
                 <a:solidFill>
                   <a:srgbClr val="EE5A29"/>
                 </a:solidFill>
-                <a:latin typeface="Arial" pitchFamily="34" charset="0"/>
-                <a:ea typeface="Arial" pitchFamily="34" charset="-122"/>
-                <a:cs typeface="Arial" pitchFamily="34" charset="-120"/>
+                <a:latin typeface="Plus Jakarta Sans" pitchFamily="34" charset="0"/>
+                <a:ea typeface="Plus Jakarta Sans" pitchFamily="34" charset="-122"/>
+                <a:cs typeface="Plus Jakarta Sans" pitchFamily="34" charset="-120"/>
               </a:rPr>
               <a:t>2</a:t>
             </a:r>
@@ -15740,9 +15740,9 @@
                 <a:solidFill>
                   <a:srgbClr val="15154A"/>
                 </a:solidFill>
-                <a:latin typeface="Calibri" pitchFamily="34" charset="0"/>
-                <a:ea typeface="Calibri" pitchFamily="34" charset="-122"/>
-                <a:cs typeface="Calibri" pitchFamily="34" charset="-120"/>
+                <a:latin typeface="Plus Jakarta Sans" pitchFamily="34" charset="0"/>
+                <a:ea typeface="Plus Jakarta Sans" pitchFamily="34" charset="-122"/>
+                <a:cs typeface="Plus Jakarta Sans" pitchFamily="34" charset="-120"/>
               </a:rPr>
               <a:t>Cloudera AI — Architecture &amp; Overview</a:t>
             </a:r>
@@ -15802,9 +15802,9 @@
                 <a:solidFill>
                   <a:srgbClr val="EE5A29"/>
                 </a:solidFill>
-                <a:latin typeface="Arial" pitchFamily="34" charset="0"/>
-                <a:ea typeface="Arial" pitchFamily="34" charset="-122"/>
-                <a:cs typeface="Arial" pitchFamily="34" charset="-120"/>
+                <a:latin typeface="Plus Jakarta Sans" pitchFamily="34" charset="0"/>
+                <a:ea typeface="Plus Jakarta Sans" pitchFamily="34" charset="-122"/>
+                <a:cs typeface="Plus Jakarta Sans" pitchFamily="34" charset="-120"/>
               </a:rPr>
               <a:t>3</a:t>
             </a:r>
@@ -15841,9 +15841,9 @@
                 <a:solidFill>
                   <a:srgbClr val="15154A"/>
                 </a:solidFill>
-                <a:latin typeface="Calibri" pitchFamily="34" charset="0"/>
-                <a:ea typeface="Calibri" pitchFamily="34" charset="-122"/>
-                <a:cs typeface="Calibri" pitchFamily="34" charset="-120"/>
+                <a:latin typeface="Plus Jakarta Sans" pitchFamily="34" charset="0"/>
+                <a:ea typeface="Plus Jakarta Sans" pitchFamily="34" charset="-122"/>
+                <a:cs typeface="Plus Jakarta Sans" pitchFamily="34" charset="-120"/>
               </a:rPr>
               <a:t>AI Studios</a:t>
             </a:r>
@@ -15903,9 +15903,9 @@
                 <a:solidFill>
                   <a:srgbClr val="EE5A29"/>
                 </a:solidFill>
-                <a:latin typeface="Arial" pitchFamily="34" charset="0"/>
-                <a:ea typeface="Arial" pitchFamily="34" charset="-122"/>
-                <a:cs typeface="Arial" pitchFamily="34" charset="-120"/>
+                <a:latin typeface="Plus Jakarta Sans" pitchFamily="34" charset="0"/>
+                <a:ea typeface="Plus Jakarta Sans" pitchFamily="34" charset="-122"/>
+                <a:cs typeface="Plus Jakarta Sans" pitchFamily="34" charset="-120"/>
               </a:rPr>
               <a:t>4</a:t>
             </a:r>
@@ -15942,9 +15942,9 @@
                 <a:solidFill>
                   <a:srgbClr val="15154A"/>
                 </a:solidFill>
-                <a:latin typeface="Calibri" pitchFamily="34" charset="0"/>
-                <a:ea typeface="Calibri" pitchFamily="34" charset="-122"/>
-                <a:cs typeface="Calibri" pitchFamily="34" charset="-120"/>
+                <a:latin typeface="Plus Jakarta Sans" pitchFamily="34" charset="0"/>
+                <a:ea typeface="Plus Jakarta Sans" pitchFamily="34" charset="-122"/>
+                <a:cs typeface="Plus Jakarta Sans" pitchFamily="34" charset="-120"/>
               </a:rPr>
               <a:t>Hands-on Lab &amp; Demos</a:t>
             </a:r>
@@ -16004,9 +16004,9 @@
                 <a:solidFill>
                   <a:srgbClr val="EE5A29"/>
                 </a:solidFill>
-                <a:latin typeface="Arial" pitchFamily="34" charset="0"/>
-                <a:ea typeface="Arial" pitchFamily="34" charset="-122"/>
-                <a:cs typeface="Arial" pitchFamily="34" charset="-120"/>
+                <a:latin typeface="Plus Jakarta Sans" pitchFamily="34" charset="0"/>
+                <a:ea typeface="Plus Jakarta Sans" pitchFamily="34" charset="-122"/>
+                <a:cs typeface="Plus Jakarta Sans" pitchFamily="34" charset="-120"/>
               </a:rPr>
               <a:t>5</a:t>
             </a:r>
@@ -16043,9 +16043,9 @@
                 <a:solidFill>
                   <a:srgbClr val="15154A"/>
                 </a:solidFill>
-                <a:latin typeface="Calibri" pitchFamily="34" charset="0"/>
-                <a:ea typeface="Calibri" pitchFamily="34" charset="-122"/>
-                <a:cs typeface="Calibri" pitchFamily="34" charset="-120"/>
+                <a:latin typeface="Plus Jakarta Sans" pitchFamily="34" charset="0"/>
+                <a:ea typeface="Plus Jakarta Sans" pitchFamily="34" charset="-122"/>
+                <a:cs typeface="Plus Jakarta Sans" pitchFamily="34" charset="-120"/>
               </a:rPr>
               <a:t>Q &amp; A</a:t>
             </a:r>
@@ -16105,9 +16105,9 @@
                 <a:solidFill>
                   <a:srgbClr val="9A9AB4"/>
                 </a:solidFill>
-                <a:latin typeface="Calibri" pitchFamily="34" charset="0"/>
-                <a:ea typeface="Calibri" pitchFamily="34" charset="-122"/>
-                <a:cs typeface="Calibri" pitchFamily="34" charset="-120"/>
+                <a:latin typeface="Plus Jakarta Sans" pitchFamily="34" charset="0"/>
+                <a:ea typeface="Plus Jakarta Sans" pitchFamily="34" charset="-122"/>
+                <a:cs typeface="Plus Jakarta Sans" pitchFamily="34" charset="-120"/>
               </a:rPr>
               <a:t>©2026 Cloudera, Inc. All Rights Reserved.</a:t>
             </a:r>
@@ -16144,9 +16144,9 @@
                 <a:solidFill>
                   <a:srgbClr val="9A9AB4"/>
                 </a:solidFill>
-                <a:latin typeface="Calibri" pitchFamily="34" charset="0"/>
-                <a:ea typeface="Calibri" pitchFamily="34" charset="-122"/>
-                <a:cs typeface="Calibri" pitchFamily="34" charset="-120"/>
+                <a:latin typeface="Plus Jakarta Sans" pitchFamily="34" charset="0"/>
+                <a:ea typeface="Plus Jakarta Sans" pitchFamily="34" charset="-122"/>
+                <a:cs typeface="Plus Jakarta Sans" pitchFamily="34" charset="-120"/>
               </a:rPr>
               <a:t>2 / 22</a:t>
             </a:r>
@@ -16215,9 +16215,9 @@
                 <a:solidFill>
                   <a:srgbClr val="EE5A29"/>
                 </a:solidFill>
-                <a:latin typeface="Arial" pitchFamily="34" charset="0"/>
-                <a:ea typeface="Arial" pitchFamily="34" charset="-122"/>
-                <a:cs typeface="Arial" pitchFamily="34" charset="-120"/>
+                <a:latin typeface="Plus Jakarta Sans" pitchFamily="34" charset="0"/>
+                <a:ea typeface="Plus Jakarta Sans" pitchFamily="34" charset="-122"/>
+                <a:cs typeface="Plus Jakarta Sans" pitchFamily="34" charset="-120"/>
               </a:rPr>
               <a:t>CLOUD</a:t>
             </a:r>
@@ -16229,9 +16229,9 @@
                 <a:solidFill>
                   <a:srgbClr val="EE5A29"/>
                 </a:solidFill>
-                <a:latin typeface="Arial" pitchFamily="34" charset="0"/>
-                <a:ea typeface="Arial" pitchFamily="34" charset="-122"/>
-                <a:cs typeface="Arial" pitchFamily="34" charset="-120"/>
+                <a:latin typeface="Plus Jakarta Sans" pitchFamily="34" charset="0"/>
+                <a:ea typeface="Plus Jakarta Sans" pitchFamily="34" charset="-122"/>
+                <a:cs typeface="Plus Jakarta Sans" pitchFamily="34" charset="-120"/>
               </a:rPr>
               <a:t>E</a:t>
             </a:r>
@@ -16243,9 +16243,9 @@
                 <a:solidFill>
                   <a:srgbClr val="EE5A29"/>
                 </a:solidFill>
-                <a:latin typeface="Arial" pitchFamily="34" charset="0"/>
-                <a:ea typeface="Arial" pitchFamily="34" charset="-122"/>
-                <a:cs typeface="Arial" pitchFamily="34" charset="-120"/>
+                <a:latin typeface="Plus Jakarta Sans" pitchFamily="34" charset="0"/>
+                <a:ea typeface="Plus Jakarta Sans" pitchFamily="34" charset="-122"/>
+                <a:cs typeface="Plus Jakarta Sans" pitchFamily="34" charset="-120"/>
               </a:rPr>
               <a:t>RA</a:t>
             </a:r>
@@ -16302,9 +16302,9 @@
                 <a:solidFill>
                   <a:srgbClr val="EE5A29"/>
                 </a:solidFill>
-                <a:latin typeface="Calibri" pitchFamily="34" charset="0"/>
-                <a:ea typeface="Calibri" pitchFamily="34" charset="-122"/>
-                <a:cs typeface="Calibri" pitchFamily="34" charset="-120"/>
+                <a:latin typeface="Plus Jakarta Sans" pitchFamily="34" charset="0"/>
+                <a:ea typeface="Plus Jakarta Sans" pitchFamily="34" charset="-122"/>
+                <a:cs typeface="Plus Jakarta Sans" pitchFamily="34" charset="-120"/>
               </a:rPr>
               <a:t>EVALUATING &amp; OPERATING AGENTS</a:t>
             </a:r>
@@ -16341,9 +16341,9 @@
                 <a:solidFill>
                   <a:srgbClr val="15154A"/>
                 </a:solidFill>
-                <a:latin typeface="Arial" pitchFamily="34" charset="0"/>
-                <a:ea typeface="Arial" pitchFamily="34" charset="-122"/>
-                <a:cs typeface="Arial" pitchFamily="34" charset="-120"/>
+                <a:latin typeface="Plus Jakarta Sans" pitchFamily="34" charset="0"/>
+                <a:ea typeface="Plus Jakarta Sans" pitchFamily="34" charset="-122"/>
+                <a:cs typeface="Plus Jakarta Sans" pitchFamily="34" charset="-120"/>
               </a:rPr>
               <a:t>Loop Evals, Observability &amp; the Maturity Model</a:t>
             </a:r>
@@ -16380,9 +16380,9 @@
                 <a:solidFill>
                   <a:srgbClr val="15154A"/>
                 </a:solidFill>
-                <a:latin typeface="Arial" pitchFamily="34" charset="0"/>
-                <a:ea typeface="Arial" pitchFamily="34" charset="-122"/>
-                <a:cs typeface="Arial" pitchFamily="34" charset="-120"/>
+                <a:latin typeface="Plus Jakarta Sans" pitchFamily="34" charset="0"/>
+                <a:ea typeface="Plus Jakarta Sans" pitchFamily="34" charset="-122"/>
+                <a:cs typeface="Plus Jakarta Sans" pitchFamily="34" charset="-120"/>
               </a:rPr>
               <a:t>Key Agentic Eval Benchmarks</a:t>
             </a:r>
@@ -16430,16 +16430,16 @@
                           <a:solidFill>
                             <a:srgbClr val="FFFFFF"/>
                           </a:solidFill>
-                          <a:latin typeface="Calibri" pitchFamily="34" charset="0"/>
-                          <a:ea typeface="Calibri" pitchFamily="34" charset="-122"/>
-                          <a:cs typeface="Calibri" pitchFamily="34" charset="-120"/>
+                          <a:latin typeface="Plus Jakarta Sans" pitchFamily="34" charset="0"/>
+                          <a:ea typeface="Plus Jakarta Sans" pitchFamily="34" charset="-122"/>
+                          <a:cs typeface="Plus Jakarta Sans" pitchFamily="34" charset="-120"/>
                         </a:rPr>
                         <a:t>Benchmark</a:t>
                       </a:r>
                       <a:endParaRPr lang="en-US" sz="900" dirty="0">
-                        <a:latin typeface="Calibri" charset="0"/>
-                        <a:ea typeface="Calibri" charset="0"/>
-                        <a:cs typeface="Calibri" charset="0"/>
+                        <a:latin typeface="Plus Jakarta Sans" charset="0"/>
+                        <a:ea typeface="Plus Jakarta Sans" charset="0"/>
+                        <a:cs typeface="Plus Jakarta Sans" charset="0"/>
                       </a:endParaRPr>
                     </a:p>
                   </a:txBody>
@@ -16498,16 +16498,16 @@
                           <a:solidFill>
                             <a:srgbClr val="FFFFFF"/>
                           </a:solidFill>
-                          <a:latin typeface="Calibri" pitchFamily="34" charset="0"/>
-                          <a:ea typeface="Calibri" pitchFamily="34" charset="-122"/>
-                          <a:cs typeface="Calibri" pitchFamily="34" charset="-120"/>
+                          <a:latin typeface="Plus Jakarta Sans" pitchFamily="34" charset="0"/>
+                          <a:ea typeface="Plus Jakarta Sans" pitchFamily="34" charset="-122"/>
+                          <a:cs typeface="Plus Jakarta Sans" pitchFamily="34" charset="-120"/>
                         </a:rPr>
                         <a:t>What it tests</a:t>
                       </a:r>
                       <a:endParaRPr lang="en-US" sz="900" dirty="0">
-                        <a:latin typeface="Calibri" charset="0"/>
-                        <a:ea typeface="Calibri" charset="0"/>
-                        <a:cs typeface="Calibri" charset="0"/>
+                        <a:latin typeface="Plus Jakarta Sans" charset="0"/>
+                        <a:ea typeface="Plus Jakarta Sans" charset="0"/>
+                        <a:cs typeface="Plus Jakarta Sans" charset="0"/>
                       </a:endParaRPr>
                     </a:p>
                   </a:txBody>
@@ -16568,16 +16568,16 @@
                           <a:solidFill>
                             <a:srgbClr val="15154A"/>
                           </a:solidFill>
-                          <a:latin typeface="Calibri" pitchFamily="34" charset="0"/>
-                          <a:ea typeface="Calibri" pitchFamily="34" charset="-122"/>
-                          <a:cs typeface="Calibri" pitchFamily="34" charset="-120"/>
+                          <a:latin typeface="Plus Jakarta Sans" pitchFamily="34" charset="0"/>
+                          <a:ea typeface="Plus Jakarta Sans" pitchFamily="34" charset="-122"/>
+                          <a:cs typeface="Plus Jakarta Sans" pitchFamily="34" charset="-120"/>
                         </a:rPr>
                         <a:t>SWE-bench Verified</a:t>
                       </a:r>
                       <a:endParaRPr lang="en-US" sz="850" dirty="0">
-                        <a:latin typeface="Calibri" charset="0"/>
-                        <a:ea typeface="Calibri" charset="0"/>
-                        <a:cs typeface="Calibri" charset="0"/>
+                        <a:latin typeface="Plus Jakarta Sans" charset="0"/>
+                        <a:ea typeface="Plus Jakarta Sans" charset="0"/>
+                        <a:cs typeface="Plus Jakarta Sans" charset="0"/>
                       </a:endParaRPr>
                     </a:p>
                   </a:txBody>
@@ -16636,16 +16636,16 @@
                           <a:solidFill>
                             <a:srgbClr val="5A5A72"/>
                           </a:solidFill>
-                          <a:latin typeface="Calibri" pitchFamily="34" charset="0"/>
-                          <a:ea typeface="Calibri" pitchFamily="34" charset="-122"/>
-                          <a:cs typeface="Calibri" pitchFamily="34" charset="-120"/>
+                          <a:latin typeface="Plus Jakarta Sans" pitchFamily="34" charset="0"/>
+                          <a:ea typeface="Plus Jakarta Sans" pitchFamily="34" charset="-122"/>
+                          <a:cs typeface="Plus Jakarta Sans" pitchFamily="34" charset="-120"/>
                         </a:rPr>
                         <a:t>Real GitHub issues solved end-to-end (2294 tasks)</a:t>
                       </a:r>
                       <a:endParaRPr lang="en-US" sz="850" dirty="0">
-                        <a:latin typeface="Calibri" charset="0"/>
-                        <a:ea typeface="Calibri" charset="0"/>
-                        <a:cs typeface="Calibri" charset="0"/>
+                        <a:latin typeface="Plus Jakarta Sans" charset="0"/>
+                        <a:ea typeface="Plus Jakarta Sans" charset="0"/>
+                        <a:cs typeface="Plus Jakarta Sans" charset="0"/>
                       </a:endParaRPr>
                     </a:p>
                   </a:txBody>
@@ -16706,16 +16706,16 @@
                           <a:solidFill>
                             <a:srgbClr val="15154A"/>
                           </a:solidFill>
-                          <a:latin typeface="Calibri" pitchFamily="34" charset="0"/>
-                          <a:ea typeface="Calibri" pitchFamily="34" charset="-122"/>
-                          <a:cs typeface="Calibri" pitchFamily="34" charset="-120"/>
+                          <a:latin typeface="Plus Jakarta Sans" pitchFamily="34" charset="0"/>
+                          <a:ea typeface="Plus Jakarta Sans" pitchFamily="34" charset="-122"/>
+                          <a:cs typeface="Plus Jakarta Sans" pitchFamily="34" charset="-120"/>
                         </a:rPr>
                         <a:t>τ-bench</a:t>
                       </a:r>
                       <a:endParaRPr lang="en-US" sz="850" dirty="0">
-                        <a:latin typeface="Calibri" charset="0"/>
-                        <a:ea typeface="Calibri" charset="0"/>
-                        <a:cs typeface="Calibri" charset="0"/>
+                        <a:latin typeface="Plus Jakarta Sans" charset="0"/>
+                        <a:ea typeface="Plus Jakarta Sans" charset="0"/>
+                        <a:cs typeface="Plus Jakarta Sans" charset="0"/>
                       </a:endParaRPr>
                     </a:p>
                   </a:txBody>
@@ -16774,16 +16774,16 @@
                           <a:solidFill>
                             <a:srgbClr val="5A5A72"/>
                           </a:solidFill>
-                          <a:latin typeface="Calibri" pitchFamily="34" charset="0"/>
-                          <a:ea typeface="Calibri" pitchFamily="34" charset="-122"/>
-                          <a:cs typeface="Calibri" pitchFamily="34" charset="-120"/>
+                          <a:latin typeface="Plus Jakarta Sans" pitchFamily="34" charset="0"/>
+                          <a:ea typeface="Plus Jakarta Sans" pitchFamily="34" charset="-122"/>
+                          <a:cs typeface="Plus Jakarta Sans" pitchFamily="34" charset="-120"/>
                         </a:rPr>
                         <a:t>Tool-agent in retail/airline environments; pass^k metric</a:t>
                       </a:r>
                       <a:endParaRPr lang="en-US" sz="850" dirty="0">
-                        <a:latin typeface="Calibri" charset="0"/>
-                        <a:ea typeface="Calibri" charset="0"/>
-                        <a:cs typeface="Calibri" charset="0"/>
+                        <a:latin typeface="Plus Jakarta Sans" charset="0"/>
+                        <a:ea typeface="Plus Jakarta Sans" charset="0"/>
+                        <a:cs typeface="Plus Jakarta Sans" charset="0"/>
                       </a:endParaRPr>
                     </a:p>
                   </a:txBody>
@@ -16844,16 +16844,16 @@
                           <a:solidFill>
                             <a:srgbClr val="15154A"/>
                           </a:solidFill>
-                          <a:latin typeface="Calibri" pitchFamily="34" charset="0"/>
-                          <a:ea typeface="Calibri" pitchFamily="34" charset="-122"/>
-                          <a:cs typeface="Calibri" pitchFamily="34" charset="-120"/>
+                          <a:latin typeface="Plus Jakarta Sans" pitchFamily="34" charset="0"/>
+                          <a:ea typeface="Plus Jakarta Sans" pitchFamily="34" charset="-122"/>
+                          <a:cs typeface="Plus Jakarta Sans" pitchFamily="34" charset="-120"/>
                         </a:rPr>
                         <a:t>GAIA</a:t>
                       </a:r>
                       <a:endParaRPr lang="en-US" sz="850" dirty="0">
-                        <a:latin typeface="Calibri" charset="0"/>
-                        <a:ea typeface="Calibri" charset="0"/>
-                        <a:cs typeface="Calibri" charset="0"/>
+                        <a:latin typeface="Plus Jakarta Sans" charset="0"/>
+                        <a:ea typeface="Plus Jakarta Sans" charset="0"/>
+                        <a:cs typeface="Plus Jakarta Sans" charset="0"/>
                       </a:endParaRPr>
                     </a:p>
                   </a:txBody>
@@ -16912,16 +16912,16 @@
                           <a:solidFill>
                             <a:srgbClr val="5A5A72"/>
                           </a:solidFill>
-                          <a:latin typeface="Calibri" pitchFamily="34" charset="0"/>
-                          <a:ea typeface="Calibri" pitchFamily="34" charset="-122"/>
-                          <a:cs typeface="Calibri" pitchFamily="34" charset="-120"/>
+                          <a:latin typeface="Plus Jakarta Sans" pitchFamily="34" charset="0"/>
+                          <a:ea typeface="Plus Jakarta Sans" pitchFamily="34" charset="-122"/>
+                          <a:cs typeface="Plus Jakarta Sans" pitchFamily="34" charset="-120"/>
                         </a:rPr>
                         <a:t>Multi-step real-world web tasks; human ~92% vs AI ~15-30%</a:t>
                       </a:r>
                       <a:endParaRPr lang="en-US" sz="850" dirty="0">
-                        <a:latin typeface="Calibri" charset="0"/>
-                        <a:ea typeface="Calibri" charset="0"/>
-                        <a:cs typeface="Calibri" charset="0"/>
+                        <a:latin typeface="Plus Jakarta Sans" charset="0"/>
+                        <a:ea typeface="Plus Jakarta Sans" charset="0"/>
+                        <a:cs typeface="Plus Jakarta Sans" charset="0"/>
                       </a:endParaRPr>
                     </a:p>
                   </a:txBody>
@@ -16982,16 +16982,16 @@
                           <a:solidFill>
                             <a:srgbClr val="15154A"/>
                           </a:solidFill>
-                          <a:latin typeface="Calibri" pitchFamily="34" charset="0"/>
-                          <a:ea typeface="Calibri" pitchFamily="34" charset="-122"/>
-                          <a:cs typeface="Calibri" pitchFamily="34" charset="-120"/>
+                          <a:latin typeface="Plus Jakarta Sans" pitchFamily="34" charset="0"/>
+                          <a:ea typeface="Plus Jakarta Sans" pitchFamily="34" charset="-122"/>
+                          <a:cs typeface="Plus Jakarta Sans" pitchFamily="34" charset="-120"/>
                         </a:rPr>
                         <a:t>WebArena</a:t>
                       </a:r>
                       <a:endParaRPr lang="en-US" sz="850" dirty="0">
-                        <a:latin typeface="Calibri" charset="0"/>
-                        <a:ea typeface="Calibri" charset="0"/>
-                        <a:cs typeface="Calibri" charset="0"/>
+                        <a:latin typeface="Plus Jakarta Sans" charset="0"/>
+                        <a:ea typeface="Plus Jakarta Sans" charset="0"/>
+                        <a:cs typeface="Plus Jakarta Sans" charset="0"/>
                       </a:endParaRPr>
                     </a:p>
                   </a:txBody>
@@ -17050,16 +17050,16 @@
                           <a:solidFill>
                             <a:srgbClr val="5A5A72"/>
                           </a:solidFill>
-                          <a:latin typeface="Calibri" pitchFamily="34" charset="0"/>
-                          <a:ea typeface="Calibri" pitchFamily="34" charset="-122"/>
-                          <a:cs typeface="Calibri" pitchFamily="34" charset="-120"/>
+                          <a:latin typeface="Plus Jakarta Sans" pitchFamily="34" charset="0"/>
+                          <a:ea typeface="Plus Jakarta Sans" pitchFamily="34" charset="-122"/>
+                          <a:cs typeface="Plus Jakarta Sans" pitchFamily="34" charset="-120"/>
                         </a:rPr>
                         <a:t>Browser automation across e-commerce, reddit, gitlab</a:t>
                       </a:r>
                       <a:endParaRPr lang="en-US" sz="850" dirty="0">
-                        <a:latin typeface="Calibri" charset="0"/>
-                        <a:ea typeface="Calibri" charset="0"/>
-                        <a:cs typeface="Calibri" charset="0"/>
+                        <a:latin typeface="Plus Jakarta Sans" charset="0"/>
+                        <a:ea typeface="Plus Jakarta Sans" charset="0"/>
+                        <a:cs typeface="Plus Jakarta Sans" charset="0"/>
                       </a:endParaRPr>
                     </a:p>
                   </a:txBody>
@@ -17120,16 +17120,16 @@
                           <a:solidFill>
                             <a:srgbClr val="15154A"/>
                           </a:solidFill>
-                          <a:latin typeface="Calibri" pitchFamily="34" charset="0"/>
-                          <a:ea typeface="Calibri" pitchFamily="34" charset="-122"/>
-                          <a:cs typeface="Calibri" pitchFamily="34" charset="-120"/>
+                          <a:latin typeface="Plus Jakarta Sans" pitchFamily="34" charset="0"/>
+                          <a:ea typeface="Plus Jakarta Sans" pitchFamily="34" charset="-122"/>
+                          <a:cs typeface="Plus Jakarta Sans" pitchFamily="34" charset="-120"/>
                         </a:rPr>
                         <a:t>AgentBench</a:t>
                       </a:r>
                       <a:endParaRPr lang="en-US" sz="850" dirty="0">
-                        <a:latin typeface="Calibri" charset="0"/>
-                        <a:ea typeface="Calibri" charset="0"/>
-                        <a:cs typeface="Calibri" charset="0"/>
+                        <a:latin typeface="Plus Jakarta Sans" charset="0"/>
+                        <a:ea typeface="Plus Jakarta Sans" charset="0"/>
+                        <a:cs typeface="Plus Jakarta Sans" charset="0"/>
                       </a:endParaRPr>
                     </a:p>
                   </a:txBody>
@@ -17188,16 +17188,16 @@
                           <a:solidFill>
                             <a:srgbClr val="5A5A72"/>
                           </a:solidFill>
-                          <a:latin typeface="Calibri" pitchFamily="34" charset="0"/>
-                          <a:ea typeface="Calibri" pitchFamily="34" charset="-122"/>
-                          <a:cs typeface="Calibri" pitchFamily="34" charset="-120"/>
+                          <a:latin typeface="Plus Jakarta Sans" pitchFamily="34" charset="0"/>
+                          <a:ea typeface="Plus Jakarta Sans" pitchFamily="34" charset="-122"/>
+                          <a:cs typeface="Plus Jakarta Sans" pitchFamily="34" charset="-120"/>
                         </a:rPr>
                         <a:t>8 environments: OS, DB, web, code — measures task success rate</a:t>
                       </a:r>
                       <a:endParaRPr lang="en-US" sz="850" dirty="0">
-                        <a:latin typeface="Calibri" charset="0"/>
-                        <a:ea typeface="Calibri" charset="0"/>
-                        <a:cs typeface="Calibri" charset="0"/>
+                        <a:latin typeface="Plus Jakarta Sans" charset="0"/>
+                        <a:ea typeface="Plus Jakarta Sans" charset="0"/>
+                        <a:cs typeface="Plus Jakarta Sans" charset="0"/>
                       </a:endParaRPr>
                     </a:p>
                   </a:txBody>
@@ -17277,9 +17277,9 @@
                 <a:solidFill>
                   <a:srgbClr val="15154A"/>
                 </a:solidFill>
-                <a:latin typeface="Arial" pitchFamily="34" charset="0"/>
-                <a:ea typeface="Arial" pitchFamily="34" charset="-122"/>
-                <a:cs typeface="Arial" pitchFamily="34" charset="-120"/>
+                <a:latin typeface="Plus Jakarta Sans" pitchFamily="34" charset="0"/>
+                <a:ea typeface="Plus Jakarta Sans" pitchFamily="34" charset="-122"/>
+                <a:cs typeface="Plus Jakarta Sans" pitchFamily="34" charset="-120"/>
               </a:rPr>
               <a:t>Harness Maturity Model</a:t>
             </a:r>
@@ -17365,9 +17365,9 @@
                 <a:solidFill>
                   <a:srgbClr val="FFFFFF"/>
                 </a:solidFill>
-                <a:latin typeface="Arial" pitchFamily="34" charset="0"/>
-                <a:ea typeface="Arial" pitchFamily="34" charset="-122"/>
-                <a:cs typeface="Arial" pitchFamily="34" charset="-120"/>
+                <a:latin typeface="Plus Jakarta Sans" pitchFamily="34" charset="0"/>
+                <a:ea typeface="Plus Jakarta Sans" pitchFamily="34" charset="-122"/>
+                <a:cs typeface="Plus Jakarta Sans" pitchFamily="34" charset="-120"/>
               </a:rPr>
               <a:t>L0</a:t>
             </a:r>
@@ -17404,9 +17404,9 @@
                 <a:solidFill>
                   <a:srgbClr val="15154A"/>
                 </a:solidFill>
-                <a:latin typeface="Arial" pitchFamily="34" charset="0"/>
-                <a:ea typeface="Arial" pitchFamily="34" charset="-122"/>
-                <a:cs typeface="Arial" pitchFamily="34" charset="-120"/>
+                <a:latin typeface="Plus Jakarta Sans" pitchFamily="34" charset="0"/>
+                <a:ea typeface="Plus Jakarta Sans" pitchFamily="34" charset="-122"/>
+                <a:cs typeface="Plus Jakarta Sans" pitchFamily="34" charset="-120"/>
               </a:rPr>
               <a:t>Raw Interaction</a:t>
             </a:r>
@@ -17443,9 +17443,9 @@
                 <a:solidFill>
                   <a:srgbClr val="5A5A72"/>
                 </a:solidFill>
-                <a:latin typeface="Calibri" pitchFamily="34" charset="0"/>
-                <a:ea typeface="Calibri" pitchFamily="34" charset="-122"/>
-                <a:cs typeface="Calibri" pitchFamily="34" charset="-120"/>
+                <a:latin typeface="Plus Jakarta Sans" pitchFamily="34" charset="0"/>
+                <a:ea typeface="Plus Jakarta Sans" pitchFamily="34" charset="-122"/>
+                <a:cs typeface="Plus Jakarta Sans" pitchFamily="34" charset="-120"/>
               </a:rPr>
               <a:t>Direct prompts, manual coding, zero constraints</a:t>
             </a:r>
@@ -17531,9 +17531,9 @@
                 <a:solidFill>
                   <a:srgbClr val="FFFFFF"/>
                 </a:solidFill>
-                <a:latin typeface="Arial" pitchFamily="34" charset="0"/>
-                <a:ea typeface="Arial" pitchFamily="34" charset="-122"/>
-                <a:cs typeface="Arial" pitchFamily="34" charset="-120"/>
+                <a:latin typeface="Plus Jakarta Sans" pitchFamily="34" charset="0"/>
+                <a:ea typeface="Plus Jakarta Sans" pitchFamily="34" charset="-122"/>
+                <a:cs typeface="Plus Jakarta Sans" pitchFamily="34" charset="-120"/>
               </a:rPr>
               <a:t>L1</a:t>
             </a:r>
@@ -17570,9 +17570,9 @@
                 <a:solidFill>
                   <a:srgbClr val="15154A"/>
                 </a:solidFill>
-                <a:latin typeface="Arial" pitchFamily="34" charset="0"/>
-                <a:ea typeface="Arial" pitchFamily="34" charset="-122"/>
-                <a:cs typeface="Arial" pitchFamily="34" charset="-120"/>
+                <a:latin typeface="Plus Jakarta Sans" pitchFamily="34" charset="0"/>
+                <a:ea typeface="Plus Jakarta Sans" pitchFamily="34" charset="-122"/>
+                <a:cs typeface="Plus Jakarta Sans" pitchFamily="34" charset="-120"/>
               </a:rPr>
               <a:t>Basic Constraints</a:t>
             </a:r>
@@ -17609,9 +17609,9 @@
                 <a:solidFill>
                   <a:srgbClr val="5A5A72"/>
                 </a:solidFill>
-                <a:latin typeface="Calibri" pitchFamily="34" charset="0"/>
-                <a:ea typeface="Calibri" pitchFamily="34" charset="-122"/>
-                <a:cs typeface="Calibri" pitchFamily="34" charset="-120"/>
+                <a:latin typeface="Plus Jakarta Sans" pitchFamily="34" charset="0"/>
+                <a:ea typeface="Plus Jakarta Sans" pitchFamily="34" charset="-122"/>
+                <a:cs typeface="Plus Jakarta Sans" pitchFamily="34" charset="-120"/>
               </a:rPr>
               <a:t>AGENTS.md, basic linters, manual testing</a:t>
             </a:r>
@@ -17697,9 +17697,9 @@
                 <a:solidFill>
                   <a:srgbClr val="FFFFFF"/>
                 </a:solidFill>
-                <a:latin typeface="Arial" pitchFamily="34" charset="0"/>
-                <a:ea typeface="Arial" pitchFamily="34" charset="-122"/>
-                <a:cs typeface="Arial" pitchFamily="34" charset="-120"/>
+                <a:latin typeface="Plus Jakarta Sans" pitchFamily="34" charset="0"/>
+                <a:ea typeface="Plus Jakarta Sans" pitchFamily="34" charset="-122"/>
+                <a:cs typeface="Plus Jakarta Sans" pitchFamily="34" charset="-120"/>
               </a:rPr>
               <a:t>L2</a:t>
             </a:r>
@@ -17736,9 +17736,9 @@
                 <a:solidFill>
                   <a:srgbClr val="15154A"/>
                 </a:solidFill>
-                <a:latin typeface="Arial" pitchFamily="34" charset="0"/>
-                <a:ea typeface="Arial" pitchFamily="34" charset="-122"/>
-                <a:cs typeface="Arial" pitchFamily="34" charset="-120"/>
+                <a:latin typeface="Plus Jakarta Sans" pitchFamily="34" charset="0"/>
+                <a:ea typeface="Plus Jakarta Sans" pitchFamily="34" charset="-122"/>
+                <a:cs typeface="Plus Jakarta Sans" pitchFamily="34" charset="-120"/>
               </a:rPr>
               <a:t>Feedback Loops</a:t>
             </a:r>
@@ -17775,9 +17775,9 @@
                 <a:solidFill>
                   <a:srgbClr val="5A5A72"/>
                 </a:solidFill>
-                <a:latin typeface="Calibri" pitchFamily="34" charset="0"/>
-                <a:ea typeface="Calibri" pitchFamily="34" charset="-122"/>
-                <a:cs typeface="Calibri" pitchFamily="34" charset="-120"/>
+                <a:latin typeface="Plus Jakarta Sans" pitchFamily="34" charset="0"/>
+                <a:ea typeface="Plus Jakarta Sans" pitchFamily="34" charset="-122"/>
+                <a:cs typeface="Plus Jakarta Sans" pitchFamily="34" charset="-120"/>
               </a:rPr>
               <a:t>CI/CD, automated tests, progress.json state tracking</a:t>
             </a:r>
@@ -17863,9 +17863,9 @@
                 <a:solidFill>
                   <a:srgbClr val="FFFFFF"/>
                 </a:solidFill>
-                <a:latin typeface="Arial" pitchFamily="34" charset="0"/>
-                <a:ea typeface="Arial" pitchFamily="34" charset="-122"/>
-                <a:cs typeface="Arial" pitchFamily="34" charset="-120"/>
+                <a:latin typeface="Plus Jakarta Sans" pitchFamily="34" charset="0"/>
+                <a:ea typeface="Plus Jakarta Sans" pitchFamily="34" charset="-122"/>
+                <a:cs typeface="Plus Jakarta Sans" pitchFamily="34" charset="-120"/>
               </a:rPr>
               <a:t>L3</a:t>
             </a:r>
@@ -17902,9 +17902,9 @@
                 <a:solidFill>
                   <a:srgbClr val="15154A"/>
                 </a:solidFill>
-                <a:latin typeface="Arial" pitchFamily="34" charset="0"/>
-                <a:ea typeface="Arial" pitchFamily="34" charset="-122"/>
-                <a:cs typeface="Arial" pitchFamily="34" charset="-120"/>
+                <a:latin typeface="Plus Jakarta Sans" pitchFamily="34" charset="0"/>
+                <a:ea typeface="Plus Jakarta Sans" pitchFamily="34" charset="-122"/>
+                <a:cs typeface="Plus Jakarta Sans" pitchFamily="34" charset="-120"/>
               </a:rPr>
               <a:t>Specialization</a:t>
             </a:r>
@@ -17941,9 +17941,9 @@
                 <a:solidFill>
                   <a:srgbClr val="5A5A72"/>
                 </a:solidFill>
-                <a:latin typeface="Calibri" pitchFamily="34" charset="0"/>
-                <a:ea typeface="Calibri" pitchFamily="34" charset="-122"/>
-                <a:cs typeface="Calibri" pitchFamily="34" charset="-120"/>
+                <a:latin typeface="Plus Jakarta Sans" pitchFamily="34" charset="0"/>
+                <a:ea typeface="Plus Jakarta Sans" pitchFamily="34" charset="-122"/>
+                <a:cs typeface="Plus Jakarta Sans" pitchFamily="34" charset="-120"/>
               </a:rPr>
               <a:t>Multi-agent routing, progressive context, role definitions</a:t>
             </a:r>
@@ -18029,9 +18029,9 @@
                 <a:solidFill>
                   <a:srgbClr val="FFFFFF"/>
                 </a:solidFill>
-                <a:latin typeface="Arial" pitchFamily="34" charset="0"/>
-                <a:ea typeface="Arial" pitchFamily="34" charset="-122"/>
-                <a:cs typeface="Arial" pitchFamily="34" charset="-120"/>
+                <a:latin typeface="Plus Jakarta Sans" pitchFamily="34" charset="0"/>
+                <a:ea typeface="Plus Jakarta Sans" pitchFamily="34" charset="-122"/>
+                <a:cs typeface="Plus Jakarta Sans" pitchFamily="34" charset="-120"/>
               </a:rPr>
               <a:t>L4</a:t>
             </a:r>
@@ -18068,9 +18068,9 @@
                 <a:solidFill>
                   <a:srgbClr val="15154A"/>
                 </a:solidFill>
-                <a:latin typeface="Arial" pitchFamily="34" charset="0"/>
-                <a:ea typeface="Arial" pitchFamily="34" charset="-122"/>
-                <a:cs typeface="Arial" pitchFamily="34" charset="-120"/>
+                <a:latin typeface="Plus Jakarta Sans" pitchFamily="34" charset="0"/>
+                <a:ea typeface="Plus Jakarta Sans" pitchFamily="34" charset="-122"/>
+                <a:cs typeface="Plus Jakarta Sans" pitchFamily="34" charset="-120"/>
               </a:rPr>
               <a:t>Autonomy</a:t>
             </a:r>
@@ -18107,9 +18107,9 @@
                 <a:solidFill>
                   <a:srgbClr val="5A5A72"/>
                 </a:solidFill>
-                <a:latin typeface="Calibri" pitchFamily="34" charset="0"/>
-                <a:ea typeface="Calibri" pitchFamily="34" charset="-122"/>
-                <a:cs typeface="Calibri" pitchFamily="34" charset="-120"/>
+                <a:latin typeface="Plus Jakarta Sans" pitchFamily="34" charset="0"/>
+                <a:ea typeface="Plus Jakarta Sans" pitchFamily="34" charset="-122"/>
+                <a:cs typeface="Plus Jakarta Sans" pitchFamily="34" charset="-120"/>
               </a:rPr>
               <a:t>Unattended parallel execution, automated entropy management, self-healing</a:t>
             </a:r>
@@ -18166,9 +18166,9 @@
                 <a:solidFill>
                   <a:srgbClr val="5A5A72"/>
                 </a:solidFill>
-                <a:latin typeface="Calibri" pitchFamily="34" charset="0"/>
-                <a:ea typeface="Calibri" pitchFamily="34" charset="-122"/>
-                <a:cs typeface="Calibri" pitchFamily="34" charset="-120"/>
+                <a:latin typeface="Plus Jakarta Sans" pitchFamily="34" charset="0"/>
+                <a:ea typeface="Plus Jakarta Sans" pitchFamily="34" charset="-122"/>
+                <a:cs typeface="Plus Jakarta Sans" pitchFamily="34" charset="-120"/>
               </a:rPr>
               <a:t>Observability stack:</a:t>
             </a:r>
@@ -18227,9 +18227,9 @@
                 <a:solidFill>
                   <a:srgbClr val="15154A"/>
                 </a:solidFill>
-                <a:latin typeface="Calibri" pitchFamily="34" charset="0"/>
-                <a:ea typeface="Calibri" pitchFamily="34" charset="-122"/>
-                <a:cs typeface="Calibri" pitchFamily="34" charset="-120"/>
+                <a:latin typeface="Plus Jakarta Sans" pitchFamily="34" charset="0"/>
+                <a:ea typeface="Plus Jakarta Sans" pitchFamily="34" charset="-122"/>
+                <a:cs typeface="Plus Jakarta Sans" pitchFamily="34" charset="-120"/>
               </a:rPr>
               <a:t>LangSmith — LangChain tracing</a:t>
             </a:r>
@@ -18288,9 +18288,9 @@
                 <a:solidFill>
                   <a:srgbClr val="15154A"/>
                 </a:solidFill>
-                <a:latin typeface="Calibri" pitchFamily="34" charset="0"/>
-                <a:ea typeface="Calibri" pitchFamily="34" charset="-122"/>
-                <a:cs typeface="Calibri" pitchFamily="34" charset="-120"/>
+                <a:latin typeface="Plus Jakarta Sans" pitchFamily="34" charset="0"/>
+                <a:ea typeface="Plus Jakarta Sans" pitchFamily="34" charset="-122"/>
+                <a:cs typeface="Plus Jakarta Sans" pitchFamily="34" charset="-120"/>
               </a:rPr>
               <a:t>Langfuse — Open-source LLM ops</a:t>
             </a:r>
@@ -18349,9 +18349,9 @@
                 <a:solidFill>
                   <a:srgbClr val="15154A"/>
                 </a:solidFill>
-                <a:latin typeface="Calibri" pitchFamily="34" charset="0"/>
-                <a:ea typeface="Calibri" pitchFamily="34" charset="-122"/>
-                <a:cs typeface="Calibri" pitchFamily="34" charset="-120"/>
+                <a:latin typeface="Plus Jakarta Sans" pitchFamily="34" charset="0"/>
+                <a:ea typeface="Plus Jakarta Sans" pitchFamily="34" charset="-122"/>
+                <a:cs typeface="Plus Jakarta Sans" pitchFamily="34" charset="-120"/>
               </a:rPr>
               <a:t>Arize Phoenix — Evals + tracing</a:t>
             </a:r>
@@ -18410,9 +18410,9 @@
                 <a:solidFill>
                   <a:srgbClr val="15154A"/>
                 </a:solidFill>
-                <a:latin typeface="Calibri" pitchFamily="34" charset="0"/>
-                <a:ea typeface="Calibri" pitchFamily="34" charset="-122"/>
-                <a:cs typeface="Calibri" pitchFamily="34" charset="-120"/>
+                <a:latin typeface="Plus Jakarta Sans" pitchFamily="34" charset="0"/>
+                <a:ea typeface="Plus Jakarta Sans" pitchFamily="34" charset="-122"/>
+                <a:cs typeface="Plus Jakarta Sans" pitchFamily="34" charset="-120"/>
               </a:rPr>
               <a:t>OTel GenAI — GenAI conventions</a:t>
             </a:r>
@@ -18449,9 +18449,9 @@
                 <a:solidFill>
                   <a:srgbClr val="9A9AB4"/>
                 </a:solidFill>
-                <a:latin typeface="Calibri" pitchFamily="34" charset="0"/>
-                <a:ea typeface="Calibri" pitchFamily="34" charset="-122"/>
-                <a:cs typeface="Calibri" pitchFamily="34" charset="-120"/>
+                <a:latin typeface="Plus Jakarta Sans" pitchFamily="34" charset="0"/>
+                <a:ea typeface="Plus Jakarta Sans" pitchFamily="34" charset="-122"/>
+                <a:cs typeface="Plus Jakarta Sans" pitchFamily="34" charset="-120"/>
               </a:rPr>
               <a:t>©2026 Cloudera, Inc. All Rights Reserved. · Benchmarks: SWE-bench, τ-bench, GAIA, WebArena, AgentBench. Maturity model: Harness Engineering PDF.</a:t>
             </a:r>
@@ -18488,9 +18488,9 @@
                 <a:solidFill>
                   <a:srgbClr val="9A9AB4"/>
                 </a:solidFill>
-                <a:latin typeface="Calibri" pitchFamily="34" charset="0"/>
-                <a:ea typeface="Calibri" pitchFamily="34" charset="-122"/>
-                <a:cs typeface="Calibri" pitchFamily="34" charset="-120"/>
+                <a:latin typeface="Plus Jakarta Sans" pitchFamily="34" charset="0"/>
+                <a:ea typeface="Plus Jakarta Sans" pitchFamily="34" charset="-122"/>
+                <a:cs typeface="Plus Jakarta Sans" pitchFamily="34" charset="-120"/>
               </a:rPr>
               <a:t>20 / 22</a:t>
             </a:r>
@@ -18559,9 +18559,9 @@
                 <a:solidFill>
                   <a:srgbClr val="EE5A29"/>
                 </a:solidFill>
-                <a:latin typeface="Arial" pitchFamily="34" charset="0"/>
-                <a:ea typeface="Arial" pitchFamily="34" charset="-122"/>
-                <a:cs typeface="Arial" pitchFamily="34" charset="-120"/>
+                <a:latin typeface="Plus Jakarta Sans" pitchFamily="34" charset="0"/>
+                <a:ea typeface="Plus Jakarta Sans" pitchFamily="34" charset="-122"/>
+                <a:cs typeface="Plus Jakarta Sans" pitchFamily="34" charset="-120"/>
               </a:rPr>
               <a:t>CLOUD</a:t>
             </a:r>
@@ -18573,9 +18573,9 @@
                 <a:solidFill>
                   <a:srgbClr val="EE5A29"/>
                 </a:solidFill>
-                <a:latin typeface="Arial" pitchFamily="34" charset="0"/>
-                <a:ea typeface="Arial" pitchFamily="34" charset="-122"/>
-                <a:cs typeface="Arial" pitchFamily="34" charset="-120"/>
+                <a:latin typeface="Plus Jakarta Sans" pitchFamily="34" charset="0"/>
+                <a:ea typeface="Plus Jakarta Sans" pitchFamily="34" charset="-122"/>
+                <a:cs typeface="Plus Jakarta Sans" pitchFamily="34" charset="-120"/>
               </a:rPr>
               <a:t>E</a:t>
             </a:r>
@@ -18587,9 +18587,9 @@
                 <a:solidFill>
                   <a:srgbClr val="EE5A29"/>
                 </a:solidFill>
-                <a:latin typeface="Arial" pitchFamily="34" charset="0"/>
-                <a:ea typeface="Arial" pitchFamily="34" charset="-122"/>
-                <a:cs typeface="Arial" pitchFamily="34" charset="-120"/>
+                <a:latin typeface="Plus Jakarta Sans" pitchFamily="34" charset="0"/>
+                <a:ea typeface="Plus Jakarta Sans" pitchFamily="34" charset="-122"/>
+                <a:cs typeface="Plus Jakarta Sans" pitchFamily="34" charset="-120"/>
               </a:rPr>
               <a:t>RA</a:t>
             </a:r>
@@ -18646,9 +18646,9 @@
                 <a:solidFill>
                   <a:srgbClr val="EE5A29"/>
                 </a:solidFill>
-                <a:latin typeface="Calibri" pitchFamily="34" charset="0"/>
-                <a:ea typeface="Calibri" pitchFamily="34" charset="-122"/>
-                <a:cs typeface="Calibri" pitchFamily="34" charset="-120"/>
+                <a:latin typeface="Plus Jakarta Sans" pitchFamily="34" charset="0"/>
+                <a:ea typeface="Plus Jakarta Sans" pitchFamily="34" charset="-122"/>
+                <a:cs typeface="Plus Jakarta Sans" pitchFamily="34" charset="-120"/>
               </a:rPr>
               <a:t>CLOUDERA AI</a:t>
             </a:r>
@@ -18685,9 +18685,9 @@
                 <a:solidFill>
                   <a:srgbClr val="15154A"/>
                 </a:solidFill>
-                <a:latin typeface="Arial" pitchFamily="34" charset="0"/>
-                <a:ea typeface="Arial" pitchFamily="34" charset="-122"/>
-                <a:cs typeface="Arial" pitchFamily="34" charset="-120"/>
+                <a:latin typeface="Plus Jakarta Sans" pitchFamily="34" charset="0"/>
+                <a:ea typeface="Plus Jakarta Sans" pitchFamily="34" charset="-122"/>
+                <a:cs typeface="Plus Jakarta Sans" pitchFamily="34" charset="-120"/>
               </a:rPr>
               <a:t>Cloudera Agent Studio 3.0</a:t>
             </a:r>
@@ -18727,9 +18727,9 @@
                 <a:solidFill>
                   <a:srgbClr val="4F4FF5"/>
                 </a:solidFill>
-                <a:latin typeface="Arial" pitchFamily="34" charset="0"/>
-                <a:ea typeface="Arial" pitchFamily="34" charset="-122"/>
-                <a:cs typeface="Arial" pitchFamily="34" charset="-120"/>
+                <a:latin typeface="Plus Jakarta Sans" pitchFamily="34" charset="0"/>
+                <a:ea typeface="Plus Jakarta Sans" pitchFamily="34" charset="-122"/>
+                <a:cs typeface="Plus Jakarta Sans" pitchFamily="34" charset="-120"/>
               </a:rPr>
               <a:t>A flexible low-code to high-code platform to create AI agents, tools, and multi-agent workflows — all through an intuitive UI.</a:t>
             </a:r>
@@ -18786,9 +18786,9 @@
                 <a:solidFill>
                   <a:srgbClr val="15154A"/>
                 </a:solidFill>
-                <a:latin typeface="Arial" pitchFamily="34" charset="0"/>
-                <a:ea typeface="Arial" pitchFamily="34" charset="-122"/>
-                <a:cs typeface="Arial" pitchFamily="34" charset="-120"/>
+                <a:latin typeface="Plus Jakarta Sans" pitchFamily="34" charset="0"/>
+                <a:ea typeface="Plus Jakarta Sans" pitchFamily="34" charset="-122"/>
+                <a:cs typeface="Plus Jakarta Sans" pitchFamily="34" charset="-120"/>
               </a:rPr>
               <a:t>Agentic workflow builder</a:t>
             </a:r>
@@ -18825,9 +18825,9 @@
                 <a:solidFill>
                   <a:srgbClr val="5A5A72"/>
                 </a:solidFill>
-                <a:latin typeface="Calibri" pitchFamily="34" charset="0"/>
-                <a:ea typeface="Calibri" pitchFamily="34" charset="-122"/>
-                <a:cs typeface="Calibri" pitchFamily="34" charset="-120"/>
+                <a:latin typeface="Plus Jakarta Sans" pitchFamily="34" charset="0"/>
+                <a:ea typeface="Plus Jakarta Sans" pitchFamily="34" charset="-122"/>
+                <a:cs typeface="Plus Jakarta Sans" pitchFamily="34" charset="-120"/>
               </a:rPr>
               <a:t>Create agents with tasks, tools &amp; roles; AI-assisted authoring</a:t>
             </a:r>
@@ -18884,9 +18884,9 @@
                 <a:solidFill>
                   <a:srgbClr val="15154A"/>
                 </a:solidFill>
-                <a:latin typeface="Arial" pitchFamily="34" charset="0"/>
-                <a:ea typeface="Arial" pitchFamily="34" charset="-122"/>
-                <a:cs typeface="Arial" pitchFamily="34" charset="-120"/>
+                <a:latin typeface="Plus Jakarta Sans" pitchFamily="34" charset="0"/>
+                <a:ea typeface="Plus Jakarta Sans" pitchFamily="34" charset="-122"/>
+                <a:cs typeface="Plus Jakarta Sans" pitchFamily="34" charset="-120"/>
               </a:rPr>
               <a:t>Tools Catalog</a:t>
             </a:r>
@@ -18923,9 +18923,9 @@
                 <a:solidFill>
                   <a:srgbClr val="5A5A72"/>
                 </a:solidFill>
-                <a:latin typeface="Calibri" pitchFamily="34" charset="0"/>
-                <a:ea typeface="Calibri" pitchFamily="34" charset="-122"/>
-                <a:cs typeface="Calibri" pitchFamily="34" charset="-120"/>
+                <a:latin typeface="Plus Jakarta Sans" pitchFamily="34" charset="0"/>
+                <a:ea typeface="Plus Jakarta Sans" pitchFamily="34" charset="-122"/>
+                <a:cs typeface="Plus Jakarta Sans" pitchFamily="34" charset="-120"/>
               </a:rPr>
               <a:t>Built-in, custom Python, and MCP server tools — all reusable across workflows</a:t>
             </a:r>
@@ -18982,9 +18982,9 @@
                 <a:solidFill>
                   <a:srgbClr val="15154A"/>
                 </a:solidFill>
-                <a:latin typeface="Arial" pitchFamily="34" charset="0"/>
-                <a:ea typeface="Arial" pitchFamily="34" charset="-122"/>
-                <a:cs typeface="Arial" pitchFamily="34" charset="-120"/>
+                <a:latin typeface="Plus Jakarta Sans" pitchFamily="34" charset="0"/>
+                <a:ea typeface="Plus Jakarta Sans" pitchFamily="34" charset="-122"/>
+                <a:cs typeface="Plus Jakarta Sans" pitchFamily="34" charset="-120"/>
               </a:rPr>
               <a:t>Multi-LLM support</a:t>
             </a:r>
@@ -19021,9 +19021,9 @@
                 <a:solidFill>
                   <a:srgbClr val="5A5A72"/>
                 </a:solidFill>
-                <a:latin typeface="Calibri" pitchFamily="34" charset="0"/>
-                <a:ea typeface="Calibri" pitchFamily="34" charset="-122"/>
-                <a:cs typeface="Calibri" pitchFamily="34" charset="-120"/>
+                <a:latin typeface="Plus Jakarta Sans" pitchFamily="34" charset="0"/>
+                <a:ea typeface="Plus Jakarta Sans" pitchFamily="34" charset="-122"/>
+                <a:cs typeface="Plus Jakarta Sans" pitchFamily="34" charset="-120"/>
               </a:rPr>
               <a:t>CAI Inferencing, Azure OpenAI, Gemini, Anthropic, any OpenAI-compatible endpoint</a:t>
             </a:r>
@@ -19080,9 +19080,9 @@
                 <a:solidFill>
                   <a:srgbClr val="15154A"/>
                 </a:solidFill>
-                <a:latin typeface="Arial" pitchFamily="34" charset="0"/>
-                <a:ea typeface="Arial" pitchFamily="34" charset="-122"/>
-                <a:cs typeface="Arial" pitchFamily="34" charset="-120"/>
+                <a:latin typeface="Plus Jakarta Sans" pitchFamily="34" charset="0"/>
+                <a:ea typeface="Plus Jakarta Sans" pitchFamily="34" charset="-122"/>
+                <a:cs typeface="Plus Jakarta Sans" pitchFamily="34" charset="-120"/>
               </a:rPr>
               <a:t>Test &amp; debug</a:t>
             </a:r>
@@ -19119,9 +19119,9 @@
                 <a:solidFill>
                   <a:srgbClr val="5A5A72"/>
                 </a:solidFill>
-                <a:latin typeface="Calibri" pitchFamily="34" charset="0"/>
-                <a:ea typeface="Calibri" pitchFamily="34" charset="-122"/>
-                <a:cs typeface="Calibri" pitchFamily="34" charset="-120"/>
+                <a:latin typeface="Plus Jakarta Sans" pitchFamily="34" charset="0"/>
+                <a:ea typeface="Plus Jakarta Sans" pitchFamily="34" charset="-122"/>
+                <a:cs typeface="Plus Jakarta Sans" pitchFamily="34" charset="-120"/>
               </a:rPr>
               <a:t>Logs, playback, and visual debugger in the Test panel</a:t>
             </a:r>
@@ -19178,9 +19178,9 @@
                 <a:solidFill>
                   <a:srgbClr val="15154A"/>
                 </a:solidFill>
-                <a:latin typeface="Arial" pitchFamily="34" charset="0"/>
-                <a:ea typeface="Arial" pitchFamily="34" charset="-122"/>
-                <a:cs typeface="Arial" pitchFamily="34" charset="-120"/>
+                <a:latin typeface="Plus Jakarta Sans" pitchFamily="34" charset="0"/>
+                <a:ea typeface="Plus Jakarta Sans" pitchFamily="34" charset="-122"/>
+                <a:cs typeface="Plus Jakarta Sans" pitchFamily="34" charset="-120"/>
               </a:rPr>
               <a:t>Deploy as endpoint</a:t>
             </a:r>
@@ -19217,9 +19217,9 @@
                 <a:solidFill>
                   <a:srgbClr val="5A5A72"/>
                 </a:solidFill>
-                <a:latin typeface="Calibri" pitchFamily="34" charset="0"/>
-                <a:ea typeface="Calibri" pitchFamily="34" charset="-122"/>
-                <a:cs typeface="Calibri" pitchFamily="34" charset="-120"/>
+                <a:latin typeface="Plus Jakarta Sans" pitchFamily="34" charset="0"/>
+                <a:ea typeface="Plus Jakarta Sans" pitchFamily="34" charset="-122"/>
+                <a:cs typeface="Plus Jakarta Sans" pitchFamily="34" charset="-120"/>
               </a:rPr>
               <a:t>Auto-generated UI; deploy workflows as APIs with one click</a:t>
             </a:r>
@@ -19276,9 +19276,9 @@
                 <a:solidFill>
                   <a:srgbClr val="15154A"/>
                 </a:solidFill>
-                <a:latin typeface="Arial" pitchFamily="34" charset="0"/>
-                <a:ea typeface="Arial" pitchFamily="34" charset="-122"/>
-                <a:cs typeface="Arial" pitchFamily="34" charset="-120"/>
+                <a:latin typeface="Plus Jakarta Sans" pitchFamily="34" charset="0"/>
+                <a:ea typeface="Plus Jakarta Sans" pitchFamily="34" charset="-122"/>
+                <a:cs typeface="Plus Jakarta Sans" pitchFamily="34" charset="-120"/>
               </a:rPr>
               <a:t>Built-in observability</a:t>
             </a:r>
@@ -19315,9 +19315,9 @@
                 <a:solidFill>
                   <a:srgbClr val="5A5A72"/>
                 </a:solidFill>
-                <a:latin typeface="Calibri" pitchFamily="34" charset="0"/>
-                <a:ea typeface="Calibri" pitchFamily="34" charset="-122"/>
-                <a:cs typeface="Calibri" pitchFamily="34" charset="-120"/>
+                <a:latin typeface="Plus Jakarta Sans" pitchFamily="34" charset="0"/>
+                <a:ea typeface="Plus Jakarta Sans" pitchFamily="34" charset="-122"/>
+                <a:cs typeface="Plus Jakarta Sans" pitchFamily="34" charset="-120"/>
               </a:rPr>
               <a:t>Phoenix (Arize) tracing integrated; monitor every agent run</a:t>
             </a:r>
@@ -19374,9 +19374,9 @@
                 <a:solidFill>
                   <a:srgbClr val="15154A"/>
                 </a:solidFill>
-                <a:latin typeface="Arial" pitchFamily="34" charset="0"/>
-                <a:ea typeface="Arial" pitchFamily="34" charset="-122"/>
-                <a:cs typeface="Arial" pitchFamily="34" charset="-120"/>
+                <a:latin typeface="Plus Jakarta Sans" pitchFamily="34" charset="0"/>
+                <a:ea typeface="Plus Jakarta Sans" pitchFamily="34" charset="-122"/>
+                <a:cs typeface="Plus Jakarta Sans" pitchFamily="34" charset="-120"/>
               </a:rPr>
               <a:t>Guardrails</a:t>
             </a:r>
@@ -19413,9 +19413,9 @@
                 <a:solidFill>
                   <a:srgbClr val="5A5A72"/>
                 </a:solidFill>
-                <a:latin typeface="Calibri" pitchFamily="34" charset="0"/>
-                <a:ea typeface="Calibri" pitchFamily="34" charset="-122"/>
-                <a:cs typeface="Calibri" pitchFamily="34" charset="-120"/>
+                <a:latin typeface="Plus Jakarta Sans" pitchFamily="34" charset="0"/>
+                <a:ea typeface="Plus Jakarta Sans" pitchFamily="34" charset="-122"/>
+                <a:cs typeface="Plus Jakarta Sans" pitchFamily="34" charset="-120"/>
               </a:rPr>
               <a:t>Secure workflows with configurable safety constraints</a:t>
             </a:r>
@@ -19479,9 +19479,9 @@
                 <a:solidFill>
                   <a:srgbClr val="15154A"/>
                 </a:solidFill>
-                <a:latin typeface="Arial" pitchFamily="34" charset="0"/>
-                <a:ea typeface="Arial" pitchFamily="34" charset="-122"/>
-                <a:cs typeface="Arial" pitchFamily="34" charset="-120"/>
+                <a:latin typeface="Plus Jakarta Sans" pitchFamily="34" charset="0"/>
+                <a:ea typeface="Plus Jakarta Sans" pitchFamily="34" charset="-122"/>
+                <a:cs typeface="Plus Jakarta Sans" pitchFamily="34" charset="-120"/>
               </a:rPr>
               <a:t>AGENT STUDIO</a:t>
             </a:r>
@@ -19545,9 +19545,9 @@
                 <a:solidFill>
                   <a:srgbClr val="4F4FF5"/>
                 </a:solidFill>
-                <a:latin typeface="Calibri" pitchFamily="34" charset="0"/>
-                <a:ea typeface="Calibri" pitchFamily="34" charset="-122"/>
-                <a:cs typeface="Calibri" pitchFamily="34" charset="-120"/>
+                <a:latin typeface="Plus Jakarta Sans" pitchFamily="34" charset="0"/>
+                <a:ea typeface="Plus Jakarta Sans" pitchFamily="34" charset="-122"/>
+                <a:cs typeface="Plus Jakarta Sans" pitchFamily="34" charset="-120"/>
               </a:rPr>
               <a:t>Agent 1</a:t>
             </a:r>
@@ -19606,9 +19606,9 @@
                 <a:solidFill>
                   <a:srgbClr val="EE5A29"/>
                 </a:solidFill>
-                <a:latin typeface="Calibri" pitchFamily="34" charset="0"/>
-                <a:ea typeface="Calibri" pitchFamily="34" charset="-122"/>
-                <a:cs typeface="Calibri" pitchFamily="34" charset="-120"/>
+                <a:latin typeface="Plus Jakarta Sans" pitchFamily="34" charset="0"/>
+                <a:ea typeface="Plus Jakarta Sans" pitchFamily="34" charset="-122"/>
+                <a:cs typeface="Plus Jakarta Sans" pitchFamily="34" charset="-120"/>
               </a:rPr>
               <a:t>Tool 1</a:t>
             </a:r>
@@ -19667,9 +19667,9 @@
                 <a:solidFill>
                   <a:srgbClr val="EE5A29"/>
                 </a:solidFill>
-                <a:latin typeface="Calibri" pitchFamily="34" charset="0"/>
-                <a:ea typeface="Calibri" pitchFamily="34" charset="-122"/>
-                <a:cs typeface="Calibri" pitchFamily="34" charset="-120"/>
+                <a:latin typeface="Plus Jakarta Sans" pitchFamily="34" charset="0"/>
+                <a:ea typeface="Plus Jakarta Sans" pitchFamily="34" charset="-122"/>
+                <a:cs typeface="Plus Jakarta Sans" pitchFamily="34" charset="-120"/>
               </a:rPr>
               <a:t>Tool 2</a:t>
             </a:r>
@@ -19733,9 +19733,9 @@
                 <a:solidFill>
                   <a:srgbClr val="4F4FF5"/>
                 </a:solidFill>
-                <a:latin typeface="Calibri" pitchFamily="34" charset="0"/>
-                <a:ea typeface="Calibri" pitchFamily="34" charset="-122"/>
-                <a:cs typeface="Calibri" pitchFamily="34" charset="-120"/>
+                <a:latin typeface="Plus Jakarta Sans" pitchFamily="34" charset="0"/>
+                <a:ea typeface="Plus Jakarta Sans" pitchFamily="34" charset="-122"/>
+                <a:cs typeface="Plus Jakarta Sans" pitchFamily="34" charset="-120"/>
               </a:rPr>
               <a:t>Agent 2</a:t>
             </a:r>
@@ -19794,9 +19794,9 @@
                 <a:solidFill>
                   <a:srgbClr val="EE5A29"/>
                 </a:solidFill>
-                <a:latin typeface="Calibri" pitchFamily="34" charset="0"/>
-                <a:ea typeface="Calibri" pitchFamily="34" charset="-122"/>
-                <a:cs typeface="Calibri" pitchFamily="34" charset="-120"/>
+                <a:latin typeface="Plus Jakarta Sans" pitchFamily="34" charset="0"/>
+                <a:ea typeface="Plus Jakarta Sans" pitchFamily="34" charset="-122"/>
+                <a:cs typeface="Plus Jakarta Sans" pitchFamily="34" charset="-120"/>
               </a:rPr>
               <a:t>Tool 1</a:t>
             </a:r>
@@ -19855,9 +19855,9 @@
                 <a:solidFill>
                   <a:srgbClr val="EE5A29"/>
                 </a:solidFill>
-                <a:latin typeface="Calibri" pitchFamily="34" charset="0"/>
-                <a:ea typeface="Calibri" pitchFamily="34" charset="-122"/>
-                <a:cs typeface="Calibri" pitchFamily="34" charset="-120"/>
+                <a:latin typeface="Plus Jakarta Sans" pitchFamily="34" charset="0"/>
+                <a:ea typeface="Plus Jakarta Sans" pitchFamily="34" charset="-122"/>
+                <a:cs typeface="Plus Jakarta Sans" pitchFamily="34" charset="-120"/>
               </a:rPr>
               <a:t>Tool 2</a:t>
             </a:r>
@@ -19921,9 +19921,9 @@
                 <a:solidFill>
                   <a:srgbClr val="4F4FF5"/>
                 </a:solidFill>
-                <a:latin typeface="Calibri" pitchFamily="34" charset="0"/>
-                <a:ea typeface="Calibri" pitchFamily="34" charset="-122"/>
-                <a:cs typeface="Calibri" pitchFamily="34" charset="-120"/>
+                <a:latin typeface="Plus Jakarta Sans" pitchFamily="34" charset="0"/>
+                <a:ea typeface="Plus Jakarta Sans" pitchFamily="34" charset="-122"/>
+                <a:cs typeface="Plus Jakarta Sans" pitchFamily="34" charset="-120"/>
               </a:rPr>
               <a:t>Agent 3</a:t>
             </a:r>
@@ -19982,9 +19982,9 @@
                 <a:solidFill>
                   <a:srgbClr val="EE5A29"/>
                 </a:solidFill>
-                <a:latin typeface="Calibri" pitchFamily="34" charset="0"/>
-                <a:ea typeface="Calibri" pitchFamily="34" charset="-122"/>
-                <a:cs typeface="Calibri" pitchFamily="34" charset="-120"/>
+                <a:latin typeface="Plus Jakarta Sans" pitchFamily="34" charset="0"/>
+                <a:ea typeface="Plus Jakarta Sans" pitchFamily="34" charset="-122"/>
+                <a:cs typeface="Plus Jakarta Sans" pitchFamily="34" charset="-120"/>
               </a:rPr>
               <a:t>Tool 1</a:t>
             </a:r>
@@ -20043,9 +20043,9 @@
                 <a:solidFill>
                   <a:srgbClr val="EE5A29"/>
                 </a:solidFill>
-                <a:latin typeface="Calibri" pitchFamily="34" charset="0"/>
-                <a:ea typeface="Calibri" pitchFamily="34" charset="-122"/>
-                <a:cs typeface="Calibri" pitchFamily="34" charset="-120"/>
+                <a:latin typeface="Plus Jakarta Sans" pitchFamily="34" charset="0"/>
+                <a:ea typeface="Plus Jakarta Sans" pitchFamily="34" charset="-122"/>
+                <a:cs typeface="Plus Jakarta Sans" pitchFamily="34" charset="-120"/>
               </a:rPr>
               <a:t>Tool 2</a:t>
             </a:r>
@@ -20104,9 +20104,9 @@
                 <a:solidFill>
                   <a:srgbClr val="FFFFFF"/>
                 </a:solidFill>
-                <a:latin typeface="Calibri" pitchFamily="34" charset="0"/>
-                <a:ea typeface="Calibri" pitchFamily="34" charset="-122"/>
-                <a:cs typeface="Calibri" pitchFamily="34" charset="-120"/>
+                <a:latin typeface="Plus Jakarta Sans" pitchFamily="34" charset="0"/>
+                <a:ea typeface="Plus Jakarta Sans" pitchFamily="34" charset="-122"/>
+                <a:cs typeface="Plus Jakarta Sans" pitchFamily="34" charset="-120"/>
               </a:rPr>
               <a:t>Task 1</a:t>
             </a:r>
@@ -20143,9 +20143,9 @@
                 <a:solidFill>
                   <a:srgbClr val="EE5A29"/>
                 </a:solidFill>
-                <a:latin typeface="Arial" pitchFamily="34" charset="0"/>
-                <a:ea typeface="Arial" pitchFamily="34" charset="-122"/>
-                <a:cs typeface="Arial" pitchFamily="34" charset="-120"/>
+                <a:latin typeface="Plus Jakarta Sans" pitchFamily="34" charset="0"/>
+                <a:ea typeface="Plus Jakarta Sans" pitchFamily="34" charset="-122"/>
+                <a:cs typeface="Plus Jakarta Sans" pitchFamily="34" charset="-120"/>
               </a:rPr>
               <a:t>→</a:t>
             </a:r>
@@ -20204,9 +20204,9 @@
                 <a:solidFill>
                   <a:srgbClr val="FFFFFF"/>
                 </a:solidFill>
-                <a:latin typeface="Calibri" pitchFamily="34" charset="0"/>
-                <a:ea typeface="Calibri" pitchFamily="34" charset="-122"/>
-                <a:cs typeface="Calibri" pitchFamily="34" charset="-120"/>
+                <a:latin typeface="Plus Jakarta Sans" pitchFamily="34" charset="0"/>
+                <a:ea typeface="Plus Jakarta Sans" pitchFamily="34" charset="-122"/>
+                <a:cs typeface="Plus Jakarta Sans" pitchFamily="34" charset="-120"/>
               </a:rPr>
               <a:t>Task 2</a:t>
             </a:r>
@@ -20243,9 +20243,9 @@
                 <a:solidFill>
                   <a:srgbClr val="EE5A29"/>
                 </a:solidFill>
-                <a:latin typeface="Arial" pitchFamily="34" charset="0"/>
-                <a:ea typeface="Arial" pitchFamily="34" charset="-122"/>
-                <a:cs typeface="Arial" pitchFamily="34" charset="-120"/>
+                <a:latin typeface="Plus Jakarta Sans" pitchFamily="34" charset="0"/>
+                <a:ea typeface="Plus Jakarta Sans" pitchFamily="34" charset="-122"/>
+                <a:cs typeface="Plus Jakarta Sans" pitchFamily="34" charset="-120"/>
               </a:rPr>
               <a:t>→</a:t>
             </a:r>
@@ -20304,9 +20304,9 @@
                 <a:solidFill>
                   <a:srgbClr val="FFFFFF"/>
                 </a:solidFill>
-                <a:latin typeface="Calibri" pitchFamily="34" charset="0"/>
-                <a:ea typeface="Calibri" pitchFamily="34" charset="-122"/>
-                <a:cs typeface="Calibri" pitchFamily="34" charset="-120"/>
+                <a:latin typeface="Plus Jakarta Sans" pitchFamily="34" charset="0"/>
+                <a:ea typeface="Plus Jakarta Sans" pitchFamily="34" charset="-122"/>
+                <a:cs typeface="Plus Jakarta Sans" pitchFamily="34" charset="-120"/>
               </a:rPr>
               <a:t>Task 3</a:t>
             </a:r>
@@ -20367,9 +20367,9 @@
                 <a:solidFill>
                   <a:srgbClr val="FFFFFF"/>
                 </a:solidFill>
-                <a:latin typeface="Calibri" pitchFamily="34" charset="0"/>
-                <a:ea typeface="Calibri" pitchFamily="34" charset="-122"/>
-                <a:cs typeface="Calibri" pitchFamily="34" charset="-120"/>
+                <a:latin typeface="Plus Jakarta Sans" pitchFamily="34" charset="0"/>
+                <a:ea typeface="Plus Jakarta Sans" pitchFamily="34" charset="-122"/>
+                <a:cs typeface="Plus Jakarta Sans" pitchFamily="34" charset="-120"/>
               </a:rPr>
               <a:t>Test  |  Deploy  |  Observe</a:t>
             </a:r>
@@ -20428,9 +20428,9 @@
                 <a:solidFill>
                   <a:srgbClr val="4F4FF5"/>
                 </a:solidFill>
-                <a:latin typeface="Calibri" pitchFamily="34" charset="0"/>
-                <a:ea typeface="Calibri" pitchFamily="34" charset="-122"/>
-                <a:cs typeface="Calibri" pitchFamily="34" charset="-120"/>
+                <a:latin typeface="Plus Jakarta Sans" pitchFamily="34" charset="0"/>
+                <a:ea typeface="Plus Jakarta Sans" pitchFamily="34" charset="-122"/>
+                <a:cs typeface="Plus Jakarta Sans" pitchFamily="34" charset="-120"/>
               </a:rPr>
               <a:t>Private Cloud GA (PVC 1.5.5-SP3)</a:t>
             </a:r>
@@ -20489,9 +20489,9 @@
                 <a:solidFill>
                   <a:srgbClr val="EE5A29"/>
                 </a:solidFill>
-                <a:latin typeface="Calibri" pitchFamily="34" charset="0"/>
-                <a:ea typeface="Calibri" pitchFamily="34" charset="-122"/>
-                <a:cs typeface="Calibri" pitchFamily="34" charset="-120"/>
+                <a:latin typeface="Plus Jakarta Sans" pitchFamily="34" charset="0"/>
+                <a:ea typeface="Plus Jakarta Sans" pitchFamily="34" charset="-122"/>
+                <a:cs typeface="Plus Jakarta Sans" pitchFamily="34" charset="-120"/>
               </a:rPr>
               <a:t>Public Cloud (AWS, Azure — TP)</a:t>
             </a:r>
@@ -20528,9 +20528,9 @@
                 <a:solidFill>
                   <a:srgbClr val="9A9AB4"/>
                 </a:solidFill>
-                <a:latin typeface="Calibri" pitchFamily="34" charset="0"/>
-                <a:ea typeface="Calibri" pitchFamily="34" charset="-122"/>
-                <a:cs typeface="Calibri" pitchFamily="34" charset="-120"/>
+                <a:latin typeface="Plus Jakarta Sans" pitchFamily="34" charset="0"/>
+                <a:ea typeface="Plus Jakarta Sans" pitchFamily="34" charset="-122"/>
+                <a:cs typeface="Plus Jakarta Sans" pitchFamily="34" charset="-120"/>
               </a:rPr>
               <a:t>©2026 Cloudera, Inc. All Rights Reserved. · Agent Studio v3.0.0-b28 (PVC) / v2.3.0-b40 (Public Cloud).</a:t>
             </a:r>
@@ -20567,9 +20567,9 @@
                 <a:solidFill>
                   <a:srgbClr val="9A9AB4"/>
                 </a:solidFill>
-                <a:latin typeface="Calibri" pitchFamily="34" charset="0"/>
-                <a:ea typeface="Calibri" pitchFamily="34" charset="-122"/>
-                <a:cs typeface="Calibri" pitchFamily="34" charset="-120"/>
+                <a:latin typeface="Plus Jakarta Sans" pitchFamily="34" charset="0"/>
+                <a:ea typeface="Plus Jakarta Sans" pitchFamily="34" charset="-122"/>
+                <a:cs typeface="Plus Jakarta Sans" pitchFamily="34" charset="-120"/>
               </a:rPr>
               <a:t>21 / 22</a:t>
             </a:r>
@@ -20638,9 +20638,9 @@
                 <a:solidFill>
                   <a:srgbClr val="EE5A29"/>
                 </a:solidFill>
-                <a:latin typeface="Arial" pitchFamily="34" charset="0"/>
-                <a:ea typeface="Arial" pitchFamily="34" charset="-122"/>
-                <a:cs typeface="Arial" pitchFamily="34" charset="-120"/>
+                <a:latin typeface="Plus Jakarta Sans" pitchFamily="34" charset="0"/>
+                <a:ea typeface="Plus Jakarta Sans" pitchFamily="34" charset="-122"/>
+                <a:cs typeface="Plus Jakarta Sans" pitchFamily="34" charset="-120"/>
               </a:rPr>
               <a:t>CLOUD</a:t>
             </a:r>
@@ -20652,9 +20652,9 @@
                 <a:solidFill>
                   <a:srgbClr val="EE5A29"/>
                 </a:solidFill>
-                <a:latin typeface="Arial" pitchFamily="34" charset="0"/>
-                <a:ea typeface="Arial" pitchFamily="34" charset="-122"/>
-                <a:cs typeface="Arial" pitchFamily="34" charset="-120"/>
+                <a:latin typeface="Plus Jakarta Sans" pitchFamily="34" charset="0"/>
+                <a:ea typeface="Plus Jakarta Sans" pitchFamily="34" charset="-122"/>
+                <a:cs typeface="Plus Jakarta Sans" pitchFamily="34" charset="-120"/>
               </a:rPr>
               <a:t>E</a:t>
             </a:r>
@@ -20666,9 +20666,9 @@
                 <a:solidFill>
                   <a:srgbClr val="EE5A29"/>
                 </a:solidFill>
-                <a:latin typeface="Arial" pitchFamily="34" charset="0"/>
-                <a:ea typeface="Arial" pitchFamily="34" charset="-122"/>
-                <a:cs typeface="Arial" pitchFamily="34" charset="-120"/>
+                <a:latin typeface="Plus Jakarta Sans" pitchFamily="34" charset="0"/>
+                <a:ea typeface="Plus Jakarta Sans" pitchFamily="34" charset="-122"/>
+                <a:cs typeface="Plus Jakarta Sans" pitchFamily="34" charset="-120"/>
               </a:rPr>
               <a:t>RA</a:t>
             </a:r>
@@ -20725,9 +20725,9 @@
                 <a:solidFill>
                   <a:srgbClr val="EE5A29"/>
                 </a:solidFill>
-                <a:latin typeface="Calibri" pitchFamily="34" charset="0"/>
-                <a:ea typeface="Calibri" pitchFamily="34" charset="-122"/>
-                <a:cs typeface="Calibri" pitchFamily="34" charset="-120"/>
+                <a:latin typeface="Plus Jakarta Sans" pitchFamily="34" charset="0"/>
+                <a:ea typeface="Plus Jakarta Sans" pitchFamily="34" charset="-122"/>
+                <a:cs typeface="Plus Jakarta Sans" pitchFamily="34" charset="-120"/>
               </a:rPr>
               <a:t>FROM THEORY TO PRODUCT</a:t>
             </a:r>
@@ -20764,9 +20764,9 @@
                 <a:solidFill>
                   <a:srgbClr val="15154A"/>
                 </a:solidFill>
-                <a:latin typeface="Arial" pitchFamily="34" charset="0"/>
-                <a:ea typeface="Arial" pitchFamily="34" charset="-122"/>
-                <a:cs typeface="Arial" pitchFamily="34" charset="-120"/>
+                <a:latin typeface="Plus Jakarta Sans" pitchFamily="34" charset="0"/>
+                <a:ea typeface="Plus Jakarta Sans" pitchFamily="34" charset="-122"/>
+                <a:cs typeface="Plus Jakarta Sans" pitchFamily="34" charset="-120"/>
               </a:rPr>
               <a:t>Agent Studio — The Harness Pillars in Practice</a:t>
             </a:r>
@@ -20815,16 +20815,16 @@
                           <a:solidFill>
                             <a:srgbClr val="FFFFFF"/>
                           </a:solidFill>
-                          <a:latin typeface="Arial" pitchFamily="34" charset="0"/>
-                          <a:ea typeface="Arial" pitchFamily="34" charset="-122"/>
-                          <a:cs typeface="Arial" pitchFamily="34" charset="-120"/>
+                          <a:latin typeface="Plus Jakarta Sans" pitchFamily="34" charset="0"/>
+                          <a:ea typeface="Plus Jakarta Sans" pitchFamily="34" charset="-122"/>
+                          <a:cs typeface="Plus Jakarta Sans" pitchFamily="34" charset="-120"/>
                         </a:rPr>
                         <a:t>Harness Pillar</a:t>
                       </a:r>
                       <a:endParaRPr lang="en-US" sz="1000" dirty="0">
-                        <a:latin typeface="Arial" charset="0"/>
-                        <a:ea typeface="Arial" charset="0"/>
-                        <a:cs typeface="Arial" charset="0"/>
+                        <a:latin typeface="Plus Jakarta Sans" charset="0"/>
+                        <a:ea typeface="Plus Jakarta Sans" charset="0"/>
+                        <a:cs typeface="Plus Jakarta Sans" charset="0"/>
                       </a:endParaRPr>
                     </a:p>
                   </a:txBody>
@@ -20883,16 +20883,16 @@
                           <a:solidFill>
                             <a:srgbClr val="FFFFFF"/>
                           </a:solidFill>
-                          <a:latin typeface="Arial" pitchFamily="34" charset="0"/>
-                          <a:ea typeface="Arial" pitchFamily="34" charset="-122"/>
-                          <a:cs typeface="Arial" pitchFamily="34" charset="-120"/>
+                          <a:latin typeface="Plus Jakarta Sans" pitchFamily="34" charset="0"/>
+                          <a:ea typeface="Plus Jakarta Sans" pitchFamily="34" charset="-122"/>
+                          <a:cs typeface="Plus Jakarta Sans" pitchFamily="34" charset="-120"/>
                         </a:rPr>
                         <a:t>What it means</a:t>
                       </a:r>
                       <a:endParaRPr lang="en-US" sz="1000" dirty="0">
-                        <a:latin typeface="Arial" charset="0"/>
-                        <a:ea typeface="Arial" charset="0"/>
-                        <a:cs typeface="Arial" charset="0"/>
+                        <a:latin typeface="Plus Jakarta Sans" charset="0"/>
+                        <a:ea typeface="Plus Jakarta Sans" charset="0"/>
+                        <a:cs typeface="Plus Jakarta Sans" charset="0"/>
                       </a:endParaRPr>
                     </a:p>
                   </a:txBody>
@@ -20951,16 +20951,16 @@
                           <a:solidFill>
                             <a:srgbClr val="FFFFFF"/>
                           </a:solidFill>
-                          <a:latin typeface="Arial" pitchFamily="34" charset="0"/>
-                          <a:ea typeface="Arial" pitchFamily="34" charset="-122"/>
-                          <a:cs typeface="Arial" pitchFamily="34" charset="-120"/>
+                          <a:latin typeface="Plus Jakarta Sans" pitchFamily="34" charset="0"/>
+                          <a:ea typeface="Plus Jakarta Sans" pitchFamily="34" charset="-122"/>
+                          <a:cs typeface="Plus Jakarta Sans" pitchFamily="34" charset="-120"/>
                         </a:rPr>
                         <a:t>Agent Studio implementation</a:t>
                       </a:r>
                       <a:endParaRPr lang="en-US" sz="1000" dirty="0">
-                        <a:latin typeface="Arial" charset="0"/>
-                        <a:ea typeface="Arial" charset="0"/>
-                        <a:cs typeface="Arial" charset="0"/>
+                        <a:latin typeface="Plus Jakarta Sans" charset="0"/>
+                        <a:ea typeface="Plus Jakarta Sans" charset="0"/>
+                        <a:cs typeface="Plus Jakarta Sans" charset="0"/>
                       </a:endParaRPr>
                     </a:p>
                   </a:txBody>
@@ -21021,16 +21021,16 @@
                           <a:solidFill>
                             <a:srgbClr val="4F4FF5"/>
                           </a:solidFill>
-                          <a:latin typeface="Calibri" pitchFamily="34" charset="0"/>
-                          <a:ea typeface="Calibri" pitchFamily="34" charset="-122"/>
-                          <a:cs typeface="Calibri" pitchFamily="34" charset="-120"/>
+                          <a:latin typeface="Plus Jakarta Sans" pitchFamily="34" charset="0"/>
+                          <a:ea typeface="Plus Jakarta Sans" pitchFamily="34" charset="-122"/>
+                          <a:cs typeface="Plus Jakarta Sans" pitchFamily="34" charset="-120"/>
                         </a:rPr>
                         <a:t>Progressive Context Architecture</a:t>
                       </a:r>
                       <a:endParaRPr lang="en-US" sz="900" dirty="0">
-                        <a:latin typeface="Calibri" charset="0"/>
-                        <a:ea typeface="Calibri" charset="0"/>
-                        <a:cs typeface="Calibri" charset="0"/>
+                        <a:latin typeface="Plus Jakarta Sans" charset="0"/>
+                        <a:ea typeface="Plus Jakarta Sans" charset="0"/>
+                        <a:cs typeface="Plus Jakarta Sans" charset="0"/>
                       </a:endParaRPr>
                     </a:p>
                   </a:txBody>
@@ -21089,16 +21089,16 @@
                           <a:solidFill>
                             <a:srgbClr val="5A5A72"/>
                           </a:solidFill>
-                          <a:latin typeface="Calibri" pitchFamily="34" charset="0"/>
-                          <a:ea typeface="Calibri" pitchFamily="34" charset="-122"/>
-                          <a:cs typeface="Calibri" pitchFamily="34" charset="-120"/>
+                          <a:latin typeface="Plus Jakarta Sans" pitchFamily="34" charset="0"/>
+                          <a:ea typeface="Plus Jakarta Sans" pitchFamily="34" charset="-122"/>
+                          <a:cs typeface="Plus Jakarta Sans" pitchFamily="34" charset="-120"/>
                         </a:rPr>
                         <a:t>Agent only sees the context for its immediate task</a:t>
                       </a:r>
                       <a:endParaRPr lang="en-US" sz="900" dirty="0">
-                        <a:latin typeface="Calibri" charset="0"/>
-                        <a:ea typeface="Calibri" charset="0"/>
-                        <a:cs typeface="Calibri" charset="0"/>
+                        <a:latin typeface="Plus Jakarta Sans" charset="0"/>
+                        <a:ea typeface="Plus Jakarta Sans" charset="0"/>
+                        <a:cs typeface="Plus Jakarta Sans" charset="0"/>
                       </a:endParaRPr>
                     </a:p>
                   </a:txBody>
@@ -21157,16 +21157,16 @@
                           <a:solidFill>
                             <a:srgbClr val="5A5A72"/>
                           </a:solidFill>
-                          <a:latin typeface="Calibri" pitchFamily="34" charset="0"/>
-                          <a:ea typeface="Calibri" pitchFamily="34" charset="-122"/>
-                          <a:cs typeface="Calibri" pitchFamily="34" charset="-120"/>
+                          <a:latin typeface="Plus Jakarta Sans" pitchFamily="34" charset="0"/>
+                          <a:ea typeface="Plus Jakarta Sans" pitchFamily="34" charset="-122"/>
+                          <a:cs typeface="Plus Jakarta Sans" pitchFamily="34" charset="-120"/>
                         </a:rPr>
                         <a:t>Sequential workflow routing — each task receives only its declared prior-task context; input variables injected at run time</a:t>
                       </a:r>
                       <a:endParaRPr lang="en-US" sz="900" dirty="0">
-                        <a:latin typeface="Calibri" charset="0"/>
-                        <a:ea typeface="Calibri" charset="0"/>
-                        <a:cs typeface="Calibri" charset="0"/>
+                        <a:latin typeface="Plus Jakarta Sans" charset="0"/>
+                        <a:ea typeface="Plus Jakarta Sans" charset="0"/>
+                        <a:cs typeface="Plus Jakarta Sans" charset="0"/>
                       </a:endParaRPr>
                     </a:p>
                   </a:txBody>
@@ -21227,16 +21227,16 @@
                           <a:solidFill>
                             <a:srgbClr val="4F4FF5"/>
                           </a:solidFill>
-                          <a:latin typeface="Calibri" pitchFamily="34" charset="0"/>
-                          <a:ea typeface="Calibri" pitchFamily="34" charset="-122"/>
-                          <a:cs typeface="Calibri" pitchFamily="34" charset="-120"/>
+                          <a:latin typeface="Plus Jakarta Sans" pitchFamily="34" charset="0"/>
+                          <a:ea typeface="Plus Jakarta Sans" pitchFamily="34" charset="-122"/>
+                          <a:cs typeface="Plus Jakarta Sans" pitchFamily="34" charset="-120"/>
                         </a:rPr>
                         <a:t>Agent Specialization &amp; Parallelism</a:t>
                       </a:r>
                       <a:endParaRPr lang="en-US" sz="900" dirty="0">
-                        <a:latin typeface="Calibri" charset="0"/>
-                        <a:ea typeface="Calibri" charset="0"/>
-                        <a:cs typeface="Calibri" charset="0"/>
+                        <a:latin typeface="Plus Jakarta Sans" charset="0"/>
+                        <a:ea typeface="Plus Jakarta Sans" charset="0"/>
+                        <a:cs typeface="Plus Jakarta Sans" charset="0"/>
                       </a:endParaRPr>
                     </a:p>
                   </a:txBody>
@@ -21295,16 +21295,16 @@
                           <a:solidFill>
                             <a:srgbClr val="5A5A72"/>
                           </a:solidFill>
-                          <a:latin typeface="Calibri" pitchFamily="34" charset="0"/>
-                          <a:ea typeface="Calibri" pitchFamily="34" charset="-122"/>
-                          <a:cs typeface="Calibri" pitchFamily="34" charset="-120"/>
+                          <a:latin typeface="Plus Jakarta Sans" pitchFamily="34" charset="0"/>
+                          <a:ea typeface="Plus Jakarta Sans" pitchFamily="34" charset="-122"/>
+                          <a:cs typeface="Plus Jakarta Sans" pitchFamily="34" charset="-120"/>
                         </a:rPr>
                         <a:t>Focused agents with restricted toolsets outperform generalists</a:t>
                       </a:r>
                       <a:endParaRPr lang="en-US" sz="900" dirty="0">
-                        <a:latin typeface="Calibri" charset="0"/>
-                        <a:ea typeface="Calibri" charset="0"/>
-                        <a:cs typeface="Calibri" charset="0"/>
+                        <a:latin typeface="Plus Jakarta Sans" charset="0"/>
+                        <a:ea typeface="Plus Jakarta Sans" charset="0"/>
+                        <a:cs typeface="Plus Jakarta Sans" charset="0"/>
                       </a:endParaRPr>
                     </a:p>
                   </a:txBody>
@@ -21363,16 +21363,16 @@
                           <a:solidFill>
                             <a:srgbClr val="5A5A72"/>
                           </a:solidFill>
-                          <a:latin typeface="Calibri" pitchFamily="34" charset="0"/>
-                          <a:ea typeface="Calibri" pitchFamily="34" charset="-122"/>
-                          <a:cs typeface="Calibri" pitchFamily="34" charset="-120"/>
+                          <a:latin typeface="Plus Jakarta Sans" pitchFamily="34" charset="0"/>
+                          <a:ea typeface="Plus Jakarta Sans" pitchFamily="34" charset="-122"/>
+                          <a:cs typeface="Plus Jakarta Sans" pitchFamily="34" charset="-120"/>
                         </a:rPr>
                         <a:t>Each agent gets its own Role, Goal, Backstory and an explicit scoped tool list — no god-mode access; Manager Agent pattern for hierarchical coordination</a:t>
                       </a:r>
                       <a:endParaRPr lang="en-US" sz="900" dirty="0">
-                        <a:latin typeface="Calibri" charset="0"/>
-                        <a:ea typeface="Calibri" charset="0"/>
-                        <a:cs typeface="Calibri" charset="0"/>
+                        <a:latin typeface="Plus Jakarta Sans" charset="0"/>
+                        <a:ea typeface="Plus Jakarta Sans" charset="0"/>
+                        <a:cs typeface="Plus Jakarta Sans" charset="0"/>
                       </a:endParaRPr>
                     </a:p>
                   </a:txBody>
@@ -21433,16 +21433,16 @@
                           <a:solidFill>
                             <a:srgbClr val="4F4FF5"/>
                           </a:solidFill>
-                          <a:latin typeface="Calibri" pitchFamily="34" charset="0"/>
-                          <a:ea typeface="Calibri" pitchFamily="34" charset="-122"/>
-                          <a:cs typeface="Calibri" pitchFamily="34" charset="-120"/>
+                          <a:latin typeface="Plus Jakarta Sans" pitchFamily="34" charset="0"/>
+                          <a:ea typeface="Plus Jakarta Sans" pitchFamily="34" charset="-122"/>
+                          <a:cs typeface="Plus Jakarta Sans" pitchFamily="34" charset="-120"/>
                         </a:rPr>
                         <a:t>Persistent Memory &amp; State</a:t>
                       </a:r>
                       <a:endParaRPr lang="en-US" sz="900" dirty="0">
-                        <a:latin typeface="Calibri" charset="0"/>
-                        <a:ea typeface="Calibri" charset="0"/>
-                        <a:cs typeface="Calibri" charset="0"/>
+                        <a:latin typeface="Plus Jakarta Sans" charset="0"/>
+                        <a:ea typeface="Plus Jakarta Sans" charset="0"/>
+                        <a:cs typeface="Plus Jakarta Sans" charset="0"/>
                       </a:endParaRPr>
                     </a:p>
                   </a:txBody>
@@ -21501,16 +21501,16 @@
                           <a:solidFill>
                             <a:srgbClr val="5A5A72"/>
                           </a:solidFill>
-                          <a:latin typeface="Calibri" pitchFamily="34" charset="0"/>
-                          <a:ea typeface="Calibri" pitchFamily="34" charset="-122"/>
-                          <a:cs typeface="Calibri" pitchFamily="34" charset="-120"/>
+                          <a:latin typeface="Plus Jakarta Sans" pitchFamily="34" charset="0"/>
+                          <a:ea typeface="Plus Jakarta Sans" pitchFamily="34" charset="-122"/>
+                          <a:cs typeface="Plus Jakarta Sans" pitchFamily="34" charset="-120"/>
                         </a:rPr>
                         <a:t>Memory lives outside the prompt window</a:t>
                       </a:r>
                       <a:endParaRPr lang="en-US" sz="900" dirty="0">
-                        <a:latin typeface="Calibri" charset="0"/>
-                        <a:ea typeface="Calibri" charset="0"/>
-                        <a:cs typeface="Calibri" charset="0"/>
+                        <a:latin typeface="Plus Jakarta Sans" charset="0"/>
+                        <a:ea typeface="Plus Jakarta Sans" charset="0"/>
+                        <a:cs typeface="Plus Jakarta Sans" charset="0"/>
                       </a:endParaRPr>
                     </a:p>
                   </a:txBody>
@@ -21569,16 +21569,16 @@
                           <a:solidFill>
                             <a:srgbClr val="5A5A72"/>
                           </a:solidFill>
-                          <a:latin typeface="Calibri" pitchFamily="34" charset="0"/>
-                          <a:ea typeface="Calibri" pitchFamily="34" charset="-122"/>
-                          <a:cs typeface="Calibri" pitchFamily="34" charset="-120"/>
+                          <a:latin typeface="Plus Jakarta Sans" pitchFamily="34" charset="0"/>
+                          <a:ea typeface="Plus Jakarta Sans" pitchFamily="34" charset="-122"/>
+                          <a:cs typeface="Plus Jakarta Sans" pitchFamily="34" charset="-120"/>
                         </a:rPr>
                         <a:t>Artifact Files (shared virtual filesystem), workflow input variables, and progress.json-style state persist across tasks and sessions</a:t>
                       </a:r>
                       <a:endParaRPr lang="en-US" sz="900" dirty="0">
-                        <a:latin typeface="Calibri" charset="0"/>
-                        <a:ea typeface="Calibri" charset="0"/>
-                        <a:cs typeface="Calibri" charset="0"/>
+                        <a:latin typeface="Plus Jakarta Sans" charset="0"/>
+                        <a:ea typeface="Plus Jakarta Sans" charset="0"/>
+                        <a:cs typeface="Plus Jakarta Sans" charset="0"/>
                       </a:endParaRPr>
                     </a:p>
                   </a:txBody>
@@ -21639,16 +21639,16 @@
                           <a:solidFill>
                             <a:srgbClr val="4F4FF5"/>
                           </a:solidFill>
-                          <a:latin typeface="Calibri" pitchFamily="34" charset="0"/>
-                          <a:ea typeface="Calibri" pitchFamily="34" charset="-122"/>
-                          <a:cs typeface="Calibri" pitchFamily="34" charset="-120"/>
+                          <a:latin typeface="Plus Jakarta Sans" pitchFamily="34" charset="0"/>
+                          <a:ea typeface="Plus Jakarta Sans" pitchFamily="34" charset="-122"/>
+                          <a:cs typeface="Plus Jakarta Sans" pitchFamily="34" charset="-120"/>
                         </a:rPr>
                         <a:t>Structured Execution &amp; Backpressure</a:t>
                       </a:r>
                       <a:endParaRPr lang="en-US" sz="900" dirty="0">
-                        <a:latin typeface="Calibri" charset="0"/>
-                        <a:ea typeface="Calibri" charset="0"/>
-                        <a:cs typeface="Calibri" charset="0"/>
+                        <a:latin typeface="Plus Jakarta Sans" charset="0"/>
+                        <a:ea typeface="Plus Jakarta Sans" charset="0"/>
+                        <a:cs typeface="Plus Jakarta Sans" charset="0"/>
                       </a:endParaRPr>
                     </a:p>
                   </a:txBody>
@@ -21707,16 +21707,16 @@
                           <a:solidFill>
                             <a:srgbClr val="5A5A72"/>
                           </a:solidFill>
-                          <a:latin typeface="Calibri" pitchFamily="34" charset="0"/>
-                          <a:ea typeface="Calibri" pitchFamily="34" charset="-122"/>
-                          <a:cs typeface="Calibri" pitchFamily="34" charset="-120"/>
+                          <a:latin typeface="Plus Jakarta Sans" pitchFamily="34" charset="0"/>
+                          <a:ea typeface="Plus Jakarta Sans" pitchFamily="34" charset="-122"/>
+                          <a:cs typeface="Plus Jakarta Sans" pitchFamily="34" charset="-120"/>
                         </a:rPr>
                         <a:t>Mechanical constraints force correct behavior</a:t>
                       </a:r>
                       <a:endParaRPr lang="en-US" sz="900" dirty="0">
-                        <a:latin typeface="Calibri" charset="0"/>
-                        <a:ea typeface="Calibri" charset="0"/>
-                        <a:cs typeface="Calibri" charset="0"/>
+                        <a:latin typeface="Plus Jakarta Sans" charset="0"/>
+                        <a:ea typeface="Plus Jakarta Sans" charset="0"/>
+                        <a:cs typeface="Plus Jakarta Sans" charset="0"/>
                       </a:endParaRPr>
                     </a:p>
                   </a:txBody>
@@ -21775,16 +21775,16 @@
                           <a:solidFill>
                             <a:srgbClr val="5A5A72"/>
                           </a:solidFill>
-                          <a:latin typeface="Calibri" pitchFamily="34" charset="0"/>
-                          <a:ea typeface="Calibri" pitchFamily="34" charset="-122"/>
-                          <a:cs typeface="Calibri" pitchFamily="34" charset="-120"/>
+                          <a:latin typeface="Plus Jakarta Sans" pitchFamily="34" charset="0"/>
+                          <a:ea typeface="Plus Jakarta Sans" pitchFamily="34" charset="-122"/>
+                          <a:cs typeface="Plus Jakarta Sans" pitchFamily="34" charset="-120"/>
                         </a:rPr>
                         <a:t>MCP guardrails, jailbreak tool, custom Python tools with typed parameters, CI/CD-ready deployment endpoints, and Phoenix observability for every run</a:t>
                       </a:r>
                       <a:endParaRPr lang="en-US" sz="900" dirty="0">
-                        <a:latin typeface="Calibri" charset="0"/>
-                        <a:ea typeface="Calibri" charset="0"/>
-                        <a:cs typeface="Calibri" charset="0"/>
+                        <a:latin typeface="Plus Jakarta Sans" charset="0"/>
+                        <a:ea typeface="Plus Jakarta Sans" charset="0"/>
+                        <a:cs typeface="Plus Jakarta Sans" charset="0"/>
                       </a:endParaRPr>
                     </a:p>
                   </a:txBody>
@@ -21886,9 +21886,9 @@
                 <a:solidFill>
                   <a:srgbClr val="FFFFFF"/>
                 </a:solidFill>
-                <a:latin typeface="Calibri" pitchFamily="34" charset="0"/>
-                <a:ea typeface="Calibri" pitchFamily="34" charset="-122"/>
-                <a:cs typeface="Calibri" pitchFamily="34" charset="-120"/>
+                <a:latin typeface="Plus Jakarta Sans" pitchFamily="34" charset="0"/>
+                <a:ea typeface="Plus Jakarta Sans" pitchFamily="34" charset="-122"/>
+                <a:cs typeface="Plus Jakarta Sans" pitchFamily="34" charset="-120"/>
               </a:rPr>
               <a:t>Agent Studio is Cloudera's production harness for AI agents</a:t>
             </a:r>
@@ -21900,9 +21900,9 @@
                 <a:solidFill>
                   <a:srgbClr val="C9C9E6"/>
                 </a:solidFill>
-                <a:latin typeface="Calibri" pitchFamily="34" charset="0"/>
-                <a:ea typeface="Calibri" pitchFamily="34" charset="-122"/>
-                <a:cs typeface="Calibri" pitchFamily="34" charset="-120"/>
+                <a:latin typeface="Plus Jakarta Sans" pitchFamily="34" charset="0"/>
+                <a:ea typeface="Plus Jakarta Sans" pitchFamily="34" charset="-122"/>
+                <a:cs typeface="Plus Jakarta Sans" pitchFamily="34" charset="-120"/>
               </a:rPr>
               <a:t> — purpose-built to close the gap between the 2% deploying at scale and everyone else.</a:t>
             </a:r>
@@ -21939,9 +21939,9 @@
                 <a:solidFill>
                   <a:srgbClr val="9A9AB4"/>
                 </a:solidFill>
-                <a:latin typeface="Calibri" pitchFamily="34" charset="0"/>
-                <a:ea typeface="Calibri" pitchFamily="34" charset="-122"/>
-                <a:cs typeface="Calibri" pitchFamily="34" charset="-120"/>
+                <a:latin typeface="Plus Jakarta Sans" pitchFamily="34" charset="0"/>
+                <a:ea typeface="Plus Jakarta Sans" pitchFamily="34" charset="-122"/>
+                <a:cs typeface="Plus Jakarta Sans" pitchFamily="34" charset="-120"/>
               </a:rPr>
               <a:t>©2026 Cloudera, Inc. All Rights Reserved.</a:t>
             </a:r>
@@ -21978,9 +21978,9 @@
                 <a:solidFill>
                   <a:srgbClr val="9A9AB4"/>
                 </a:solidFill>
-                <a:latin typeface="Calibri" pitchFamily="34" charset="0"/>
-                <a:ea typeface="Calibri" pitchFamily="34" charset="-122"/>
-                <a:cs typeface="Calibri" pitchFamily="34" charset="-120"/>
+                <a:latin typeface="Plus Jakarta Sans" pitchFamily="34" charset="0"/>
+                <a:ea typeface="Plus Jakarta Sans" pitchFamily="34" charset="-122"/>
+                <a:cs typeface="Plus Jakarta Sans" pitchFamily="34" charset="-120"/>
               </a:rPr>
               <a:t>22 / 22</a:t>
             </a:r>
@@ -22592,9 +22592,9 @@
                 <a:solidFill>
                   <a:srgbClr val="FFFFFF"/>
                 </a:solidFill>
-                <a:latin typeface="Arial" pitchFamily="34" charset="0"/>
-                <a:ea typeface="Arial" pitchFamily="34" charset="-122"/>
-                <a:cs typeface="Arial" pitchFamily="34" charset="-120"/>
+                <a:latin typeface="Plus Jakarta Sans" pitchFamily="34" charset="0"/>
+                <a:ea typeface="Plus Jakarta Sans" pitchFamily="34" charset="-122"/>
+                <a:cs typeface="Plus Jakarta Sans" pitchFamily="34" charset="-120"/>
               </a:rPr>
               <a:t>The Latest in the AI Landscape</a:t>
             </a:r>
@@ -22651,9 +22651,9 @@
                 <a:solidFill>
                   <a:srgbClr val="C9C9E6"/>
                 </a:solidFill>
-                <a:latin typeface="Calibri" pitchFamily="34" charset="0"/>
-                <a:ea typeface="Calibri" pitchFamily="34" charset="-122"/>
-                <a:cs typeface="Calibri" pitchFamily="34" charset="-120"/>
+                <a:latin typeface="Plus Jakarta Sans" pitchFamily="34" charset="0"/>
+                <a:ea typeface="Plus Jakarta Sans" pitchFamily="34" charset="-122"/>
+                <a:cs typeface="Plus Jakarta Sans" pitchFamily="34" charset="-120"/>
               </a:rPr>
               <a:t>From foundation models to autonomous agents — what changed, why it matters, and how to build for production.</a:t>
             </a:r>
@@ -22690,9 +22690,9 @@
                 <a:solidFill>
                   <a:srgbClr val="9A9AC4"/>
                 </a:solidFill>
-                <a:latin typeface="Calibri" pitchFamily="34" charset="0"/>
-                <a:ea typeface="Calibri" pitchFamily="34" charset="-122"/>
-                <a:cs typeface="Calibri" pitchFamily="34" charset="-120"/>
+                <a:latin typeface="Plus Jakarta Sans" pitchFamily="34" charset="0"/>
+                <a:ea typeface="Plus Jakarta Sans" pitchFamily="34" charset="-122"/>
+                <a:cs typeface="Plus Jakarta Sans" pitchFamily="34" charset="-120"/>
               </a:rPr>
               <a:t>©2026 Cloudera, Inc. All Rights Reserved.</a:t>
             </a:r>
@@ -22729,9 +22729,9 @@
                 <a:solidFill>
                   <a:srgbClr val="9A9AC4"/>
                 </a:solidFill>
-                <a:latin typeface="Calibri" pitchFamily="34" charset="0"/>
-                <a:ea typeface="Calibri" pitchFamily="34" charset="-122"/>
-                <a:cs typeface="Calibri" pitchFamily="34" charset="-120"/>
+                <a:latin typeface="Plus Jakarta Sans" pitchFamily="34" charset="0"/>
+                <a:ea typeface="Plus Jakarta Sans" pitchFamily="34" charset="-122"/>
+                <a:cs typeface="Plus Jakarta Sans" pitchFamily="34" charset="-120"/>
               </a:rPr>
               <a:t>3 / 22</a:t>
             </a:r>
@@ -22800,9 +22800,9 @@
                 <a:solidFill>
                   <a:srgbClr val="EE5A29"/>
                 </a:solidFill>
-                <a:latin typeface="Arial" pitchFamily="34" charset="0"/>
-                <a:ea typeface="Arial" pitchFamily="34" charset="-122"/>
-                <a:cs typeface="Arial" pitchFamily="34" charset="-120"/>
+                <a:latin typeface="Plus Jakarta Sans" pitchFamily="34" charset="0"/>
+                <a:ea typeface="Plus Jakarta Sans" pitchFamily="34" charset="-122"/>
+                <a:cs typeface="Plus Jakarta Sans" pitchFamily="34" charset="-120"/>
               </a:rPr>
               <a:t>CLOUD</a:t>
             </a:r>
@@ -22814,9 +22814,9 @@
                 <a:solidFill>
                   <a:srgbClr val="EE5A29"/>
                 </a:solidFill>
-                <a:latin typeface="Arial" pitchFamily="34" charset="0"/>
-                <a:ea typeface="Arial" pitchFamily="34" charset="-122"/>
-                <a:cs typeface="Arial" pitchFamily="34" charset="-120"/>
+                <a:latin typeface="Plus Jakarta Sans" pitchFamily="34" charset="0"/>
+                <a:ea typeface="Plus Jakarta Sans" pitchFamily="34" charset="-122"/>
+                <a:cs typeface="Plus Jakarta Sans" pitchFamily="34" charset="-120"/>
               </a:rPr>
               <a:t>E</a:t>
             </a:r>
@@ -22828,9 +22828,9 @@
                 <a:solidFill>
                   <a:srgbClr val="EE5A29"/>
                 </a:solidFill>
-                <a:latin typeface="Arial" pitchFamily="34" charset="0"/>
-                <a:ea typeface="Arial" pitchFamily="34" charset="-122"/>
-                <a:cs typeface="Arial" pitchFamily="34" charset="-120"/>
+                <a:latin typeface="Plus Jakarta Sans" pitchFamily="34" charset="0"/>
+                <a:ea typeface="Plus Jakarta Sans" pitchFamily="34" charset="-122"/>
+                <a:cs typeface="Plus Jakarta Sans" pitchFamily="34" charset="-120"/>
               </a:rPr>
               <a:t>RA</a:t>
             </a:r>
@@ -22887,9 +22887,9 @@
                 <a:solidFill>
                   <a:srgbClr val="EE5A29"/>
                 </a:solidFill>
-                <a:latin typeface="Calibri" pitchFamily="34" charset="0"/>
-                <a:ea typeface="Calibri" pitchFamily="34" charset="-122"/>
-                <a:cs typeface="Calibri" pitchFamily="34" charset="-120"/>
+                <a:latin typeface="Plus Jakarta Sans" pitchFamily="34" charset="0"/>
+                <a:ea typeface="Plus Jakarta Sans" pitchFamily="34" charset="-122"/>
+                <a:cs typeface="Plus Jakarta Sans" pitchFamily="34" charset="-120"/>
               </a:rPr>
               <a:t>GENAI &amp; AGENT DEVELOPMENT</a:t>
             </a:r>
@@ -22926,9 +22926,9 @@
                 <a:solidFill>
                   <a:srgbClr val="15154A"/>
                 </a:solidFill>
-                <a:latin typeface="Arial" pitchFamily="34" charset="0"/>
-                <a:ea typeface="Arial" pitchFamily="34" charset="-122"/>
-                <a:cs typeface="Arial" pitchFamily="34" charset="-120"/>
+                <a:latin typeface="Plus Jakarta Sans" pitchFamily="34" charset="0"/>
+                <a:ea typeface="Plus Jakarta Sans" pitchFamily="34" charset="-122"/>
+                <a:cs typeface="Plus Jakarta Sans" pitchFamily="34" charset="-120"/>
               </a:rPr>
               <a:t>Four Years of Increasing Autonomy</a:t>
             </a:r>
@@ -23014,9 +23014,9 @@
                 <a:solidFill>
                   <a:srgbClr val="15154A"/>
                 </a:solidFill>
-                <a:latin typeface="Arial" pitchFamily="34" charset="0"/>
-                <a:ea typeface="Arial" pitchFamily="34" charset="-122"/>
-                <a:cs typeface="Arial" pitchFamily="34" charset="-120"/>
+                <a:latin typeface="Plus Jakarta Sans" pitchFamily="34" charset="0"/>
+                <a:ea typeface="Plus Jakarta Sans" pitchFamily="34" charset="-122"/>
+                <a:cs typeface="Plus Jakarta Sans" pitchFamily="34" charset="-120"/>
               </a:rPr>
               <a:t>2023</a:t>
             </a:r>
@@ -23053,9 +23053,9 @@
                 <a:solidFill>
                   <a:srgbClr val="5A5A72"/>
                 </a:solidFill>
-                <a:latin typeface="Calibri" pitchFamily="34" charset="0"/>
-                <a:ea typeface="Calibri" pitchFamily="34" charset="-122"/>
-                <a:cs typeface="Calibri" pitchFamily="34" charset="-120"/>
+                <a:latin typeface="Plus Jakarta Sans" pitchFamily="34" charset="0"/>
+                <a:ea typeface="Plus Jakarta Sans" pitchFamily="34" charset="-122"/>
+                <a:cs typeface="Plus Jakarta Sans" pitchFamily="34" charset="-120"/>
               </a:rPr>
               <a:t>FOUNDATION</a:t>
             </a:r>
@@ -23099,9 +23099,9 @@
                 <a:solidFill>
                   <a:srgbClr val="15154A"/>
                 </a:solidFill>
-                <a:latin typeface="Calibri" pitchFamily="34" charset="0"/>
-                <a:ea typeface="Calibri" pitchFamily="34" charset="-122"/>
-                <a:cs typeface="Calibri" pitchFamily="34" charset="-120"/>
+                <a:latin typeface="Plus Jakarta Sans" pitchFamily="34" charset="0"/>
+                <a:ea typeface="Plus Jakarta Sans" pitchFamily="34" charset="-122"/>
+                <a:cs typeface="Plus Jakarta Sans" pitchFamily="34" charset="-120"/>
               </a:rPr>
               <a:t>First LLM deployments</a:t>
             </a:r>
@@ -23123,9 +23123,9 @@
                 <a:solidFill>
                   <a:srgbClr val="15154A"/>
                 </a:solidFill>
-                <a:latin typeface="Calibri" pitchFamily="34" charset="0"/>
-                <a:ea typeface="Calibri" pitchFamily="34" charset="-122"/>
-                <a:cs typeface="Calibri" pitchFamily="34" charset="-120"/>
+                <a:latin typeface="Plus Jakarta Sans" pitchFamily="34" charset="0"/>
+                <a:ea typeface="Plus Jakarta Sans" pitchFamily="34" charset="-122"/>
+                <a:cs typeface="Plus Jakarta Sans" pitchFamily="34" charset="-120"/>
               </a:rPr>
               <a:t>Basic cluster setup</a:t>
             </a:r>
@@ -23147,9 +23147,9 @@
                 <a:solidFill>
                   <a:srgbClr val="15154A"/>
                 </a:solidFill>
-                <a:latin typeface="Calibri" pitchFamily="34" charset="0"/>
-                <a:ea typeface="Calibri" pitchFamily="34" charset="-122"/>
-                <a:cs typeface="Calibri" pitchFamily="34" charset="-120"/>
+                <a:latin typeface="Plus Jakarta Sans" pitchFamily="34" charset="0"/>
+                <a:ea typeface="Plus Jakarta Sans" pitchFamily="34" charset="-122"/>
+                <a:cs typeface="Plus Jakarta Sans" pitchFamily="34" charset="-120"/>
               </a:rPr>
               <a:t>System integration</a:t>
             </a:r>
@@ -23235,9 +23235,9 @@
                 <a:solidFill>
                   <a:srgbClr val="15154A"/>
                 </a:solidFill>
-                <a:latin typeface="Arial" pitchFamily="34" charset="0"/>
-                <a:ea typeface="Arial" pitchFamily="34" charset="-122"/>
-                <a:cs typeface="Arial" pitchFamily="34" charset="-120"/>
+                <a:latin typeface="Plus Jakarta Sans" pitchFamily="34" charset="0"/>
+                <a:ea typeface="Plus Jakarta Sans" pitchFamily="34" charset="-122"/>
+                <a:cs typeface="Plus Jakarta Sans" pitchFamily="34" charset="-120"/>
               </a:rPr>
               <a:t>2024</a:t>
             </a:r>
@@ -23274,9 +23274,9 @@
                 <a:solidFill>
                   <a:srgbClr val="5A5A72"/>
                 </a:solidFill>
-                <a:latin typeface="Calibri" pitchFamily="34" charset="0"/>
-                <a:ea typeface="Calibri" pitchFamily="34" charset="-122"/>
-                <a:cs typeface="Calibri" pitchFamily="34" charset="-120"/>
+                <a:latin typeface="Plus Jakarta Sans" pitchFamily="34" charset="0"/>
+                <a:ea typeface="Plus Jakarta Sans" pitchFamily="34" charset="-122"/>
+                <a:cs typeface="Plus Jakarta Sans" pitchFamily="34" charset="-120"/>
               </a:rPr>
               <a:t>EXPANSION</a:t>
             </a:r>
@@ -23320,9 +23320,9 @@
                 <a:solidFill>
                   <a:srgbClr val="15154A"/>
                 </a:solidFill>
-                <a:latin typeface="Calibri" pitchFamily="34" charset="0"/>
-                <a:ea typeface="Calibri" pitchFamily="34" charset="-122"/>
-                <a:cs typeface="Calibri" pitchFamily="34" charset="-120"/>
+                <a:latin typeface="Plus Jakarta Sans" pitchFamily="34" charset="0"/>
+                <a:ea typeface="Plus Jakarta Sans" pitchFamily="34" charset="-122"/>
+                <a:cs typeface="Plus Jakarta Sans" pitchFamily="34" charset="-120"/>
               </a:rPr>
               <a:t>RAG at scale</a:t>
             </a:r>
@@ -23344,9 +23344,9 @@
                 <a:solidFill>
                   <a:srgbClr val="15154A"/>
                 </a:solidFill>
-                <a:latin typeface="Calibri" pitchFamily="34" charset="0"/>
-                <a:ea typeface="Calibri" pitchFamily="34" charset="-122"/>
-                <a:cs typeface="Calibri" pitchFamily="34" charset="-120"/>
+                <a:latin typeface="Plus Jakarta Sans" pitchFamily="34" charset="0"/>
+                <a:ea typeface="Plus Jakarta Sans" pitchFamily="34" charset="-122"/>
+                <a:cs typeface="Plus Jakarta Sans" pitchFamily="34" charset="-120"/>
               </a:rPr>
               <a:t>Multimodal (VLM)</a:t>
             </a:r>
@@ -23368,9 +23368,9 @@
                 <a:solidFill>
                   <a:srgbClr val="15154A"/>
                 </a:solidFill>
-                <a:latin typeface="Calibri" pitchFamily="34" charset="0"/>
-                <a:ea typeface="Calibri" pitchFamily="34" charset="-122"/>
-                <a:cs typeface="Calibri" pitchFamily="34" charset="-120"/>
+                <a:latin typeface="Plus Jakarta Sans" pitchFamily="34" charset="0"/>
+                <a:ea typeface="Plus Jakarta Sans" pitchFamily="34" charset="-122"/>
+                <a:cs typeface="Plus Jakarta Sans" pitchFamily="34" charset="-120"/>
               </a:rPr>
               <a:t>First agents</a:t>
             </a:r>
@@ -23456,9 +23456,9 @@
                 <a:solidFill>
                   <a:srgbClr val="15154A"/>
                 </a:solidFill>
-                <a:latin typeface="Arial" pitchFamily="34" charset="0"/>
-                <a:ea typeface="Arial" pitchFamily="34" charset="-122"/>
-                <a:cs typeface="Arial" pitchFamily="34" charset="-120"/>
+                <a:latin typeface="Plus Jakarta Sans" pitchFamily="34" charset="0"/>
+                <a:ea typeface="Plus Jakarta Sans" pitchFamily="34" charset="-122"/>
+                <a:cs typeface="Plus Jakarta Sans" pitchFamily="34" charset="-120"/>
               </a:rPr>
               <a:t>2025</a:t>
             </a:r>
@@ -23495,9 +23495,9 @@
                 <a:solidFill>
                   <a:srgbClr val="5A5A72"/>
                 </a:solidFill>
-                <a:latin typeface="Calibri" pitchFamily="34" charset="0"/>
-                <a:ea typeface="Calibri" pitchFamily="34" charset="-122"/>
-                <a:cs typeface="Calibri" pitchFamily="34" charset="-120"/>
+                <a:latin typeface="Plus Jakarta Sans" pitchFamily="34" charset="0"/>
+                <a:ea typeface="Plus Jakarta Sans" pitchFamily="34" charset="-122"/>
+                <a:cs typeface="Plus Jakarta Sans" pitchFamily="34" charset="-120"/>
               </a:rPr>
               <a:t>COMPLEXITY</a:t>
             </a:r>
@@ -23541,9 +23541,9 @@
                 <a:solidFill>
                   <a:srgbClr val="15154A"/>
                 </a:solidFill>
-                <a:latin typeface="Calibri" pitchFamily="34" charset="0"/>
-                <a:ea typeface="Calibri" pitchFamily="34" charset="-122"/>
-                <a:cs typeface="Calibri" pitchFamily="34" charset="-120"/>
+                <a:latin typeface="Plus Jakarta Sans" pitchFamily="34" charset="0"/>
+                <a:ea typeface="Plus Jakarta Sans" pitchFamily="34" charset="-122"/>
+                <a:cs typeface="Plus Jakarta Sans" pitchFamily="34" charset="-120"/>
               </a:rPr>
               <a:t>Reasoning agents</a:t>
             </a:r>
@@ -23565,9 +23565,9 @@
                 <a:solidFill>
                   <a:srgbClr val="15154A"/>
                 </a:solidFill>
-                <a:latin typeface="Calibri" pitchFamily="34" charset="0"/>
-                <a:ea typeface="Calibri" pitchFamily="34" charset="-122"/>
-                <a:cs typeface="Calibri" pitchFamily="34" charset="-120"/>
+                <a:latin typeface="Plus Jakarta Sans" pitchFamily="34" charset="0"/>
+                <a:ea typeface="Plus Jakarta Sans" pitchFamily="34" charset="-122"/>
+                <a:cs typeface="Plus Jakarta Sans" pitchFamily="34" charset="-120"/>
               </a:rPr>
               <a:t>Deep data &amp; API integration</a:t>
             </a:r>
@@ -23589,9 +23589,9 @@
                 <a:solidFill>
                   <a:srgbClr val="15154A"/>
                 </a:solidFill>
-                <a:latin typeface="Calibri" pitchFamily="34" charset="0"/>
-                <a:ea typeface="Calibri" pitchFamily="34" charset="-122"/>
-                <a:cs typeface="Calibri" pitchFamily="34" charset="-120"/>
+                <a:latin typeface="Plus Jakarta Sans" pitchFamily="34" charset="0"/>
+                <a:ea typeface="Plus Jakarta Sans" pitchFamily="34" charset="-122"/>
+                <a:cs typeface="Plus Jakarta Sans" pitchFamily="34" charset="-120"/>
               </a:rPr>
               <a:t>Fine-tuning at scale</a:t>
             </a:r>
@@ -23677,9 +23677,9 @@
                 <a:solidFill>
                   <a:srgbClr val="15154A"/>
                 </a:solidFill>
-                <a:latin typeface="Arial" pitchFamily="34" charset="0"/>
-                <a:ea typeface="Arial" pitchFamily="34" charset="-122"/>
-                <a:cs typeface="Arial" pitchFamily="34" charset="-120"/>
+                <a:latin typeface="Plus Jakarta Sans" pitchFamily="34" charset="0"/>
+                <a:ea typeface="Plus Jakarta Sans" pitchFamily="34" charset="-122"/>
+                <a:cs typeface="Plus Jakarta Sans" pitchFamily="34" charset="-120"/>
               </a:rPr>
               <a:t>2026</a:t>
             </a:r>
@@ -23716,9 +23716,9 @@
                 <a:solidFill>
                   <a:srgbClr val="5A5A72"/>
                 </a:solidFill>
-                <a:latin typeface="Calibri" pitchFamily="34" charset="0"/>
-                <a:ea typeface="Calibri" pitchFamily="34" charset="-122"/>
-                <a:cs typeface="Calibri" pitchFamily="34" charset="-120"/>
+                <a:latin typeface="Plus Jakarta Sans" pitchFamily="34" charset="0"/>
+                <a:ea typeface="Plus Jakarta Sans" pitchFamily="34" charset="-122"/>
+                <a:cs typeface="Plus Jakarta Sans" pitchFamily="34" charset="-120"/>
               </a:rPr>
               <a:t>AUTONOMY</a:t>
             </a:r>
@@ -23762,9 +23762,9 @@
                 <a:solidFill>
                   <a:srgbClr val="15154A"/>
                 </a:solidFill>
-                <a:latin typeface="Calibri" pitchFamily="34" charset="0"/>
-                <a:ea typeface="Calibri" pitchFamily="34" charset="-122"/>
-                <a:cs typeface="Calibri" pitchFamily="34" charset="-120"/>
+                <a:latin typeface="Plus Jakarta Sans" pitchFamily="34" charset="0"/>
+                <a:ea typeface="Plus Jakarta Sans" pitchFamily="34" charset="-122"/>
+                <a:cs typeface="Plus Jakarta Sans" pitchFamily="34" charset="-120"/>
               </a:rPr>
               <a:t>Self-correcting loops</a:t>
             </a:r>
@@ -23786,9 +23786,9 @@
                 <a:solidFill>
                   <a:srgbClr val="15154A"/>
                 </a:solidFill>
-                <a:latin typeface="Calibri" pitchFamily="34" charset="0"/>
-                <a:ea typeface="Calibri" pitchFamily="34" charset="-122"/>
-                <a:cs typeface="Calibri" pitchFamily="34" charset="-120"/>
+                <a:latin typeface="Plus Jakarta Sans" pitchFamily="34" charset="0"/>
+                <a:ea typeface="Plus Jakarta Sans" pitchFamily="34" charset="-122"/>
+                <a:cs typeface="Plus Jakarta Sans" pitchFamily="34" charset="-120"/>
               </a:rPr>
               <a:t>MCP &amp; “computer use”</a:t>
             </a:r>
@@ -23810,9 +23810,9 @@
                 <a:solidFill>
                   <a:srgbClr val="15154A"/>
                 </a:solidFill>
-                <a:latin typeface="Calibri" pitchFamily="34" charset="0"/>
-                <a:ea typeface="Calibri" pitchFamily="34" charset="-122"/>
-                <a:cs typeface="Calibri" pitchFamily="34" charset="-120"/>
+                <a:latin typeface="Plus Jakarta Sans" pitchFamily="34" charset="0"/>
+                <a:ea typeface="Plus Jakarta Sans" pitchFamily="34" charset="-122"/>
+                <a:cs typeface="Plus Jakarta Sans" pitchFamily="34" charset="-120"/>
               </a:rPr>
               <a:t>Context &amp; harness engineering</a:t>
             </a:r>
@@ -23849,9 +23849,9 @@
                 <a:solidFill>
                   <a:srgbClr val="EE5A29"/>
                 </a:solidFill>
-                <a:latin typeface="Calibri" pitchFamily="34" charset="0"/>
-                <a:ea typeface="Calibri" pitchFamily="34" charset="-122"/>
-                <a:cs typeface="Calibri" pitchFamily="34" charset="-120"/>
+                <a:latin typeface="Plus Jakarta Sans" pitchFamily="34" charset="0"/>
+                <a:ea typeface="Plus Jakarta Sans" pitchFamily="34" charset="-122"/>
+                <a:cs typeface="Plus Jakarta Sans" pitchFamily="34" charset="-120"/>
               </a:rPr>
               <a:t>INCREASING AUTONOMY</a:t>
             </a:r>
@@ -23928,9 +23928,9 @@
                 <a:solidFill>
                   <a:srgbClr val="EE5A29"/>
                 </a:solidFill>
-                <a:latin typeface="Arial" pitchFamily="34" charset="0"/>
-                <a:ea typeface="Arial" pitchFamily="34" charset="-122"/>
-                <a:cs typeface="Arial" pitchFamily="34" charset="-120"/>
+                <a:latin typeface="Plus Jakarta Sans" pitchFamily="34" charset="0"/>
+                <a:ea typeface="Plus Jakarta Sans" pitchFamily="34" charset="-122"/>
+                <a:cs typeface="Plus Jakarta Sans" pitchFamily="34" charset="-120"/>
               </a:rPr>
               <a:t>→</a:t>
             </a:r>
@@ -23967,9 +23967,9 @@
                 <a:solidFill>
                   <a:srgbClr val="9A9AB4"/>
                 </a:solidFill>
-                <a:latin typeface="Calibri" pitchFamily="34" charset="0"/>
-                <a:ea typeface="Calibri" pitchFamily="34" charset="-122"/>
-                <a:cs typeface="Calibri" pitchFamily="34" charset="-120"/>
+                <a:latin typeface="Plus Jakarta Sans" pitchFamily="34" charset="0"/>
+                <a:ea typeface="Plus Jakarta Sans" pitchFamily="34" charset="-122"/>
+                <a:cs typeface="Plus Jakarta Sans" pitchFamily="34" charset="-120"/>
               </a:rPr>
               <a:t>©2026 Cloudera, Inc. All Rights Reserved.</a:t>
             </a:r>
@@ -24006,9 +24006,9 @@
                 <a:solidFill>
                   <a:srgbClr val="9A9AB4"/>
                 </a:solidFill>
-                <a:latin typeface="Calibri" pitchFamily="34" charset="0"/>
-                <a:ea typeface="Calibri" pitchFamily="34" charset="-122"/>
-                <a:cs typeface="Calibri" pitchFamily="34" charset="-120"/>
+                <a:latin typeface="Plus Jakarta Sans" pitchFamily="34" charset="0"/>
+                <a:ea typeface="Plus Jakarta Sans" pitchFamily="34" charset="-122"/>
+                <a:cs typeface="Plus Jakarta Sans" pitchFamily="34" charset="-120"/>
               </a:rPr>
               <a:t>4 / 22</a:t>
             </a:r>
@@ -24077,9 +24077,9 @@
                 <a:solidFill>
                   <a:srgbClr val="EE5A29"/>
                 </a:solidFill>
-                <a:latin typeface="Arial" pitchFamily="34" charset="0"/>
-                <a:ea typeface="Arial" pitchFamily="34" charset="-122"/>
-                <a:cs typeface="Arial" pitchFamily="34" charset="-120"/>
+                <a:latin typeface="Plus Jakarta Sans" pitchFamily="34" charset="0"/>
+                <a:ea typeface="Plus Jakarta Sans" pitchFamily="34" charset="-122"/>
+                <a:cs typeface="Plus Jakarta Sans" pitchFamily="34" charset="-120"/>
               </a:rPr>
               <a:t>CLOUD</a:t>
             </a:r>
@@ -24091,9 +24091,9 @@
                 <a:solidFill>
                   <a:srgbClr val="EE5A29"/>
                 </a:solidFill>
-                <a:latin typeface="Arial" pitchFamily="34" charset="0"/>
-                <a:ea typeface="Arial" pitchFamily="34" charset="-122"/>
-                <a:cs typeface="Arial" pitchFamily="34" charset="-120"/>
+                <a:latin typeface="Plus Jakarta Sans" pitchFamily="34" charset="0"/>
+                <a:ea typeface="Plus Jakarta Sans" pitchFamily="34" charset="-122"/>
+                <a:cs typeface="Plus Jakarta Sans" pitchFamily="34" charset="-120"/>
               </a:rPr>
               <a:t>E</a:t>
             </a:r>
@@ -24105,9 +24105,9 @@
                 <a:solidFill>
                   <a:srgbClr val="EE5A29"/>
                 </a:solidFill>
-                <a:latin typeface="Arial" pitchFamily="34" charset="0"/>
-                <a:ea typeface="Arial" pitchFamily="34" charset="-122"/>
-                <a:cs typeface="Arial" pitchFamily="34" charset="-120"/>
+                <a:latin typeface="Plus Jakarta Sans" pitchFamily="34" charset="0"/>
+                <a:ea typeface="Plus Jakarta Sans" pitchFamily="34" charset="-122"/>
+                <a:cs typeface="Plus Jakarta Sans" pitchFamily="34" charset="-120"/>
               </a:rPr>
               <a:t>RA</a:t>
             </a:r>
@@ -24164,9 +24164,9 @@
                 <a:solidFill>
                   <a:srgbClr val="EE5A29"/>
                 </a:solidFill>
-                <a:latin typeface="Calibri" pitchFamily="34" charset="0"/>
-                <a:ea typeface="Calibri" pitchFamily="34" charset="-122"/>
-                <a:cs typeface="Calibri" pitchFamily="34" charset="-120"/>
+                <a:latin typeface="Plus Jakarta Sans" pitchFamily="34" charset="0"/>
+                <a:ea typeface="Plus Jakarta Sans" pitchFamily="34" charset="-122"/>
+                <a:cs typeface="Plus Jakarta Sans" pitchFamily="34" charset="-120"/>
               </a:rPr>
               <a:t>WHY NOW</a:t>
             </a:r>
@@ -24203,9 +24203,9 @@
                 <a:solidFill>
                   <a:srgbClr val="15154A"/>
                 </a:solidFill>
-                <a:latin typeface="Arial" pitchFamily="34" charset="0"/>
-                <a:ea typeface="Arial" pitchFamily="34" charset="-122"/>
-                <a:cs typeface="Arial" pitchFamily="34" charset="-120"/>
+                <a:latin typeface="Plus Jakarta Sans" pitchFamily="34" charset="0"/>
+                <a:ea typeface="Plus Jakarta Sans" pitchFamily="34" charset="-122"/>
+                <a:cs typeface="Plus Jakarta Sans" pitchFamily="34" charset="-120"/>
               </a:rPr>
               <a:t>2025–26: The Years of the Agent</a:t>
             </a:r>
@@ -24245,9 +24245,9 @@
                 <a:solidFill>
                   <a:srgbClr val="15154A"/>
                 </a:solidFill>
-                <a:latin typeface="Calibri" pitchFamily="34" charset="0"/>
-                <a:ea typeface="Calibri" pitchFamily="34" charset="-122"/>
-                <a:cs typeface="Calibri" pitchFamily="34" charset="-120"/>
+                <a:latin typeface="Plus Jakarta Sans" pitchFamily="34" charset="0"/>
+                <a:ea typeface="Plus Jakarta Sans" pitchFamily="34" charset="-122"/>
+                <a:cs typeface="Plus Jakarta Sans" pitchFamily="34" charset="-120"/>
               </a:rPr>
               <a:t>AI agents</a:t>
             </a:r>
@@ -24262,9 +24262,9 @@
                 <a:solidFill>
                   <a:srgbClr val="5A5A72"/>
                 </a:solidFill>
-                <a:latin typeface="Calibri" pitchFamily="34" charset="0"/>
-                <a:ea typeface="Calibri" pitchFamily="34" charset="-122"/>
-                <a:cs typeface="Calibri" pitchFamily="34" charset="-120"/>
+                <a:latin typeface="Plus Jakarta Sans" pitchFamily="34" charset="0"/>
+                <a:ea typeface="Plus Jakarta Sans" pitchFamily="34" charset="-122"/>
+                <a:cs typeface="Plus Jakarta Sans" pitchFamily="34" charset="-120"/>
               </a:rPr>
               <a:t> are autonomous software systems that </a:t>
             </a:r>
@@ -24279,9 +24279,9 @@
                 <a:solidFill>
                   <a:srgbClr val="15154A"/>
                 </a:solidFill>
-                <a:latin typeface="Calibri" pitchFamily="34" charset="0"/>
-                <a:ea typeface="Calibri" pitchFamily="34" charset="-122"/>
-                <a:cs typeface="Calibri" pitchFamily="34" charset="-120"/>
+                <a:latin typeface="Plus Jakarta Sans" pitchFamily="34" charset="0"/>
+                <a:ea typeface="Plus Jakarta Sans" pitchFamily="34" charset="-122"/>
+                <a:cs typeface="Plus Jakarta Sans" pitchFamily="34" charset="-120"/>
               </a:rPr>
               <a:t>reason, plan, and act</a:t>
             </a:r>
@@ -24296,9 +24296,9 @@
                 <a:solidFill>
                   <a:srgbClr val="5A5A72"/>
                 </a:solidFill>
-                <a:latin typeface="Calibri" pitchFamily="34" charset="0"/>
-                <a:ea typeface="Calibri" pitchFamily="34" charset="-122"/>
-                <a:cs typeface="Calibri" pitchFamily="34" charset="-120"/>
+                <a:latin typeface="Plus Jakarta Sans" pitchFamily="34" charset="0"/>
+                <a:ea typeface="Plus Jakarta Sans" pitchFamily="34" charset="-122"/>
+                <a:cs typeface="Plus Jakarta Sans" pitchFamily="34" charset="-120"/>
               </a:rPr>
               <a:t> on behalf of users — orchestrating multi-step workflows and choosing their own course of action.</a:t>
             </a:r>
@@ -24339,9 +24339,9 @@
                 <a:solidFill>
                   <a:srgbClr val="5A5A72"/>
                 </a:solidFill>
-                <a:latin typeface="Calibri" pitchFamily="34" charset="0"/>
-                <a:ea typeface="Calibri" pitchFamily="34" charset="-122"/>
-                <a:cs typeface="Calibri" pitchFamily="34" charset="-120"/>
+                <a:latin typeface="Plus Jakarta Sans" pitchFamily="34" charset="0"/>
+                <a:ea typeface="Plus Jakarta Sans" pitchFamily="34" charset="-122"/>
+                <a:cs typeface="Plus Jakarta Sans" pitchFamily="34" charset="-120"/>
               </a:rPr>
               <a:t>Highly interactive; manage complex, multi-step tasks</a:t>
             </a:r>
@@ -24360,9 +24360,9 @@
                 <a:solidFill>
                   <a:srgbClr val="5A5A72"/>
                 </a:solidFill>
-                <a:latin typeface="Calibri" pitchFamily="34" charset="0"/>
-                <a:ea typeface="Calibri" pitchFamily="34" charset="-122"/>
-                <a:cs typeface="Calibri" pitchFamily="34" charset="-120"/>
+                <a:latin typeface="Plus Jakarta Sans" pitchFamily="34" charset="0"/>
+                <a:ea typeface="Plus Jakarta Sans" pitchFamily="34" charset="-122"/>
+                <a:cs typeface="Plus Jakarta Sans" pitchFamily="34" charset="-120"/>
               </a:rPr>
               <a:t>Apply reasoning to pick the best next action</a:t>
             </a:r>
@@ -24381,9 +24381,9 @@
                 <a:solidFill>
                   <a:srgbClr val="5A5A72"/>
                 </a:solidFill>
-                <a:latin typeface="Calibri" pitchFamily="34" charset="0"/>
-                <a:ea typeface="Calibri" pitchFamily="34" charset="-122"/>
-                <a:cs typeface="Calibri" pitchFamily="34" charset="-120"/>
+                <a:latin typeface="Plus Jakarta Sans" pitchFamily="34" charset="0"/>
+                <a:ea typeface="Plus Jakarta Sans" pitchFamily="34" charset="-122"/>
+                <a:cs typeface="Plus Jakarta Sans" pitchFamily="34" charset="-120"/>
               </a:rPr>
               <a:t>The leap from chatbot to autonomous operator</a:t>
             </a:r>
@@ -24474,9 +24474,9 @@
                 <a:solidFill>
                   <a:srgbClr val="EE5A29"/>
                 </a:solidFill>
-                <a:latin typeface="Arial" pitchFamily="34" charset="0"/>
-                <a:ea typeface="Arial" pitchFamily="34" charset="-122"/>
-                <a:cs typeface="Arial" pitchFamily="34" charset="-120"/>
+                <a:latin typeface="Plus Jakarta Sans" pitchFamily="34" charset="0"/>
+                <a:ea typeface="Plus Jakarta Sans" pitchFamily="34" charset="-122"/>
+                <a:cs typeface="Plus Jakarta Sans" pitchFamily="34" charset="-120"/>
               </a:rPr>
               <a:t>80%</a:t>
             </a:r>
@@ -24516,9 +24516,9 @@
                 <a:solidFill>
                   <a:srgbClr val="5A5A72"/>
                 </a:solidFill>
-                <a:latin typeface="Calibri" pitchFamily="34" charset="0"/>
-                <a:ea typeface="Calibri" pitchFamily="34" charset="-122"/>
-                <a:cs typeface="Calibri" pitchFamily="34" charset="-120"/>
+                <a:latin typeface="Plus Jakarta Sans" pitchFamily="34" charset="0"/>
+                <a:ea typeface="Plus Jakarta Sans" pitchFamily="34" charset="-122"/>
+                <a:cs typeface="Plus Jakarta Sans" pitchFamily="34" charset="-120"/>
               </a:rPr>
               <a:t>of common customer-service issues resolved autonomously by 2029</a:t>
             </a:r>
@@ -24555,9 +24555,9 @@
                 <a:solidFill>
                   <a:srgbClr val="A6A6BC"/>
                 </a:solidFill>
-                <a:latin typeface="Calibri" pitchFamily="34" charset="0"/>
-                <a:ea typeface="Calibri" pitchFamily="34" charset="-122"/>
-                <a:cs typeface="Calibri" pitchFamily="34" charset="-120"/>
+                <a:latin typeface="Plus Jakarta Sans" pitchFamily="34" charset="0"/>
+                <a:ea typeface="Plus Jakarta Sans" pitchFamily="34" charset="-122"/>
+                <a:cs typeface="Plus Jakarta Sans" pitchFamily="34" charset="-120"/>
               </a:rPr>
               <a:t>Gartner, Nov 2024</a:t>
             </a:r>
@@ -24648,9 +24648,9 @@
                 <a:solidFill>
                   <a:srgbClr val="4F4FF5"/>
                 </a:solidFill>
-                <a:latin typeface="Arial" pitchFamily="34" charset="0"/>
-                <a:ea typeface="Arial" pitchFamily="34" charset="-122"/>
-                <a:cs typeface="Arial" pitchFamily="34" charset="-120"/>
+                <a:latin typeface="Plus Jakarta Sans" pitchFamily="34" charset="0"/>
+                <a:ea typeface="Plus Jakarta Sans" pitchFamily="34" charset="-122"/>
+                <a:cs typeface="Plus Jakarta Sans" pitchFamily="34" charset="-120"/>
               </a:rPr>
               <a:t>~45%</a:t>
             </a:r>
@@ -24690,9 +24690,9 @@
                 <a:solidFill>
                   <a:srgbClr val="5A5A72"/>
                 </a:solidFill>
-                <a:latin typeface="Calibri" pitchFamily="34" charset="0"/>
-                <a:ea typeface="Calibri" pitchFamily="34" charset="-122"/>
-                <a:cs typeface="Calibri" pitchFamily="34" charset="-120"/>
+                <a:latin typeface="Plus Jakarta Sans" pitchFamily="34" charset="0"/>
+                <a:ea typeface="Plus Jakarta Sans" pitchFamily="34" charset="-122"/>
+                <a:cs typeface="Plus Jakarta Sans" pitchFamily="34" charset="-120"/>
               </a:rPr>
               <a:t>AI-agent market CAGR through the early 2030s</a:t>
             </a:r>
@@ -24729,9 +24729,9 @@
                 <a:solidFill>
                   <a:srgbClr val="A6A6BC"/>
                 </a:solidFill>
-                <a:latin typeface="Calibri" pitchFamily="34" charset="0"/>
-                <a:ea typeface="Calibri" pitchFamily="34" charset="-122"/>
-                <a:cs typeface="Calibri" pitchFamily="34" charset="-120"/>
+                <a:latin typeface="Plus Jakarta Sans" pitchFamily="34" charset="0"/>
+                <a:ea typeface="Plus Jakarta Sans" pitchFamily="34" charset="-122"/>
+                <a:cs typeface="Plus Jakarta Sans" pitchFamily="34" charset="-120"/>
               </a:rPr>
               <a:t>Grand View / Precedence, 2025</a:t>
             </a:r>
@@ -24810,9 +24810,9 @@
                 <a:solidFill>
                   <a:srgbClr val="C8870B"/>
                 </a:solidFill>
-                <a:latin typeface="Calibri" pitchFamily="34" charset="0"/>
-                <a:ea typeface="Calibri" pitchFamily="34" charset="-122"/>
-                <a:cs typeface="Calibri" pitchFamily="34" charset="-120"/>
+                <a:latin typeface="Plus Jakarta Sans" pitchFamily="34" charset="0"/>
+                <a:ea typeface="Plus Jakarta Sans" pitchFamily="34" charset="-122"/>
+                <a:cs typeface="Plus Jakarta Sans" pitchFamily="34" charset="-120"/>
               </a:rPr>
               <a:t>⚠  THE REALITY CHECK</a:t>
             </a:r>
@@ -24852,9 +24852,9 @@
                 <a:solidFill>
                   <a:srgbClr val="5A5A72"/>
                 </a:solidFill>
-                <a:latin typeface="Calibri" pitchFamily="34" charset="0"/>
-                <a:ea typeface="Calibri" pitchFamily="34" charset="-122"/>
-                <a:cs typeface="Calibri" pitchFamily="34" charset="-120"/>
+                <a:latin typeface="Plus Jakarta Sans" pitchFamily="34" charset="0"/>
+                <a:ea typeface="Plus Jakarta Sans" pitchFamily="34" charset="-122"/>
+                <a:cs typeface="Plus Jakarta Sans" pitchFamily="34" charset="-120"/>
               </a:rPr>
               <a:t>Only </a:t>
             </a:r>
@@ -24869,9 +24869,9 @@
                 <a:solidFill>
                   <a:srgbClr val="15154A"/>
                 </a:solidFill>
-                <a:latin typeface="Calibri" pitchFamily="34" charset="0"/>
-                <a:ea typeface="Calibri" pitchFamily="34" charset="-122"/>
-                <a:cs typeface="Calibri" pitchFamily="34" charset="-120"/>
+                <a:latin typeface="Plus Jakarta Sans" pitchFamily="34" charset="0"/>
+                <a:ea typeface="Plus Jakarta Sans" pitchFamily="34" charset="-122"/>
+                <a:cs typeface="Plus Jakarta Sans" pitchFamily="34" charset="-120"/>
               </a:rPr>
               <a:t>2%</a:t>
             </a:r>
@@ -24886,9 +24886,9 @@
                 <a:solidFill>
                   <a:srgbClr val="5A5A72"/>
                 </a:solidFill>
-                <a:latin typeface="Calibri" pitchFamily="34" charset="0"/>
-                <a:ea typeface="Calibri" pitchFamily="34" charset="-122"/>
-                <a:cs typeface="Calibri" pitchFamily="34" charset="-120"/>
+                <a:latin typeface="Plus Jakarta Sans" pitchFamily="34" charset="0"/>
+                <a:ea typeface="Plus Jakarta Sans" pitchFamily="34" charset="-122"/>
+                <a:cs typeface="Plus Jakarta Sans" pitchFamily="34" charset="-120"/>
               </a:rPr>
               <a:t> of orgs run agents at scale; </a:t>
             </a:r>
@@ -24903,9 +24903,9 @@
                 <a:solidFill>
                   <a:srgbClr val="15154A"/>
                 </a:solidFill>
-                <a:latin typeface="Calibri" pitchFamily="34" charset="0"/>
-                <a:ea typeface="Calibri" pitchFamily="34" charset="-122"/>
-                <a:cs typeface="Calibri" pitchFamily="34" charset="-120"/>
+                <a:latin typeface="Plus Jakarta Sans" pitchFamily="34" charset="0"/>
+                <a:ea typeface="Plus Jakarta Sans" pitchFamily="34" charset="-122"/>
+                <a:cs typeface="Plus Jakarta Sans" pitchFamily="34" charset="-120"/>
               </a:rPr>
               <a:t>61%</a:t>
             </a:r>
@@ -24920,9 +24920,9 @@
                 <a:solidFill>
                   <a:srgbClr val="5A5A72"/>
                 </a:solidFill>
-                <a:latin typeface="Calibri" pitchFamily="34" charset="0"/>
-                <a:ea typeface="Calibri" pitchFamily="34" charset="-122"/>
-                <a:cs typeface="Calibri" pitchFamily="34" charset="-120"/>
+                <a:latin typeface="Plus Jakarta Sans" pitchFamily="34" charset="0"/>
+                <a:ea typeface="Plus Jakarta Sans" pitchFamily="34" charset="-122"/>
+                <a:cs typeface="Plus Jakarta Sans" pitchFamily="34" charset="-120"/>
               </a:rPr>
               <a:t> are still exploring (Capgemini, 2025). Gartner expects </a:t>
             </a:r>
@@ -24937,9 +24937,9 @@
                 <a:solidFill>
                   <a:srgbClr val="15154A"/>
                 </a:solidFill>
-                <a:latin typeface="Calibri" pitchFamily="34" charset="0"/>
-                <a:ea typeface="Calibri" pitchFamily="34" charset="-122"/>
-                <a:cs typeface="Calibri" pitchFamily="34" charset="-120"/>
+                <a:latin typeface="Plus Jakarta Sans" pitchFamily="34" charset="0"/>
+                <a:ea typeface="Plus Jakarta Sans" pitchFamily="34" charset="-122"/>
+                <a:cs typeface="Plus Jakarta Sans" pitchFamily="34" charset="-120"/>
               </a:rPr>
               <a:t>&gt;40%</a:t>
             </a:r>
@@ -24954,9 +24954,9 @@
                 <a:solidFill>
                   <a:srgbClr val="5A5A72"/>
                 </a:solidFill>
-                <a:latin typeface="Calibri" pitchFamily="34" charset="0"/>
-                <a:ea typeface="Calibri" pitchFamily="34" charset="-122"/>
-                <a:cs typeface="Calibri" pitchFamily="34" charset="-120"/>
+                <a:latin typeface="Plus Jakarta Sans" pitchFamily="34" charset="0"/>
+                <a:ea typeface="Plus Jakarta Sans" pitchFamily="34" charset="-122"/>
+                <a:cs typeface="Plus Jakarta Sans" pitchFamily="34" charset="-120"/>
               </a:rPr>
               <a:t> of agentic-AI projects to be scrapped by 2027 — on cost, unclear value, and weak controls.</a:t>
             </a:r>
@@ -24993,9 +24993,9 @@
                 <a:solidFill>
                   <a:srgbClr val="9A9AB4"/>
                 </a:solidFill>
-                <a:latin typeface="Calibri" pitchFamily="34" charset="0"/>
-                <a:ea typeface="Calibri" pitchFamily="34" charset="-122"/>
-                <a:cs typeface="Calibri" pitchFamily="34" charset="-120"/>
+                <a:latin typeface="Plus Jakarta Sans" pitchFamily="34" charset="0"/>
+                <a:ea typeface="Plus Jakarta Sans" pitchFamily="34" charset="-122"/>
+                <a:cs typeface="Plus Jakarta Sans" pitchFamily="34" charset="-120"/>
               </a:rPr>
               <a:t>©2026 Cloudera, Inc. · Governed, enterprise-grade data is what separates the 2% from the 40%.</a:t>
             </a:r>
@@ -25032,9 +25032,9 @@
                 <a:solidFill>
                   <a:srgbClr val="9A9AB4"/>
                 </a:solidFill>
-                <a:latin typeface="Calibri" pitchFamily="34" charset="0"/>
-                <a:ea typeface="Calibri" pitchFamily="34" charset="-122"/>
-                <a:cs typeface="Calibri" pitchFamily="34" charset="-120"/>
+                <a:latin typeface="Plus Jakarta Sans" pitchFamily="34" charset="0"/>
+                <a:ea typeface="Plus Jakarta Sans" pitchFamily="34" charset="-122"/>
+                <a:cs typeface="Plus Jakarta Sans" pitchFamily="34" charset="-120"/>
               </a:rPr>
               <a:t>5 / 22</a:t>
             </a:r>
@@ -25103,9 +25103,9 @@
                 <a:solidFill>
                   <a:srgbClr val="EE5A29"/>
                 </a:solidFill>
-                <a:latin typeface="Arial" pitchFamily="34" charset="0"/>
-                <a:ea typeface="Arial" pitchFamily="34" charset="-122"/>
-                <a:cs typeface="Arial" pitchFamily="34" charset="-120"/>
+                <a:latin typeface="Plus Jakarta Sans" pitchFamily="34" charset="0"/>
+                <a:ea typeface="Plus Jakarta Sans" pitchFamily="34" charset="-122"/>
+                <a:cs typeface="Plus Jakarta Sans" pitchFamily="34" charset="-120"/>
               </a:rPr>
               <a:t>CLOUD</a:t>
             </a:r>
@@ -25117,9 +25117,9 @@
                 <a:solidFill>
                   <a:srgbClr val="EE5A29"/>
                 </a:solidFill>
-                <a:latin typeface="Arial" pitchFamily="34" charset="0"/>
-                <a:ea typeface="Arial" pitchFamily="34" charset="-122"/>
-                <a:cs typeface="Arial" pitchFamily="34" charset="-120"/>
+                <a:latin typeface="Plus Jakarta Sans" pitchFamily="34" charset="0"/>
+                <a:ea typeface="Plus Jakarta Sans" pitchFamily="34" charset="-122"/>
+                <a:cs typeface="Plus Jakarta Sans" pitchFamily="34" charset="-120"/>
               </a:rPr>
               <a:t>E</a:t>
             </a:r>
@@ -25131,9 +25131,9 @@
                 <a:solidFill>
                   <a:srgbClr val="EE5A29"/>
                 </a:solidFill>
-                <a:latin typeface="Arial" pitchFamily="34" charset="0"/>
-                <a:ea typeface="Arial" pitchFamily="34" charset="-122"/>
-                <a:cs typeface="Arial" pitchFamily="34" charset="-120"/>
+                <a:latin typeface="Plus Jakarta Sans" pitchFamily="34" charset="0"/>
+                <a:ea typeface="Plus Jakarta Sans" pitchFamily="34" charset="-122"/>
+                <a:cs typeface="Plus Jakarta Sans" pitchFamily="34" charset="-120"/>
               </a:rPr>
               <a:t>RA</a:t>
             </a:r>
@@ -25190,9 +25190,9 @@
                 <a:solidFill>
                   <a:srgbClr val="EE5A29"/>
                 </a:solidFill>
-                <a:latin typeface="Calibri" pitchFamily="34" charset="0"/>
-                <a:ea typeface="Calibri" pitchFamily="34" charset="-122"/>
-                <a:cs typeface="Calibri" pitchFamily="34" charset="-120"/>
+                <a:latin typeface="Plus Jakarta Sans" pitchFamily="34" charset="0"/>
+                <a:ea typeface="Plus Jakarta Sans" pitchFamily="34" charset="-122"/>
+                <a:cs typeface="Plus Jakarta Sans" pitchFamily="34" charset="-120"/>
               </a:rPr>
               <a:t>CONTROL &amp; ORCHESTRATION</a:t>
             </a:r>
@@ -25229,9 +25229,9 @@
                 <a:solidFill>
                   <a:srgbClr val="15154A"/>
                 </a:solidFill>
-                <a:latin typeface="Arial" pitchFamily="34" charset="0"/>
-                <a:ea typeface="Arial" pitchFamily="34" charset="-122"/>
-                <a:cs typeface="Arial" pitchFamily="34" charset="-120"/>
+                <a:latin typeface="Plus Jakarta Sans" pitchFamily="34" charset="0"/>
+                <a:ea typeface="Plus Jakarta Sans" pitchFamily="34" charset="-122"/>
+                <a:cs typeface="Plus Jakarta Sans" pitchFamily="34" charset="-120"/>
               </a:rPr>
               <a:t>From Single-Agent to Multi-Agent</a:t>
             </a:r>
@@ -25324,9 +25324,9 @@
                 <a:solidFill>
                   <a:srgbClr val="4F4FF5"/>
                 </a:solidFill>
-                <a:latin typeface="Calibri" pitchFamily="34" charset="0"/>
-                <a:ea typeface="Calibri" pitchFamily="34" charset="-122"/>
-                <a:cs typeface="Calibri" pitchFamily="34" charset="-120"/>
+                <a:latin typeface="Plus Jakarta Sans" pitchFamily="34" charset="0"/>
+                <a:ea typeface="Plus Jakarta Sans" pitchFamily="34" charset="-122"/>
+                <a:cs typeface="Plus Jakarta Sans" pitchFamily="34" charset="-120"/>
               </a:rPr>
               <a:t>SINGLE AGENT · ReAct</a:t>
             </a:r>
@@ -25390,9 +25390,9 @@
                 <a:solidFill>
                   <a:srgbClr val="15154A"/>
                 </a:solidFill>
-                <a:latin typeface="Calibri" pitchFamily="34" charset="0"/>
-                <a:ea typeface="Calibri" pitchFamily="34" charset="-122"/>
-                <a:cs typeface="Calibri" pitchFamily="34" charset="-120"/>
+                <a:latin typeface="Plus Jakarta Sans" pitchFamily="34" charset="0"/>
+                <a:ea typeface="Plus Jakarta Sans" pitchFamily="34" charset="-122"/>
+                <a:cs typeface="Plus Jakarta Sans" pitchFamily="34" charset="-120"/>
               </a:rPr>
               <a:t>Reason</a:t>
             </a:r>
@@ -25429,9 +25429,9 @@
                 <a:solidFill>
                   <a:srgbClr val="EE5A29"/>
                 </a:solidFill>
-                <a:latin typeface="Arial" pitchFamily="34" charset="0"/>
-                <a:ea typeface="Arial" pitchFamily="34" charset="-122"/>
-                <a:cs typeface="Arial" pitchFamily="34" charset="-120"/>
+                <a:latin typeface="Plus Jakarta Sans" pitchFamily="34" charset="0"/>
+                <a:ea typeface="Plus Jakarta Sans" pitchFamily="34" charset="-122"/>
+                <a:cs typeface="Plus Jakarta Sans" pitchFamily="34" charset="-120"/>
               </a:rPr>
               <a:t>→</a:t>
             </a:r>
@@ -25495,9 +25495,9 @@
                 <a:solidFill>
                   <a:srgbClr val="15154A"/>
                 </a:solidFill>
-                <a:latin typeface="Calibri" pitchFamily="34" charset="0"/>
-                <a:ea typeface="Calibri" pitchFamily="34" charset="-122"/>
-                <a:cs typeface="Calibri" pitchFamily="34" charset="-120"/>
+                <a:latin typeface="Plus Jakarta Sans" pitchFamily="34" charset="0"/>
+                <a:ea typeface="Plus Jakarta Sans" pitchFamily="34" charset="-122"/>
+                <a:cs typeface="Plus Jakarta Sans" pitchFamily="34" charset="-120"/>
               </a:rPr>
               <a:t>Act (tool)</a:t>
             </a:r>
@@ -25534,9 +25534,9 @@
                 <a:solidFill>
                   <a:srgbClr val="EE5A29"/>
                 </a:solidFill>
-                <a:latin typeface="Arial" pitchFamily="34" charset="0"/>
-                <a:ea typeface="Arial" pitchFamily="34" charset="-122"/>
-                <a:cs typeface="Arial" pitchFamily="34" charset="-120"/>
+                <a:latin typeface="Plus Jakarta Sans" pitchFamily="34" charset="0"/>
+                <a:ea typeface="Plus Jakarta Sans" pitchFamily="34" charset="-122"/>
+                <a:cs typeface="Plus Jakarta Sans" pitchFamily="34" charset="-120"/>
               </a:rPr>
               <a:t>→</a:t>
             </a:r>
@@ -25600,9 +25600,9 @@
                 <a:solidFill>
                   <a:srgbClr val="15154A"/>
                 </a:solidFill>
-                <a:latin typeface="Calibri" pitchFamily="34" charset="0"/>
-                <a:ea typeface="Calibri" pitchFamily="34" charset="-122"/>
-                <a:cs typeface="Calibri" pitchFamily="34" charset="-120"/>
+                <a:latin typeface="Plus Jakarta Sans" pitchFamily="34" charset="0"/>
+                <a:ea typeface="Plus Jakarta Sans" pitchFamily="34" charset="-122"/>
+                <a:cs typeface="Plus Jakarta Sans" pitchFamily="34" charset="-120"/>
               </a:rPr>
               <a:t>Observe</a:t>
             </a:r>
@@ -25639,9 +25639,9 @@
                 <a:solidFill>
                   <a:srgbClr val="EE5A29"/>
                 </a:solidFill>
-                <a:latin typeface="Arial" pitchFamily="34" charset="0"/>
-                <a:ea typeface="Arial" pitchFamily="34" charset="-122"/>
-                <a:cs typeface="Arial" pitchFamily="34" charset="-120"/>
+                <a:latin typeface="Plus Jakarta Sans" pitchFamily="34" charset="0"/>
+                <a:ea typeface="Plus Jakarta Sans" pitchFamily="34" charset="-122"/>
+                <a:cs typeface="Plus Jakarta Sans" pitchFamily="34" charset="-120"/>
               </a:rPr>
               <a:t>→</a:t>
             </a:r>
@@ -25705,9 +25705,9 @@
                 <a:solidFill>
                   <a:srgbClr val="15154A"/>
                 </a:solidFill>
-                <a:latin typeface="Calibri" pitchFamily="34" charset="0"/>
-                <a:ea typeface="Calibri" pitchFamily="34" charset="-122"/>
-                <a:cs typeface="Calibri" pitchFamily="34" charset="-120"/>
+                <a:latin typeface="Plus Jakarta Sans" pitchFamily="34" charset="0"/>
+                <a:ea typeface="Plus Jakarta Sans" pitchFamily="34" charset="-122"/>
+                <a:cs typeface="Plus Jakarta Sans" pitchFamily="34" charset="-120"/>
               </a:rPr>
               <a:t>Reflect</a:t>
             </a:r>
@@ -25744,9 +25744,9 @@
                 <a:solidFill>
                   <a:srgbClr val="5A5A72"/>
                 </a:solidFill>
-                <a:latin typeface="Calibri" pitchFamily="34" charset="0"/>
-                <a:ea typeface="Calibri" pitchFamily="34" charset="-122"/>
-                <a:cs typeface="Calibri" pitchFamily="34" charset="-120"/>
+                <a:latin typeface="Plus Jakarta Sans" pitchFamily="34" charset="0"/>
+                <a:ea typeface="Plus Jakarta Sans" pitchFamily="34" charset="-122"/>
+                <a:cs typeface="Plus Jakarta Sans" pitchFamily="34" charset="-120"/>
               </a:rPr>
               <a:t>One model loops — reason, call a tool, observe, self-correct — until the task is done.</a:t>
             </a:r>
@@ -25839,9 +25839,9 @@
                 <a:solidFill>
                   <a:srgbClr val="EE5A29"/>
                 </a:solidFill>
-                <a:latin typeface="Calibri" pitchFamily="34" charset="0"/>
-                <a:ea typeface="Calibri" pitchFamily="34" charset="-122"/>
-                <a:cs typeface="Calibri" pitchFamily="34" charset="-120"/>
+                <a:latin typeface="Plus Jakarta Sans" pitchFamily="34" charset="0"/>
+                <a:ea typeface="Plus Jakarta Sans" pitchFamily="34" charset="-122"/>
+                <a:cs typeface="Plus Jakarta Sans" pitchFamily="34" charset="-120"/>
               </a:rPr>
               <a:t>MULTI-AGENT · Orchestrated</a:t>
             </a:r>
@@ -25905,9 +25905,9 @@
                 <a:solidFill>
                   <a:srgbClr val="15154A"/>
                 </a:solidFill>
-                <a:latin typeface="Calibri" pitchFamily="34" charset="0"/>
-                <a:ea typeface="Calibri" pitchFamily="34" charset="-122"/>
-                <a:cs typeface="Calibri" pitchFamily="34" charset="-120"/>
+                <a:latin typeface="Plus Jakarta Sans" pitchFamily="34" charset="0"/>
+                <a:ea typeface="Plus Jakarta Sans" pitchFamily="34" charset="-122"/>
+                <a:cs typeface="Plus Jakarta Sans" pitchFamily="34" charset="-120"/>
               </a:rPr>
               <a:t>Planner</a:t>
             </a:r>
@@ -25944,9 +25944,9 @@
                 <a:solidFill>
                   <a:srgbClr val="EE5A29"/>
                 </a:solidFill>
-                <a:latin typeface="Arial" pitchFamily="34" charset="0"/>
-                <a:ea typeface="Arial" pitchFamily="34" charset="-122"/>
-                <a:cs typeface="Arial" pitchFamily="34" charset="-120"/>
+                <a:latin typeface="Plus Jakarta Sans" pitchFamily="34" charset="0"/>
+                <a:ea typeface="Plus Jakarta Sans" pitchFamily="34" charset="-122"/>
+                <a:cs typeface="Plus Jakarta Sans" pitchFamily="34" charset="-120"/>
               </a:rPr>
               <a:t>→</a:t>
             </a:r>
@@ -26010,9 +26010,9 @@
                 <a:solidFill>
                   <a:srgbClr val="15154A"/>
                 </a:solidFill>
-                <a:latin typeface="Calibri" pitchFamily="34" charset="0"/>
-                <a:ea typeface="Calibri" pitchFamily="34" charset="-122"/>
-                <a:cs typeface="Calibri" pitchFamily="34" charset="-120"/>
+                <a:latin typeface="Plus Jakarta Sans" pitchFamily="34" charset="0"/>
+                <a:ea typeface="Plus Jakarta Sans" pitchFamily="34" charset="-122"/>
+                <a:cs typeface="Plus Jakarta Sans" pitchFamily="34" charset="-120"/>
               </a:rPr>
               <a:t>Researcher</a:t>
             </a:r>
@@ -26049,9 +26049,9 @@
                 <a:solidFill>
                   <a:srgbClr val="EE5A29"/>
                 </a:solidFill>
-                <a:latin typeface="Arial" pitchFamily="34" charset="0"/>
-                <a:ea typeface="Arial" pitchFamily="34" charset="-122"/>
-                <a:cs typeface="Arial" pitchFamily="34" charset="-120"/>
+                <a:latin typeface="Plus Jakarta Sans" pitchFamily="34" charset="0"/>
+                <a:ea typeface="Plus Jakarta Sans" pitchFamily="34" charset="-122"/>
+                <a:cs typeface="Plus Jakarta Sans" pitchFamily="34" charset="-120"/>
               </a:rPr>
               <a:t>→</a:t>
             </a:r>
@@ -26115,9 +26115,9 @@
                 <a:solidFill>
                   <a:srgbClr val="15154A"/>
                 </a:solidFill>
-                <a:latin typeface="Calibri" pitchFamily="34" charset="0"/>
-                <a:ea typeface="Calibri" pitchFamily="34" charset="-122"/>
-                <a:cs typeface="Calibri" pitchFamily="34" charset="-120"/>
+                <a:latin typeface="Plus Jakarta Sans" pitchFamily="34" charset="0"/>
+                <a:ea typeface="Plus Jakarta Sans" pitchFamily="34" charset="-122"/>
+                <a:cs typeface="Plus Jakarta Sans" pitchFamily="34" charset="-120"/>
               </a:rPr>
               <a:t>Writer</a:t>
             </a:r>
@@ -26154,9 +26154,9 @@
                 <a:solidFill>
                   <a:srgbClr val="EE5A29"/>
                 </a:solidFill>
-                <a:latin typeface="Arial" pitchFamily="34" charset="0"/>
-                <a:ea typeface="Arial" pitchFamily="34" charset="-122"/>
-                <a:cs typeface="Arial" pitchFamily="34" charset="-120"/>
+                <a:latin typeface="Plus Jakarta Sans" pitchFamily="34" charset="0"/>
+                <a:ea typeface="Plus Jakarta Sans" pitchFamily="34" charset="-122"/>
+                <a:cs typeface="Plus Jakarta Sans" pitchFamily="34" charset="-120"/>
               </a:rPr>
               <a:t>→</a:t>
             </a:r>
@@ -26220,9 +26220,9 @@
                 <a:solidFill>
                   <a:srgbClr val="15154A"/>
                 </a:solidFill>
-                <a:latin typeface="Calibri" pitchFamily="34" charset="0"/>
-                <a:ea typeface="Calibri" pitchFamily="34" charset="-122"/>
-                <a:cs typeface="Calibri" pitchFamily="34" charset="-120"/>
+                <a:latin typeface="Plus Jakarta Sans" pitchFamily="34" charset="0"/>
+                <a:ea typeface="Plus Jakarta Sans" pitchFamily="34" charset="-122"/>
+                <a:cs typeface="Plus Jakarta Sans" pitchFamily="34" charset="-120"/>
               </a:rPr>
               <a:t>Reviewer</a:t>
             </a:r>
@@ -26259,9 +26259,9 @@
                 <a:solidFill>
                   <a:srgbClr val="5A5A72"/>
                 </a:solidFill>
-                <a:latin typeface="Calibri" pitchFamily="34" charset="0"/>
-                <a:ea typeface="Calibri" pitchFamily="34" charset="-122"/>
-                <a:cs typeface="Calibri" pitchFamily="34" charset="-120"/>
+                <a:latin typeface="Plus Jakarta Sans" pitchFamily="34" charset="0"/>
+                <a:ea typeface="Plus Jakarta Sans" pitchFamily="34" charset="-122"/>
+                <a:cs typeface="Plus Jakarta Sans" pitchFamily="34" charset="-120"/>
               </a:rPr>
               <a:t>Specialized agents coordinate via a planner, with feedback loops between roles.</a:t>
             </a:r>
@@ -26310,16 +26310,16 @@
                           <a:solidFill>
                             <a:srgbClr val="FFFFFF"/>
                           </a:solidFill>
-                          <a:latin typeface="Calibri" pitchFamily="34" charset="0"/>
-                          <a:ea typeface="Calibri" pitchFamily="34" charset="-122"/>
-                          <a:cs typeface="Calibri" pitchFamily="34" charset="-120"/>
+                          <a:latin typeface="Plus Jakarta Sans" pitchFamily="34" charset="0"/>
+                          <a:ea typeface="Plus Jakarta Sans" pitchFamily="34" charset="-122"/>
+                          <a:cs typeface="Plus Jakarta Sans" pitchFamily="34" charset="-120"/>
                         </a:rPr>
                         <a:t>Dimension</a:t>
                       </a:r>
                       <a:endParaRPr lang="en-US" sz="1000" dirty="0">
-                        <a:latin typeface="Calibri" charset="0"/>
-                        <a:ea typeface="Calibri" charset="0"/>
-                        <a:cs typeface="Calibri" charset="0"/>
+                        <a:latin typeface="Plus Jakarta Sans" charset="0"/>
+                        <a:ea typeface="Plus Jakarta Sans" charset="0"/>
+                        <a:cs typeface="Plus Jakarta Sans" charset="0"/>
                       </a:endParaRPr>
                     </a:p>
                   </a:txBody>
@@ -26378,16 +26378,16 @@
                           <a:solidFill>
                             <a:srgbClr val="FFFFFF"/>
                           </a:solidFill>
-                          <a:latin typeface="Calibri" pitchFamily="34" charset="0"/>
-                          <a:ea typeface="Calibri" pitchFamily="34" charset="-122"/>
-                          <a:cs typeface="Calibri" pitchFamily="34" charset="-120"/>
+                          <a:latin typeface="Plus Jakarta Sans" pitchFamily="34" charset="0"/>
+                          <a:ea typeface="Plus Jakarta Sans" pitchFamily="34" charset="-122"/>
+                          <a:cs typeface="Plus Jakarta Sans" pitchFamily="34" charset="-120"/>
                         </a:rPr>
                         <a:t>Single Agent (ReAct)</a:t>
                       </a:r>
                       <a:endParaRPr lang="en-US" sz="1000" dirty="0">
-                        <a:latin typeface="Calibri" charset="0"/>
-                        <a:ea typeface="Calibri" charset="0"/>
-                        <a:cs typeface="Calibri" charset="0"/>
+                        <a:latin typeface="Plus Jakarta Sans" charset="0"/>
+                        <a:ea typeface="Plus Jakarta Sans" charset="0"/>
+                        <a:cs typeface="Plus Jakarta Sans" charset="0"/>
                       </a:endParaRPr>
                     </a:p>
                   </a:txBody>
@@ -26446,16 +26446,16 @@
                           <a:solidFill>
                             <a:srgbClr val="FFFFFF"/>
                           </a:solidFill>
-                          <a:latin typeface="Calibri" pitchFamily="34" charset="0"/>
-                          <a:ea typeface="Calibri" pitchFamily="34" charset="-122"/>
-                          <a:cs typeface="Calibri" pitchFamily="34" charset="-120"/>
+                          <a:latin typeface="Plus Jakarta Sans" pitchFamily="34" charset="0"/>
+                          <a:ea typeface="Plus Jakarta Sans" pitchFamily="34" charset="-122"/>
+                          <a:cs typeface="Plus Jakarta Sans" pitchFamily="34" charset="-120"/>
                         </a:rPr>
                         <a:t>Multi-Agent (Orchestrated)</a:t>
                       </a:r>
                       <a:endParaRPr lang="en-US" sz="1000" dirty="0">
-                        <a:latin typeface="Calibri" charset="0"/>
-                        <a:ea typeface="Calibri" charset="0"/>
-                        <a:cs typeface="Calibri" charset="0"/>
+                        <a:latin typeface="Plus Jakarta Sans" charset="0"/>
+                        <a:ea typeface="Plus Jakarta Sans" charset="0"/>
+                        <a:cs typeface="Plus Jakarta Sans" charset="0"/>
                       </a:endParaRPr>
                     </a:p>
                   </a:txBody>
@@ -26516,16 +26516,16 @@
                           <a:solidFill>
                             <a:srgbClr val="15154A"/>
                           </a:solidFill>
-                          <a:latin typeface="Calibri" pitchFamily="34" charset="0"/>
-                          <a:ea typeface="Calibri" pitchFamily="34" charset="-122"/>
-                          <a:cs typeface="Calibri" pitchFamily="34" charset="-120"/>
+                          <a:latin typeface="Plus Jakarta Sans" pitchFamily="34" charset="0"/>
+                          <a:ea typeface="Plus Jakarta Sans" pitchFamily="34" charset="-122"/>
+                          <a:cs typeface="Plus Jakarta Sans" pitchFamily="34" charset="-120"/>
                         </a:rPr>
                         <a:t>Coordination cost</a:t>
                       </a:r>
                       <a:endParaRPr lang="en-US" sz="1000" dirty="0">
-                        <a:latin typeface="Calibri" charset="0"/>
-                        <a:ea typeface="Calibri" charset="0"/>
-                        <a:cs typeface="Calibri" charset="0"/>
+                        <a:latin typeface="Plus Jakarta Sans" charset="0"/>
+                        <a:ea typeface="Plus Jakarta Sans" charset="0"/>
+                        <a:cs typeface="Plus Jakarta Sans" charset="0"/>
                       </a:endParaRPr>
                     </a:p>
                   </a:txBody>
@@ -26584,16 +26584,16 @@
                           <a:solidFill>
                             <a:srgbClr val="5A5A72"/>
                           </a:solidFill>
-                          <a:latin typeface="Calibri" pitchFamily="34" charset="0"/>
-                          <a:ea typeface="Calibri" pitchFamily="34" charset="-122"/>
-                          <a:cs typeface="Calibri" pitchFamily="34" charset="-120"/>
+                          <a:latin typeface="Plus Jakarta Sans" pitchFamily="34" charset="0"/>
+                          <a:ea typeface="Plus Jakarta Sans" pitchFamily="34" charset="-122"/>
+                          <a:cs typeface="Plus Jakarta Sans" pitchFamily="34" charset="-120"/>
                         </a:rPr>
                         <a:t>None</a:t>
                       </a:r>
                       <a:endParaRPr lang="en-US" sz="1000" dirty="0">
-                        <a:latin typeface="Calibri" charset="0"/>
-                        <a:ea typeface="Calibri" charset="0"/>
-                        <a:cs typeface="Calibri" charset="0"/>
+                        <a:latin typeface="Plus Jakarta Sans" charset="0"/>
+                        <a:ea typeface="Plus Jakarta Sans" charset="0"/>
+                        <a:cs typeface="Plus Jakarta Sans" charset="0"/>
                       </a:endParaRPr>
                     </a:p>
                   </a:txBody>
@@ -26652,16 +26652,16 @@
                           <a:solidFill>
                             <a:srgbClr val="5A5A72"/>
                           </a:solidFill>
-                          <a:latin typeface="Calibri" pitchFamily="34" charset="0"/>
-                          <a:ea typeface="Calibri" pitchFamily="34" charset="-122"/>
-                          <a:cs typeface="Calibri" pitchFamily="34" charset="-120"/>
+                          <a:latin typeface="Plus Jakarta Sans" pitchFamily="34" charset="0"/>
+                          <a:ea typeface="Plus Jakarta Sans" pitchFamily="34" charset="-122"/>
+                          <a:cs typeface="Plus Jakarta Sans" pitchFamily="34" charset="-120"/>
                         </a:rPr>
                         <a:t>Role allocation + inter-agent comms</a:t>
                       </a:r>
                       <a:endParaRPr lang="en-US" sz="1000" dirty="0">
-                        <a:latin typeface="Calibri" charset="0"/>
-                        <a:ea typeface="Calibri" charset="0"/>
-                        <a:cs typeface="Calibri" charset="0"/>
+                        <a:latin typeface="Plus Jakarta Sans" charset="0"/>
+                        <a:ea typeface="Plus Jakarta Sans" charset="0"/>
+                        <a:cs typeface="Plus Jakarta Sans" charset="0"/>
                       </a:endParaRPr>
                     </a:p>
                   </a:txBody>
@@ -26722,16 +26722,16 @@
                           <a:solidFill>
                             <a:srgbClr val="15154A"/>
                           </a:solidFill>
-                          <a:latin typeface="Calibri" pitchFamily="34" charset="0"/>
-                          <a:ea typeface="Calibri" pitchFamily="34" charset="-122"/>
-                          <a:cs typeface="Calibri" pitchFamily="34" charset="-120"/>
+                          <a:latin typeface="Plus Jakarta Sans" pitchFamily="34" charset="0"/>
+                          <a:ea typeface="Plus Jakarta Sans" pitchFamily="34" charset="-122"/>
+                          <a:cs typeface="Plus Jakarta Sans" pitchFamily="34" charset="-120"/>
                         </a:rPr>
                         <a:t>Failure mode</a:t>
                       </a:r>
                       <a:endParaRPr lang="en-US" sz="1000" dirty="0">
-                        <a:latin typeface="Calibri" charset="0"/>
-                        <a:ea typeface="Calibri" charset="0"/>
-                        <a:cs typeface="Calibri" charset="0"/>
+                        <a:latin typeface="Plus Jakarta Sans" charset="0"/>
+                        <a:ea typeface="Plus Jakarta Sans" charset="0"/>
+                        <a:cs typeface="Plus Jakarta Sans" charset="0"/>
                       </a:endParaRPr>
                     </a:p>
                   </a:txBody>
@@ -26790,16 +26790,16 @@
                           <a:solidFill>
                             <a:srgbClr val="5A5A72"/>
                           </a:solidFill>
-                          <a:latin typeface="Calibri" pitchFamily="34" charset="0"/>
-                          <a:ea typeface="Calibri" pitchFamily="34" charset="-122"/>
-                          <a:cs typeface="Calibri" pitchFamily="34" charset="-120"/>
+                          <a:latin typeface="Plus Jakarta Sans" pitchFamily="34" charset="0"/>
+                          <a:ea typeface="Plus Jakarta Sans" pitchFamily="34" charset="-122"/>
+                          <a:cs typeface="Plus Jakarta Sans" pitchFamily="34" charset="-120"/>
                         </a:rPr>
                         <a:t>Single-point hallucination</a:t>
                       </a:r>
                       <a:endParaRPr lang="en-US" sz="1000" dirty="0">
-                        <a:latin typeface="Calibri" charset="0"/>
-                        <a:ea typeface="Calibri" charset="0"/>
-                        <a:cs typeface="Calibri" charset="0"/>
+                        <a:latin typeface="Plus Jakarta Sans" charset="0"/>
+                        <a:ea typeface="Plus Jakarta Sans" charset="0"/>
+                        <a:cs typeface="Plus Jakarta Sans" charset="0"/>
                       </a:endParaRPr>
                     </a:p>
                   </a:txBody>
@@ -26858,16 +26858,16 @@
                           <a:solidFill>
                             <a:srgbClr val="5A5A72"/>
                           </a:solidFill>
-                          <a:latin typeface="Calibri" pitchFamily="34" charset="0"/>
-                          <a:ea typeface="Calibri" pitchFamily="34" charset="-122"/>
-                          <a:cs typeface="Calibri" pitchFamily="34" charset="-120"/>
+                          <a:latin typeface="Plus Jakarta Sans" pitchFamily="34" charset="0"/>
+                          <a:ea typeface="Plus Jakarta Sans" pitchFamily="34" charset="-122"/>
+                          <a:cs typeface="Plus Jakarta Sans" pitchFamily="34" charset="-120"/>
                         </a:rPr>
                         <a:t>Cascading misunderstanding</a:t>
                       </a:r>
                       <a:endParaRPr lang="en-US" sz="1000" dirty="0">
-                        <a:latin typeface="Calibri" charset="0"/>
-                        <a:ea typeface="Calibri" charset="0"/>
-                        <a:cs typeface="Calibri" charset="0"/>
+                        <a:latin typeface="Plus Jakarta Sans" charset="0"/>
+                        <a:ea typeface="Plus Jakarta Sans" charset="0"/>
+                        <a:cs typeface="Plus Jakarta Sans" charset="0"/>
                       </a:endParaRPr>
                     </a:p>
                   </a:txBody>
@@ -26928,16 +26928,16 @@
                           <a:solidFill>
                             <a:srgbClr val="15154A"/>
                           </a:solidFill>
-                          <a:latin typeface="Calibri" pitchFamily="34" charset="0"/>
-                          <a:ea typeface="Calibri" pitchFamily="34" charset="-122"/>
-                          <a:cs typeface="Calibri" pitchFamily="34" charset="-120"/>
+                          <a:latin typeface="Plus Jakarta Sans" pitchFamily="34" charset="0"/>
+                          <a:ea typeface="Plus Jakarta Sans" pitchFamily="34" charset="-122"/>
+                          <a:cs typeface="Plus Jakarta Sans" pitchFamily="34" charset="-120"/>
                         </a:rPr>
                         <a:t>Best for</a:t>
                       </a:r>
                       <a:endParaRPr lang="en-US" sz="1000" dirty="0">
-                        <a:latin typeface="Calibri" charset="0"/>
-                        <a:ea typeface="Calibri" charset="0"/>
-                        <a:cs typeface="Calibri" charset="0"/>
+                        <a:latin typeface="Plus Jakarta Sans" charset="0"/>
+                        <a:ea typeface="Plus Jakarta Sans" charset="0"/>
+                        <a:cs typeface="Plus Jakarta Sans" charset="0"/>
                       </a:endParaRPr>
                     </a:p>
                   </a:txBody>
@@ -26996,16 +26996,16 @@
                           <a:solidFill>
                             <a:srgbClr val="5A5A72"/>
                           </a:solidFill>
-                          <a:latin typeface="Calibri" pitchFamily="34" charset="0"/>
-                          <a:ea typeface="Calibri" pitchFamily="34" charset="-122"/>
-                          <a:cs typeface="Calibri" pitchFamily="34" charset="-120"/>
+                          <a:latin typeface="Plus Jakarta Sans" pitchFamily="34" charset="0"/>
+                          <a:ea typeface="Plus Jakarta Sans" pitchFamily="34" charset="-122"/>
+                          <a:cs typeface="Plus Jakarta Sans" pitchFamily="34" charset="-120"/>
                         </a:rPr>
                         <a:t>Simple, linear toolchains</a:t>
                       </a:r>
                       <a:endParaRPr lang="en-US" sz="1000" dirty="0">
-                        <a:latin typeface="Calibri" charset="0"/>
-                        <a:ea typeface="Calibri" charset="0"/>
-                        <a:cs typeface="Calibri" charset="0"/>
+                        <a:latin typeface="Plus Jakarta Sans" charset="0"/>
+                        <a:ea typeface="Plus Jakarta Sans" charset="0"/>
+                        <a:cs typeface="Plus Jakarta Sans" charset="0"/>
                       </a:endParaRPr>
                     </a:p>
                   </a:txBody>
@@ -27064,16 +27064,16 @@
                           <a:solidFill>
                             <a:srgbClr val="5A5A72"/>
                           </a:solidFill>
-                          <a:latin typeface="Calibri" pitchFamily="34" charset="0"/>
-                          <a:ea typeface="Calibri" pitchFamily="34" charset="-122"/>
-                          <a:cs typeface="Calibri" pitchFamily="34" charset="-120"/>
+                          <a:latin typeface="Plus Jakarta Sans" pitchFamily="34" charset="0"/>
+                          <a:ea typeface="Plus Jakarta Sans" pitchFamily="34" charset="-122"/>
+                          <a:cs typeface="Plus Jakarta Sans" pitchFamily="34" charset="-120"/>
                         </a:rPr>
                         <a:t>Creativity · review · negotiation · parallelism</a:t>
                       </a:r>
                       <a:endParaRPr lang="en-US" sz="1000" dirty="0">
-                        <a:latin typeface="Calibri" charset="0"/>
-                        <a:ea typeface="Calibri" charset="0"/>
-                        <a:cs typeface="Calibri" charset="0"/>
+                        <a:latin typeface="Plus Jakarta Sans" charset="0"/>
+                        <a:ea typeface="Plus Jakarta Sans" charset="0"/>
+                        <a:cs typeface="Plus Jakarta Sans" charset="0"/>
                       </a:endParaRPr>
                     </a:p>
                   </a:txBody>
@@ -27153,9 +27153,9 @@
                 <a:solidFill>
                   <a:srgbClr val="9A9AB4"/>
                 </a:solidFill>
-                <a:latin typeface="Calibri" pitchFamily="34" charset="0"/>
-                <a:ea typeface="Calibri" pitchFamily="34" charset="-122"/>
-                <a:cs typeface="Calibri" pitchFamily="34" charset="-120"/>
+                <a:latin typeface="Plus Jakarta Sans" pitchFamily="34" charset="0"/>
+                <a:ea typeface="Plus Jakarta Sans" pitchFamily="34" charset="-122"/>
+                <a:cs typeface="Plus Jakarta Sans" pitchFamily="34" charset="-120"/>
               </a:rPr>
               <a:t>©2026 Cloudera, Inc. · Patterns: ReAct (Yao 2022), Reflexion (Shinn 2023); frameworks: LangGraph, AutoGen, CrewAI.</a:t>
             </a:r>
@@ -27192,9 +27192,9 @@
                 <a:solidFill>
                   <a:srgbClr val="9A9AB4"/>
                 </a:solidFill>
-                <a:latin typeface="Calibri" pitchFamily="34" charset="0"/>
-                <a:ea typeface="Calibri" pitchFamily="34" charset="-122"/>
-                <a:cs typeface="Calibri" pitchFamily="34" charset="-120"/>
+                <a:latin typeface="Plus Jakarta Sans" pitchFamily="34" charset="0"/>
+                <a:ea typeface="Plus Jakarta Sans" pitchFamily="34" charset="-122"/>
+                <a:cs typeface="Plus Jakarta Sans" pitchFamily="34" charset="-120"/>
               </a:rPr>
               <a:t>6 / 22</a:t>
             </a:r>
@@ -27809,9 +27809,9 @@
                 <a:solidFill>
                   <a:srgbClr val="EE5A29"/>
                 </a:solidFill>
-                <a:latin typeface="Calibri" pitchFamily="34" charset="0"/>
-                <a:ea typeface="Calibri" pitchFamily="34" charset="-122"/>
-                <a:cs typeface="Calibri" pitchFamily="34" charset="-120"/>
+                <a:latin typeface="Plus Jakarta Sans" pitchFamily="34" charset="0"/>
+                <a:ea typeface="Plus Jakarta Sans" pitchFamily="34" charset="-122"/>
+                <a:cs typeface="Plus Jakarta Sans" pitchFamily="34" charset="-120"/>
               </a:rPr>
               <a:t>2026</a:t>
             </a:r>
@@ -27848,9 +27848,9 @@
                 <a:solidFill>
                   <a:srgbClr val="FFFFFF"/>
                 </a:solidFill>
-                <a:latin typeface="Arial" pitchFamily="34" charset="0"/>
-                <a:ea typeface="Arial" pitchFamily="34" charset="-122"/>
-                <a:cs typeface="Arial" pitchFamily="34" charset="-120"/>
+                <a:latin typeface="Plus Jakarta Sans" pitchFamily="34" charset="0"/>
+                <a:ea typeface="Plus Jakarta Sans" pitchFamily="34" charset="-122"/>
+                <a:cs typeface="Plus Jakarta Sans" pitchFamily="34" charset="-120"/>
               </a:rPr>
               <a:t>The Autonomy Shift</a:t>
             </a:r>
@@ -27916,9 +27916,9 @@
                 <a:solidFill>
                   <a:srgbClr val="FFFFFF"/>
                 </a:solidFill>
-                <a:latin typeface="Arial" pitchFamily="34" charset="0"/>
-                <a:ea typeface="Arial" pitchFamily="34" charset="-122"/>
-                <a:cs typeface="Arial" pitchFamily="34" charset="-120"/>
+                <a:latin typeface="Plus Jakarta Sans" pitchFamily="34" charset="0"/>
+                <a:ea typeface="Plus Jakarta Sans" pitchFamily="34" charset="-122"/>
+                <a:cs typeface="Plus Jakarta Sans" pitchFamily="34" charset="-120"/>
               </a:rPr>
               <a:t>Autonomous loops</a:t>
             </a:r>
@@ -27958,9 +27958,9 @@
                 <a:solidFill>
                   <a:srgbClr val="C9C9E6"/>
                 </a:solidFill>
-                <a:latin typeface="Calibri" pitchFamily="34" charset="0"/>
-                <a:ea typeface="Calibri" pitchFamily="34" charset="-122"/>
-                <a:cs typeface="Calibri" pitchFamily="34" charset="-120"/>
+                <a:latin typeface="Plus Jakarta Sans" pitchFamily="34" charset="0"/>
+                <a:ea typeface="Plus Jakarta Sans" pitchFamily="34" charset="-122"/>
+                <a:cs typeface="Plus Jakarta Sans" pitchFamily="34" charset="-120"/>
               </a:rPr>
               <a:t>Self-correcting reason–act–observe cycles replace rigid, human-coded decision trees.</a:t>
             </a:r>
@@ -28026,9 +28026,9 @@
                 <a:solidFill>
                   <a:srgbClr val="FFFFFF"/>
                 </a:solidFill>
-                <a:latin typeface="Arial" pitchFamily="34" charset="0"/>
-                <a:ea typeface="Arial" pitchFamily="34" charset="-122"/>
-                <a:cs typeface="Arial" pitchFamily="34" charset="-120"/>
+                <a:latin typeface="Plus Jakarta Sans" pitchFamily="34" charset="0"/>
+                <a:ea typeface="Plus Jakarta Sans" pitchFamily="34" charset="-122"/>
+                <a:cs typeface="Plus Jakarta Sans" pitchFamily="34" charset="-120"/>
               </a:rPr>
               <a:t>MCP — “USB-C for AI”</a:t>
             </a:r>
@@ -28068,9 +28068,9 @@
                 <a:solidFill>
                   <a:srgbClr val="C9C9E6"/>
                 </a:solidFill>
-                <a:latin typeface="Calibri" pitchFamily="34" charset="0"/>
-                <a:ea typeface="Calibri" pitchFamily="34" charset="-122"/>
-                <a:cs typeface="Calibri" pitchFamily="34" charset="-120"/>
+                <a:latin typeface="Plus Jakarta Sans" pitchFamily="34" charset="0"/>
+                <a:ea typeface="Plus Jakarta Sans" pitchFamily="34" charset="-122"/>
+                <a:cs typeface="Plus Jakarta Sans" pitchFamily="34" charset="-120"/>
               </a:rPr>
               <a:t>The Model Context Protocol standardizes tool/data connections. Adopted by OpenAI &amp; Google; donated to the Linux Foundation (Dec 2025).</a:t>
             </a:r>
@@ -28136,9 +28136,9 @@
                 <a:solidFill>
                   <a:srgbClr val="FFFFFF"/>
                 </a:solidFill>
-                <a:latin typeface="Arial" pitchFamily="34" charset="0"/>
-                <a:ea typeface="Arial" pitchFamily="34" charset="-122"/>
-                <a:cs typeface="Arial" pitchFamily="34" charset="-120"/>
+                <a:latin typeface="Plus Jakarta Sans" pitchFamily="34" charset="0"/>
+                <a:ea typeface="Plus Jakarta Sans" pitchFamily="34" charset="-122"/>
+                <a:cs typeface="Plus Jakarta Sans" pitchFamily="34" charset="-120"/>
               </a:rPr>
               <a:t>Universal “computer use”</a:t>
             </a:r>
@@ -28178,9 +28178,9 @@
                 <a:solidFill>
                   <a:srgbClr val="C9C9E6"/>
                 </a:solidFill>
-                <a:latin typeface="Calibri" pitchFamily="34" charset="0"/>
-                <a:ea typeface="Calibri" pitchFamily="34" charset="-122"/>
-                <a:cs typeface="Calibri" pitchFamily="34" charset="-120"/>
+                <a:latin typeface="Plus Jakarta Sans" pitchFamily="34" charset="0"/>
+                <a:ea typeface="Plus Jakarta Sans" pitchFamily="34" charset="-122"/>
+                <a:cs typeface="Plus Jakarta Sans" pitchFamily="34" charset="-120"/>
               </a:rPr>
               <a:t>Agents drive GUIs, browsers &amp; keyboards like humans. Still hard: ~22% vs ~72% human on OSWorld.</a:t>
             </a:r>
@@ -28246,9 +28246,9 @@
                 <a:solidFill>
                   <a:srgbClr val="FFFFFF"/>
                 </a:solidFill>
-                <a:latin typeface="Arial" pitchFamily="34" charset="0"/>
-                <a:ea typeface="Arial" pitchFamily="34" charset="-122"/>
-                <a:cs typeface="Arial" pitchFamily="34" charset="-120"/>
+                <a:latin typeface="Plus Jakarta Sans" pitchFamily="34" charset="0"/>
+                <a:ea typeface="Plus Jakarta Sans" pitchFamily="34" charset="-122"/>
+                <a:cs typeface="Plus Jakarta Sans" pitchFamily="34" charset="-120"/>
               </a:rPr>
               <a:t>Context engineering</a:t>
             </a:r>
@@ -28288,9 +28288,9 @@
                 <a:solidFill>
                   <a:srgbClr val="C9C9E6"/>
                 </a:solidFill>
-                <a:latin typeface="Calibri" pitchFamily="34" charset="0"/>
-                <a:ea typeface="Calibri" pitchFamily="34" charset="-122"/>
-                <a:cs typeface="Calibri" pitchFamily="34" charset="-120"/>
+                <a:latin typeface="Plus Jakarta Sans" pitchFamily="34" charset="0"/>
+                <a:ea typeface="Plus Jakarta Sans" pitchFamily="34" charset="-122"/>
+                <a:cs typeface="Plus Jakarta Sans" pitchFamily="34" charset="-120"/>
               </a:rPr>
               <a:t>Curating the token budget beats prompt-tweaking. Beware context rot — more tokens ≠ better.</a:t>
             </a:r>
@@ -28356,9 +28356,9 @@
                 <a:solidFill>
                   <a:srgbClr val="FFFFFF"/>
                 </a:solidFill>
-                <a:latin typeface="Arial" pitchFamily="34" charset="0"/>
-                <a:ea typeface="Arial" pitchFamily="34" charset="-122"/>
-                <a:cs typeface="Arial" pitchFamily="34" charset="-120"/>
+                <a:latin typeface="Plus Jakarta Sans" pitchFamily="34" charset="0"/>
+                <a:ea typeface="Plus Jakarta Sans" pitchFamily="34" charset="-122"/>
+                <a:cs typeface="Plus Jakarta Sans" pitchFamily="34" charset="-120"/>
               </a:rPr>
               <a:t>“Harm over failure” risk</a:t>
             </a:r>
@@ -28398,9 +28398,9 @@
                 <a:solidFill>
                   <a:srgbClr val="C9C9E6"/>
                 </a:solidFill>
-                <a:latin typeface="Calibri" pitchFamily="34" charset="0"/>
-                <a:ea typeface="Calibri" pitchFamily="34" charset="-122"/>
-                <a:cs typeface="Calibri" pitchFamily="34" charset="-120"/>
+                <a:latin typeface="Plus Jakarta Sans" pitchFamily="34" charset="0"/>
+                <a:ea typeface="Plus Jakarta Sans" pitchFamily="34" charset="-122"/>
+                <a:cs typeface="Plus Jakarta Sans" pitchFamily="34" charset="-120"/>
               </a:rPr>
               <a:t>Stress tests (Anthropic Agentic Misalignment, Jun 2025) show models may act harmfully to avoid failure — in the lab, not yet in deployment.</a:t>
             </a:r>
@@ -28466,9 +28466,9 @@
                 <a:solidFill>
                   <a:srgbClr val="F6814F"/>
                 </a:solidFill>
-                <a:latin typeface="Arial" pitchFamily="34" charset="0"/>
-                <a:ea typeface="Arial" pitchFamily="34" charset="-122"/>
-                <a:cs typeface="Arial" pitchFamily="34" charset="-120"/>
+                <a:latin typeface="Plus Jakarta Sans" pitchFamily="34" charset="0"/>
+                <a:ea typeface="Plus Jakarta Sans" pitchFamily="34" charset="-122"/>
+                <a:cs typeface="Plus Jakarta Sans" pitchFamily="34" charset="-120"/>
               </a:rPr>
               <a:t>→ The takeaway</a:t>
             </a:r>
@@ -28508,9 +28508,9 @@
                 <a:solidFill>
                   <a:srgbClr val="C9C9E6"/>
                 </a:solidFill>
-                <a:latin typeface="Calibri" pitchFamily="34" charset="0"/>
-                <a:ea typeface="Calibri" pitchFamily="34" charset="-122"/>
-                <a:cs typeface="Calibri" pitchFamily="34" charset="-120"/>
+                <a:latin typeface="Plus Jakarta Sans" pitchFamily="34" charset="0"/>
+                <a:ea typeface="Plus Jakarta Sans" pitchFamily="34" charset="-122"/>
+                <a:cs typeface="Plus Jakarta Sans" pitchFamily="34" charset="-120"/>
               </a:rPr>
               <a:t>More autonomy demands more governance: observability, guardrails, and human oversight.</a:t>
             </a:r>
@@ -28547,9 +28547,9 @@
                 <a:solidFill>
                   <a:srgbClr val="9A9AC4"/>
                 </a:solidFill>
-                <a:latin typeface="Calibri" pitchFamily="34" charset="0"/>
-                <a:ea typeface="Calibri" pitchFamily="34" charset="-122"/>
-                <a:cs typeface="Calibri" pitchFamily="34" charset="-120"/>
+                <a:latin typeface="Plus Jakarta Sans" pitchFamily="34" charset="0"/>
+                <a:ea typeface="Plus Jakarta Sans" pitchFamily="34" charset="-122"/>
+                <a:cs typeface="Plus Jakarta Sans" pitchFamily="34" charset="-120"/>
               </a:rPr>
               <a:t>©2026 Cloudera, Inc. All Rights Reserved.</a:t>
             </a:r>
@@ -28586,9 +28586,9 @@
                 <a:solidFill>
                   <a:srgbClr val="9A9AC4"/>
                 </a:solidFill>
-                <a:latin typeface="Calibri" pitchFamily="34" charset="0"/>
-                <a:ea typeface="Calibri" pitchFamily="34" charset="-122"/>
-                <a:cs typeface="Calibri" pitchFamily="34" charset="-120"/>
+                <a:latin typeface="Plus Jakarta Sans" pitchFamily="34" charset="0"/>
+                <a:ea typeface="Plus Jakarta Sans" pitchFamily="34" charset="-122"/>
+                <a:cs typeface="Plus Jakarta Sans" pitchFamily="34" charset="-120"/>
               </a:rPr>
               <a:t>7 / 22</a:t>
             </a:r>
@@ -28657,9 +28657,9 @@
                 <a:solidFill>
                   <a:srgbClr val="EE5A29"/>
                 </a:solidFill>
-                <a:latin typeface="Arial" pitchFamily="34" charset="0"/>
-                <a:ea typeface="Arial" pitchFamily="34" charset="-122"/>
-                <a:cs typeface="Arial" pitchFamily="34" charset="-120"/>
+                <a:latin typeface="Plus Jakarta Sans" pitchFamily="34" charset="0"/>
+                <a:ea typeface="Plus Jakarta Sans" pitchFamily="34" charset="-122"/>
+                <a:cs typeface="Plus Jakarta Sans" pitchFamily="34" charset="-120"/>
               </a:rPr>
               <a:t>CLOUD</a:t>
             </a:r>
@@ -28671,9 +28671,9 @@
                 <a:solidFill>
                   <a:srgbClr val="EE5A29"/>
                 </a:solidFill>
-                <a:latin typeface="Arial" pitchFamily="34" charset="0"/>
-                <a:ea typeface="Arial" pitchFamily="34" charset="-122"/>
-                <a:cs typeface="Arial" pitchFamily="34" charset="-120"/>
+                <a:latin typeface="Plus Jakarta Sans" pitchFamily="34" charset="0"/>
+                <a:ea typeface="Plus Jakarta Sans" pitchFamily="34" charset="-122"/>
+                <a:cs typeface="Plus Jakarta Sans" pitchFamily="34" charset="-120"/>
               </a:rPr>
               <a:t>E</a:t>
             </a:r>
@@ -28685,9 +28685,9 @@
                 <a:solidFill>
                   <a:srgbClr val="EE5A29"/>
                 </a:solidFill>
-                <a:latin typeface="Arial" pitchFamily="34" charset="0"/>
-                <a:ea typeface="Arial" pitchFamily="34" charset="-122"/>
-                <a:cs typeface="Arial" pitchFamily="34" charset="-120"/>
+                <a:latin typeface="Plus Jakarta Sans" pitchFamily="34" charset="0"/>
+                <a:ea typeface="Plus Jakarta Sans" pitchFamily="34" charset="-122"/>
+                <a:cs typeface="Plus Jakarta Sans" pitchFamily="34" charset="-120"/>
               </a:rPr>
               <a:t>RA</a:t>
             </a:r>
@@ -28744,9 +28744,9 @@
                 <a:solidFill>
                   <a:srgbClr val="EE5A29"/>
                 </a:solidFill>
-                <a:latin typeface="Calibri" pitchFamily="34" charset="0"/>
-                <a:ea typeface="Calibri" pitchFamily="34" charset="-122"/>
-                <a:cs typeface="Calibri" pitchFamily="34" charset="-120"/>
+                <a:latin typeface="Plus Jakarta Sans" pitchFamily="34" charset="0"/>
+                <a:ea typeface="Plus Jakarta Sans" pitchFamily="34" charset="-122"/>
+                <a:cs typeface="Plus Jakarta Sans" pitchFamily="34" charset="-120"/>
               </a:rPr>
               <a:t>ANATOMY OF AN AGENT</a:t>
             </a:r>
@@ -28783,9 +28783,9 @@
                 <a:solidFill>
                   <a:srgbClr val="15154A"/>
                 </a:solidFill>
-                <a:latin typeface="Arial" pitchFamily="34" charset="0"/>
-                <a:ea typeface="Arial" pitchFamily="34" charset="-122"/>
-                <a:cs typeface="Arial" pitchFamily="34" charset="-120"/>
+                <a:latin typeface="Plus Jakarta Sans" pitchFamily="34" charset="0"/>
+                <a:ea typeface="Plus Jakarta Sans" pitchFamily="34" charset="-122"/>
+                <a:cs typeface="Plus Jakarta Sans" pitchFamily="34" charset="-120"/>
               </a:rPr>
               <a:t>Three Things Make an Agent Work</a:t>
             </a:r>
@@ -28903,9 +28903,9 @@
                 <a:solidFill>
                   <a:srgbClr val="EE5A29"/>
                 </a:solidFill>
-                <a:latin typeface="Arial" pitchFamily="34" charset="0"/>
-                <a:ea typeface="Arial" pitchFamily="34" charset="-122"/>
-                <a:cs typeface="Arial" pitchFamily="34" charset="-120"/>
+                <a:latin typeface="Plus Jakarta Sans" pitchFamily="34" charset="0"/>
+                <a:ea typeface="Plus Jakarta Sans" pitchFamily="34" charset="-122"/>
+                <a:cs typeface="Plus Jakarta Sans" pitchFamily="34" charset="-120"/>
               </a:rPr>
               <a:t>1</a:t>
             </a:r>
@@ -28942,9 +28942,9 @@
                 <a:solidFill>
                   <a:srgbClr val="15154A"/>
                 </a:solidFill>
-                <a:latin typeface="Arial" pitchFamily="34" charset="0"/>
-                <a:ea typeface="Arial" pitchFamily="34" charset="-122"/>
-                <a:cs typeface="Arial" pitchFamily="34" charset="-120"/>
+                <a:latin typeface="Plus Jakarta Sans" pitchFamily="34" charset="0"/>
+                <a:ea typeface="Plus Jakarta Sans" pitchFamily="34" charset="-122"/>
+                <a:cs typeface="Plus Jakarta Sans" pitchFamily="34" charset="-120"/>
               </a:rPr>
               <a:t>Tools</a:t>
             </a:r>
@@ -28984,9 +28984,9 @@
                 <a:solidFill>
                   <a:srgbClr val="5A5A72"/>
                 </a:solidFill>
-                <a:latin typeface="Calibri" pitchFamily="34" charset="0"/>
-                <a:ea typeface="Calibri" pitchFamily="34" charset="-122"/>
-                <a:cs typeface="Calibri" pitchFamily="34" charset="-120"/>
+                <a:latin typeface="Plus Jakarta Sans" pitchFamily="34" charset="0"/>
+                <a:ea typeface="Plus Jakarta Sans" pitchFamily="34" charset="-122"/>
+                <a:cs typeface="Plus Jakarta Sans" pitchFamily="34" charset="-120"/>
               </a:rPr>
               <a:t>How the agent acts on the world — APIs, search, code execution, MCP servers. Tool design directly drives task accuracy.</a:t>
             </a:r>
@@ -29104,9 +29104,9 @@
                 <a:solidFill>
                   <a:srgbClr val="4F4FF5"/>
                 </a:solidFill>
-                <a:latin typeface="Arial" pitchFamily="34" charset="0"/>
-                <a:ea typeface="Arial" pitchFamily="34" charset="-122"/>
-                <a:cs typeface="Arial" pitchFamily="34" charset="-120"/>
+                <a:latin typeface="Plus Jakarta Sans" pitchFamily="34" charset="0"/>
+                <a:ea typeface="Plus Jakarta Sans" pitchFamily="34" charset="-122"/>
+                <a:cs typeface="Plus Jakarta Sans" pitchFamily="34" charset="-120"/>
               </a:rPr>
               <a:t>2</a:t>
             </a:r>
@@ -29143,9 +29143,9 @@
                 <a:solidFill>
                   <a:srgbClr val="15154A"/>
                 </a:solidFill>
-                <a:latin typeface="Arial" pitchFamily="34" charset="0"/>
-                <a:ea typeface="Arial" pitchFamily="34" charset="-122"/>
-                <a:cs typeface="Arial" pitchFamily="34" charset="-120"/>
+                <a:latin typeface="Plus Jakarta Sans" pitchFamily="34" charset="0"/>
+                <a:ea typeface="Plus Jakarta Sans" pitchFamily="34" charset="-122"/>
+                <a:cs typeface="Plus Jakarta Sans" pitchFamily="34" charset="-120"/>
               </a:rPr>
               <a:t>Memory</a:t>
             </a:r>
@@ -29185,9 +29185,9 @@
                 <a:solidFill>
                   <a:srgbClr val="5A5A72"/>
                 </a:solidFill>
-                <a:latin typeface="Calibri" pitchFamily="34" charset="0"/>
-                <a:ea typeface="Calibri" pitchFamily="34" charset="-122"/>
-                <a:cs typeface="Calibri" pitchFamily="34" charset="-120"/>
+                <a:latin typeface="Plus Jakarta Sans" pitchFamily="34" charset="0"/>
+                <a:ea typeface="Plus Jakarta Sans" pitchFamily="34" charset="-122"/>
+                <a:cs typeface="Plus Jakarta Sans" pitchFamily="34" charset="-120"/>
               </a:rPr>
               <a:t>How the agent remembers — factual, experiential, and working memory across a task and over time.</a:t>
             </a:r>
@@ -29305,9 +29305,9 @@
                 <a:solidFill>
                   <a:srgbClr val="EE5A29"/>
                 </a:solidFill>
-                <a:latin typeface="Arial" pitchFamily="34" charset="0"/>
-                <a:ea typeface="Arial" pitchFamily="34" charset="-122"/>
-                <a:cs typeface="Arial" pitchFamily="34" charset="-120"/>
+                <a:latin typeface="Plus Jakarta Sans" pitchFamily="34" charset="0"/>
+                <a:ea typeface="Plus Jakarta Sans" pitchFamily="34" charset="-122"/>
+                <a:cs typeface="Plus Jakarta Sans" pitchFamily="34" charset="-120"/>
               </a:rPr>
               <a:t>3</a:t>
             </a:r>
@@ -29344,9 +29344,9 @@
                 <a:solidFill>
                   <a:srgbClr val="15154A"/>
                 </a:solidFill>
-                <a:latin typeface="Arial" pitchFamily="34" charset="0"/>
-                <a:ea typeface="Arial" pitchFamily="34" charset="-122"/>
-                <a:cs typeface="Arial" pitchFamily="34" charset="-120"/>
+                <a:latin typeface="Plus Jakarta Sans" pitchFamily="34" charset="0"/>
+                <a:ea typeface="Plus Jakarta Sans" pitchFamily="34" charset="-122"/>
+                <a:cs typeface="Plus Jakarta Sans" pitchFamily="34" charset="-120"/>
               </a:rPr>
               <a:t>Control</a:t>
             </a:r>
@@ -29386,9 +29386,9 @@
                 <a:solidFill>
                   <a:srgbClr val="5A5A72"/>
                 </a:solidFill>
-                <a:latin typeface="Calibri" pitchFamily="34" charset="0"/>
-                <a:ea typeface="Calibri" pitchFamily="34" charset="-122"/>
-                <a:cs typeface="Calibri" pitchFamily="34" charset="-120"/>
+                <a:latin typeface="Plus Jakarta Sans" pitchFamily="34" charset="0"/>
+                <a:ea typeface="Plus Jakarta Sans" pitchFamily="34" charset="-122"/>
+                <a:cs typeface="Plus Jakarta Sans" pitchFamily="34" charset="-120"/>
               </a:rPr>
               <a:t>How the agent decides — the reasoning loop and orchestration that turn a model into an operator.</a:t>
             </a:r>
@@ -29425,9 +29425,9 @@
                 <a:solidFill>
                   <a:srgbClr val="5A5A72"/>
                 </a:solidFill>
-                <a:latin typeface="Calibri" pitchFamily="34" charset="0"/>
-                <a:ea typeface="Calibri" pitchFamily="34" charset="-122"/>
-                <a:cs typeface="Calibri" pitchFamily="34" charset="-120"/>
+                <a:latin typeface="Plus Jakarta Sans" pitchFamily="34" charset="0"/>
+                <a:ea typeface="Plus Jakarta Sans" pitchFamily="34" charset="-122"/>
+                <a:cs typeface="Plus Jakarta Sans" pitchFamily="34" charset="-120"/>
               </a:rPr>
               <a:t>Next: a closer look at </a:t>
             </a:r>
@@ -29439,9 +29439,9 @@
                 <a:solidFill>
                   <a:srgbClr val="15154A"/>
                 </a:solidFill>
-                <a:latin typeface="Calibri" pitchFamily="34" charset="0"/>
-                <a:ea typeface="Calibri" pitchFamily="34" charset="-122"/>
-                <a:cs typeface="Calibri" pitchFamily="34" charset="-120"/>
+                <a:latin typeface="Plus Jakarta Sans" pitchFamily="34" charset="0"/>
+                <a:ea typeface="Plus Jakarta Sans" pitchFamily="34" charset="-122"/>
+                <a:cs typeface="Plus Jakarta Sans" pitchFamily="34" charset="-120"/>
               </a:rPr>
               <a:t>Tools</a:t>
             </a:r>
@@ -29453,9 +29453,9 @@
                 <a:solidFill>
                   <a:srgbClr val="5A5A72"/>
                 </a:solidFill>
-                <a:latin typeface="Calibri" pitchFamily="34" charset="0"/>
-                <a:ea typeface="Calibri" pitchFamily="34" charset="-122"/>
-                <a:cs typeface="Calibri" pitchFamily="34" charset="-120"/>
+                <a:latin typeface="Plus Jakarta Sans" pitchFamily="34" charset="0"/>
+                <a:ea typeface="Plus Jakarta Sans" pitchFamily="34" charset="-122"/>
+                <a:cs typeface="Plus Jakarta Sans" pitchFamily="34" charset="-120"/>
               </a:rPr>
               <a:t> and </a:t>
             </a:r>
@@ -29467,9 +29467,9 @@
                 <a:solidFill>
                   <a:srgbClr val="15154A"/>
                 </a:solidFill>
-                <a:latin typeface="Calibri" pitchFamily="34" charset="0"/>
-                <a:ea typeface="Calibri" pitchFamily="34" charset="-122"/>
-                <a:cs typeface="Calibri" pitchFamily="34" charset="-120"/>
+                <a:latin typeface="Plus Jakarta Sans" pitchFamily="34" charset="0"/>
+                <a:ea typeface="Plus Jakarta Sans" pitchFamily="34" charset="-122"/>
+                <a:cs typeface="Plus Jakarta Sans" pitchFamily="34" charset="-120"/>
               </a:rPr>
               <a:t>Memory</a:t>
             </a:r>
@@ -29481,9 +29481,9 @@
                 <a:solidFill>
                   <a:srgbClr val="5A5A72"/>
                 </a:solidFill>
-                <a:latin typeface="Calibri" pitchFamily="34" charset="0"/>
-                <a:ea typeface="Calibri" pitchFamily="34" charset="-122"/>
-                <a:cs typeface="Calibri" pitchFamily="34" charset="-120"/>
+                <a:latin typeface="Plus Jakarta Sans" pitchFamily="34" charset="0"/>
+                <a:ea typeface="Plus Jakarta Sans" pitchFamily="34" charset="-122"/>
+                <a:cs typeface="Plus Jakarta Sans" pitchFamily="34" charset="-120"/>
               </a:rPr>
               <a:t>.</a:t>
             </a:r>
@@ -29520,9 +29520,9 @@
                 <a:solidFill>
                   <a:srgbClr val="9A9AB4"/>
                 </a:solidFill>
-                <a:latin typeface="Calibri" pitchFamily="34" charset="0"/>
-                <a:ea typeface="Calibri" pitchFamily="34" charset="-122"/>
-                <a:cs typeface="Calibri" pitchFamily="34" charset="-120"/>
+                <a:latin typeface="Plus Jakarta Sans" pitchFamily="34" charset="0"/>
+                <a:ea typeface="Plus Jakarta Sans" pitchFamily="34" charset="-122"/>
+                <a:cs typeface="Plus Jakarta Sans" pitchFamily="34" charset="-120"/>
               </a:rPr>
               <a:t>©2026 Cloudera, Inc. All Rights Reserved.</a:t>
             </a:r>
@@ -29559,9 +29559,9 @@
                 <a:solidFill>
                   <a:srgbClr val="9A9AB4"/>
                 </a:solidFill>
-                <a:latin typeface="Calibri" pitchFamily="34" charset="0"/>
-                <a:ea typeface="Calibri" pitchFamily="34" charset="-122"/>
-                <a:cs typeface="Calibri" pitchFamily="34" charset="-120"/>
+                <a:latin typeface="Plus Jakarta Sans" pitchFamily="34" charset="0"/>
+                <a:ea typeface="Plus Jakarta Sans" pitchFamily="34" charset="-122"/>
+                <a:cs typeface="Plus Jakarta Sans" pitchFamily="34" charset="-120"/>
               </a:rPr>
               <a:t>8 / 22</a:t>
             </a:r>
@@ -29630,9 +29630,9 @@
                 <a:solidFill>
                   <a:srgbClr val="EE5A29"/>
                 </a:solidFill>
-                <a:latin typeface="Arial" pitchFamily="34" charset="0"/>
-                <a:ea typeface="Arial" pitchFamily="34" charset="-122"/>
-                <a:cs typeface="Arial" pitchFamily="34" charset="-120"/>
+                <a:latin typeface="Plus Jakarta Sans" pitchFamily="34" charset="0"/>
+                <a:ea typeface="Plus Jakarta Sans" pitchFamily="34" charset="-122"/>
+                <a:cs typeface="Plus Jakarta Sans" pitchFamily="34" charset="-120"/>
               </a:rPr>
               <a:t>CLOUD</a:t>
             </a:r>
@@ -29644,9 +29644,9 @@
                 <a:solidFill>
                   <a:srgbClr val="EE5A29"/>
                 </a:solidFill>
-                <a:latin typeface="Arial" pitchFamily="34" charset="0"/>
-                <a:ea typeface="Arial" pitchFamily="34" charset="-122"/>
-                <a:cs typeface="Arial" pitchFamily="34" charset="-120"/>
+                <a:latin typeface="Plus Jakarta Sans" pitchFamily="34" charset="0"/>
+                <a:ea typeface="Plus Jakarta Sans" pitchFamily="34" charset="-122"/>
+                <a:cs typeface="Plus Jakarta Sans" pitchFamily="34" charset="-120"/>
               </a:rPr>
               <a:t>E</a:t>
             </a:r>
@@ -29658,9 +29658,9 @@
                 <a:solidFill>
                   <a:srgbClr val="EE5A29"/>
                 </a:solidFill>
-                <a:latin typeface="Arial" pitchFamily="34" charset="0"/>
-                <a:ea typeface="Arial" pitchFamily="34" charset="-122"/>
-                <a:cs typeface="Arial" pitchFamily="34" charset="-120"/>
+                <a:latin typeface="Plus Jakarta Sans" pitchFamily="34" charset="0"/>
+                <a:ea typeface="Plus Jakarta Sans" pitchFamily="34" charset="-122"/>
+                <a:cs typeface="Plus Jakarta Sans" pitchFamily="34" charset="-120"/>
               </a:rPr>
               <a:t>RA</a:t>
             </a:r>
@@ -29717,9 +29717,9 @@
                 <a:solidFill>
                   <a:srgbClr val="EE5A29"/>
                 </a:solidFill>
-                <a:latin typeface="Calibri" pitchFamily="34" charset="0"/>
-                <a:ea typeface="Calibri" pitchFamily="34" charset="-122"/>
-                <a:cs typeface="Calibri" pitchFamily="34" charset="-120"/>
+                <a:latin typeface="Plus Jakarta Sans" pitchFamily="34" charset="0"/>
+                <a:ea typeface="Plus Jakarta Sans" pitchFamily="34" charset="-122"/>
+                <a:cs typeface="Plus Jakarta Sans" pitchFamily="34" charset="-120"/>
               </a:rPr>
               <a:t>FROM CHATBOT TO REAL AI AGENT</a:t>
             </a:r>
@@ -29756,9 +29756,9 @@
                 <a:solidFill>
                   <a:srgbClr val="15154A"/>
                 </a:solidFill>
-                <a:latin typeface="Arial" pitchFamily="34" charset="0"/>
-                <a:ea typeface="Arial" pitchFamily="34" charset="-122"/>
-                <a:cs typeface="Arial" pitchFamily="34" charset="-120"/>
+                <a:latin typeface="Plus Jakarta Sans" pitchFamily="34" charset="0"/>
+                <a:ea typeface="Plus Jakarta Sans" pitchFamily="34" charset="-122"/>
+                <a:cs typeface="Plus Jakarta Sans" pitchFamily="34" charset="-120"/>
               </a:rPr>
               <a:t>Tools Are Important</a:t>
             </a:r>
@@ -29808,16 +29808,16 @@
                           <a:solidFill>
                             <a:srgbClr val="FFFFFF"/>
                           </a:solidFill>
-                          <a:latin typeface="Calibri" pitchFamily="34" charset="0"/>
-                          <a:ea typeface="Calibri" pitchFamily="34" charset="-122"/>
-                          <a:cs typeface="Calibri" pitchFamily="34" charset="-120"/>
+                          <a:latin typeface="Plus Jakarta Sans" pitchFamily="34" charset="0"/>
+                          <a:ea typeface="Plus Jakarta Sans" pitchFamily="34" charset="-122"/>
+                          <a:cs typeface="Plus Jakarta Sans" pitchFamily="34" charset="-120"/>
                         </a:rPr>
                         <a:t>Concept</a:t>
                       </a:r>
                       <a:endParaRPr lang="en-US" sz="950" dirty="0">
-                        <a:latin typeface="Calibri" charset="0"/>
-                        <a:ea typeface="Calibri" charset="0"/>
-                        <a:cs typeface="Calibri" charset="0"/>
+                        <a:latin typeface="Plus Jakarta Sans" charset="0"/>
+                        <a:ea typeface="Plus Jakarta Sans" charset="0"/>
+                        <a:cs typeface="Plus Jakarta Sans" charset="0"/>
                       </a:endParaRPr>
                     </a:p>
                   </a:txBody>
@@ -29876,16 +29876,16 @@
                           <a:solidFill>
                             <a:srgbClr val="FFFFFF"/>
                           </a:solidFill>
-                          <a:latin typeface="Calibri" pitchFamily="34" charset="0"/>
-                          <a:ea typeface="Calibri" pitchFamily="34" charset="-122"/>
-                          <a:cs typeface="Calibri" pitchFamily="34" charset="-120"/>
+                          <a:latin typeface="Plus Jakarta Sans" pitchFamily="34" charset="0"/>
+                          <a:ea typeface="Plus Jakarta Sans" pitchFamily="34" charset="-122"/>
+                          <a:cs typeface="Plus Jakarta Sans" pitchFamily="34" charset="-120"/>
                         </a:rPr>
                         <a:t>The challenge</a:t>
                       </a:r>
                       <a:endParaRPr lang="en-US" sz="950" dirty="0">
-                        <a:latin typeface="Calibri" charset="0"/>
-                        <a:ea typeface="Calibri" charset="0"/>
-                        <a:cs typeface="Calibri" charset="0"/>
+                        <a:latin typeface="Plus Jakarta Sans" charset="0"/>
+                        <a:ea typeface="Plus Jakarta Sans" charset="0"/>
+                        <a:cs typeface="Plus Jakarta Sans" charset="0"/>
                       </a:endParaRPr>
                     </a:p>
                   </a:txBody>
@@ -29944,16 +29944,16 @@
                           <a:solidFill>
                             <a:srgbClr val="FFFFFF"/>
                           </a:solidFill>
-                          <a:latin typeface="Calibri" pitchFamily="34" charset="0"/>
-                          <a:ea typeface="Calibri" pitchFamily="34" charset="-122"/>
-                          <a:cs typeface="Calibri" pitchFamily="34" charset="-120"/>
+                          <a:latin typeface="Plus Jakarta Sans" pitchFamily="34" charset="0"/>
+                          <a:ea typeface="Plus Jakarta Sans" pitchFamily="34" charset="-122"/>
+                          <a:cs typeface="Plus Jakarta Sans" pitchFamily="34" charset="-120"/>
                         </a:rPr>
                         <a:t>Best practice</a:t>
                       </a:r>
                       <a:endParaRPr lang="en-US" sz="950" dirty="0">
-                        <a:latin typeface="Calibri" charset="0"/>
-                        <a:ea typeface="Calibri" charset="0"/>
-                        <a:cs typeface="Calibri" charset="0"/>
+                        <a:latin typeface="Plus Jakarta Sans" charset="0"/>
+                        <a:ea typeface="Plus Jakarta Sans" charset="0"/>
+                        <a:cs typeface="Plus Jakarta Sans" charset="0"/>
                       </a:endParaRPr>
                     </a:p>
                   </a:txBody>
@@ -30012,16 +30012,16 @@
                           <a:solidFill>
                             <a:srgbClr val="FFFFFF"/>
                           </a:solidFill>
-                          <a:latin typeface="Calibri" pitchFamily="34" charset="0"/>
-                          <a:ea typeface="Calibri" pitchFamily="34" charset="-122"/>
-                          <a:cs typeface="Calibri" pitchFamily="34" charset="-120"/>
+                          <a:latin typeface="Plus Jakarta Sans" pitchFamily="34" charset="0"/>
+                          <a:ea typeface="Plus Jakarta Sans" pitchFamily="34" charset="-122"/>
+                          <a:cs typeface="Plus Jakarta Sans" pitchFamily="34" charset="-120"/>
                         </a:rPr>
                         <a:t>Impact</a:t>
                       </a:r>
                       <a:endParaRPr lang="en-US" sz="950" dirty="0">
-                        <a:latin typeface="Calibri" charset="0"/>
-                        <a:ea typeface="Calibri" charset="0"/>
-                        <a:cs typeface="Calibri" charset="0"/>
+                        <a:latin typeface="Plus Jakarta Sans" charset="0"/>
+                        <a:ea typeface="Plus Jakarta Sans" charset="0"/>
+                        <a:cs typeface="Plus Jakarta Sans" charset="0"/>
                       </a:endParaRPr>
                     </a:p>
                   </a:txBody>
@@ -30082,16 +30082,16 @@
                           <a:solidFill>
                             <a:srgbClr val="15154A"/>
                           </a:solidFill>
-                          <a:latin typeface="Calibri" pitchFamily="34" charset="0"/>
-                          <a:ea typeface="Calibri" pitchFamily="34" charset="-122"/>
-                          <a:cs typeface="Calibri" pitchFamily="34" charset="-120"/>
+                          <a:latin typeface="Plus Jakarta Sans" pitchFamily="34" charset="0"/>
+                          <a:ea typeface="Plus Jakarta Sans" pitchFamily="34" charset="-122"/>
+                          <a:cs typeface="Plus Jakarta Sans" pitchFamily="34" charset="-120"/>
                         </a:rPr>
                         <a:t>Tool descriptions</a:t>
                       </a:r>
                       <a:endParaRPr lang="en-US" sz="900" dirty="0">
-                        <a:latin typeface="Calibri" charset="0"/>
-                        <a:ea typeface="Calibri" charset="0"/>
-                        <a:cs typeface="Calibri" charset="0"/>
+                        <a:latin typeface="Plus Jakarta Sans" charset="0"/>
+                        <a:ea typeface="Plus Jakarta Sans" charset="0"/>
+                        <a:cs typeface="Plus Jakarta Sans" charset="0"/>
                       </a:endParaRPr>
                     </a:p>
                   </a:txBody>
@@ -30150,16 +30150,16 @@
                           <a:solidFill>
                             <a:srgbClr val="5A5A72"/>
                           </a:solidFill>
-                          <a:latin typeface="Calibri" pitchFamily="34" charset="0"/>
-                          <a:ea typeface="Calibri" pitchFamily="34" charset="-122"/>
-                          <a:cs typeface="Calibri" pitchFamily="34" charset="-120"/>
+                          <a:latin typeface="Plus Jakarta Sans" pitchFamily="34" charset="0"/>
+                          <a:ea typeface="Plus Jakarta Sans" pitchFamily="34" charset="-122"/>
+                          <a:cs typeface="Plus Jakarta Sans" pitchFamily="34" charset="-120"/>
                         </a:rPr>
                         <a:t>Injected into the system prompt — easily overlooked</a:t>
                       </a:r>
                       <a:endParaRPr lang="en-US" sz="900" dirty="0">
-                        <a:latin typeface="Calibri" charset="0"/>
-                        <a:ea typeface="Calibri" charset="0"/>
-                        <a:cs typeface="Calibri" charset="0"/>
+                        <a:latin typeface="Plus Jakarta Sans" charset="0"/>
+                        <a:ea typeface="Plus Jakarta Sans" charset="0"/>
+                        <a:cs typeface="Plus Jakarta Sans" charset="0"/>
                       </a:endParaRPr>
                     </a:p>
                   </a:txBody>
@@ -30218,16 +30218,16 @@
                           <a:solidFill>
                             <a:srgbClr val="5A5A72"/>
                           </a:solidFill>
-                          <a:latin typeface="Calibri" pitchFamily="34" charset="0"/>
-                          <a:ea typeface="Calibri" pitchFamily="34" charset="-122"/>
-                          <a:cs typeface="Calibri" pitchFamily="34" charset="-120"/>
+                          <a:latin typeface="Plus Jakarta Sans" pitchFamily="34" charset="0"/>
+                          <a:ea typeface="Plus Jakarta Sans" pitchFamily="34" charset="-122"/>
+                          <a:cs typeface="Plus Jakarta Sans" pitchFamily="34" charset="-120"/>
                         </a:rPr>
                         <a:t>Treat as prompt engineering: clear, specific, 3–4 sentences, with examples</a:t>
                       </a:r>
                       <a:endParaRPr lang="en-US" sz="900" dirty="0">
-                        <a:latin typeface="Calibri" charset="0"/>
-                        <a:ea typeface="Calibri" charset="0"/>
-                        <a:cs typeface="Calibri" charset="0"/>
+                        <a:latin typeface="Plus Jakarta Sans" charset="0"/>
+                        <a:ea typeface="Plus Jakarta Sans" charset="0"/>
+                        <a:cs typeface="Plus Jakarta Sans" charset="0"/>
                       </a:endParaRPr>
                     </a:p>
                   </a:txBody>
@@ -30286,16 +30286,16 @@
                           <a:solidFill>
                             <a:srgbClr val="5A5A72"/>
                           </a:solidFill>
-                          <a:latin typeface="Calibri" pitchFamily="34" charset="0"/>
-                          <a:ea typeface="Calibri" pitchFamily="34" charset="-122"/>
-                          <a:cs typeface="Calibri" pitchFamily="34" charset="-120"/>
+                          <a:latin typeface="Plus Jakarta Sans" pitchFamily="34" charset="0"/>
+                          <a:ea typeface="Plus Jakarta Sans" pitchFamily="34" charset="-122"/>
+                          <a:cs typeface="Plus Jakarta Sans" pitchFamily="34" charset="-120"/>
                         </a:rPr>
                         <a:t>“The most important factor in tool performance”</a:t>
                       </a:r>
                       <a:endParaRPr lang="en-US" sz="900" dirty="0">
-                        <a:latin typeface="Calibri" charset="0"/>
-                        <a:ea typeface="Calibri" charset="0"/>
-                        <a:cs typeface="Calibri" charset="0"/>
+                        <a:latin typeface="Plus Jakarta Sans" charset="0"/>
+                        <a:ea typeface="Plus Jakarta Sans" charset="0"/>
+                        <a:cs typeface="Plus Jakarta Sans" charset="0"/>
                       </a:endParaRPr>
                     </a:p>
                   </a:txBody>
@@ -30356,16 +30356,16 @@
                           <a:solidFill>
                             <a:srgbClr val="15154A"/>
                           </a:solidFill>
-                          <a:latin typeface="Calibri" pitchFamily="34" charset="0"/>
-                          <a:ea typeface="Calibri" pitchFamily="34" charset="-122"/>
-                          <a:cs typeface="Calibri" pitchFamily="34" charset="-120"/>
+                          <a:latin typeface="Plus Jakarta Sans" pitchFamily="34" charset="0"/>
+                          <a:ea typeface="Plus Jakarta Sans" pitchFamily="34" charset="-122"/>
+                          <a:cs typeface="Plus Jakarta Sans" pitchFamily="34" charset="-120"/>
                         </a:rPr>
                         <a:t>Overlapping tools</a:t>
                       </a:r>
                       <a:endParaRPr lang="en-US" sz="900" dirty="0">
-                        <a:latin typeface="Calibri" charset="0"/>
-                        <a:ea typeface="Calibri" charset="0"/>
-                        <a:cs typeface="Calibri" charset="0"/>
+                        <a:latin typeface="Plus Jakarta Sans" charset="0"/>
+                        <a:ea typeface="Plus Jakarta Sans" charset="0"/>
+                        <a:cs typeface="Plus Jakarta Sans" charset="0"/>
                       </a:endParaRPr>
                     </a:p>
                   </a:txBody>
@@ -30424,16 +30424,16 @@
                           <a:solidFill>
                             <a:srgbClr val="5A5A72"/>
                           </a:solidFill>
-                          <a:latin typeface="Calibri" pitchFamily="34" charset="0"/>
-                          <a:ea typeface="Calibri" pitchFamily="34" charset="-122"/>
-                          <a:cs typeface="Calibri" pitchFamily="34" charset="-120"/>
+                          <a:latin typeface="Plus Jakarta Sans" pitchFamily="34" charset="0"/>
+                          <a:ea typeface="Plus Jakarta Sans" pitchFamily="34" charset="-122"/>
+                          <a:cs typeface="Plus Jakarta Sans" pitchFamily="34" charset="-120"/>
                         </a:rPr>
                         <a:t>Models confuse similar tools (Web vs Drive search)</a:t>
                       </a:r>
                       <a:endParaRPr lang="en-US" sz="900" dirty="0">
-                        <a:latin typeface="Calibri" charset="0"/>
-                        <a:ea typeface="Calibri" charset="0"/>
-                        <a:cs typeface="Calibri" charset="0"/>
+                        <a:latin typeface="Plus Jakarta Sans" charset="0"/>
+                        <a:ea typeface="Plus Jakarta Sans" charset="0"/>
+                        <a:cs typeface="Plus Jakarta Sans" charset="0"/>
                       </a:endParaRPr>
                     </a:p>
                   </a:txBody>
@@ -30492,16 +30492,16 @@
                           <a:solidFill>
                             <a:srgbClr val="5A5A72"/>
                           </a:solidFill>
-                          <a:latin typeface="Calibri" pitchFamily="34" charset="0"/>
-                          <a:ea typeface="Calibri" pitchFamily="34" charset="-122"/>
-                          <a:cs typeface="Calibri" pitchFamily="34" charset="-120"/>
+                          <a:latin typeface="Plus Jakarta Sans" pitchFamily="34" charset="0"/>
+                          <a:ea typeface="Plus Jakarta Sans" pitchFamily="34" charset="-122"/>
+                          <a:cs typeface="Plus Jakarta Sans" pitchFamily="34" charset="-120"/>
                         </a:rPr>
                         <a:t>Consolidate &amp; use namespace_ prefixes; scope each tool</a:t>
                       </a:r>
                       <a:endParaRPr lang="en-US" sz="900" dirty="0">
-                        <a:latin typeface="Calibri" charset="0"/>
-                        <a:ea typeface="Calibri" charset="0"/>
-                        <a:cs typeface="Calibri" charset="0"/>
+                        <a:latin typeface="Plus Jakarta Sans" charset="0"/>
+                        <a:ea typeface="Plus Jakarta Sans" charset="0"/>
+                        <a:cs typeface="Plus Jakarta Sans" charset="0"/>
                       </a:endParaRPr>
                     </a:p>
                   </a:txBody>
@@ -30560,16 +30560,16 @@
                           <a:solidFill>
                             <a:srgbClr val="5A5A72"/>
                           </a:solidFill>
-                          <a:latin typeface="Calibri" pitchFamily="34" charset="0"/>
-                          <a:ea typeface="Calibri" pitchFamily="34" charset="-122"/>
-                          <a:cs typeface="Calibri" pitchFamily="34" charset="-120"/>
+                          <a:latin typeface="Plus Jakarta Sans" pitchFamily="34" charset="0"/>
+                          <a:ea typeface="Plus Jakarta Sans" pitchFamily="34" charset="-122"/>
+                          <a:cs typeface="Plus Jakarta Sans" pitchFamily="34" charset="-120"/>
                         </a:rPr>
                         <a:t>Removes a key failure mode</a:t>
                       </a:r>
                       <a:endParaRPr lang="en-US" sz="900" dirty="0">
-                        <a:latin typeface="Calibri" charset="0"/>
-                        <a:ea typeface="Calibri" charset="0"/>
-                        <a:cs typeface="Calibri" charset="0"/>
+                        <a:latin typeface="Plus Jakarta Sans" charset="0"/>
+                        <a:ea typeface="Plus Jakarta Sans" charset="0"/>
+                        <a:cs typeface="Plus Jakarta Sans" charset="0"/>
                       </a:endParaRPr>
                     </a:p>
                   </a:txBody>
@@ -30630,16 +30630,16 @@
                           <a:solidFill>
                             <a:srgbClr val="15154A"/>
                           </a:solidFill>
-                          <a:latin typeface="Calibri" pitchFamily="34" charset="0"/>
-                          <a:ea typeface="Calibri" pitchFamily="34" charset="-122"/>
-                          <a:cs typeface="Calibri" pitchFamily="34" charset="-120"/>
+                          <a:latin typeface="Plus Jakarta Sans" pitchFamily="34" charset="0"/>
+                          <a:ea typeface="Plus Jakarta Sans" pitchFamily="34" charset="-122"/>
+                          <a:cs typeface="Plus Jakarta Sans" pitchFamily="34" charset="-120"/>
                         </a:rPr>
                         <a:t>Tool-use examples</a:t>
                       </a:r>
                       <a:endParaRPr lang="en-US" sz="900" dirty="0">
-                        <a:latin typeface="Calibri" charset="0"/>
-                        <a:ea typeface="Calibri" charset="0"/>
-                        <a:cs typeface="Calibri" charset="0"/>
+                        <a:latin typeface="Plus Jakarta Sans" charset="0"/>
+                        <a:ea typeface="Plus Jakarta Sans" charset="0"/>
+                        <a:cs typeface="Plus Jakarta Sans" charset="0"/>
                       </a:endParaRPr>
                     </a:p>
                   </a:txBody>
@@ -30698,16 +30698,16 @@
                           <a:solidFill>
                             <a:srgbClr val="5A5A72"/>
                           </a:solidFill>
-                          <a:latin typeface="Calibri" pitchFamily="34" charset="0"/>
-                          <a:ea typeface="Calibri" pitchFamily="34" charset="-122"/>
-                          <a:cs typeface="Calibri" pitchFamily="34" charset="-120"/>
+                          <a:latin typeface="Plus Jakarta Sans" pitchFamily="34" charset="0"/>
+                          <a:ea typeface="Plus Jakarta Sans" pitchFamily="34" charset="-122"/>
+                          <a:cs typeface="Plus Jakarta Sans" pitchFamily="34" charset="-120"/>
                         </a:rPr>
                         <a:t>JSON Schema shows structure, not when/how</a:t>
                       </a:r>
                       <a:endParaRPr lang="en-US" sz="900" dirty="0">
-                        <a:latin typeface="Calibri" charset="0"/>
-                        <a:ea typeface="Calibri" charset="0"/>
-                        <a:cs typeface="Calibri" charset="0"/>
+                        <a:latin typeface="Plus Jakarta Sans" charset="0"/>
+                        <a:ea typeface="Plus Jakarta Sans" charset="0"/>
+                        <a:cs typeface="Plus Jakarta Sans" charset="0"/>
                       </a:endParaRPr>
                     </a:p>
                   </a:txBody>
@@ -30766,16 +30766,16 @@
                           <a:solidFill>
                             <a:srgbClr val="5A5A72"/>
                           </a:solidFill>
-                          <a:latin typeface="Calibri" pitchFamily="34" charset="0"/>
-                          <a:ea typeface="Calibri" pitchFamily="34" charset="-122"/>
-                          <a:cs typeface="Calibri" pitchFamily="34" charset="-120"/>
+                          <a:latin typeface="Plus Jakarta Sans" pitchFamily="34" charset="0"/>
+                          <a:ea typeface="Plus Jakarta Sans" pitchFamily="34" charset="-122"/>
+                          <a:cs typeface="Plus Jakarta Sans" pitchFamily="34" charset="-120"/>
                         </a:rPr>
                         <a:t>Provide input_examples (now an official field)</a:t>
                       </a:r>
                       <a:endParaRPr lang="en-US" sz="900" dirty="0">
-                        <a:latin typeface="Calibri" charset="0"/>
-                        <a:ea typeface="Calibri" charset="0"/>
-                        <a:cs typeface="Calibri" charset="0"/>
+                        <a:latin typeface="Plus Jakarta Sans" charset="0"/>
+                        <a:ea typeface="Plus Jakarta Sans" charset="0"/>
+                        <a:cs typeface="Plus Jakarta Sans" charset="0"/>
                       </a:endParaRPr>
                     </a:p>
                   </a:txBody>
@@ -30834,9 +30834,9 @@
                           <a:solidFill>
                             <a:srgbClr val="EE5A29"/>
                           </a:solidFill>
-                          <a:latin typeface="Calibri" pitchFamily="34" charset="0"/>
-                          <a:ea typeface="Calibri" pitchFamily="34" charset="-122"/>
-                          <a:cs typeface="Calibri" pitchFamily="34" charset="-120"/>
+                          <a:latin typeface="Plus Jakarta Sans" pitchFamily="34" charset="0"/>
+                          <a:ea typeface="Plus Jakarta Sans" pitchFamily="34" charset="-122"/>
+                          <a:cs typeface="Plus Jakarta Sans" pitchFamily="34" charset="-120"/>
                         </a:rPr>
                         <a:t>72% → 90%
 </a:t>
@@ -30849,16 +30849,16 @@
                           <a:solidFill>
                             <a:srgbClr val="5A5A72"/>
                           </a:solidFill>
-                          <a:latin typeface="Calibri" pitchFamily="34" charset="0"/>
-                          <a:ea typeface="Calibri" pitchFamily="34" charset="-122"/>
-                          <a:cs typeface="Calibri" pitchFamily="34" charset="-120"/>
+                          <a:latin typeface="Plus Jakarta Sans" pitchFamily="34" charset="0"/>
+                          <a:ea typeface="Plus Jakarta Sans" pitchFamily="34" charset="-122"/>
+                          <a:cs typeface="Plus Jakarta Sans" pitchFamily="34" charset="-120"/>
                         </a:rPr>
                         <a:t>on complex params</a:t>
                       </a:r>
                       <a:endParaRPr lang="en-US" sz="900" dirty="0">
-                        <a:latin typeface="Calibri" charset="0"/>
-                        <a:ea typeface="Calibri" charset="0"/>
-                        <a:cs typeface="Calibri" charset="0"/>
+                        <a:latin typeface="Plus Jakarta Sans" charset="0"/>
+                        <a:ea typeface="Plus Jakarta Sans" charset="0"/>
+                        <a:cs typeface="Plus Jakarta Sans" charset="0"/>
                       </a:endParaRPr>
                     </a:p>
                   </a:txBody>
@@ -30919,16 +30919,16 @@
                           <a:solidFill>
                             <a:srgbClr val="15154A"/>
                           </a:solidFill>
-                          <a:latin typeface="Calibri" pitchFamily="34" charset="0"/>
-                          <a:ea typeface="Calibri" pitchFamily="34" charset="-122"/>
-                          <a:cs typeface="Calibri" pitchFamily="34" charset="-120"/>
+                          <a:latin typeface="Plus Jakarta Sans" pitchFamily="34" charset="0"/>
+                          <a:ea typeface="Plus Jakarta Sans" pitchFamily="34" charset="-122"/>
+                          <a:cs typeface="Plus Jakarta Sans" pitchFamily="34" charset="-120"/>
                         </a:rPr>
                         <a:t>Progressive disclosure</a:t>
                       </a:r>
                       <a:endParaRPr lang="en-US" sz="900" dirty="0">
-                        <a:latin typeface="Calibri" charset="0"/>
-                        <a:ea typeface="Calibri" charset="0"/>
-                        <a:cs typeface="Calibri" charset="0"/>
+                        <a:latin typeface="Plus Jakarta Sans" charset="0"/>
+                        <a:ea typeface="Plus Jakarta Sans" charset="0"/>
+                        <a:cs typeface="Plus Jakarta Sans" charset="0"/>
                       </a:endParaRPr>
                     </a:p>
                   </a:txBody>
@@ -30987,16 +30987,16 @@
                           <a:solidFill>
                             <a:srgbClr val="5A5A72"/>
                           </a:solidFill>
-                          <a:latin typeface="Calibri" pitchFamily="34" charset="0"/>
-                          <a:ea typeface="Calibri" pitchFamily="34" charset="-122"/>
-                          <a:cs typeface="Calibri" pitchFamily="34" charset="-120"/>
+                          <a:latin typeface="Plus Jakarta Sans" pitchFamily="34" charset="0"/>
+                          <a:ea typeface="Plus Jakarta Sans" pitchFamily="34" charset="-122"/>
+                          <a:cs typeface="Plus Jakarta Sans" pitchFamily="34" charset="-120"/>
                         </a:rPr>
                         <a:t>Preloading all tools floods context (up to 134K tokens)</a:t>
                       </a:r>
                       <a:endParaRPr lang="en-US" sz="900" dirty="0">
-                        <a:latin typeface="Calibri" charset="0"/>
-                        <a:ea typeface="Calibri" charset="0"/>
-                        <a:cs typeface="Calibri" charset="0"/>
+                        <a:latin typeface="Plus Jakarta Sans" charset="0"/>
+                        <a:ea typeface="Plus Jakarta Sans" charset="0"/>
+                        <a:cs typeface="Plus Jakarta Sans" charset="0"/>
                       </a:endParaRPr>
                     </a:p>
                   </a:txBody>
@@ -31055,16 +31055,16 @@
                           <a:solidFill>
                             <a:srgbClr val="5A5A72"/>
                           </a:solidFill>
-                          <a:latin typeface="Calibri" pitchFamily="34" charset="0"/>
-                          <a:ea typeface="Calibri" pitchFamily="34" charset="-122"/>
-                          <a:cs typeface="Calibri" pitchFamily="34" charset="-120"/>
+                          <a:latin typeface="Plus Jakarta Sans" pitchFamily="34" charset="0"/>
+                          <a:ea typeface="Plus Jakarta Sans" pitchFamily="34" charset="-122"/>
+                          <a:cs typeface="Plus Jakarta Sans" pitchFamily="34" charset="-120"/>
                         </a:rPr>
                         <a:t>Load on demand via the Tool Search Tool (GA Nov 2025)</a:t>
                       </a:r>
                       <a:endParaRPr lang="en-US" sz="900" dirty="0">
-                        <a:latin typeface="Calibri" charset="0"/>
-                        <a:ea typeface="Calibri" charset="0"/>
-                        <a:cs typeface="Calibri" charset="0"/>
+                        <a:latin typeface="Plus Jakarta Sans" charset="0"/>
+                        <a:ea typeface="Plus Jakarta Sans" charset="0"/>
+                        <a:cs typeface="Plus Jakarta Sans" charset="0"/>
                       </a:endParaRPr>
                     </a:p>
                   </a:txBody>
@@ -31123,9 +31123,9 @@
                           <a:solidFill>
                             <a:srgbClr val="EE5A29"/>
                           </a:solidFill>
-                          <a:latin typeface="Calibri" pitchFamily="34" charset="0"/>
-                          <a:ea typeface="Calibri" pitchFamily="34" charset="-122"/>
-                          <a:cs typeface="Calibri" pitchFamily="34" charset="-120"/>
+                          <a:latin typeface="Plus Jakarta Sans" pitchFamily="34" charset="0"/>
+                          <a:ea typeface="Plus Jakarta Sans" pitchFamily="34" charset="-122"/>
+                          <a:cs typeface="Plus Jakarta Sans" pitchFamily="34" charset="-120"/>
                         </a:rPr>
                         <a:t>77K → 8.7K tokens
 </a:t>
@@ -31138,16 +31138,16 @@
                           <a:solidFill>
                             <a:srgbClr val="5A5A72"/>
                           </a:solidFill>
-                          <a:latin typeface="Calibri" pitchFamily="34" charset="0"/>
-                          <a:ea typeface="Calibri" pitchFamily="34" charset="-122"/>
-                          <a:cs typeface="Calibri" pitchFamily="34" charset="-120"/>
+                          <a:latin typeface="Plus Jakarta Sans" pitchFamily="34" charset="0"/>
+                          <a:ea typeface="Plus Jakarta Sans" pitchFamily="34" charset="-122"/>
+                          <a:cs typeface="Plus Jakarta Sans" pitchFamily="34" charset="-120"/>
                         </a:rPr>
                         <a:t>49% → 74% accuracy</a:t>
                       </a:r>
                       <a:endParaRPr lang="en-US" sz="900" dirty="0">
-                        <a:latin typeface="Calibri" charset="0"/>
-                        <a:ea typeface="Calibri" charset="0"/>
-                        <a:cs typeface="Calibri" charset="0"/>
+                        <a:latin typeface="Plus Jakarta Sans" charset="0"/>
+                        <a:ea typeface="Plus Jakarta Sans" charset="0"/>
+                        <a:cs typeface="Plus Jakarta Sans" charset="0"/>
                       </a:endParaRPr>
                     </a:p>
                   </a:txBody>
@@ -31249,9 +31249,9 @@
                 <a:solidFill>
                   <a:srgbClr val="15154A"/>
                 </a:solidFill>
-                <a:latin typeface="Arial" pitchFamily="34" charset="0"/>
-                <a:ea typeface="Arial" pitchFamily="34" charset="-122"/>
-                <a:cs typeface="Arial" pitchFamily="34" charset="-120"/>
+                <a:latin typeface="Plus Jakarta Sans" pitchFamily="34" charset="0"/>
+                <a:ea typeface="Plus Jakarta Sans" pitchFamily="34" charset="-122"/>
+                <a:cs typeface="Plus Jakarta Sans" pitchFamily="34" charset="-120"/>
               </a:rPr>
               <a:t>Programmatic tool calling</a:t>
             </a:r>
@@ -31291,9 +31291,9 @@
                 <a:solidFill>
                   <a:srgbClr val="5A5A72"/>
                 </a:solidFill>
-                <a:latin typeface="Calibri" pitchFamily="34" charset="0"/>
-                <a:ea typeface="Calibri" pitchFamily="34" charset="-122"/>
-                <a:cs typeface="Calibri" pitchFamily="34" charset="-120"/>
+                <a:latin typeface="Plus Jakarta Sans" pitchFamily="34" charset="0"/>
+                <a:ea typeface="Plus Jakarta Sans" pitchFamily="34" charset="-122"/>
+                <a:cs typeface="Plus Jakarta Sans" pitchFamily="34" charset="-120"/>
               </a:rPr>
               <a:t>Claude calls tools from sandboxed code — fewer round-trips, ~37% fewer tokens.</a:t>
             </a:r>
@@ -31352,9 +31352,9 @@
                 <a:solidFill>
                   <a:srgbClr val="15154A"/>
                 </a:solidFill>
-                <a:latin typeface="Arial" pitchFamily="34" charset="0"/>
-                <a:ea typeface="Arial" pitchFamily="34" charset="-122"/>
-                <a:cs typeface="Arial" pitchFamily="34" charset="-120"/>
+                <a:latin typeface="Plus Jakarta Sans" pitchFamily="34" charset="0"/>
+                <a:ea typeface="Plus Jakarta Sans" pitchFamily="34" charset="-122"/>
+                <a:cs typeface="Plus Jakarta Sans" pitchFamily="34" charset="-120"/>
               </a:rPr>
               <a:t>MCP connector</a:t>
             </a:r>
@@ -31394,9 +31394,9 @@
                 <a:solidFill>
                   <a:srgbClr val="5A5A72"/>
                 </a:solidFill>
-                <a:latin typeface="Calibri" pitchFamily="34" charset="0"/>
-                <a:ea typeface="Calibri" pitchFamily="34" charset="-122"/>
-                <a:cs typeface="Calibri" pitchFamily="34" charset="-120"/>
+                <a:latin typeface="Plus Jakarta Sans" pitchFamily="34" charset="0"/>
+                <a:ea typeface="Plus Jakarta Sans" pitchFamily="34" charset="-122"/>
+                <a:cs typeface="Plus Jakarta Sans" pitchFamily="34" charset="-120"/>
               </a:rPr>
               <a:t>Attach whole MCP servers (200+ tools) with defer_loading to protect the cache.</a:t>
             </a:r>
@@ -31455,9 +31455,9 @@
                 <a:solidFill>
                   <a:srgbClr val="15154A"/>
                 </a:solidFill>
-                <a:latin typeface="Arial" pitchFamily="34" charset="0"/>
-                <a:ea typeface="Arial" pitchFamily="34" charset="-122"/>
-                <a:cs typeface="Arial" pitchFamily="34" charset="-120"/>
+                <a:latin typeface="Plus Jakarta Sans" pitchFamily="34" charset="0"/>
+                <a:ea typeface="Plus Jakarta Sans" pitchFamily="34" charset="-122"/>
+                <a:cs typeface="Plus Jakarta Sans" pitchFamily="34" charset="-120"/>
               </a:rPr>
               <a:t>Strict tool use</a:t>
             </a:r>
@@ -31497,9 +31497,9 @@
                 <a:solidFill>
                   <a:srgbClr val="5A5A72"/>
                 </a:solidFill>
-                <a:latin typeface="Calibri" pitchFamily="34" charset="0"/>
-                <a:ea typeface="Calibri" pitchFamily="34" charset="-122"/>
-                <a:cs typeface="Calibri" pitchFamily="34" charset="-120"/>
+                <a:latin typeface="Plus Jakarta Sans" pitchFamily="34" charset="0"/>
+                <a:ea typeface="Plus Jakarta Sans" pitchFamily="34" charset="-122"/>
+                <a:cs typeface="Plus Jakarta Sans" pitchFamily="34" charset="-120"/>
               </a:rPr>
               <a:t>strict:true guarantees calls match your schema exactly.</a:t>
             </a:r>
@@ -31536,9 +31536,9 @@
                 <a:solidFill>
                   <a:srgbClr val="9A9AB4"/>
                 </a:solidFill>
-                <a:latin typeface="Calibri" pitchFamily="34" charset="0"/>
-                <a:ea typeface="Calibri" pitchFamily="34" charset="-122"/>
-                <a:cs typeface="Calibri" pitchFamily="34" charset="-120"/>
+                <a:latin typeface="Plus Jakarta Sans" pitchFamily="34" charset="0"/>
+                <a:ea typeface="Plus Jakarta Sans" pitchFamily="34" charset="-122"/>
+                <a:cs typeface="Plus Jakarta Sans" pitchFamily="34" charset="-120"/>
               </a:rPr>
               <a:t>©2026 Cloudera, Inc. · Source: Anthropic Engineering — “Advanced Tool Use” &amp; “Writing Tools for Agents”.</a:t>
             </a:r>
@@ -31575,9 +31575,9 @@
                 <a:solidFill>
                   <a:srgbClr val="9A9AB4"/>
                 </a:solidFill>
-                <a:latin typeface="Calibri" pitchFamily="34" charset="0"/>
-                <a:ea typeface="Calibri" pitchFamily="34" charset="-122"/>
-                <a:cs typeface="Calibri" pitchFamily="34" charset="-120"/>
+                <a:latin typeface="Plus Jakarta Sans" pitchFamily="34" charset="0"/>
+                <a:ea typeface="Plus Jakarta Sans" pitchFamily="34" charset="-122"/>
+                <a:cs typeface="Plus Jakarta Sans" pitchFamily="34" charset="-120"/>
               </a:rPr>
               <a:t>9 / 22</a:t>
             </a:r>

--- a/Cloudera_AI_Landscape.pptx
+++ b/Cloudera_AI_Landscape.pptx
@@ -4955,12 +4955,134 @@
         </p:nvSpPr>
         <p:spPr>
           <a:xfrm>
-            <a:off x="566928" y="3383280"/>
-            <a:ext cx="8010144" cy="868680"/>
+            <a:off x="2322576" y="2907792"/>
+            <a:ext cx="694944" cy="201168"/>
           </a:xfrm>
           <a:prstGeom prst="roundRect">
             <a:avLst>
-              <a:gd name="adj" fmla="val 8421"/>
+              <a:gd name="adj" fmla="val 18182"/>
+            </a:avLst>
+          </a:prstGeom>
+          <a:solidFill>
+            <a:srgbClr val="EE5A29"/>
+          </a:solidFill>
+          <a:ln/>
+        </p:spPr>
+      </p:sp>
+      <p:sp>
+        <p:nvSpPr>
+          <p:cNvPr id="16" name="Text 14"/>
+          <p:cNvSpPr/>
+          <p:nvPr/>
+        </p:nvSpPr>
+        <p:spPr>
+          <a:xfrm>
+            <a:off x="2322576" y="2907792"/>
+            <a:ext cx="694944" cy="201168"/>
+          </a:xfrm>
+          <a:prstGeom prst="rect">
+            <a:avLst/>
+          </a:prstGeom>
+          <a:noFill/>
+          <a:ln/>
+        </p:spPr>
+        <p:txBody>
+          <a:bodyPr wrap="square" lIns="0" tIns="0" rIns="0" bIns="0" rtlCol="0" anchor="ctr"/>
+          <a:lstStyle/>
+          <a:p>
+            <a:pPr algn="ctr" indent="0" marL="0">
+              <a:buNone/>
+            </a:pPr>
+            <a:r>
+              <a:rPr lang="en-US" sz="750" b="1" dirty="0">
+                <a:solidFill>
+                  <a:srgbClr val="FFFFFF"/>
+                </a:solidFill>
+                <a:latin typeface="Plus Jakarta Sans" pitchFamily="34" charset="0"/>
+                <a:ea typeface="Plus Jakarta Sans" pitchFamily="34" charset="-122"/>
+                <a:cs typeface="Plus Jakarta Sans" pitchFamily="34" charset="-120"/>
+              </a:rPr>
+              <a:t>RAG source</a:t>
+            </a:r>
+            <a:endParaRPr lang="en-US" sz="750" dirty="0"/>
+          </a:p>
+        </p:txBody>
+      </p:sp>
+      <p:sp>
+        <p:nvSpPr>
+          <p:cNvPr id="17" name="Shape 15"/>
+          <p:cNvSpPr/>
+          <p:nvPr/>
+        </p:nvSpPr>
+        <p:spPr>
+          <a:xfrm>
+            <a:off x="7644384" y="2907792"/>
+            <a:ext cx="841248" cy="201168"/>
+          </a:xfrm>
+          <a:prstGeom prst="roundRect">
+            <a:avLst>
+              <a:gd name="adj" fmla="val 18182"/>
+            </a:avLst>
+          </a:prstGeom>
+          <a:solidFill>
+            <a:srgbClr val="4F4FF5"/>
+          </a:solidFill>
+          <a:ln/>
+        </p:spPr>
+      </p:sp>
+      <p:sp>
+        <p:nvSpPr>
+          <p:cNvPr id="18" name="Text 16"/>
+          <p:cNvSpPr/>
+          <p:nvPr/>
+        </p:nvSpPr>
+        <p:spPr>
+          <a:xfrm>
+            <a:off x="7644384" y="2907792"/>
+            <a:ext cx="841248" cy="201168"/>
+          </a:xfrm>
+          <a:prstGeom prst="rect">
+            <a:avLst/>
+          </a:prstGeom>
+          <a:noFill/>
+          <a:ln/>
+        </p:spPr>
+        <p:txBody>
+          <a:bodyPr wrap="square" lIns="0" tIns="0" rIns="0" bIns="0" rtlCol="0" anchor="ctr"/>
+          <a:lstStyle/>
+          <a:p>
+            <a:pPr algn="ctr" indent="0" marL="0">
+              <a:buNone/>
+            </a:pPr>
+            <a:r>
+              <a:rPr lang="en-US" sz="750" b="1" dirty="0">
+                <a:solidFill>
+                  <a:srgbClr val="FFFFFF"/>
+                </a:solidFill>
+                <a:latin typeface="Plus Jakarta Sans" pitchFamily="34" charset="0"/>
+                <a:ea typeface="Plus Jakarta Sans" pitchFamily="34" charset="-122"/>
+                <a:cs typeface="Plus Jakarta Sans" pitchFamily="34" charset="-120"/>
+              </a:rPr>
+              <a:t>RAG lands here</a:t>
+            </a:r>
+            <a:endParaRPr lang="en-US" sz="750" dirty="0"/>
+          </a:p>
+        </p:txBody>
+      </p:sp>
+      <p:sp>
+        <p:nvSpPr>
+          <p:cNvPr id="19" name="Shape 17"/>
+          <p:cNvSpPr/>
+          <p:nvPr/>
+        </p:nvSpPr>
+        <p:spPr>
+          <a:xfrm>
+            <a:off x="566928" y="3383280"/>
+            <a:ext cx="8010144" cy="1417320"/>
+          </a:xfrm>
+          <a:prstGeom prst="roundRect">
+            <a:avLst>
+              <a:gd name="adj" fmla="val 5161"/>
             </a:avLst>
           </a:prstGeom>
           <a:solidFill>
@@ -4971,14 +5093,14 @@
       </p:sp>
       <p:sp>
         <p:nvSpPr>
-          <p:cNvPr id="16" name="Text 14"/>
-          <p:cNvSpPr/>
-          <p:nvPr/>
-        </p:nvSpPr>
-        <p:spPr>
-          <a:xfrm>
-            <a:off x="749808" y="3493008"/>
-            <a:ext cx="7680960" cy="256032"/>
+          <p:cNvPr id="20" name="Text 18"/>
+          <p:cNvSpPr/>
+          <p:nvPr/>
+        </p:nvSpPr>
+        <p:spPr>
+          <a:xfrm>
+            <a:off x="749808" y="3465576"/>
+            <a:ext cx="7680960" cy="237744"/>
           </a:xfrm>
           <a:prstGeom prst="rect">
             <a:avLst/>
@@ -4994,7 +5116,7 @@
               <a:buNone/>
             </a:pPr>
             <a:r>
-              <a:rPr lang="en-US" sz="1100" b="1" dirty="0">
+              <a:rPr lang="en-US" sz="1050" b="1" dirty="0">
                 <a:solidFill>
                   <a:srgbClr val="15154A"/>
                 </a:solidFill>
@@ -5004,19 +5126,19 @@
               </a:rPr>
               <a:t>Experiential memory comes in flavors</a:t>
             </a:r>
-            <a:endParaRPr lang="en-US" sz="1100" dirty="0"/>
-          </a:p>
-        </p:txBody>
-      </p:sp>
-      <p:sp>
-        <p:nvSpPr>
-          <p:cNvPr id="17" name="Shape 15"/>
-          <p:cNvSpPr/>
-          <p:nvPr/>
-        </p:nvSpPr>
-        <p:spPr>
-          <a:xfrm>
-            <a:off x="749808" y="3840480"/>
+            <a:endParaRPr lang="en-US" sz="1050" dirty="0"/>
+          </a:p>
+        </p:txBody>
+      </p:sp>
+      <p:sp>
+        <p:nvSpPr>
+          <p:cNvPr id="21" name="Shape 19"/>
+          <p:cNvSpPr/>
+          <p:nvPr/>
+        </p:nvSpPr>
+        <p:spPr>
+          <a:xfrm>
+            <a:off x="749808" y="3749040"/>
             <a:ext cx="841248" cy="310896"/>
           </a:xfrm>
           <a:prstGeom prst="roundRect">
@@ -5037,13 +5159,13 @@
       </p:sp>
       <p:sp>
         <p:nvSpPr>
-          <p:cNvPr id="18" name="Text 16"/>
-          <p:cNvSpPr/>
-          <p:nvPr/>
-        </p:nvSpPr>
-        <p:spPr>
-          <a:xfrm>
-            <a:off x="749808" y="3840480"/>
+          <p:cNvPr id="22" name="Text 20"/>
+          <p:cNvSpPr/>
+          <p:nvPr/>
+        </p:nvSpPr>
+        <p:spPr>
+          <a:xfrm>
+            <a:off x="749808" y="3749040"/>
             <a:ext cx="841248" cy="310896"/>
           </a:xfrm>
           <a:prstGeom prst="rect">
@@ -5076,13 +5198,13 @@
       </p:sp>
       <p:sp>
         <p:nvSpPr>
-          <p:cNvPr id="19" name="Text 17"/>
-          <p:cNvSpPr/>
-          <p:nvPr/>
-        </p:nvSpPr>
-        <p:spPr>
-          <a:xfrm>
-            <a:off x="1591056" y="3840480"/>
+          <p:cNvPr id="23" name="Text 21"/>
+          <p:cNvSpPr/>
+          <p:nvPr/>
+        </p:nvSpPr>
+        <p:spPr>
+          <a:xfrm>
+            <a:off x="1591056" y="3749040"/>
             <a:ext cx="237744" cy="310896"/>
           </a:xfrm>
           <a:prstGeom prst="rect">
@@ -5115,13 +5237,13 @@
       </p:sp>
       <p:sp>
         <p:nvSpPr>
-          <p:cNvPr id="20" name="Shape 18"/>
-          <p:cNvSpPr/>
-          <p:nvPr/>
-        </p:nvSpPr>
-        <p:spPr>
-          <a:xfrm>
-            <a:off x="1828800" y="3840480"/>
+          <p:cNvPr id="24" name="Shape 22"/>
+          <p:cNvSpPr/>
+          <p:nvPr/>
+        </p:nvSpPr>
+        <p:spPr>
+          <a:xfrm>
+            <a:off x="1828800" y="3749040"/>
             <a:ext cx="907085" cy="310896"/>
           </a:xfrm>
           <a:prstGeom prst="roundRect">
@@ -5142,13 +5264,13 @@
       </p:sp>
       <p:sp>
         <p:nvSpPr>
-          <p:cNvPr id="21" name="Text 19"/>
-          <p:cNvSpPr/>
-          <p:nvPr/>
-        </p:nvSpPr>
-        <p:spPr>
-          <a:xfrm>
-            <a:off x="1828800" y="3840480"/>
+          <p:cNvPr id="25" name="Text 23"/>
+          <p:cNvSpPr/>
+          <p:nvPr/>
+        </p:nvSpPr>
+        <p:spPr>
+          <a:xfrm>
+            <a:off x="1828800" y="3749040"/>
             <a:ext cx="907085" cy="310896"/>
           </a:xfrm>
           <a:prstGeom prst="rect">
@@ -5181,13 +5303,13 @@
       </p:sp>
       <p:sp>
         <p:nvSpPr>
-          <p:cNvPr id="22" name="Text 20"/>
-          <p:cNvSpPr/>
-          <p:nvPr/>
-        </p:nvSpPr>
-        <p:spPr>
-          <a:xfrm>
-            <a:off x="2735885" y="3840480"/>
+          <p:cNvPr id="26" name="Text 24"/>
+          <p:cNvSpPr/>
+          <p:nvPr/>
+        </p:nvSpPr>
+        <p:spPr>
+          <a:xfrm>
+            <a:off x="2735885" y="3749040"/>
             <a:ext cx="237744" cy="310896"/>
           </a:xfrm>
           <a:prstGeom prst="rect">
@@ -5220,13 +5342,13 @@
       </p:sp>
       <p:sp>
         <p:nvSpPr>
-          <p:cNvPr id="23" name="Shape 21"/>
-          <p:cNvSpPr/>
-          <p:nvPr/>
-        </p:nvSpPr>
-        <p:spPr>
-          <a:xfrm>
-            <a:off x="2973629" y="3840480"/>
+          <p:cNvPr id="27" name="Shape 25"/>
+          <p:cNvSpPr/>
+          <p:nvPr/>
+        </p:nvSpPr>
+        <p:spPr>
+          <a:xfrm>
+            <a:off x="2973629" y="3749040"/>
             <a:ext cx="1104595" cy="310896"/>
           </a:xfrm>
           <a:prstGeom prst="roundRect">
@@ -5247,13 +5369,13 @@
       </p:sp>
       <p:sp>
         <p:nvSpPr>
-          <p:cNvPr id="24" name="Text 22"/>
-          <p:cNvSpPr/>
-          <p:nvPr/>
-        </p:nvSpPr>
-        <p:spPr>
-          <a:xfrm>
-            <a:off x="2973629" y="3840480"/>
+          <p:cNvPr id="28" name="Text 26"/>
+          <p:cNvSpPr/>
+          <p:nvPr/>
+        </p:nvSpPr>
+        <p:spPr>
+          <a:xfrm>
+            <a:off x="2973629" y="3749040"/>
             <a:ext cx="1104595" cy="310896"/>
           </a:xfrm>
           <a:prstGeom prst="rect">
@@ -5286,13 +5408,13 @@
       </p:sp>
       <p:sp>
         <p:nvSpPr>
-          <p:cNvPr id="25" name="Text 23"/>
-          <p:cNvSpPr/>
-          <p:nvPr/>
-        </p:nvSpPr>
-        <p:spPr>
-          <a:xfrm>
-            <a:off x="4078224" y="3840480"/>
+          <p:cNvPr id="29" name="Text 27"/>
+          <p:cNvSpPr/>
+          <p:nvPr/>
+        </p:nvSpPr>
+        <p:spPr>
+          <a:xfrm>
+            <a:off x="4078224" y="3749040"/>
             <a:ext cx="237744" cy="310896"/>
           </a:xfrm>
           <a:prstGeom prst="rect">
@@ -5325,13 +5447,13 @@
       </p:sp>
       <p:sp>
         <p:nvSpPr>
-          <p:cNvPr id="26" name="Shape 24"/>
-          <p:cNvSpPr/>
-          <p:nvPr/>
-        </p:nvSpPr>
-        <p:spPr>
-          <a:xfrm>
-            <a:off x="4315968" y="3840480"/>
+          <p:cNvPr id="30" name="Shape 28"/>
+          <p:cNvSpPr/>
+          <p:nvPr/>
+        </p:nvSpPr>
+        <p:spPr>
+          <a:xfrm>
+            <a:off x="4315968" y="3749040"/>
             <a:ext cx="777240" cy="310896"/>
           </a:xfrm>
           <a:prstGeom prst="roundRect">
@@ -5352,13 +5474,13 @@
       </p:sp>
       <p:sp>
         <p:nvSpPr>
-          <p:cNvPr id="27" name="Text 25"/>
-          <p:cNvSpPr/>
-          <p:nvPr/>
-        </p:nvSpPr>
-        <p:spPr>
-          <a:xfrm>
-            <a:off x="4315968" y="3840480"/>
+          <p:cNvPr id="31" name="Text 29"/>
+          <p:cNvSpPr/>
+          <p:nvPr/>
+        </p:nvSpPr>
+        <p:spPr>
+          <a:xfrm>
+            <a:off x="4315968" y="3749040"/>
             <a:ext cx="777240" cy="310896"/>
           </a:xfrm>
           <a:prstGeom prst="rect">
@@ -5391,7 +5513,447 @@
       </p:sp>
       <p:sp>
         <p:nvSpPr>
-          <p:cNvPr id="28" name="Text 26"/>
+          <p:cNvPr id="32" name="Shape 30"/>
+          <p:cNvSpPr/>
+          <p:nvPr/>
+        </p:nvSpPr>
+        <p:spPr>
+          <a:xfrm>
+            <a:off x="749808" y="4078224"/>
+            <a:ext cx="7644384" cy="12802"/>
+          </a:xfrm>
+          <a:prstGeom prst="rect">
+            <a:avLst/>
+          </a:prstGeom>
+          <a:solidFill>
+            <a:srgbClr val="E2E2EC"/>
+          </a:solidFill>
+          <a:ln/>
+        </p:spPr>
+      </p:sp>
+      <p:sp>
+        <p:nvSpPr>
+          <p:cNvPr id="33" name="Text 31"/>
+          <p:cNvSpPr/>
+          <p:nvPr/>
+        </p:nvSpPr>
+        <p:spPr>
+          <a:xfrm>
+            <a:off x="749808" y="4133088"/>
+            <a:ext cx="2743200" cy="219456"/>
+          </a:xfrm>
+          <a:prstGeom prst="rect">
+            <a:avLst/>
+          </a:prstGeom>
+          <a:noFill/>
+          <a:ln/>
+        </p:spPr>
+        <p:txBody>
+          <a:bodyPr wrap="square" lIns="0" tIns="0" rIns="0" bIns="0" rtlCol="0" anchor="ctr"/>
+          <a:lstStyle/>
+          <a:p>
+            <a:pPr indent="0" marL="0">
+              <a:buNone/>
+            </a:pPr>
+            <a:r>
+              <a:rPr lang="en-US" sz="1050" b="1" dirty="0">
+                <a:solidFill>
+                  <a:srgbClr val="EE5A29"/>
+                </a:solidFill>
+                <a:latin typeface="Plus Jakarta Sans" pitchFamily="34" charset="0"/>
+                <a:ea typeface="Plus Jakarta Sans" pitchFamily="34" charset="-122"/>
+                <a:cs typeface="Plus Jakarta Sans" pitchFamily="34" charset="-120"/>
+              </a:rPr>
+              <a:t>RAG pipeline</a:t>
+            </a:r>
+            <a:endParaRPr lang="en-US" sz="1050" dirty="0"/>
+          </a:p>
+        </p:txBody>
+      </p:sp>
+      <p:sp>
+        <p:nvSpPr>
+          <p:cNvPr id="34" name="Shape 32"/>
+          <p:cNvSpPr/>
+          <p:nvPr/>
+        </p:nvSpPr>
+        <p:spPr>
+          <a:xfrm>
+            <a:off x="749808" y="4370832"/>
+            <a:ext cx="1828800" cy="310896"/>
+          </a:xfrm>
+          <a:prstGeom prst="roundRect">
+            <a:avLst>
+              <a:gd name="adj" fmla="val 17647"/>
+            </a:avLst>
+          </a:prstGeom>
+          <a:solidFill>
+            <a:srgbClr val="FFFFFF"/>
+          </a:solidFill>
+          <a:ln w="15240">
+            <a:solidFill>
+              <a:srgbClr val="E2E2EC"/>
+            </a:solidFill>
+            <a:prstDash val="solid"/>
+          </a:ln>
+        </p:spPr>
+      </p:sp>
+      <p:sp>
+        <p:nvSpPr>
+          <p:cNvPr id="35" name="Text 33"/>
+          <p:cNvSpPr/>
+          <p:nvPr/>
+        </p:nvSpPr>
+        <p:spPr>
+          <a:xfrm>
+            <a:off x="749808" y="4370832"/>
+            <a:ext cx="1828800" cy="310896"/>
+          </a:xfrm>
+          <a:prstGeom prst="rect">
+            <a:avLst/>
+          </a:prstGeom>
+          <a:noFill/>
+          <a:ln/>
+        </p:spPr>
+        <p:txBody>
+          <a:bodyPr wrap="square" lIns="0" tIns="0" rIns="0" bIns="0" rtlCol="0" anchor="ctr"/>
+          <a:lstStyle/>
+          <a:p>
+            <a:pPr algn="ctr" indent="0" marL="0">
+              <a:buNone/>
+            </a:pPr>
+            <a:r>
+              <a:rPr lang="en-US" sz="900" b="1" dirty="0">
+                <a:solidFill>
+                  <a:srgbClr val="15154A"/>
+                </a:solidFill>
+                <a:latin typeface="Plus Jakarta Sans" pitchFamily="34" charset="0"/>
+                <a:ea typeface="Plus Jakarta Sans" pitchFamily="34" charset="-122"/>
+                <a:cs typeface="Plus Jakarta Sans" pitchFamily="34" charset="-120"/>
+              </a:rPr>
+              <a:t>Factual store (vector DB)</a:t>
+            </a:r>
+            <a:endParaRPr lang="en-US" sz="900" dirty="0"/>
+          </a:p>
+        </p:txBody>
+      </p:sp>
+      <p:sp>
+        <p:nvSpPr>
+          <p:cNvPr id="36" name="Text 34"/>
+          <p:cNvSpPr/>
+          <p:nvPr/>
+        </p:nvSpPr>
+        <p:spPr>
+          <a:xfrm>
+            <a:off x="2578608" y="4370832"/>
+            <a:ext cx="237744" cy="310896"/>
+          </a:xfrm>
+          <a:prstGeom prst="rect">
+            <a:avLst/>
+          </a:prstGeom>
+          <a:noFill/>
+          <a:ln/>
+        </p:spPr>
+        <p:txBody>
+          <a:bodyPr wrap="square" lIns="0" tIns="0" rIns="0" bIns="0" rtlCol="0" anchor="ctr"/>
+          <a:lstStyle/>
+          <a:p>
+            <a:pPr algn="ctr" indent="0" marL="0">
+              <a:buNone/>
+            </a:pPr>
+            <a:r>
+              <a:rPr lang="en-US" sz="1200" b="1" dirty="0">
+                <a:solidFill>
+                  <a:srgbClr val="EE5A29"/>
+                </a:solidFill>
+                <a:latin typeface="Plus Jakarta Sans" pitchFamily="34" charset="0"/>
+                <a:ea typeface="Plus Jakarta Sans" pitchFamily="34" charset="-122"/>
+                <a:cs typeface="Plus Jakarta Sans" pitchFamily="34" charset="-120"/>
+              </a:rPr>
+              <a:t>→</a:t>
+            </a:r>
+            <a:endParaRPr lang="en-US" sz="1200" dirty="0"/>
+          </a:p>
+        </p:txBody>
+      </p:sp>
+      <p:sp>
+        <p:nvSpPr>
+          <p:cNvPr id="37" name="Shape 35"/>
+          <p:cNvSpPr/>
+          <p:nvPr/>
+        </p:nvSpPr>
+        <p:spPr>
+          <a:xfrm>
+            <a:off x="2816352" y="4370832"/>
+            <a:ext cx="1038758" cy="310896"/>
+          </a:xfrm>
+          <a:prstGeom prst="roundRect">
+            <a:avLst>
+              <a:gd name="adj" fmla="val 17647"/>
+            </a:avLst>
+          </a:prstGeom>
+          <a:solidFill>
+            <a:srgbClr val="FFFFFF"/>
+          </a:solidFill>
+          <a:ln w="15240">
+            <a:solidFill>
+              <a:srgbClr val="E2E2EC"/>
+            </a:solidFill>
+            <a:prstDash val="solid"/>
+          </a:ln>
+        </p:spPr>
+      </p:sp>
+      <p:sp>
+        <p:nvSpPr>
+          <p:cNvPr id="38" name="Text 36"/>
+          <p:cNvSpPr/>
+          <p:nvPr/>
+        </p:nvSpPr>
+        <p:spPr>
+          <a:xfrm>
+            <a:off x="2816352" y="4370832"/>
+            <a:ext cx="1038758" cy="310896"/>
+          </a:xfrm>
+          <a:prstGeom prst="rect">
+            <a:avLst/>
+          </a:prstGeom>
+          <a:noFill/>
+          <a:ln/>
+        </p:spPr>
+        <p:txBody>
+          <a:bodyPr wrap="square" lIns="0" tIns="0" rIns="0" bIns="0" rtlCol="0" anchor="ctr"/>
+          <a:lstStyle/>
+          <a:p>
+            <a:pPr algn="ctr" indent="0" marL="0">
+              <a:buNone/>
+            </a:pPr>
+            <a:r>
+              <a:rPr lang="en-US" sz="900" b="1" dirty="0">
+                <a:solidFill>
+                  <a:srgbClr val="15154A"/>
+                </a:solidFill>
+                <a:latin typeface="Plus Jakarta Sans" pitchFamily="34" charset="0"/>
+                <a:ea typeface="Plus Jakarta Sans" pitchFamily="34" charset="-122"/>
+                <a:cs typeface="Plus Jakarta Sans" pitchFamily="34" charset="-120"/>
+              </a:rPr>
+              <a:t>RAG retrieval</a:t>
+            </a:r>
+            <a:endParaRPr lang="en-US" sz="900" dirty="0"/>
+          </a:p>
+        </p:txBody>
+      </p:sp>
+      <p:sp>
+        <p:nvSpPr>
+          <p:cNvPr id="39" name="Text 37"/>
+          <p:cNvSpPr/>
+          <p:nvPr/>
+        </p:nvSpPr>
+        <p:spPr>
+          <a:xfrm>
+            <a:off x="3855110" y="4370832"/>
+            <a:ext cx="237744" cy="310896"/>
+          </a:xfrm>
+          <a:prstGeom prst="rect">
+            <a:avLst/>
+          </a:prstGeom>
+          <a:noFill/>
+          <a:ln/>
+        </p:spPr>
+        <p:txBody>
+          <a:bodyPr wrap="square" lIns="0" tIns="0" rIns="0" bIns="0" rtlCol="0" anchor="ctr"/>
+          <a:lstStyle/>
+          <a:p>
+            <a:pPr algn="ctr" indent="0" marL="0">
+              <a:buNone/>
+            </a:pPr>
+            <a:r>
+              <a:rPr lang="en-US" sz="1200" b="1" dirty="0">
+                <a:solidFill>
+                  <a:srgbClr val="EE5A29"/>
+                </a:solidFill>
+                <a:latin typeface="Plus Jakarta Sans" pitchFamily="34" charset="0"/>
+                <a:ea typeface="Plus Jakarta Sans" pitchFamily="34" charset="-122"/>
+                <a:cs typeface="Plus Jakarta Sans" pitchFamily="34" charset="-120"/>
+              </a:rPr>
+              <a:t>→</a:t>
+            </a:r>
+            <a:endParaRPr lang="en-US" sz="1200" dirty="0"/>
+          </a:p>
+        </p:txBody>
+      </p:sp>
+      <p:sp>
+        <p:nvSpPr>
+          <p:cNvPr id="40" name="Shape 38"/>
+          <p:cNvSpPr/>
+          <p:nvPr/>
+        </p:nvSpPr>
+        <p:spPr>
+          <a:xfrm>
+            <a:off x="4092854" y="4370832"/>
+            <a:ext cx="1894637" cy="310896"/>
+          </a:xfrm>
+          <a:prstGeom prst="roundRect">
+            <a:avLst>
+              <a:gd name="adj" fmla="val 17647"/>
+            </a:avLst>
+          </a:prstGeom>
+          <a:solidFill>
+            <a:srgbClr val="FFFFFF"/>
+          </a:solidFill>
+          <a:ln w="15240">
+            <a:solidFill>
+              <a:srgbClr val="E2E2EC"/>
+            </a:solidFill>
+            <a:prstDash val="solid"/>
+          </a:ln>
+        </p:spPr>
+      </p:sp>
+      <p:sp>
+        <p:nvSpPr>
+          <p:cNvPr id="41" name="Text 39"/>
+          <p:cNvSpPr/>
+          <p:nvPr/>
+        </p:nvSpPr>
+        <p:spPr>
+          <a:xfrm>
+            <a:off x="4092854" y="4370832"/>
+            <a:ext cx="1894637" cy="310896"/>
+          </a:xfrm>
+          <a:prstGeom prst="rect">
+            <a:avLst/>
+          </a:prstGeom>
+          <a:noFill/>
+          <a:ln/>
+        </p:spPr>
+        <p:txBody>
+          <a:bodyPr wrap="square" lIns="0" tIns="0" rIns="0" bIns="0" rtlCol="0" anchor="ctr"/>
+          <a:lstStyle/>
+          <a:p>
+            <a:pPr algn="ctr" indent="0" marL="0">
+              <a:buNone/>
+            </a:pPr>
+            <a:r>
+              <a:rPr lang="en-US" sz="900" b="1" dirty="0">
+                <a:solidFill>
+                  <a:srgbClr val="15154A"/>
+                </a:solidFill>
+                <a:latin typeface="Plus Jakarta Sans" pitchFamily="34" charset="0"/>
+                <a:ea typeface="Plus Jakarta Sans" pitchFamily="34" charset="-122"/>
+                <a:cs typeface="Plus Jakarta Sans" pitchFamily="34" charset="-120"/>
+              </a:rPr>
+              <a:t>Working context (injected)</a:t>
+            </a:r>
+            <a:endParaRPr lang="en-US" sz="900" dirty="0"/>
+          </a:p>
+        </p:txBody>
+      </p:sp>
+      <p:sp>
+        <p:nvSpPr>
+          <p:cNvPr id="42" name="Text 40"/>
+          <p:cNvSpPr/>
+          <p:nvPr/>
+        </p:nvSpPr>
+        <p:spPr>
+          <a:xfrm>
+            <a:off x="5987491" y="4370832"/>
+            <a:ext cx="237744" cy="310896"/>
+          </a:xfrm>
+          <a:prstGeom prst="rect">
+            <a:avLst/>
+          </a:prstGeom>
+          <a:noFill/>
+          <a:ln/>
+        </p:spPr>
+        <p:txBody>
+          <a:bodyPr wrap="square" lIns="0" tIns="0" rIns="0" bIns="0" rtlCol="0" anchor="ctr"/>
+          <a:lstStyle/>
+          <a:p>
+            <a:pPr algn="ctr" indent="0" marL="0">
+              <a:buNone/>
+            </a:pPr>
+            <a:r>
+              <a:rPr lang="en-US" sz="1200" b="1" dirty="0">
+                <a:solidFill>
+                  <a:srgbClr val="EE5A29"/>
+                </a:solidFill>
+                <a:latin typeface="Plus Jakarta Sans" pitchFamily="34" charset="0"/>
+                <a:ea typeface="Plus Jakarta Sans" pitchFamily="34" charset="-122"/>
+                <a:cs typeface="Plus Jakarta Sans" pitchFamily="34" charset="-120"/>
+              </a:rPr>
+              <a:t>→</a:t>
+            </a:r>
+            <a:endParaRPr lang="en-US" sz="1200" dirty="0"/>
+          </a:p>
+        </p:txBody>
+      </p:sp>
+      <p:sp>
+        <p:nvSpPr>
+          <p:cNvPr id="43" name="Shape 41"/>
+          <p:cNvSpPr/>
+          <p:nvPr/>
+        </p:nvSpPr>
+        <p:spPr>
+          <a:xfrm>
+            <a:off x="6225235" y="4370832"/>
+            <a:ext cx="972922" cy="310896"/>
+          </a:xfrm>
+          <a:prstGeom prst="roundRect">
+            <a:avLst>
+              <a:gd name="adj" fmla="val 17647"/>
+            </a:avLst>
+          </a:prstGeom>
+          <a:solidFill>
+            <a:srgbClr val="FFFFFF"/>
+          </a:solidFill>
+          <a:ln w="15240">
+            <a:solidFill>
+              <a:srgbClr val="E2E2EC"/>
+            </a:solidFill>
+            <a:prstDash val="solid"/>
+          </a:ln>
+        </p:spPr>
+      </p:sp>
+      <p:sp>
+        <p:nvSpPr>
+          <p:cNvPr id="44" name="Text 42"/>
+          <p:cNvSpPr/>
+          <p:nvPr/>
+        </p:nvSpPr>
+        <p:spPr>
+          <a:xfrm>
+            <a:off x="6225235" y="4370832"/>
+            <a:ext cx="972922" cy="310896"/>
+          </a:xfrm>
+          <a:prstGeom prst="rect">
+            <a:avLst/>
+          </a:prstGeom>
+          <a:noFill/>
+          <a:ln/>
+        </p:spPr>
+        <p:txBody>
+          <a:bodyPr wrap="square" lIns="0" tIns="0" rIns="0" bIns="0" rtlCol="0" anchor="ctr"/>
+          <a:lstStyle/>
+          <a:p>
+            <a:pPr algn="ctr" indent="0" marL="0">
+              <a:buNone/>
+            </a:pPr>
+            <a:r>
+              <a:rPr lang="en-US" sz="900" b="1" dirty="0">
+                <a:solidFill>
+                  <a:srgbClr val="15154A"/>
+                </a:solidFill>
+                <a:latin typeface="Plus Jakarta Sans" pitchFamily="34" charset="0"/>
+                <a:ea typeface="Plus Jakarta Sans" pitchFamily="34" charset="-122"/>
+                <a:cs typeface="Plus Jakarta Sans" pitchFamily="34" charset="-120"/>
+              </a:rPr>
+              <a:t>LLM response</a:t>
+            </a:r>
+            <a:endParaRPr lang="en-US" sz="900" dirty="0"/>
+          </a:p>
+        </p:txBody>
+      </p:sp>
+      <p:sp>
+        <p:nvSpPr>
+          <p:cNvPr id="45" name="Text 43"/>
           <p:cNvSpPr/>
           <p:nvPr/>
         </p:nvSpPr>
@@ -5430,7 +5992,7 @@
       </p:sp>
       <p:sp>
         <p:nvSpPr>
-          <p:cNvPr id="29" name="Text 27"/>
+          <p:cNvPr id="46" name="Text 44"/>
           <p:cNvSpPr/>
           <p:nvPr/>
         </p:nvSpPr>
